--- a/03차시_Flyweight/강의자료/유니티 프로그래밍 패턴 3차시 - Flyweight.pptx
+++ b/03차시_Flyweight/강의자료/유니티 프로그래밍 패턴 3차시 - Flyweight.pptx
@@ -4,6 +4,9 @@
   <p:sldMasterIdLst>
     <p:sldMasterId id="2147483648" r:id="rId1"/>
   </p:sldMasterIdLst>
+  <p:notesMasterIdLst>
+    <p:notesMasterId r:id="rId38"/>
+  </p:notesMasterIdLst>
   <p:sldIdLst>
     <p:sldId id="256" r:id="rId2"/>
     <p:sldId id="257" r:id="rId3"/>
@@ -42,10 +45,7 @@
     <p:sldId id="290" r:id="rId36"/>
     <p:sldId id="291" r:id="rId37"/>
   </p:sldIdLst>
-  <p:notesMasterIdLst>
-    <p:notesMasterId r:id="rId38"/>
-  </p:notesMasterIdLst>
-  <p:sldSz cx="9144000" cy="5715000"/>
+  <p:sldSz cx="9144000" cy="5715000" type="screen16x10"/>
   <p:notesSz cx="5715000" cy="9144000"/>
   <p:defaultTextStyle>
     <a:lvl1pPr marL="0" algn="l" defTabSz="914400" rtl="0" eaLnBrk="1" latinLnBrk="0" hangingPunct="1">
@@ -139,6 +139,11 @@
       </a:defRPr>
     </a:lvl9pPr>
   </p:defaultTextStyle>
+  <p:extLst>
+    <p:ext uri="{EFAFB233-063F-42B5-8137-9DF3F51BA10A}">
+      <p15:sldGuideLst xmlns:p15="http://schemas.microsoft.com/office/powerpoint/2012/main"/>
+    </p:ext>
+  </p:extLst>
 </p:presentation>
 </file>
 
@@ -164,240 +169,16 @@
           <a:chExt cx="0" cy="0"/>
         </a:xfrm>
       </p:grpSpPr>
-      <p:sp>
-        <p:nvSpPr>
-          <p:cNvPr id="2" name="Header Placeholder 1"/>
-          <p:cNvSpPr>
-            <a:spLocks noGrp="1"/>
-          </p:cNvSpPr>
-          <p:nvPr>
-            <p:ph type="hdr" sz="quarter"/>
-          </p:nvPr>
-        </p:nvSpPr>
-        <p:spPr>
-          <a:xfrm>
-            <a:off x="0" y="0"/>
-            <a:ext cx="2971800" cy="458788"/>
-          </a:xfrm>
-          <a:prstGeom prst="rect">
-            <a:avLst/>
-          </a:prstGeom>
-        </p:spPr>
-        <p:txBody>
-          <a:bodyPr vert="horz" lIns="91440" tIns="45720" rIns="91440" bIns="45720" rtlCol="0"/>
-          <a:lstStyle>
-            <a:lvl1pPr algn="l">
-              <a:defRPr sz="1200"/>
-            </a:lvl1pPr>
-          </a:lstStyle>
-          <a:p>
-            <a:endParaRPr lang="en-US"/>
-          </a:p>
-        </p:txBody>
-      </p:sp>
-      <p:sp>
-        <p:nvSpPr>
-          <p:cNvPr id="3" name="Date Placeholder 2"/>
-          <p:cNvSpPr>
-            <a:spLocks noGrp="1"/>
-          </p:cNvSpPr>
-          <p:nvPr>
-            <p:ph type="dt" idx="1"/>
-          </p:nvPr>
-        </p:nvSpPr>
-        <p:spPr>
-          <a:xfrm>
-            <a:off x="3884613" y="0"/>
-            <a:ext cx="2971800" cy="458788"/>
-          </a:xfrm>
-          <a:prstGeom prst="rect">
-            <a:avLst/>
-          </a:prstGeom>
-        </p:spPr>
-        <p:txBody>
-          <a:bodyPr vert="horz" lIns="91440" tIns="45720" rIns="91440" bIns="45720" rtlCol="0"/>
-          <a:lstStyle>
-            <a:lvl1pPr algn="r">
-              <a:defRPr sz="1200"/>
-            </a:lvl1pPr>
-          </a:lstStyle>
-          <a:p>
-            <a:fld id="{5282F153-3F37-0F45-9E97-73ACFA13230C}" type="datetimeFigureOut">
-              <a:rPr lang="en-US"/>
-              <a:t>7/23/19</a:t>
-            </a:fld>
-            <a:endParaRPr lang="en-US"/>
-          </a:p>
-        </p:txBody>
-      </p:sp>
-      <p:sp>
-        <p:nvSpPr>
-          <p:cNvPr id="4" name="Slide Image Placeholder 3"/>
-          <p:cNvSpPr>
-            <a:spLocks noGrp="1" noRot="1" noChangeAspect="1"/>
-          </p:cNvSpPr>
-          <p:nvPr>
-            <p:ph type="sldImg" idx="2"/>
-          </p:nvPr>
-        </p:nvSpPr>
-        <p:spPr>
-          <a:xfrm>
-            <a:off x="685800" y="1143000"/>
-            <a:ext cx="5486400" cy="3086100"/>
-          </a:xfrm>
-          <a:prstGeom prst="rect">
-            <a:avLst/>
-          </a:prstGeom>
-          <a:noFill/>
-          <a:ln w="12700">
-            <a:solidFill>
-              <a:prstClr val="black"/>
-            </a:solidFill>
-          </a:ln>
-        </p:spPr>
-        <p:txBody>
-          <a:bodyPr vert="horz" lIns="91440" tIns="45720" rIns="91440" bIns="45720" rtlCol="0" anchor="ctr"/>
-          <a:lstStyle/>
-          <a:p>
-            <a:endParaRPr lang="en-US"/>
-          </a:p>
-        </p:txBody>
-      </p:sp>
-      <p:sp>
-        <p:nvSpPr>
-          <p:cNvPr id="5" name="Notes Placeholder 4"/>
-          <p:cNvSpPr>
-            <a:spLocks noGrp="1"/>
-          </p:cNvSpPr>
-          <p:nvPr>
-            <p:ph type="body" sz="quarter" idx="3"/>
-          </p:nvPr>
-        </p:nvSpPr>
-        <p:spPr>
-          <a:xfrm>
-            <a:off x="685800" y="4400550"/>
-            <a:ext cx="5486400" cy="3600450"/>
-          </a:xfrm>
-          <a:prstGeom prst="rect">
-            <a:avLst/>
-          </a:prstGeom>
-        </p:spPr>
-        <p:txBody>
-          <a:bodyPr vert="horz" lIns="91440" tIns="45720" rIns="91440" bIns="45720" rtlCol="0"/>
-          <a:lstStyle/>
-          <a:p>
-            <a:pPr lvl="0"/>
-            <a:r>
-              <a:rPr lang="en-US"/>
-              <a:t>Click to edit Master text styles</a:t>
-            </a:r>
-          </a:p>
-          <a:p>
-            <a:pPr lvl="1"/>
-            <a:r>
-              <a:rPr lang="en-US"/>
-              <a:t>Second level</a:t>
-            </a:r>
-          </a:p>
-          <a:p>
-            <a:pPr lvl="2"/>
-            <a:r>
-              <a:rPr lang="en-US"/>
-              <a:t>Third level</a:t>
-            </a:r>
-          </a:p>
-          <a:p>
-            <a:pPr lvl="3"/>
-            <a:r>
-              <a:rPr lang="en-US"/>
-              <a:t>Fourth level</a:t>
-            </a:r>
-          </a:p>
-          <a:p>
-            <a:pPr lvl="4"/>
-            <a:r>
-              <a:rPr lang="en-US"/>
-              <a:t>Fifth level</a:t>
-            </a:r>
-          </a:p>
-        </p:txBody>
-      </p:sp>
-      <p:sp>
-        <p:nvSpPr>
-          <p:cNvPr id="6" name="Footer Placeholder 5"/>
-          <p:cNvSpPr>
-            <a:spLocks noGrp="1"/>
-          </p:cNvSpPr>
-          <p:nvPr>
-            <p:ph type="ftr" sz="quarter" idx="4"/>
-          </p:nvPr>
-        </p:nvSpPr>
-        <p:spPr>
-          <a:xfrm>
-            <a:off x="0" y="8685213"/>
-            <a:ext cx="2971800" cy="458787"/>
-          </a:xfrm>
-          <a:prstGeom prst="rect">
-            <a:avLst/>
-          </a:prstGeom>
-        </p:spPr>
-        <p:txBody>
-          <a:bodyPr vert="horz" lIns="91440" tIns="45720" rIns="91440" bIns="45720" rtlCol="0" anchor="b"/>
-          <a:lstStyle>
-            <a:lvl1pPr algn="l">
-              <a:defRPr sz="1200"/>
-            </a:lvl1pPr>
-          </a:lstStyle>
-          <a:p>
-            <a:endParaRPr lang="en-US"/>
-          </a:p>
-        </p:txBody>
-      </p:sp>
-      <p:sp>
-        <p:nvSpPr>
-          <p:cNvPr id="7" name="Slide Number Placeholder 6"/>
-          <p:cNvSpPr>
-            <a:spLocks noGrp="1"/>
-          </p:cNvSpPr>
-          <p:nvPr>
-            <p:ph type="sldNum" sz="quarter" idx="5"/>
-          </p:nvPr>
-        </p:nvSpPr>
-        <p:spPr>
-          <a:xfrm>
-            <a:off x="3884613" y="8685213"/>
-            <a:ext cx="2971800" cy="458787"/>
-          </a:xfrm>
-          <a:prstGeom prst="rect">
-            <a:avLst/>
-          </a:prstGeom>
-        </p:spPr>
-        <p:txBody>
-          <a:bodyPr vert="horz" lIns="91440" tIns="45720" rIns="91440" bIns="45720" rtlCol="0" anchor="b"/>
-          <a:lstStyle>
-            <a:lvl1pPr algn="r">
-              <a:defRPr sz="1200"/>
-            </a:lvl1pPr>
-          </a:lstStyle>
-          <a:p>
-            <a:fld id="{CE5E9CC1-C706-0F49-92D6-E571CC5EEA8F}" type="slidenum">
-              <a:rPr lang="en-US"/>
-              <a:t>‹#›</a:t>
-            </a:fld>
-            <a:endParaRPr lang="en-US"/>
-          </a:p>
-        </p:txBody>
-      </p:sp>
     </p:spTree>
     <p:extLst>
       <p:ext uri="{BB962C8B-B14F-4D97-AF65-F5344CB8AC3E}">
-        <p14:creationId xmlns:p14="http://schemas.microsoft.com/office/powerpoint/2010/main" val="1024086991"/>
+        <p14:creationId xmlns:p14="http://schemas.microsoft.com/office/powerpoint/2010/main" val="4176109072"/>
       </p:ext>
     </p:extLst>
   </p:cSld>
   <p:clrMap bg1="lt1" tx1="dk1" bg2="lt2" tx2="dk2" accent1="accent1" accent2="accent2" accent3="accent3" accent4="accent4" accent5="accent5" accent6="accent6" hlink="hlink" folHlink="folHlink"/>
   <p:notesStyle>
-    <a:lvl1pPr marL="0" algn="l" defTabSz="914400" rtl="0" eaLnBrk="1" latinLnBrk="0" hangingPunct="1">
+    <a:lvl1pPr marL="0" algn="l" defTabSz="914400" rtl="0" eaLnBrk="1" latinLnBrk="1" hangingPunct="1">
       <a:defRPr sz="1200" kern="1200">
         <a:solidFill>
           <a:schemeClr val="tx1"/>
@@ -407,7 +188,7 @@
         <a:cs typeface="+mn-cs"/>
       </a:defRPr>
     </a:lvl1pPr>
-    <a:lvl2pPr marL="457200" algn="l" defTabSz="914400" rtl="0" eaLnBrk="1" latinLnBrk="0" hangingPunct="1">
+    <a:lvl2pPr marL="457200" algn="l" defTabSz="914400" rtl="0" eaLnBrk="1" latinLnBrk="1" hangingPunct="1">
       <a:defRPr sz="1200" kern="1200">
         <a:solidFill>
           <a:schemeClr val="tx1"/>
@@ -417,7 +198,7 @@
         <a:cs typeface="+mn-cs"/>
       </a:defRPr>
     </a:lvl2pPr>
-    <a:lvl3pPr marL="914400" algn="l" defTabSz="914400" rtl="0" eaLnBrk="1" latinLnBrk="0" hangingPunct="1">
+    <a:lvl3pPr marL="914400" algn="l" defTabSz="914400" rtl="0" eaLnBrk="1" latinLnBrk="1" hangingPunct="1">
       <a:defRPr sz="1200" kern="1200">
         <a:solidFill>
           <a:schemeClr val="tx1"/>
@@ -427,7 +208,7 @@
         <a:cs typeface="+mn-cs"/>
       </a:defRPr>
     </a:lvl3pPr>
-    <a:lvl4pPr marL="1371600" algn="l" defTabSz="914400" rtl="0" eaLnBrk="1" latinLnBrk="0" hangingPunct="1">
+    <a:lvl4pPr marL="1371600" algn="l" defTabSz="914400" rtl="0" eaLnBrk="1" latinLnBrk="1" hangingPunct="1">
       <a:defRPr sz="1200" kern="1200">
         <a:solidFill>
           <a:schemeClr val="tx1"/>
@@ -437,7 +218,7 @@
         <a:cs typeface="+mn-cs"/>
       </a:defRPr>
     </a:lvl4pPr>
-    <a:lvl5pPr marL="1828800" algn="l" defTabSz="914400" rtl="0" eaLnBrk="1" latinLnBrk="0" hangingPunct="1">
+    <a:lvl5pPr marL="1828800" algn="l" defTabSz="914400" rtl="0" eaLnBrk="1" latinLnBrk="1" hangingPunct="1">
       <a:defRPr sz="1200" kern="1200">
         <a:solidFill>
           <a:schemeClr val="tx1"/>
@@ -447,7 +228,7 @@
         <a:cs typeface="+mn-cs"/>
       </a:defRPr>
     </a:lvl5pPr>
-    <a:lvl6pPr marL="2286000" algn="l" defTabSz="914400" rtl="0" eaLnBrk="1" latinLnBrk="0" hangingPunct="1">
+    <a:lvl6pPr marL="2286000" algn="l" defTabSz="914400" rtl="0" eaLnBrk="1" latinLnBrk="1" hangingPunct="1">
       <a:defRPr sz="1200" kern="1200">
         <a:solidFill>
           <a:schemeClr val="tx1"/>
@@ -457,7 +238,7 @@
         <a:cs typeface="+mn-cs"/>
       </a:defRPr>
     </a:lvl6pPr>
-    <a:lvl7pPr marL="2743200" algn="l" defTabSz="914400" rtl="0" eaLnBrk="1" latinLnBrk="0" hangingPunct="1">
+    <a:lvl7pPr marL="2743200" algn="l" defTabSz="914400" rtl="0" eaLnBrk="1" latinLnBrk="1" hangingPunct="1">
       <a:defRPr sz="1200" kern="1200">
         <a:solidFill>
           <a:schemeClr val="tx1"/>
@@ -467,7 +248,7 @@
         <a:cs typeface="+mn-cs"/>
       </a:defRPr>
     </a:lvl7pPr>
-    <a:lvl8pPr marL="3200400" algn="l" defTabSz="914400" rtl="0" eaLnBrk="1" latinLnBrk="0" hangingPunct="1">
+    <a:lvl8pPr marL="3200400" algn="l" defTabSz="914400" rtl="0" eaLnBrk="1" latinLnBrk="1" hangingPunct="1">
       <a:defRPr sz="1200" kern="1200">
         <a:solidFill>
           <a:schemeClr val="tx1"/>
@@ -477,7 +258,7 @@
         <a:cs typeface="+mn-cs"/>
       </a:defRPr>
     </a:lvl8pPr>
-    <a:lvl9pPr marL="3657600" algn="l" defTabSz="914400" rtl="0" eaLnBrk="1" latinLnBrk="0" hangingPunct="1">
+    <a:lvl9pPr marL="3657600" algn="l" defTabSz="914400" rtl="0" eaLnBrk="1" latinLnBrk="1" hangingPunct="1">
       <a:defRPr sz="1200" kern="1200">
         <a:solidFill>
           <a:schemeClr val="tx1"/>
@@ -536,8 +317,52 @@
           <a:lstStyle/>
           <a:p>
             <a:r>
-              <a:rPr lang="en-US" dirty="0"/>
-              <a:t>오늘은 Flyweight 패턴을 Unity와 C# 관점으로 다룬다. 핵심은 많은 객체가 반복해서 갖는 큰 데이터를 공유하고, 개별 객체에는 위치와 색 같은 작은 상태만 남기는 것이다.</a:t>
+              <a:rPr lang="ko-KR" altLang="en-US"/>
+              <a:t>오늘은 </a:t>
+            </a:r>
+            <a:r>
+              <a:rPr lang="en-US" altLang="ko-KR"/>
+              <a:t>Flyweight </a:t>
+            </a:r>
+            <a:r>
+              <a:rPr lang="ko-KR" altLang="en-US"/>
+              <a:t>패턴을 </a:t>
+            </a:r>
+            <a:r>
+              <a:rPr lang="en-US" altLang="ko-KR"/>
+              <a:t>Unity</a:t>
+            </a:r>
+            <a:r>
+              <a:rPr lang="ko-KR" altLang="en-US"/>
+              <a:t>와 </a:t>
+            </a:r>
+            <a:r>
+              <a:rPr lang="en-US" altLang="ko-KR"/>
+              <a:t>C# </a:t>
+            </a:r>
+            <a:r>
+              <a:rPr lang="ko-KR" altLang="en-US"/>
+              <a:t>관점에서 다룬다</a:t>
+            </a:r>
+            <a:r>
+              <a:rPr lang="en-US" altLang="ko-KR"/>
+              <a:t>. </a:t>
+            </a:r>
+            <a:r>
+              <a:rPr lang="ko-KR" altLang="en-US"/>
+              <a:t>핵심은 많은 객체가 반복해서 갖는 큰 데이터를 공유하고</a:t>
+            </a:r>
+            <a:r>
+              <a:rPr lang="en-US" altLang="ko-KR"/>
+              <a:t>, </a:t>
+            </a:r>
+            <a:r>
+              <a:rPr lang="ko-KR" altLang="en-US"/>
+              <a:t>개별 객체에는 위치와 색 같은 작은 상태만 남기는 것이다</a:t>
+            </a:r>
+            <a:r>
+              <a:rPr lang="en-US" altLang="ko-KR"/>
+              <a:t>.</a:t>
             </a:r>
             <a:endParaRPr lang="en-US" dirty="0"/>
           </a:p>
@@ -627,7 +452,6 @@
               <a:rPr lang="en-US" dirty="0"/>
               <a:t>원문의 그림은 여러 나무가 하나의 Model을 공유하는 구조를 보여준다.</a:t>
             </a:r>
-            <a:endParaRPr lang="en-US" dirty="0"/>
           </a:p>
         </p:txBody>
       </p:sp>
@@ -715,7 +539,6 @@
               <a:rPr lang="en-US" dirty="0"/>
               <a:t>원문은 Flyweight와 Type Object가 비슷해 보이지만 의도가 다르다고 설명한다.</a:t>
             </a:r>
-            <a:endParaRPr lang="en-US" dirty="0"/>
           </a:p>
         </p:txBody>
       </p:sp>
@@ -800,8 +623,64 @@
           <a:lstStyle/>
           <a:p>
             <a:r>
-              <a:rPr lang="en-US" dirty="0"/>
-              <a:t>원문은 Direct3D와 OpenGL의 instanced rendering을 언급한다. Unity에서도 GPU Instancing과 Graphics.DrawMeshInstanced가 같은 사고방식이다.</a:t>
+              <a:rPr lang="ko-KR" altLang="en-US"/>
+              <a:t>원문은 </a:t>
+            </a:r>
+            <a:r>
+              <a:rPr lang="en-US"/>
+              <a:t>Direct3D</a:t>
+            </a:r>
+            <a:r>
+              <a:rPr lang="ko-KR" altLang="en-US"/>
+              <a:t>와 </a:t>
+            </a:r>
+            <a:r>
+              <a:rPr lang="en-US"/>
+              <a:t>OpenGL</a:t>
+            </a:r>
+            <a:r>
+              <a:rPr lang="ko-KR" altLang="en-US"/>
+              <a:t>의 </a:t>
+            </a:r>
+            <a:r>
+              <a:rPr lang="en-US"/>
+              <a:t>instanced rendering</a:t>
+            </a:r>
+            <a:r>
+              <a:rPr lang="ko-KR" altLang="en-US"/>
+              <a:t>을 언급한다</a:t>
+            </a:r>
+            <a:r>
+              <a:rPr lang="en-US" altLang="ko-KR"/>
+              <a:t>. </a:t>
+            </a:r>
+            <a:r>
+              <a:rPr lang="en-US"/>
+              <a:t>Unity</a:t>
+            </a:r>
+            <a:r>
+              <a:rPr lang="ko-KR" altLang="en-US"/>
+              <a:t>에서도 </a:t>
+            </a:r>
+            <a:r>
+              <a:rPr lang="en-US"/>
+              <a:t>GPU Instancing</a:t>
+            </a:r>
+            <a:r>
+              <a:rPr lang="ko-KR" altLang="en-US"/>
+              <a:t>과 </a:t>
+            </a:r>
+            <a:r>
+              <a:rPr lang="en-US"/>
+              <a:t>Graphics.DrawMeshInstanced</a:t>
+            </a:r>
+            <a:r>
+              <a:rPr lang="ko-KR" altLang="en-US"/>
+              <a:t>가 같은 개념을 따른다</a:t>
+            </a:r>
+            <a:r>
+              <a:rPr lang="en-US" altLang="ko-KR"/>
+              <a:t>.</a:t>
             </a:r>
             <a:endParaRPr lang="en-US" dirty="0"/>
           </a:p>
@@ -888,8 +767,44 @@
           <a:lstStyle/>
           <a:p>
             <a:r>
-              <a:rPr lang="en-US" dirty="0"/>
-              <a:t>실제 Unity 프로젝트에서는 배치 크기, 머티리얼 설정, SRP Batcher 등 추가 고려가 있지만 수업에서는 핵심 구조만 보여준다.</a:t>
+              <a:rPr lang="ko-KR" altLang="en-US"/>
+              <a:t>실제 </a:t>
+            </a:r>
+            <a:r>
+              <a:rPr lang="en-US" altLang="ko-KR"/>
+              <a:t>Unity </a:t>
+            </a:r>
+            <a:r>
+              <a:rPr lang="ko-KR" altLang="en-US"/>
+              <a:t>프로젝트에서는 배치 크기</a:t>
+            </a:r>
+            <a:r>
+              <a:rPr lang="en-US" altLang="ko-KR"/>
+              <a:t>, </a:t>
+            </a:r>
+            <a:r>
+              <a:rPr lang="ko-KR" altLang="en-US"/>
+              <a:t>머티리얼 설정</a:t>
+            </a:r>
+            <a:r>
+              <a:rPr lang="en-US" altLang="ko-KR"/>
+              <a:t>, SRP Batcher </a:t>
+            </a:r>
+            <a:r>
+              <a:rPr lang="ko-KR" altLang="en-US"/>
+              <a:t>등 추가로 고려할 사항이 있지만</a:t>
+            </a:r>
+            <a:r>
+              <a:rPr lang="en-US" altLang="ko-KR"/>
+              <a:t>, </a:t>
+            </a:r>
+            <a:r>
+              <a:rPr lang="ko-KR" altLang="en-US"/>
+              <a:t>수업에서는 핵심 구조만 보여준다</a:t>
+            </a:r>
+            <a:r>
+              <a:rPr lang="en-US" altLang="ko-KR"/>
+              <a:t>.</a:t>
             </a:r>
             <a:endParaRPr lang="en-US" dirty="0"/>
           </a:p>
@@ -979,7 +894,6 @@
               <a:rPr lang="en-US" dirty="0"/>
               <a:t>원문은 context-free 상태를 intrinsic state로 설명하고, 인스턴스마다 다른 값을 extrinsic state로 설명한다.</a:t>
             </a:r>
-            <a:endParaRPr lang="en-US" dirty="0"/>
           </a:p>
         </p:txBody>
       </p:sp>
@@ -1067,7 +981,6 @@
               <a:rPr lang="en-US" dirty="0"/>
               <a:t>학생에게 Flyweight 판단 기준을 연습시키는 슬라이드다.</a:t>
             </a:r>
-            <a:endParaRPr lang="en-US" dirty="0"/>
           </a:p>
         </p:txBody>
       </p:sp>
@@ -1155,7 +1068,6 @@
               <a:rPr lang="en-US" dirty="0"/>
               <a:t>원문은 Terrain의 메서드가 const인 점을 짚으며 공유 객체는 변경하면 안 된다고 설명한다.</a:t>
             </a:r>
-            <a:endParaRPr lang="en-US" dirty="0"/>
           </a:p>
         </p:txBody>
       </p:sp>
@@ -1243,7 +1155,6 @@
               <a:rPr lang="en-US" dirty="0"/>
               <a:t>원문은 나무 다음으로 지형 타일 예시를 든다.</a:t>
             </a:r>
-            <a:endParaRPr lang="en-US" dirty="0"/>
           </a:p>
         </p:txBody>
       </p:sp>
@@ -1331,7 +1242,6 @@
               <a:rPr lang="en-US" dirty="0"/>
               <a:t>원문은 enum으로 지형 타입을 저장하고 switch로 movement cost와 water 여부를 반환하는 방식을 먼저 보여준다.</a:t>
             </a:r>
-            <a:endParaRPr lang="en-US" dirty="0"/>
           </a:p>
         </p:txBody>
       </p:sp>
@@ -1416,8 +1326,20 @@
           <a:lstStyle/>
           <a:p>
             <a:r>
-              <a:rPr lang="en-US" dirty="0"/>
-              <a:t>원문은 이 방식이 작동하지만 보기 좋지 않다고 설명한다. 객체가 원래 하려던 캡슐화를 잃기 때문이다.</a:t>
+              <a:rPr lang="ko-KR" altLang="en-US"/>
+              <a:t>원문은 이 방식이 동작은 하지만 보기 좋지 않다고 설명한다</a:t>
+            </a:r>
+            <a:r>
+              <a:rPr lang="en-US" altLang="ko-KR"/>
+              <a:t>. </a:t>
+            </a:r>
+            <a:r>
+              <a:rPr lang="ko-KR" altLang="en-US"/>
+              <a:t>객체가 본래 제공해야 할 캡슐화를 잃기 때문이다</a:t>
+            </a:r>
+            <a:r>
+              <a:rPr lang="en-US" altLang="ko-KR"/>
+              <a:t>.</a:t>
             </a:r>
             <a:endParaRPr lang="en-US" dirty="0"/>
           </a:p>
@@ -1507,7 +1429,6 @@
               <a:rPr lang="en-US" dirty="0"/>
               <a:t>원문 출처는 Robert Nystrom의 Game Programming Patterns, Flyweight 장이다. 슬라이드는 원문을 그대로 옮기지 않고 수업용 설명으로 재구성했다. 장의 흐름은 숲과 나무, GPU 인스턴싱, intrinsic/extrinsic state, 지형 타일 예시, 성능 논의, 관련 패턴 순서다.</a:t>
             </a:r>
-            <a:endParaRPr lang="en-US" dirty="0"/>
           </a:p>
         </p:txBody>
       </p:sp>
@@ -1592,8 +1513,36 @@
           <a:lstStyle/>
           <a:p>
             <a:r>
-              <a:rPr lang="en-US" dirty="0"/>
-              <a:t>원문의 Terrain 클래스를 C#으로 바꾼다. 모든 프로퍼티는 읽기 전용이다.</a:t>
+              <a:rPr lang="ko-KR" altLang="en-US"/>
+              <a:t>원문의 </a:t>
+            </a:r>
+            <a:r>
+              <a:rPr lang="en-US" altLang="ko-KR"/>
+              <a:t>Terrain </a:t>
+            </a:r>
+            <a:r>
+              <a:rPr lang="ko-KR" altLang="en-US"/>
+              <a:t>클래스를 </a:t>
+            </a:r>
+            <a:r>
+              <a:rPr lang="en-US" altLang="ko-KR"/>
+              <a:t>C#</a:t>
+            </a:r>
+            <a:r>
+              <a:rPr lang="ko-KR" altLang="en-US"/>
+              <a:t>으로 옮긴다</a:t>
+            </a:r>
+            <a:r>
+              <a:rPr lang="en-US" altLang="ko-KR"/>
+              <a:t>. </a:t>
+            </a:r>
+            <a:r>
+              <a:rPr lang="ko-KR" altLang="en-US"/>
+              <a:t>모든 프로퍼티는 읽기 전용이다</a:t>
+            </a:r>
+            <a:r>
+              <a:rPr lang="en-US" altLang="ko-KR"/>
+              <a:t>.</a:t>
             </a:r>
             <a:endParaRPr lang="en-US" dirty="0"/>
           </a:p>
@@ -1683,7 +1632,6 @@
               <a:rPr lang="en-US" dirty="0"/>
               <a:t>원문은 Terrain* tiles_[WIDTH][HEIGHT] 구조를 사용한다. C#에서는 2차원 배열에 TerrainType 참조를 저장한다.</a:t>
             </a:r>
-            <a:endParaRPr lang="en-US" dirty="0"/>
           </a:p>
         </p:txBody>
       </p:sp>
@@ -1771,7 +1719,6 @@
               <a:rPr lang="en-US" dirty="0"/>
               <a:t>원문은 풀로 채우고 일부 언덕을 뿌린 뒤 강을 놓는 간단한 생성 예시를 보여준다.</a:t>
             </a:r>
-            <a:endParaRPr lang="en-US" dirty="0"/>
           </a:p>
         </p:txBody>
       </p:sp>
@@ -1856,8 +1803,28 @@
           <a:lstStyle/>
           <a:p>
             <a:r>
-              <a:rPr lang="en-US" dirty="0"/>
-              <a:t>원문은 pointer가 enum보다 크게 비싸지 않으면서 객체 API를 되찾는다고 설명한다.</a:t>
+              <a:rPr lang="ko-KR" altLang="en-US"/>
+              <a:t>원문은 포인터가 </a:t>
+            </a:r>
+            <a:r>
+              <a:rPr lang="en-US" altLang="ko-KR"/>
+              <a:t>enum</a:t>
+            </a:r>
+            <a:r>
+              <a:rPr lang="ko-KR" altLang="en-US"/>
+              <a:t>보다 크게 무겁지 않으면서 객체지향 </a:t>
+            </a:r>
+            <a:r>
+              <a:rPr lang="en-US" altLang="ko-KR"/>
+              <a:t>API</a:t>
+            </a:r>
+            <a:r>
+              <a:rPr lang="ko-KR" altLang="en-US"/>
+              <a:t>를 되살린다고 설명한다</a:t>
+            </a:r>
+            <a:r>
+              <a:rPr lang="en-US" altLang="ko-KR"/>
+              <a:t>.</a:t>
             </a:r>
             <a:endParaRPr lang="en-US" dirty="0"/>
           </a:p>
@@ -1947,7 +1914,6 @@
               <a:rPr lang="en-US" dirty="0"/>
               <a:t>Unity에서는 ScriptableObject가 flyweight 역할을 하기 좋다. 여러 타일이 같은 TerrainTypeAsset을 참조한다.</a:t>
             </a:r>
-            <a:endParaRPr lang="en-US" dirty="0"/>
           </a:p>
         </p:txBody>
       </p:sp>
@@ -2035,7 +2001,6 @@
               <a:rPr lang="en-US" dirty="0"/>
               <a:t>Unity 개발에서 이미 많은 리소스가 flyweight처럼 동작한다.</a:t>
             </a:r>
-            <a:endParaRPr lang="en-US" dirty="0"/>
           </a:p>
         </p:txBody>
       </p:sp>
@@ -2123,7 +2088,6 @@
               <a:rPr lang="en-US" dirty="0"/>
               <a:t>원문 What About Performance 절이다. Flyweight가 항상 빠르다고 단정하지 않고 프로파일링을 강조한다.</a:t>
             </a:r>
-            <a:endParaRPr lang="en-US" dirty="0"/>
           </a:p>
         </p:txBody>
       </p:sp>
@@ -2211,7 +2175,6 @@
               <a:rPr lang="en-US" dirty="0"/>
               <a:t>패턴 적용 기준을 정리한다.</a:t>
             </a:r>
-            <a:endParaRPr lang="en-US" dirty="0"/>
           </a:p>
         </p:txBody>
       </p:sp>
@@ -2299,7 +2262,6 @@
               <a:rPr lang="en-US" dirty="0"/>
               <a:t>Flyweight의 대표적인 실수는 공유 객체에 개별 상태를 넣는 것이다.</a:t>
             </a:r>
-            <a:endParaRPr lang="en-US" dirty="0"/>
           </a:p>
         </p:txBody>
       </p:sp>
@@ -2387,7 +2349,6 @@
               <a:rPr lang="en-US" dirty="0"/>
               <a:t>원문 See Also를 수업용으로 정리한다.</a:t>
             </a:r>
-            <a:endParaRPr lang="en-US" dirty="0"/>
           </a:p>
         </p:txBody>
       </p:sp>
@@ -2475,7 +2436,6 @@
               <a:rPr lang="en-US" dirty="0"/>
               <a:t>원문 출처는 Robert Nystrom의 Game Programming Patterns, Flyweight 장이다. 슬라이드는 원문을 그대로 옮기지 않고 수업용 설명으로 재구성했다. 장의 흐름은 숲과 나무, GPU 인스턴싱, intrinsic/extrinsic state, 지형 타일 예시, 성능 논의, 관련 패턴 순서다.</a:t>
             </a:r>
-            <a:endParaRPr lang="en-US" dirty="0"/>
           </a:p>
         </p:txBody>
       </p:sp>
@@ -2560,8 +2520,44 @@
           <a:lstStyle/>
           <a:p>
             <a:r>
-              <a:rPr lang="en-US" dirty="0"/>
-              <a:t>실습은 ScriptableObject 없이도 C# 객체로 할 수 있고, 확장 과제로 ScriptableObject화할 수 있다.</a:t>
+              <a:rPr lang="ko-KR" altLang="en-US"/>
+              <a:t>실습은 </a:t>
+            </a:r>
+            <a:r>
+              <a:rPr lang="en-US" altLang="ko-KR"/>
+              <a:t>ScriptableObject </a:t>
+            </a:r>
+            <a:r>
+              <a:rPr lang="ko-KR" altLang="en-US"/>
+              <a:t>없이 </a:t>
+            </a:r>
+            <a:r>
+              <a:rPr lang="en-US" altLang="ko-KR"/>
+              <a:t>C# </a:t>
+            </a:r>
+            <a:r>
+              <a:rPr lang="ko-KR" altLang="en-US"/>
+              <a:t>객체만으로도 할 수 있고</a:t>
+            </a:r>
+            <a:r>
+              <a:rPr lang="en-US" altLang="ko-KR"/>
+              <a:t>, </a:t>
+            </a:r>
+            <a:r>
+              <a:rPr lang="ko-KR" altLang="en-US"/>
+              <a:t>확장 과제에서 </a:t>
+            </a:r>
+            <a:r>
+              <a:rPr lang="en-US" altLang="ko-KR"/>
+              <a:t>ScriptableObject </a:t>
+            </a:r>
+            <a:r>
+              <a:rPr lang="ko-KR" altLang="en-US"/>
+              <a:t>기반으로 바꿀 수 있다</a:t>
+            </a:r>
+            <a:r>
+              <a:rPr lang="en-US" altLang="ko-KR"/>
+              <a:t>.</a:t>
             </a:r>
             <a:endParaRPr lang="en-US" dirty="0"/>
           </a:p>
@@ -2651,7 +2647,6 @@
               <a:rPr lang="en-US" dirty="0"/>
               <a:t>학생 실습 과제 명세다.</a:t>
             </a:r>
-            <a:endParaRPr lang="en-US" dirty="0"/>
           </a:p>
         </p:txBody>
       </p:sp>
@@ -2739,7 +2734,6 @@
               <a:rPr lang="en-US" dirty="0"/>
               <a:t>첫 번째 구현 단계다.</a:t>
             </a:r>
-            <a:endParaRPr lang="en-US" dirty="0"/>
           </a:p>
         </p:txBody>
       </p:sp>
@@ -2827,7 +2821,6 @@
               <a:rPr lang="en-US" dirty="0"/>
               <a:t>두 번째 구현 단계다.</a:t>
             </a:r>
-            <a:endParaRPr lang="en-US" dirty="0"/>
           </a:p>
         </p:txBody>
       </p:sp>
@@ -2915,7 +2908,6 @@
               <a:rPr lang="en-US" dirty="0"/>
               <a:t>기능과 구조를 함께 평가한다.</a:t>
             </a:r>
-            <a:endParaRPr lang="en-US" dirty="0"/>
           </a:p>
         </p:txBody>
       </p:sp>
@@ -3003,7 +2995,6 @@
               <a:rPr lang="en-US" dirty="0"/>
               <a:t>빠른 학생을 위한 확장 과제다.</a:t>
             </a:r>
-            <a:endParaRPr lang="en-US" dirty="0"/>
           </a:p>
         </p:txBody>
       </p:sp>
@@ -3091,7 +3082,6 @@
               <a:rPr lang="en-US" dirty="0"/>
               <a:t>수업 마지막에는 intrinsic/extrinsic state 구분을 다시 강조한다.</a:t>
             </a:r>
-            <a:endParaRPr lang="en-US" dirty="0"/>
           </a:p>
         </p:txBody>
       </p:sp>
@@ -3179,7 +3169,6 @@
               <a:rPr lang="en-US" dirty="0"/>
               <a:t>원문 출처는 Robert Nystrom의 Game Programming Patterns, Flyweight 장이다. 슬라이드는 원문을 그대로 옮기지 않고 수업용 설명으로 재구성했다. 장의 흐름은 숲과 나무, GPU 인스턴싱, intrinsic/extrinsic state, 지형 타일 예시, 성능 논의, 관련 패턴 순서다.</a:t>
             </a:r>
-            <a:endParaRPr lang="en-US" dirty="0"/>
           </a:p>
         </p:txBody>
       </p:sp>
@@ -3267,7 +3256,6 @@
               <a:rPr lang="en-US" dirty="0"/>
               <a:t>원문은 장대한 숲을 예시로 시작한다. 실제 게임에서는 수천 개의 나무를 렌더링해야 하므로 데이터 중복이 문제가 된다.</a:t>
             </a:r>
-            <a:endParaRPr lang="en-US" dirty="0"/>
           </a:p>
         </p:txBody>
       </p:sp>
@@ -3355,7 +3343,6 @@
               <a:rPr lang="en-US" dirty="0"/>
               <a:t>원문의 Tree 클래스 예시를 C#으로 바꾸었다. 큰 데이터인 Mesh와 Texture가 각 객체 안에 들어가면 중복이 커진다.</a:t>
             </a:r>
-            <a:endParaRPr lang="en-US" dirty="0"/>
           </a:p>
         </p:txBody>
       </p:sp>
@@ -3443,7 +3430,6 @@
               <a:rPr lang="en-US" dirty="0"/>
               <a:t>Flyweight의 출발점은 반복되는 큰 데이터와 개별 데이터가 섞여 있다는 사실을 보는 것이다.</a:t>
             </a:r>
-            <a:endParaRPr lang="en-US" dirty="0"/>
           </a:p>
         </p:txBody>
       </p:sp>
@@ -3528,8 +3514,52 @@
           <a:lstStyle/>
           <a:p>
             <a:r>
-              <a:rPr lang="en-US" dirty="0"/>
-              <a:t>원문은 TreeModel에 mesh, bark texture, leaf texture를 둔다. Unity에서는 Mesh와 Material로 표현하면 자연스럽다.</a:t>
+              <a:rPr lang="ko-KR" altLang="en-US"/>
+              <a:t>원문은 </a:t>
+            </a:r>
+            <a:r>
+              <a:rPr lang="en-US" altLang="ko-KR"/>
+              <a:t>TreeModel</a:t>
+            </a:r>
+            <a:r>
+              <a:rPr lang="ko-KR" altLang="en-US"/>
+              <a:t>에 </a:t>
+            </a:r>
+            <a:r>
+              <a:rPr lang="en-US" altLang="ko-KR"/>
+              <a:t>mesh, bark texture, leaf texture</a:t>
+            </a:r>
+            <a:r>
+              <a:rPr lang="ko-KR" altLang="en-US"/>
+              <a:t>를 담는다</a:t>
+            </a:r>
+            <a:r>
+              <a:rPr lang="en-US" altLang="ko-KR"/>
+              <a:t>. Unity</a:t>
+            </a:r>
+            <a:r>
+              <a:rPr lang="ko-KR" altLang="en-US"/>
+              <a:t>에서는 </a:t>
+            </a:r>
+            <a:r>
+              <a:rPr lang="en-US" altLang="ko-KR"/>
+              <a:t>Mesh</a:t>
+            </a:r>
+            <a:r>
+              <a:rPr lang="ko-KR" altLang="en-US"/>
+              <a:t>와 </a:t>
+            </a:r>
+            <a:r>
+              <a:rPr lang="en-US" altLang="ko-KR"/>
+              <a:t>Material</a:t>
+            </a:r>
+            <a:r>
+              <a:rPr lang="ko-KR" altLang="en-US"/>
+              <a:t>로 표현하면 자연스럽다</a:t>
+            </a:r>
+            <a:r>
+              <a:rPr lang="en-US" altLang="ko-KR"/>
+              <a:t>.</a:t>
             </a:r>
             <a:endParaRPr lang="en-US" dirty="0"/>
           </a:p>
@@ -3619,7 +3649,6 @@
               <a:rPr lang="en-US" dirty="0"/>
               <a:t>TreeInstance는 공유 TreeModel 참조와 위치, 높이, 색만 가진다.</a:t>
             </a:r>
-            <a:endParaRPr lang="en-US" dirty="0"/>
           </a:p>
         </p:txBody>
       </p:sp>
@@ -3692,6 +3721,11 @@
 <file path=ppt/slideMasters/slideMaster1.xml><?xml version="1.0" encoding="utf-8"?>
 <p:sldMaster xmlns:a="http://schemas.openxmlformats.org/drawingml/2006/main" xmlns:r="http://schemas.openxmlformats.org/officeDocument/2006/relationships" xmlns:p="http://schemas.openxmlformats.org/presentationml/2006/main">
   <p:cSld>
+    <p:bg>
+      <p:bgRef idx="1001">
+        <a:schemeClr val="bg1"/>
+      </p:bgRef>
+    </p:bg>
     <p:spTree>
       <p:nvGrpSpPr>
         <p:cNvPr id="1" name=""/>
@@ -3974,6 +4008,7 @@
         <a:solidFill>
           <a:srgbClr val="102016"/>
         </a:solidFill>
+        <a:effectLst/>
       </p:bgPr>
     </p:bg>
     <p:spTree>
@@ -4063,7 +4098,7 @@
           </a:bodyPr>
           <a:lstStyle/>
           <a:p>
-            <a:pPr indent="0" marL="0">
+            <a:pPr marL="0" indent="0">
               <a:buNone/>
             </a:pPr>
             <a:r>
@@ -4104,7 +4139,7 @@
           </a:bodyPr>
           <a:lstStyle/>
           <a:p>
-            <a:pPr indent="0" marL="0">
+            <a:pPr marL="0" indent="0">
               <a:buNone/>
             </a:pPr>
             <a:r>
@@ -4172,7 +4207,7 @@
           </a:bodyPr>
           <a:lstStyle/>
           <a:p>
-            <a:pPr algn="ctr" indent="0" marL="0">
+            <a:pPr marL="0" indent="0" algn="ctr">
               <a:buNone/>
             </a:pPr>
             <a:r>
@@ -4211,7 +4246,7 @@
           <a:bodyPr wrap="square" lIns="0" tIns="0" rIns="0" bIns="0" rtlCol="0" anchor="ctr"/>
           <a:lstStyle/>
           <a:p>
-            <a:pPr indent="0" marL="0">
+            <a:pPr marL="0" indent="0">
               <a:buNone/>
             </a:pPr>
             <a:r>
@@ -4276,7 +4311,7 @@
           </a:bodyPr>
           <a:lstStyle/>
           <a:p>
-            <a:pPr algn="ctr" indent="0" marL="0">
+            <a:pPr marL="0" indent="0" algn="ctr">
               <a:buNone/>
             </a:pPr>
             <a:r>
@@ -4315,7 +4350,7 @@
           <a:bodyPr wrap="square" lIns="0" tIns="0" rIns="0" bIns="0" rtlCol="0" anchor="ctr"/>
           <a:lstStyle/>
           <a:p>
-            <a:pPr indent="0" marL="0">
+            <a:pPr marL="0" indent="0">
               <a:buNone/>
             </a:pPr>
             <a:r>
@@ -4380,7 +4415,7 @@
           </a:bodyPr>
           <a:lstStyle/>
           <a:p>
-            <a:pPr algn="ctr" indent="0" marL="0">
+            <a:pPr marL="0" indent="0" algn="ctr">
               <a:buNone/>
             </a:pPr>
             <a:r>
@@ -4419,7 +4454,7 @@
           <a:bodyPr wrap="square" lIns="0" tIns="0" rIns="0" bIns="0" rtlCol="0" anchor="ctr"/>
           <a:lstStyle/>
           <a:p>
-            <a:pPr indent="0" marL="0">
+            <a:pPr marL="0" indent="0">
               <a:buNone/>
             </a:pPr>
             <a:r>
@@ -4484,7 +4519,7 @@
           </a:bodyPr>
           <a:lstStyle/>
           <a:p>
-            <a:pPr algn="ctr" indent="0" marL="0">
+            <a:pPr marL="0" indent="0" algn="ctr">
               <a:buNone/>
             </a:pPr>
             <a:r>
@@ -4525,7 +4560,7 @@
           </a:bodyPr>
           <a:lstStyle/>
           <a:p>
-            <a:pPr indent="0" marL="0">
+            <a:pPr marL="0" indent="0">
               <a:buNone/>
             </a:pPr>
             <a:r>
@@ -4559,6 +4594,7 @@
         <a:solidFill>
           <a:srgbClr val="FAF7EF"/>
         </a:solidFill>
+        <a:effectLst/>
       </p:bgPr>
     </p:bg>
     <p:spTree>
@@ -4646,7 +4682,7 @@
           <a:bodyPr wrap="square" lIns="0" tIns="0" rIns="0" bIns="0" rtlCol="0" anchor="ctr"/>
           <a:lstStyle/>
           <a:p>
-            <a:pPr algn="r" indent="0" marL="0">
+            <a:pPr marL="0" indent="0" algn="r">
               <a:buNone/>
             </a:pPr>
             <a:r>
@@ -4685,7 +4721,7 @@
           <a:bodyPr wrap="square" lIns="0" tIns="0" rIns="0" bIns="0" rtlCol="0" anchor="ctr"/>
           <a:lstStyle/>
           <a:p>
-            <a:pPr indent="0" marL="0">
+            <a:pPr marL="0" indent="0">
               <a:buNone/>
             </a:pPr>
             <a:r>
@@ -4726,7 +4762,7 @@
           </a:bodyPr>
           <a:lstStyle/>
           <a:p>
-            <a:pPr indent="0" marL="0">
+            <a:pPr marL="0" indent="0">
               <a:buNone/>
             </a:pPr>
             <a:r>
@@ -4767,7 +4803,7 @@
           </a:bodyPr>
           <a:lstStyle/>
           <a:p>
-            <a:pPr indent="0" marL="0">
+            <a:pPr marL="0" indent="0">
               <a:buNone/>
             </a:pPr>
             <a:r>
@@ -4835,7 +4871,7 @@
           </a:bodyPr>
           <a:lstStyle/>
           <a:p>
-            <a:pPr algn="ctr" indent="0" marL="0">
+            <a:pPr marL="0" indent="0" algn="ctr">
               <a:buNone/>
             </a:pPr>
             <a:r>
@@ -4874,7 +4910,7 @@
           <a:bodyPr wrap="square" lIns="0" tIns="0" rIns="0" bIns="0" rtlCol="0" anchor="ctr"/>
           <a:lstStyle/>
           <a:p>
-            <a:pPr indent="0" marL="0">
+            <a:pPr marL="0" indent="0">
               <a:buNone/>
             </a:pPr>
             <a:r>
@@ -4939,7 +4975,7 @@
           </a:bodyPr>
           <a:lstStyle/>
           <a:p>
-            <a:pPr algn="ctr" indent="0" marL="0">
+            <a:pPr marL="0" indent="0" algn="ctr">
               <a:buNone/>
             </a:pPr>
             <a:r>
@@ -4978,7 +5014,7 @@
           <a:bodyPr wrap="square" lIns="0" tIns="0" rIns="0" bIns="0" rtlCol="0" anchor="ctr"/>
           <a:lstStyle/>
           <a:p>
-            <a:pPr indent="0" marL="0">
+            <a:pPr marL="0" indent="0">
               <a:buNone/>
             </a:pPr>
             <a:r>
@@ -5043,7 +5079,7 @@
           </a:bodyPr>
           <a:lstStyle/>
           <a:p>
-            <a:pPr algn="ctr" indent="0" marL="0">
+            <a:pPr marL="0" indent="0" algn="ctr">
               <a:buNone/>
             </a:pPr>
             <a:r>
@@ -5082,7 +5118,7 @@
           <a:bodyPr wrap="square" lIns="0" tIns="0" rIns="0" bIns="0" rtlCol="0" anchor="ctr"/>
           <a:lstStyle/>
           <a:p>
-            <a:pPr indent="0" marL="0">
+            <a:pPr marL="0" indent="0">
               <a:buNone/>
             </a:pPr>
             <a:r>
@@ -5147,7 +5183,7 @@
           </a:bodyPr>
           <a:lstStyle/>
           <a:p>
-            <a:pPr algn="ctr" indent="0" marL="0">
+            <a:pPr marL="0" indent="0" algn="ctr">
               <a:buNone/>
             </a:pPr>
             <a:r>
@@ -5213,7 +5249,7 @@
           </a:bodyPr>
           <a:lstStyle/>
           <a:p>
-            <a:pPr indent="0" marL="0">
+            <a:pPr marL="0" indent="0">
               <a:buNone/>
             </a:pPr>
             <a:r>
@@ -5279,7 +5315,7 @@
           </a:bodyPr>
           <a:lstStyle/>
           <a:p>
-            <a:pPr indent="0" marL="0">
+            <a:pPr marL="0" indent="0">
               <a:buNone/>
             </a:pPr>
             <a:r>
@@ -5313,6 +5349,7 @@
         <a:solidFill>
           <a:srgbClr val="FAF7EF"/>
         </a:solidFill>
+        <a:effectLst/>
       </p:bgPr>
     </p:bg>
     <p:spTree>
@@ -5400,7 +5437,7 @@
           <a:bodyPr wrap="square" lIns="0" tIns="0" rIns="0" bIns="0" rtlCol="0" anchor="ctr"/>
           <a:lstStyle/>
           <a:p>
-            <a:pPr algn="r" indent="0" marL="0">
+            <a:pPr marL="0" indent="0" algn="r">
               <a:buNone/>
             </a:pPr>
             <a:r>
@@ -5439,7 +5476,7 @@
           <a:bodyPr wrap="square" lIns="0" tIns="0" rIns="0" bIns="0" rtlCol="0" anchor="ctr"/>
           <a:lstStyle/>
           <a:p>
-            <a:pPr indent="0" marL="0">
+            <a:pPr marL="0" indent="0">
               <a:buNone/>
             </a:pPr>
             <a:r>
@@ -5480,7 +5517,7 @@
           </a:bodyPr>
           <a:lstStyle/>
           <a:p>
-            <a:pPr indent="0" marL="0">
+            <a:pPr marL="0" indent="0">
               <a:buNone/>
             </a:pPr>
             <a:r>
@@ -5521,7 +5558,7 @@
           </a:bodyPr>
           <a:lstStyle/>
           <a:p>
-            <a:pPr indent="0" marL="0">
+            <a:pPr marL="0" indent="0">
               <a:buNone/>
             </a:pPr>
             <a:r>
@@ -5587,7 +5624,7 @@
           </a:bodyPr>
           <a:lstStyle/>
           <a:p>
-            <a:pPr indent="0" marL="0">
+            <a:pPr marL="0" indent="0">
               <a:buNone/>
             </a:pPr>
             <a:r>
@@ -5653,7 +5690,7 @@
           </a:bodyPr>
           <a:lstStyle/>
           <a:p>
-            <a:pPr indent="0" marL="0">
+            <a:pPr marL="0" indent="0">
               <a:buNone/>
             </a:pPr>
             <a:r>
@@ -5719,7 +5756,7 @@
           </a:bodyPr>
           <a:lstStyle/>
           <a:p>
-            <a:pPr indent="0" marL="0">
+            <a:pPr marL="0" indent="0">
               <a:buNone/>
             </a:pPr>
             <a:r>
@@ -5760,7 +5797,7 @@
           </a:bodyPr>
           <a:lstStyle/>
           <a:p>
-            <a:pPr indent="0" marL="0">
+            <a:pPr marL="0" indent="0">
               <a:buNone/>
             </a:pPr>
             <a:r>
@@ -5826,7 +5863,7 @@
           </a:bodyPr>
           <a:lstStyle/>
           <a:p>
-            <a:pPr indent="0" marL="0">
+            <a:pPr marL="0" indent="0">
               <a:buNone/>
             </a:pPr>
             <a:r>
@@ -5892,11 +5929,11 @@
           </a:bodyPr>
           <a:lstStyle/>
           <a:p>
-            <a:pPr indent="0" marL="0">
-              <a:buNone/>
-            </a:pPr>
-            <a:r>
-              <a:rPr lang="en-US" sz="1420" dirty="0">
+            <a:pPr marL="0" indent="0">
+              <a:buNone/>
+            </a:pPr>
+            <a:r>
+              <a:rPr lang="ko-KR" altLang="en-US" sz="1420">
                 <a:solidFill>
                   <a:srgbClr val="17212B"/>
                 </a:solidFill>
@@ -5904,7 +5941,18 @@
                 <a:ea typeface="Malgun Gothic" pitchFamily="34" charset="-122"/>
                 <a:cs typeface="Malgun Gothic" pitchFamily="34" charset="-120"/>
               </a:rPr>
-              <a:t>효율이 주목적이다.</a:t>
+              <a:t>메모리 효율이 주목적이다</a:t>
+            </a:r>
+            <a:r>
+              <a:rPr lang="en-US" altLang="ko-KR" sz="1420">
+                <a:solidFill>
+                  <a:srgbClr val="17212B"/>
+                </a:solidFill>
+                <a:latin typeface="Malgun Gothic" pitchFamily="34" charset="0"/>
+                <a:ea typeface="Malgun Gothic" pitchFamily="34" charset="-122"/>
+                <a:cs typeface="Malgun Gothic" pitchFamily="34" charset="-120"/>
+              </a:rPr>
+              <a:t>.</a:t>
             </a:r>
             <a:endParaRPr lang="en-US" sz="1420" dirty="0"/>
           </a:p>
@@ -5958,7 +6006,7 @@
           </a:bodyPr>
           <a:lstStyle/>
           <a:p>
-            <a:pPr indent="0" marL="0">
+            <a:pPr marL="0" indent="0">
               <a:buNone/>
             </a:pPr>
             <a:r>
@@ -5992,6 +6040,7 @@
         <a:solidFill>
           <a:srgbClr val="FAF7EF"/>
         </a:solidFill>
+        <a:effectLst/>
       </p:bgPr>
     </p:bg>
     <p:spTree>
@@ -6079,7 +6128,7 @@
           <a:bodyPr wrap="square" lIns="0" tIns="0" rIns="0" bIns="0" rtlCol="0" anchor="ctr"/>
           <a:lstStyle/>
           <a:p>
-            <a:pPr algn="r" indent="0" marL="0">
+            <a:pPr marL="0" indent="0" algn="r">
               <a:buNone/>
             </a:pPr>
             <a:r>
@@ -6118,7 +6167,7 @@
           <a:bodyPr wrap="square" lIns="0" tIns="0" rIns="0" bIns="0" rtlCol="0" anchor="ctr"/>
           <a:lstStyle/>
           <a:p>
-            <a:pPr indent="0" marL="0">
+            <a:pPr marL="0" indent="0">
               <a:buNone/>
             </a:pPr>
             <a:r>
@@ -6159,7 +6208,7 @@
           </a:bodyPr>
           <a:lstStyle/>
           <a:p>
-            <a:pPr indent="0" marL="0">
+            <a:pPr marL="0" indent="0">
               <a:buNone/>
             </a:pPr>
             <a:r>
@@ -6200,7 +6249,7 @@
           </a:bodyPr>
           <a:lstStyle/>
           <a:p>
-            <a:pPr indent="0" marL="0">
+            <a:pPr marL="0" indent="0">
               <a:buNone/>
             </a:pPr>
             <a:r>
@@ -6266,7 +6315,7 @@
           </a:bodyPr>
           <a:lstStyle/>
           <a:p>
-            <a:pPr indent="0" marL="0">
+            <a:pPr marL="0" indent="0">
               <a:buNone/>
             </a:pPr>
             <a:r>
@@ -6332,7 +6381,7 @@
           </a:bodyPr>
           <a:lstStyle/>
           <a:p>
-            <a:pPr indent="0" marL="0">
+            <a:pPr marL="0" indent="0">
               <a:buNone/>
             </a:pPr>
             <a:r>
@@ -6398,7 +6447,7 @@
           </a:bodyPr>
           <a:lstStyle/>
           <a:p>
-            <a:pPr indent="0" marL="0">
+            <a:pPr marL="0" indent="0">
               <a:buNone/>
             </a:pPr>
             <a:r>
@@ -6432,6 +6481,7 @@
         <a:solidFill>
           <a:srgbClr val="FAF7EF"/>
         </a:solidFill>
+        <a:effectLst/>
       </p:bgPr>
     </p:bg>
     <p:spTree>
@@ -6519,7 +6569,7 @@
           <a:bodyPr wrap="square" lIns="0" tIns="0" rIns="0" bIns="0" rtlCol="0" anchor="ctr"/>
           <a:lstStyle/>
           <a:p>
-            <a:pPr algn="r" indent="0" marL="0">
+            <a:pPr marL="0" indent="0" algn="r">
               <a:buNone/>
             </a:pPr>
             <a:r>
@@ -6558,7 +6608,7 @@
           <a:bodyPr wrap="square" lIns="0" tIns="0" rIns="0" bIns="0" rtlCol="0" anchor="ctr"/>
           <a:lstStyle/>
           <a:p>
-            <a:pPr indent="0" marL="0">
+            <a:pPr marL="0" indent="0">
               <a:buNone/>
             </a:pPr>
             <a:r>
@@ -6599,11 +6649,11 @@
           </a:bodyPr>
           <a:lstStyle/>
           <a:p>
-            <a:pPr indent="0" marL="0">
-              <a:buNone/>
-            </a:pPr>
-            <a:r>
-              <a:rPr lang="en-US" sz="2500" b="1" dirty="0">
+            <a:pPr marL="0" indent="0">
+              <a:buNone/>
+            </a:pPr>
+            <a:r>
+              <a:rPr lang="en-US" altLang="ko-KR" sz="2500" b="1">
                 <a:solidFill>
                   <a:srgbClr val="17212B"/>
                 </a:solidFill>
@@ -6611,7 +6661,18 @@
                 <a:ea typeface="Malgun Gothic" pitchFamily="34" charset="-122"/>
                 <a:cs typeface="Malgun Gothic" pitchFamily="34" charset="-120"/>
               </a:rPr>
-              <a:t>Unity식 인스턴싱 사고방식</a:t>
+              <a:t>Unity</a:t>
+            </a:r>
+            <a:r>
+              <a:rPr lang="ko-KR" altLang="en-US" sz="2500" b="1">
+                <a:solidFill>
+                  <a:srgbClr val="17212B"/>
+                </a:solidFill>
+                <a:latin typeface="Malgun Gothic" pitchFamily="34" charset="0"/>
+                <a:ea typeface="Malgun Gothic" pitchFamily="34" charset="-122"/>
+                <a:cs typeface="Malgun Gothic" pitchFamily="34" charset="-120"/>
+              </a:rPr>
+              <a:t>에서의 인스턴싱 사고방식</a:t>
             </a:r>
             <a:endParaRPr lang="en-US" sz="2500" dirty="0"/>
           </a:p>
@@ -6640,7 +6701,7 @@
           </a:bodyPr>
           <a:lstStyle/>
           <a:p>
-            <a:pPr indent="0" marL="0">
+            <a:pPr marL="0" indent="0">
               <a:buNone/>
             </a:pPr>
             <a:r>
@@ -6710,7 +6771,7 @@
           </a:bodyPr>
           <a:lstStyle/>
           <a:p>
-            <a:pPr indent="0" marL="0">
+            <a:pPr marL="0" indent="0">
               <a:buNone/>
             </a:pPr>
             <a:r>
@@ -6727,7 +6788,7 @@
             <a:endParaRPr lang="en-US" sz="1320" dirty="0"/>
           </a:p>
           <a:p>
-            <a:pPr indent="0" marL="0">
+            <a:pPr marL="0" indent="0">
               <a:buNone/>
             </a:pPr>
             <a:r>
@@ -6744,7 +6805,7 @@
             <a:endParaRPr lang="en-US" sz="1320" dirty="0"/>
           </a:p>
           <a:p>
-            <a:pPr indent="0" marL="0">
+            <a:pPr marL="0" indent="0">
               <a:buNone/>
             </a:pPr>
             <a:r>
@@ -6761,7 +6822,7 @@
             <a:endParaRPr lang="en-US" sz="1320" dirty="0"/>
           </a:p>
           <a:p>
-            <a:pPr indent="0" marL="0">
+            <a:pPr marL="0" indent="0">
               <a:buNone/>
             </a:pPr>
             <a:r>
@@ -6778,7 +6839,7 @@
             <a:endParaRPr lang="en-US" sz="1320" dirty="0"/>
           </a:p>
           <a:p>
-            <a:pPr indent="0" marL="0">
+            <a:pPr marL="0" indent="0">
               <a:buNone/>
             </a:pPr>
             <a:r>
@@ -6795,7 +6856,7 @@
             <a:endParaRPr lang="en-US" sz="1320" dirty="0"/>
           </a:p>
           <a:p>
-            <a:pPr indent="0" marL="0">
+            <a:pPr marL="0" indent="0">
               <a:buNone/>
             </a:pPr>
             <a:r>
@@ -6812,7 +6873,7 @@
             <a:endParaRPr lang="en-US" sz="1320" dirty="0"/>
           </a:p>
           <a:p>
-            <a:pPr indent="0" marL="0">
+            <a:pPr marL="0" indent="0">
               <a:buNone/>
             </a:pPr>
             <a:r>
@@ -6829,7 +6890,7 @@
             <a:endParaRPr lang="en-US" sz="1320" dirty="0"/>
           </a:p>
           <a:p>
-            <a:pPr indent="0" marL="0">
+            <a:pPr marL="0" indent="0">
               <a:buNone/>
             </a:pPr>
             <a:r>
@@ -6846,7 +6907,7 @@
             <a:endParaRPr lang="en-US" sz="1320" dirty="0"/>
           </a:p>
           <a:p>
-            <a:pPr indent="0" marL="0">
+            <a:pPr marL="0" indent="0">
               <a:buNone/>
             </a:pPr>
             <a:r>
@@ -6863,7 +6924,7 @@
             <a:endParaRPr lang="en-US" sz="1320" dirty="0"/>
           </a:p>
           <a:p>
-            <a:pPr indent="0" marL="0">
+            <a:pPr marL="0" indent="0">
               <a:buNone/>
             </a:pPr>
             <a:r>
@@ -6897,6 +6958,7 @@
         <a:solidFill>
           <a:srgbClr val="FAF7EF"/>
         </a:solidFill>
+        <a:effectLst/>
       </p:bgPr>
     </p:bg>
     <p:spTree>
@@ -6984,7 +7046,7 @@
           <a:bodyPr wrap="square" lIns="0" tIns="0" rIns="0" bIns="0" rtlCol="0" anchor="ctr"/>
           <a:lstStyle/>
           <a:p>
-            <a:pPr algn="r" indent="0" marL="0">
+            <a:pPr marL="0" indent="0" algn="r">
               <a:buNone/>
             </a:pPr>
             <a:r>
@@ -7023,7 +7085,7 @@
           <a:bodyPr wrap="square" lIns="0" tIns="0" rIns="0" bIns="0" rtlCol="0" anchor="ctr"/>
           <a:lstStyle/>
           <a:p>
-            <a:pPr indent="0" marL="0">
+            <a:pPr marL="0" indent="0">
               <a:buNone/>
             </a:pPr>
             <a:r>
@@ -7064,11 +7126,11 @@
           </a:bodyPr>
           <a:lstStyle/>
           <a:p>
-            <a:pPr indent="0" marL="0">
-              <a:buNone/>
-            </a:pPr>
-            <a:r>
-              <a:rPr lang="en-US" sz="2500" b="1" dirty="0">
+            <a:pPr marL="0" indent="0">
+              <a:buNone/>
+            </a:pPr>
+            <a:r>
+              <a:rPr lang="ko-KR" altLang="en-US" sz="2500" b="1">
                 <a:solidFill>
                   <a:srgbClr val="17212B"/>
                 </a:solidFill>
@@ -7076,7 +7138,7 @@
                 <a:ea typeface="Malgun Gothic" pitchFamily="34" charset="-122"/>
                 <a:cs typeface="Malgun Gothic" pitchFamily="34" charset="-120"/>
               </a:rPr>
-              <a:t>패턴의 일반 정의</a:t>
+              <a:t>패턴의 일반적인 정의</a:t>
             </a:r>
             <a:endParaRPr lang="en-US" sz="2500" dirty="0"/>
           </a:p>
@@ -7105,7 +7167,7 @@
           </a:bodyPr>
           <a:lstStyle/>
           <a:p>
-            <a:pPr indent="0" marL="0">
+            <a:pPr marL="0" indent="0">
               <a:buNone/>
             </a:pPr>
             <a:r>
@@ -7171,7 +7233,7 @@
           </a:bodyPr>
           <a:lstStyle/>
           <a:p>
-            <a:pPr indent="0" marL="0">
+            <a:pPr marL="0" indent="0">
               <a:buNone/>
             </a:pPr>
             <a:r>
@@ -7237,7 +7299,7 @@
           </a:bodyPr>
           <a:lstStyle/>
           <a:p>
-            <a:pPr indent="0" marL="0">
+            <a:pPr marL="0" indent="0">
               <a:buNone/>
             </a:pPr>
             <a:r>
@@ -7303,7 +7365,7 @@
           </a:bodyPr>
           <a:lstStyle/>
           <a:p>
-            <a:pPr indent="0" marL="0">
+            <a:pPr marL="0" indent="0">
               <a:buNone/>
             </a:pPr>
             <a:r>
@@ -7337,6 +7399,7 @@
         <a:solidFill>
           <a:srgbClr val="FAF7EF"/>
         </a:solidFill>
+        <a:effectLst/>
       </p:bgPr>
     </p:bg>
     <p:spTree>
@@ -7424,7 +7487,7 @@
           <a:bodyPr wrap="square" lIns="0" tIns="0" rIns="0" bIns="0" rtlCol="0" anchor="ctr"/>
           <a:lstStyle/>
           <a:p>
-            <a:pPr algn="r" indent="0" marL="0">
+            <a:pPr marL="0" indent="0" algn="r">
               <a:buNone/>
             </a:pPr>
             <a:r>
@@ -7463,7 +7526,7 @@
           <a:bodyPr wrap="square" lIns="0" tIns="0" rIns="0" bIns="0" rtlCol="0" anchor="ctr"/>
           <a:lstStyle/>
           <a:p>
-            <a:pPr indent="0" marL="0">
+            <a:pPr marL="0" indent="0">
               <a:buNone/>
             </a:pPr>
             <a:r>
@@ -7504,7 +7567,7 @@
           </a:bodyPr>
           <a:lstStyle/>
           <a:p>
-            <a:pPr indent="0" marL="0">
+            <a:pPr marL="0" indent="0">
               <a:buNone/>
             </a:pPr>
             <a:r>
@@ -7545,7 +7608,7 @@
           </a:bodyPr>
           <a:lstStyle/>
           <a:p>
-            <a:pPr indent="0" marL="0">
+            <a:pPr marL="0" indent="0">
               <a:buNone/>
             </a:pPr>
             <a:r>
@@ -7613,7 +7676,7 @@
           </a:bodyPr>
           <a:lstStyle/>
           <a:p>
-            <a:pPr algn="ctr" indent="0" marL="0">
+            <a:pPr marL="0" indent="0" algn="ctr">
               <a:buNone/>
             </a:pPr>
             <a:r>
@@ -7652,7 +7715,7 @@
           <a:bodyPr wrap="square" lIns="0" tIns="0" rIns="0" bIns="0" rtlCol="0" anchor="ctr"/>
           <a:lstStyle/>
           <a:p>
-            <a:pPr indent="0" marL="0">
+            <a:pPr marL="0" indent="0">
               <a:buNone/>
             </a:pPr>
             <a:r>
@@ -7717,7 +7780,7 @@
           </a:bodyPr>
           <a:lstStyle/>
           <a:p>
-            <a:pPr algn="ctr" indent="0" marL="0">
+            <a:pPr marL="0" indent="0" algn="ctr">
               <a:buNone/>
             </a:pPr>
             <a:r>
@@ -7756,7 +7819,7 @@
           <a:bodyPr wrap="square" lIns="0" tIns="0" rIns="0" bIns="0" rtlCol="0" anchor="ctr"/>
           <a:lstStyle/>
           <a:p>
-            <a:pPr indent="0" marL="0">
+            <a:pPr marL="0" indent="0">
               <a:buNone/>
             </a:pPr>
             <a:r>
@@ -7821,7 +7884,7 @@
           </a:bodyPr>
           <a:lstStyle/>
           <a:p>
-            <a:pPr algn="ctr" indent="0" marL="0">
+            <a:pPr marL="0" indent="0" algn="ctr">
               <a:buNone/>
             </a:pPr>
             <a:r>
@@ -7860,7 +7923,7 @@
           <a:bodyPr wrap="square" lIns="0" tIns="0" rIns="0" bIns="0" rtlCol="0" anchor="ctr"/>
           <a:lstStyle/>
           <a:p>
-            <a:pPr indent="0" marL="0">
+            <a:pPr marL="0" indent="0">
               <a:buNone/>
             </a:pPr>
             <a:r>
@@ -7925,7 +7988,7 @@
           </a:bodyPr>
           <a:lstStyle/>
           <a:p>
-            <a:pPr algn="ctr" indent="0" marL="0">
+            <a:pPr marL="0" indent="0" algn="ctr">
               <a:buNone/>
             </a:pPr>
             <a:r>
@@ -7991,7 +8054,7 @@
           </a:bodyPr>
           <a:lstStyle/>
           <a:p>
-            <a:pPr indent="0" marL="0">
+            <a:pPr marL="0" indent="0">
               <a:buNone/>
             </a:pPr>
             <a:r>
@@ -8057,7 +8120,7 @@
           </a:bodyPr>
           <a:lstStyle/>
           <a:p>
-            <a:pPr indent="0" marL="0">
+            <a:pPr marL="0" indent="0">
               <a:buNone/>
             </a:pPr>
             <a:r>
@@ -8091,6 +8154,7 @@
         <a:solidFill>
           <a:srgbClr val="FAF7EF"/>
         </a:solidFill>
+        <a:effectLst/>
       </p:bgPr>
     </p:bg>
     <p:spTree>
@@ -8178,7 +8242,7 @@
           <a:bodyPr wrap="square" lIns="0" tIns="0" rIns="0" bIns="0" rtlCol="0" anchor="ctr"/>
           <a:lstStyle/>
           <a:p>
-            <a:pPr algn="r" indent="0" marL="0">
+            <a:pPr marL="0" indent="0" algn="r">
               <a:buNone/>
             </a:pPr>
             <a:r>
@@ -8217,7 +8281,7 @@
           <a:bodyPr wrap="square" lIns="0" tIns="0" rIns="0" bIns="0" rtlCol="0" anchor="ctr"/>
           <a:lstStyle/>
           <a:p>
-            <a:pPr indent="0" marL="0">
+            <a:pPr marL="0" indent="0">
               <a:buNone/>
             </a:pPr>
             <a:r>
@@ -8258,7 +8322,7 @@
           </a:bodyPr>
           <a:lstStyle/>
           <a:p>
-            <a:pPr indent="0" marL="0">
+            <a:pPr marL="0" indent="0">
               <a:buNone/>
             </a:pPr>
             <a:r>
@@ -8324,7 +8388,7 @@
           </a:bodyPr>
           <a:lstStyle/>
           <a:p>
-            <a:pPr indent="0" marL="0">
+            <a:pPr marL="0" indent="0">
               <a:buNone/>
             </a:pPr>
             <a:r>
@@ -8390,7 +8454,7 @@
           </a:bodyPr>
           <a:lstStyle/>
           <a:p>
-            <a:pPr indent="0" marL="0">
+            <a:pPr marL="0" indent="0">
               <a:buNone/>
             </a:pPr>
             <a:r>
@@ -8456,7 +8520,7 @@
           </a:bodyPr>
           <a:lstStyle/>
           <a:p>
-            <a:pPr indent="0" marL="0">
+            <a:pPr marL="0" indent="0">
               <a:buNone/>
             </a:pPr>
             <a:r>
@@ -8522,7 +8586,7 @@
           </a:bodyPr>
           <a:lstStyle/>
           <a:p>
-            <a:pPr indent="0" marL="0">
+            <a:pPr marL="0" indent="0">
               <a:buNone/>
             </a:pPr>
             <a:r>
@@ -8556,6 +8620,7 @@
         <a:solidFill>
           <a:srgbClr val="FAF7EF"/>
         </a:solidFill>
+        <a:effectLst/>
       </p:bgPr>
     </p:bg>
     <p:spTree>
@@ -8643,7 +8708,7 @@
           <a:bodyPr wrap="square" lIns="0" tIns="0" rIns="0" bIns="0" rtlCol="0" anchor="ctr"/>
           <a:lstStyle/>
           <a:p>
-            <a:pPr algn="r" indent="0" marL="0">
+            <a:pPr marL="0" indent="0" algn="r">
               <a:buNone/>
             </a:pPr>
             <a:r>
@@ -8682,7 +8747,7 @@
           <a:bodyPr wrap="square" lIns="0" tIns="0" rIns="0" bIns="0" rtlCol="0" anchor="ctr"/>
           <a:lstStyle/>
           <a:p>
-            <a:pPr indent="0" marL="0">
+            <a:pPr marL="0" indent="0">
               <a:buNone/>
             </a:pPr>
             <a:r>
@@ -8723,7 +8788,7 @@
           </a:bodyPr>
           <a:lstStyle/>
           <a:p>
-            <a:pPr indent="0" marL="0">
+            <a:pPr marL="0" indent="0">
               <a:buNone/>
             </a:pPr>
             <a:r>
@@ -8764,11 +8829,11 @@
           </a:bodyPr>
           <a:lstStyle/>
           <a:p>
-            <a:pPr indent="0" marL="0">
-              <a:buNone/>
-            </a:pPr>
-            <a:r>
-              <a:rPr lang="en-US" sz="3000" b="1" dirty="0">
+            <a:pPr marL="0" indent="0">
+              <a:buNone/>
+            </a:pPr>
+            <a:r>
+              <a:rPr lang="ko-KR" altLang="en-US" sz="3000" b="1">
                 <a:solidFill>
                   <a:srgbClr val="F59E0B"/>
                 </a:solidFill>
@@ -8776,7 +8841,29 @@
                 <a:ea typeface="Malgun Gothic" pitchFamily="34" charset="-122"/>
                 <a:cs typeface="Malgun Gothic" pitchFamily="34" charset="-120"/>
               </a:rPr>
-              <a:t>맵 전체가 타일로 되어 있으면, 각 타일도 반복 데이터가 많다</a:t>
+              <a:t>맵을 타일로 구성하면</a:t>
+            </a:r>
+            <a:r>
+              <a:rPr lang="en-US" altLang="ko-KR" sz="3000" b="1">
+                <a:solidFill>
+                  <a:srgbClr val="F59E0B"/>
+                </a:solidFill>
+                <a:latin typeface="Malgun Gothic" pitchFamily="34" charset="0"/>
+                <a:ea typeface="Malgun Gothic" pitchFamily="34" charset="-122"/>
+                <a:cs typeface="Malgun Gothic" pitchFamily="34" charset="-120"/>
+              </a:rPr>
+              <a:t>, </a:t>
+            </a:r>
+            <a:r>
+              <a:rPr lang="ko-KR" altLang="en-US" sz="3000" b="1">
+                <a:solidFill>
+                  <a:srgbClr val="F59E0B"/>
+                </a:solidFill>
+                <a:latin typeface="Malgun Gothic" pitchFamily="34" charset="0"/>
+                <a:ea typeface="Malgun Gothic" pitchFamily="34" charset="-122"/>
+                <a:cs typeface="Malgun Gothic" pitchFamily="34" charset="-120"/>
+              </a:rPr>
+              <a:t>타일마다 반복 데이터가 많아진다</a:t>
             </a:r>
             <a:endParaRPr lang="en-US" sz="3000" dirty="0"/>
           </a:p>
@@ -8830,7 +8917,7 @@
           </a:bodyPr>
           <a:lstStyle/>
           <a:p>
-            <a:pPr indent="0" marL="0">
+            <a:pPr marL="0" indent="0">
               <a:buNone/>
             </a:pPr>
             <a:r>
@@ -8896,7 +8983,7 @@
           </a:bodyPr>
           <a:lstStyle/>
           <a:p>
-            <a:pPr indent="0" marL="0">
+            <a:pPr marL="0" indent="0">
               <a:buNone/>
             </a:pPr>
             <a:r>
@@ -8962,7 +9049,7 @@
           </a:bodyPr>
           <a:lstStyle/>
           <a:p>
-            <a:pPr indent="0" marL="0">
+            <a:pPr marL="0" indent="0">
               <a:buNone/>
             </a:pPr>
             <a:r>
@@ -8996,6 +9083,7 @@
         <a:solidFill>
           <a:srgbClr val="FAF7EF"/>
         </a:solidFill>
+        <a:effectLst/>
       </p:bgPr>
     </p:bg>
     <p:spTree>
@@ -9083,7 +9171,7 @@
           <a:bodyPr wrap="square" lIns="0" tIns="0" rIns="0" bIns="0" rtlCol="0" anchor="ctr"/>
           <a:lstStyle/>
           <a:p>
-            <a:pPr algn="r" indent="0" marL="0">
+            <a:pPr marL="0" indent="0" algn="r">
               <a:buNone/>
             </a:pPr>
             <a:r>
@@ -9122,7 +9210,7 @@
           <a:bodyPr wrap="square" lIns="0" tIns="0" rIns="0" bIns="0" rtlCol="0" anchor="ctr"/>
           <a:lstStyle/>
           <a:p>
-            <a:pPr indent="0" marL="0">
+            <a:pPr marL="0" indent="0">
               <a:buNone/>
             </a:pPr>
             <a:r>
@@ -9163,7 +9251,7 @@
           </a:bodyPr>
           <a:lstStyle/>
           <a:p>
-            <a:pPr indent="0" marL="0">
+            <a:pPr marL="0" indent="0">
               <a:buNone/>
             </a:pPr>
             <a:r>
@@ -9204,7 +9292,7 @@
           </a:bodyPr>
           <a:lstStyle/>
           <a:p>
-            <a:pPr indent="0" marL="0">
+            <a:pPr marL="0" indent="0">
               <a:buNone/>
             </a:pPr>
             <a:r>
@@ -9274,7 +9362,7 @@
           </a:bodyPr>
           <a:lstStyle/>
           <a:p>
-            <a:pPr indent="0" marL="0">
+            <a:pPr marL="0" indent="0">
               <a:buNone/>
             </a:pPr>
             <a:r>
@@ -9291,7 +9379,7 @@
             <a:endParaRPr lang="en-US" sz="1180" dirty="0"/>
           </a:p>
           <a:p>
-            <a:pPr indent="0" marL="0">
+            <a:pPr marL="0" indent="0">
               <a:buNone/>
             </a:pPr>
             <a:r>
@@ -9308,7 +9396,7 @@
             <a:endParaRPr lang="en-US" sz="1180" dirty="0"/>
           </a:p>
           <a:p>
-            <a:pPr indent="0" marL="0">
+            <a:pPr marL="0" indent="0">
               <a:buNone/>
             </a:pPr>
             <a:r>
@@ -9325,7 +9413,7 @@
             <a:endParaRPr lang="en-US" sz="1180" dirty="0"/>
           </a:p>
           <a:p>
-            <a:pPr indent="0" marL="0">
+            <a:pPr marL="0" indent="0">
               <a:buNone/>
             </a:pPr>
             <a:r>
@@ -9342,7 +9430,7 @@
             <a:endParaRPr lang="en-US" sz="1180" dirty="0"/>
           </a:p>
           <a:p>
-            <a:pPr indent="0" marL="0">
+            <a:pPr marL="0" indent="0">
               <a:buNone/>
             </a:pPr>
             <a:r>
@@ -9359,7 +9447,7 @@
             <a:endParaRPr lang="en-US" sz="1180" dirty="0"/>
           </a:p>
           <a:p>
-            <a:pPr indent="0" marL="0">
+            <a:pPr marL="0" indent="0">
               <a:buNone/>
             </a:pPr>
             <a:r>
@@ -9376,13 +9464,13 @@
             <a:endParaRPr lang="en-US" sz="1180" dirty="0"/>
           </a:p>
           <a:p>
-            <a:pPr indent="0" marL="0">
+            <a:pPr marL="0" indent="0">
               <a:buNone/>
             </a:pPr>
             <a:endParaRPr lang="en-US" sz="1180" dirty="0"/>
           </a:p>
           <a:p>
-            <a:pPr indent="0" marL="0">
+            <a:pPr marL="0" indent="0">
               <a:buNone/>
             </a:pPr>
             <a:r>
@@ -9399,7 +9487,7 @@
             <a:endParaRPr lang="en-US" sz="1180" dirty="0"/>
           </a:p>
           <a:p>
-            <a:pPr indent="0" marL="0">
+            <a:pPr marL="0" indent="0">
               <a:buNone/>
             </a:pPr>
             <a:r>
@@ -9416,7 +9504,7 @@
             <a:endParaRPr lang="en-US" sz="1180" dirty="0"/>
           </a:p>
           <a:p>
-            <a:pPr indent="0" marL="0">
+            <a:pPr marL="0" indent="0">
               <a:buNone/>
             </a:pPr>
             <a:r>
@@ -9433,7 +9521,7 @@
             <a:endParaRPr lang="en-US" sz="1180" dirty="0"/>
           </a:p>
           <a:p>
-            <a:pPr indent="0" marL="0">
+            <a:pPr marL="0" indent="0">
               <a:buNone/>
             </a:pPr>
             <a:r>
@@ -9450,7 +9538,7 @@
             <a:endParaRPr lang="en-US" sz="1180" dirty="0"/>
           </a:p>
           <a:p>
-            <a:pPr indent="0" marL="0">
+            <a:pPr marL="0" indent="0">
               <a:buNone/>
             </a:pPr>
             <a:r>
@@ -9467,7 +9555,7 @@
             <a:endParaRPr lang="en-US" sz="1180" dirty="0"/>
           </a:p>
           <a:p>
-            <a:pPr indent="0" marL="0">
+            <a:pPr marL="0" indent="0">
               <a:buNone/>
             </a:pPr>
             <a:r>
@@ -9484,7 +9572,7 @@
             <a:endParaRPr lang="en-US" sz="1180" dirty="0"/>
           </a:p>
           <a:p>
-            <a:pPr indent="0" marL="0">
+            <a:pPr marL="0" indent="0">
               <a:buNone/>
             </a:pPr>
             <a:r>
@@ -9501,7 +9589,7 @@
             <a:endParaRPr lang="en-US" sz="1180" dirty="0"/>
           </a:p>
           <a:p>
-            <a:pPr indent="0" marL="0">
+            <a:pPr marL="0" indent="0">
               <a:buNone/>
             </a:pPr>
             <a:r>
@@ -9518,7 +9606,7 @@
             <a:endParaRPr lang="en-US" sz="1180" dirty="0"/>
           </a:p>
           <a:p>
-            <a:pPr indent="0" marL="0">
+            <a:pPr marL="0" indent="0">
               <a:buNone/>
             </a:pPr>
             <a:r>
@@ -9535,7 +9623,7 @@
             <a:endParaRPr lang="en-US" sz="1180" dirty="0"/>
           </a:p>
           <a:p>
-            <a:pPr indent="0" marL="0">
+            <a:pPr marL="0" indent="0">
               <a:buNone/>
             </a:pPr>
             <a:r>
@@ -9569,6 +9657,7 @@
         <a:solidFill>
           <a:srgbClr val="FAF7EF"/>
         </a:solidFill>
+        <a:effectLst/>
       </p:bgPr>
     </p:bg>
     <p:spTree>
@@ -9656,7 +9745,7 @@
           <a:bodyPr wrap="square" lIns="0" tIns="0" rIns="0" bIns="0" rtlCol="0" anchor="ctr"/>
           <a:lstStyle/>
           <a:p>
-            <a:pPr algn="r" indent="0" marL="0">
+            <a:pPr marL="0" indent="0" algn="r">
               <a:buNone/>
             </a:pPr>
             <a:r>
@@ -9695,7 +9784,7 @@
           <a:bodyPr wrap="square" lIns="0" tIns="0" rIns="0" bIns="0" rtlCol="0" anchor="ctr"/>
           <a:lstStyle/>
           <a:p>
-            <a:pPr indent="0" marL="0">
+            <a:pPr marL="0" indent="0">
               <a:buNone/>
             </a:pPr>
             <a:r>
@@ -9736,7 +9825,7 @@
           </a:bodyPr>
           <a:lstStyle/>
           <a:p>
-            <a:pPr indent="0" marL="0">
+            <a:pPr marL="0" indent="0">
               <a:buNone/>
             </a:pPr>
             <a:r>
@@ -9777,11 +9866,11 @@
           </a:bodyPr>
           <a:lstStyle/>
           <a:p>
-            <a:pPr indent="0" marL="0">
-              <a:buNone/>
-            </a:pPr>
-            <a:r>
-              <a:rPr lang="en-US" sz="3000" b="1" dirty="0">
+            <a:pPr marL="0" indent="0">
+              <a:buNone/>
+            </a:pPr>
+            <a:r>
+              <a:rPr lang="ko-KR" altLang="en-US" sz="3000" b="1">
                 <a:solidFill>
                   <a:srgbClr val="E45745"/>
                 </a:solidFill>
@@ -9789,7 +9878,7 @@
                 <a:ea typeface="Malgun Gothic" pitchFamily="34" charset="-122"/>
                 <a:cs typeface="Malgun Gothic" pitchFamily="34" charset="-120"/>
               </a:rPr>
-              <a:t>지형에 대한 데이터가 여러 메서드에 흩어진다</a:t>
+              <a:t>지형에 대한 데이터가 여러 메서드에 흩어져 있다</a:t>
             </a:r>
             <a:endParaRPr lang="en-US" sz="3000" dirty="0"/>
           </a:p>
@@ -9843,7 +9932,7 @@
           </a:bodyPr>
           <a:lstStyle/>
           <a:p>
-            <a:pPr indent="0" marL="0">
+            <a:pPr marL="0" indent="0">
               <a:buNone/>
             </a:pPr>
             <a:r>
@@ -9909,7 +9998,7 @@
           </a:bodyPr>
           <a:lstStyle/>
           <a:p>
-            <a:pPr indent="0" marL="0">
+            <a:pPr marL="0" indent="0">
               <a:buNone/>
             </a:pPr>
             <a:r>
@@ -9975,7 +10064,7 @@
           </a:bodyPr>
           <a:lstStyle/>
           <a:p>
-            <a:pPr indent="0" marL="0">
+            <a:pPr marL="0" indent="0">
               <a:buNone/>
             </a:pPr>
             <a:r>
@@ -10041,11 +10130,11 @@
           </a:bodyPr>
           <a:lstStyle/>
           <a:p>
-            <a:pPr indent="0" marL="0">
-              <a:buNone/>
-            </a:pPr>
-            <a:r>
-              <a:rPr lang="en-US" sz="1700" dirty="0">
+            <a:pPr marL="0" indent="0">
+              <a:buNone/>
+            </a:pPr>
+            <a:r>
+              <a:rPr lang="ko-KR" altLang="en-US" sz="1700">
                 <a:solidFill>
                   <a:srgbClr val="17212B"/>
                 </a:solidFill>
@@ -10053,7 +10142,18 @@
                 <a:ea typeface="Malgun Gothic" pitchFamily="34" charset="-122"/>
                 <a:cs typeface="Malgun Gothic" pitchFamily="34" charset="-120"/>
               </a:rPr>
-              <a:t>지형 하나의 의미가 코드 여러 군데에 퍼진다.</a:t>
+              <a:t>지형 하나의 의미가 코드 여러 군데에 흩어진다</a:t>
+            </a:r>
+            <a:r>
+              <a:rPr lang="en-US" altLang="ko-KR" sz="1700">
+                <a:solidFill>
+                  <a:srgbClr val="17212B"/>
+                </a:solidFill>
+                <a:latin typeface="Malgun Gothic" pitchFamily="34" charset="0"/>
+                <a:ea typeface="Malgun Gothic" pitchFamily="34" charset="-122"/>
+                <a:cs typeface="Malgun Gothic" pitchFamily="34" charset="-120"/>
+              </a:rPr>
+              <a:t>.</a:t>
             </a:r>
             <a:endParaRPr lang="en-US" sz="1700" dirty="0"/>
           </a:p>
@@ -10075,6 +10175,7 @@
         <a:solidFill>
           <a:srgbClr val="FAF7EF"/>
         </a:solidFill>
+        <a:effectLst/>
       </p:bgPr>
     </p:bg>
     <p:spTree>
@@ -10162,7 +10263,7 @@
           <a:bodyPr wrap="square" lIns="0" tIns="0" rIns="0" bIns="0" rtlCol="0" anchor="ctr"/>
           <a:lstStyle/>
           <a:p>
-            <a:pPr algn="r" indent="0" marL="0">
+            <a:pPr marL="0" indent="0" algn="r">
               <a:buNone/>
             </a:pPr>
             <a:r>
@@ -10201,7 +10302,7 @@
           <a:bodyPr wrap="square" lIns="0" tIns="0" rIns="0" bIns="0" rtlCol="0" anchor="ctr"/>
           <a:lstStyle/>
           <a:p>
-            <a:pPr indent="0" marL="0">
+            <a:pPr marL="0" indent="0">
               <a:buNone/>
             </a:pPr>
             <a:r>
@@ -10242,7 +10343,7 @@
           </a:bodyPr>
           <a:lstStyle/>
           <a:p>
-            <a:pPr indent="0" marL="0">
+            <a:pPr marL="0" indent="0">
               <a:buNone/>
             </a:pPr>
             <a:r>
@@ -10308,7 +10409,7 @@
           </a:bodyPr>
           <a:lstStyle/>
           <a:p>
-            <a:pPr indent="0" marL="0">
+            <a:pPr marL="0" indent="0">
               <a:buNone/>
             </a:pPr>
             <a:r>
@@ -10374,7 +10475,7 @@
           </a:bodyPr>
           <a:lstStyle/>
           <a:p>
-            <a:pPr indent="0" marL="0">
+            <a:pPr marL="0" indent="0">
               <a:buNone/>
             </a:pPr>
             <a:r>
@@ -10440,7 +10541,7 @@
           </a:bodyPr>
           <a:lstStyle/>
           <a:p>
-            <a:pPr indent="0" marL="0">
+            <a:pPr marL="0" indent="0">
               <a:buNone/>
             </a:pPr>
             <a:r>
@@ -10506,7 +10607,7 @@
           </a:bodyPr>
           <a:lstStyle/>
           <a:p>
-            <a:pPr indent="0" marL="0">
+            <a:pPr marL="0" indent="0">
               <a:buNone/>
             </a:pPr>
             <a:r>
@@ -10540,6 +10641,7 @@
         <a:solidFill>
           <a:srgbClr val="FAF7EF"/>
         </a:solidFill>
+        <a:effectLst/>
       </p:bgPr>
     </p:bg>
     <p:spTree>
@@ -10627,7 +10729,7 @@
           <a:bodyPr wrap="square" lIns="0" tIns="0" rIns="0" bIns="0" rtlCol="0" anchor="ctr"/>
           <a:lstStyle/>
           <a:p>
-            <a:pPr algn="r" indent="0" marL="0">
+            <a:pPr marL="0" indent="0" algn="r">
               <a:buNone/>
             </a:pPr>
             <a:r>
@@ -10666,7 +10768,7 @@
           <a:bodyPr wrap="square" lIns="0" tIns="0" rIns="0" bIns="0" rtlCol="0" anchor="ctr"/>
           <a:lstStyle/>
           <a:p>
-            <a:pPr indent="0" marL="0">
+            <a:pPr marL="0" indent="0">
               <a:buNone/>
             </a:pPr>
             <a:r>
@@ -10707,7 +10809,7 @@
           </a:bodyPr>
           <a:lstStyle/>
           <a:p>
-            <a:pPr indent="0" marL="0">
+            <a:pPr marL="0" indent="0">
               <a:buNone/>
             </a:pPr>
             <a:r>
@@ -10748,7 +10850,7 @@
           </a:bodyPr>
           <a:lstStyle/>
           <a:p>
-            <a:pPr indent="0" marL="0">
+            <a:pPr marL="0" indent="0">
               <a:buNone/>
             </a:pPr>
             <a:r>
@@ -10818,7 +10920,7 @@
           </a:bodyPr>
           <a:lstStyle/>
           <a:p>
-            <a:pPr indent="0" marL="0">
+            <a:pPr marL="0" indent="0">
               <a:buNone/>
             </a:pPr>
             <a:r>
@@ -10835,7 +10937,7 @@
             <a:endParaRPr lang="en-US" sz="1100" dirty="0"/>
           </a:p>
           <a:p>
-            <a:pPr indent="0" marL="0">
+            <a:pPr marL="0" indent="0">
               <a:buNone/>
             </a:pPr>
             <a:r>
@@ -10852,7 +10954,7 @@
             <a:endParaRPr lang="en-US" sz="1100" dirty="0"/>
           </a:p>
           <a:p>
-            <a:pPr indent="0" marL="0">
+            <a:pPr marL="0" indent="0">
               <a:buNone/>
             </a:pPr>
             <a:r>
@@ -10869,7 +10971,7 @@
             <a:endParaRPr lang="en-US" sz="1100" dirty="0"/>
           </a:p>
           <a:p>
-            <a:pPr indent="0" marL="0">
+            <a:pPr marL="0" indent="0">
               <a:buNone/>
             </a:pPr>
             <a:r>
@@ -10886,7 +10988,7 @@
             <a:endParaRPr lang="en-US" sz="1100" dirty="0"/>
           </a:p>
           <a:p>
-            <a:pPr indent="0" marL="0">
+            <a:pPr marL="0" indent="0">
               <a:buNone/>
             </a:pPr>
             <a:r>
@@ -10903,13 +11005,13 @@
             <a:endParaRPr lang="en-US" sz="1100" dirty="0"/>
           </a:p>
           <a:p>
-            <a:pPr indent="0" marL="0">
+            <a:pPr marL="0" indent="0">
               <a:buNone/>
             </a:pPr>
             <a:endParaRPr lang="en-US" sz="1100" dirty="0"/>
           </a:p>
           <a:p>
-            <a:pPr indent="0" marL="0">
+            <a:pPr marL="0" indent="0">
               <a:buNone/>
             </a:pPr>
             <a:r>
@@ -10926,7 +11028,7 @@
             <a:endParaRPr lang="en-US" sz="1100" dirty="0"/>
           </a:p>
           <a:p>
-            <a:pPr indent="0" marL="0">
+            <a:pPr marL="0" indent="0">
               <a:buNone/>
             </a:pPr>
             <a:r>
@@ -10943,7 +11045,7 @@
             <a:endParaRPr lang="en-US" sz="1100" dirty="0"/>
           </a:p>
           <a:p>
-            <a:pPr indent="0" marL="0">
+            <a:pPr marL="0" indent="0">
               <a:buNone/>
             </a:pPr>
             <a:r>
@@ -10960,7 +11062,7 @@
             <a:endParaRPr lang="en-US" sz="1100" dirty="0"/>
           </a:p>
           <a:p>
-            <a:pPr indent="0" marL="0">
+            <a:pPr marL="0" indent="0">
               <a:buNone/>
             </a:pPr>
             <a:r>
@@ -10977,7 +11079,7 @@
             <a:endParaRPr lang="en-US" sz="1100" dirty="0"/>
           </a:p>
           <a:p>
-            <a:pPr indent="0" marL="0">
+            <a:pPr marL="0" indent="0">
               <a:buNone/>
             </a:pPr>
             <a:r>
@@ -10994,7 +11096,7 @@
             <a:endParaRPr lang="en-US" sz="1100" dirty="0"/>
           </a:p>
           <a:p>
-            <a:pPr indent="0" marL="0">
+            <a:pPr marL="0" indent="0">
               <a:buNone/>
             </a:pPr>
             <a:r>
@@ -11011,7 +11113,7 @@
             <a:endParaRPr lang="en-US" sz="1100" dirty="0"/>
           </a:p>
           <a:p>
-            <a:pPr indent="0" marL="0">
+            <a:pPr marL="0" indent="0">
               <a:buNone/>
             </a:pPr>
             <a:r>
@@ -11028,7 +11130,7 @@
             <a:endParaRPr lang="en-US" sz="1100" dirty="0"/>
           </a:p>
           <a:p>
-            <a:pPr indent="0" marL="0">
+            <a:pPr marL="0" indent="0">
               <a:buNone/>
             </a:pPr>
             <a:r>
@@ -11045,7 +11147,7 @@
             <a:endParaRPr lang="en-US" sz="1100" dirty="0"/>
           </a:p>
           <a:p>
-            <a:pPr indent="0" marL="0">
+            <a:pPr marL="0" indent="0">
               <a:buNone/>
             </a:pPr>
             <a:r>
@@ -11079,6 +11181,7 @@
         <a:solidFill>
           <a:srgbClr val="FAF7EF"/>
         </a:solidFill>
+        <a:effectLst/>
       </p:bgPr>
     </p:bg>
     <p:spTree>
@@ -11166,7 +11269,7 @@
           <a:bodyPr wrap="square" lIns="0" tIns="0" rIns="0" bIns="0" rtlCol="0" anchor="ctr"/>
           <a:lstStyle/>
           <a:p>
-            <a:pPr algn="r" indent="0" marL="0">
+            <a:pPr marL="0" indent="0" algn="r">
               <a:buNone/>
             </a:pPr>
             <a:r>
@@ -11205,7 +11308,7 @@
           <a:bodyPr wrap="square" lIns="0" tIns="0" rIns="0" bIns="0" rtlCol="0" anchor="ctr"/>
           <a:lstStyle/>
           <a:p>
-            <a:pPr indent="0" marL="0">
+            <a:pPr marL="0" indent="0">
               <a:buNone/>
             </a:pPr>
             <a:r>
@@ -11246,7 +11349,7 @@
           </a:bodyPr>
           <a:lstStyle/>
           <a:p>
-            <a:pPr indent="0" marL="0">
+            <a:pPr marL="0" indent="0">
               <a:buNone/>
             </a:pPr>
             <a:r>
@@ -11287,7 +11390,7 @@
           </a:bodyPr>
           <a:lstStyle/>
           <a:p>
-            <a:pPr indent="0" marL="0">
+            <a:pPr marL="0" indent="0">
               <a:buNone/>
             </a:pPr>
             <a:r>
@@ -11357,7 +11460,7 @@
           </a:bodyPr>
           <a:lstStyle/>
           <a:p>
-            <a:pPr indent="0" marL="0">
+            <a:pPr marL="0" indent="0">
               <a:buNone/>
             </a:pPr>
             <a:r>
@@ -11374,7 +11477,7 @@
             <a:endParaRPr lang="en-US" sz="1220" dirty="0"/>
           </a:p>
           <a:p>
-            <a:pPr indent="0" marL="0">
+            <a:pPr marL="0" indent="0">
               <a:buNone/>
             </a:pPr>
             <a:r>
@@ -11391,7 +11494,7 @@
             <a:endParaRPr lang="en-US" sz="1220" dirty="0"/>
           </a:p>
           <a:p>
-            <a:pPr indent="0" marL="0">
+            <a:pPr marL="0" indent="0">
               <a:buNone/>
             </a:pPr>
             <a:r>
@@ -11408,13 +11511,13 @@
             <a:endParaRPr lang="en-US" sz="1220" dirty="0"/>
           </a:p>
           <a:p>
-            <a:pPr indent="0" marL="0">
+            <a:pPr marL="0" indent="0">
               <a:buNone/>
             </a:pPr>
             <a:endParaRPr lang="en-US" sz="1220" dirty="0"/>
           </a:p>
           <a:p>
-            <a:pPr indent="0" marL="0">
+            <a:pPr marL="0" indent="0">
               <a:buNone/>
             </a:pPr>
             <a:r>
@@ -11431,7 +11534,7 @@
             <a:endParaRPr lang="en-US" sz="1220" dirty="0"/>
           </a:p>
           <a:p>
-            <a:pPr indent="0" marL="0">
+            <a:pPr marL="0" indent="0">
               <a:buNone/>
             </a:pPr>
             <a:r>
@@ -11448,7 +11551,7 @@
             <a:endParaRPr lang="en-US" sz="1220" dirty="0"/>
           </a:p>
           <a:p>
-            <a:pPr indent="0" marL="0">
+            <a:pPr marL="0" indent="0">
               <a:buNone/>
             </a:pPr>
             <a:r>
@@ -11465,13 +11568,13 @@
             <a:endParaRPr lang="en-US" sz="1220" dirty="0"/>
           </a:p>
           <a:p>
-            <a:pPr indent="0" marL="0">
+            <a:pPr marL="0" indent="0">
               <a:buNone/>
             </a:pPr>
             <a:endParaRPr lang="en-US" sz="1220" dirty="0"/>
           </a:p>
           <a:p>
-            <a:pPr indent="0" marL="0">
+            <a:pPr marL="0" indent="0">
               <a:buNone/>
             </a:pPr>
             <a:r>
@@ -11488,7 +11591,7 @@
             <a:endParaRPr lang="en-US" sz="1220" dirty="0"/>
           </a:p>
           <a:p>
-            <a:pPr indent="0" marL="0">
+            <a:pPr marL="0" indent="0">
               <a:buNone/>
             </a:pPr>
             <a:r>
@@ -11505,7 +11608,7 @@
             <a:endParaRPr lang="en-US" sz="1220" dirty="0"/>
           </a:p>
           <a:p>
-            <a:pPr indent="0" marL="0">
+            <a:pPr marL="0" indent="0">
               <a:buNone/>
             </a:pPr>
             <a:r>
@@ -11522,7 +11625,7 @@
             <a:endParaRPr lang="en-US" sz="1220" dirty="0"/>
           </a:p>
           <a:p>
-            <a:pPr indent="0" marL="0">
+            <a:pPr marL="0" indent="0">
               <a:buNone/>
             </a:pPr>
             <a:r>
@@ -11539,7 +11642,7 @@
             <a:endParaRPr lang="en-US" sz="1220" dirty="0"/>
           </a:p>
           <a:p>
-            <a:pPr indent="0" marL="0">
+            <a:pPr marL="0" indent="0">
               <a:buNone/>
             </a:pPr>
             <a:r>
@@ -11573,6 +11676,7 @@
         <a:solidFill>
           <a:srgbClr val="FAF7EF"/>
         </a:solidFill>
+        <a:effectLst/>
       </p:bgPr>
     </p:bg>
     <p:spTree>
@@ -11660,7 +11764,7 @@
           <a:bodyPr wrap="square" lIns="0" tIns="0" rIns="0" bIns="0" rtlCol="0" anchor="ctr"/>
           <a:lstStyle/>
           <a:p>
-            <a:pPr algn="r" indent="0" marL="0">
+            <a:pPr marL="0" indent="0" algn="r">
               <a:buNone/>
             </a:pPr>
             <a:r>
@@ -11699,7 +11803,7 @@
           <a:bodyPr wrap="square" lIns="0" tIns="0" rIns="0" bIns="0" rtlCol="0" anchor="ctr"/>
           <a:lstStyle/>
           <a:p>
-            <a:pPr indent="0" marL="0">
+            <a:pPr marL="0" indent="0">
               <a:buNone/>
             </a:pPr>
             <a:r>
@@ -11740,7 +11844,7 @@
           </a:bodyPr>
           <a:lstStyle/>
           <a:p>
-            <a:pPr indent="0" marL="0">
+            <a:pPr marL="0" indent="0">
               <a:buNone/>
             </a:pPr>
             <a:r>
@@ -11781,7 +11885,7 @@
           </a:bodyPr>
           <a:lstStyle/>
           <a:p>
-            <a:pPr indent="0" marL="0">
+            <a:pPr marL="0" indent="0">
               <a:buNone/>
             </a:pPr>
             <a:r>
@@ -11851,7 +11955,7 @@
           </a:bodyPr>
           <a:lstStyle/>
           <a:p>
-            <a:pPr indent="0" marL="0">
+            <a:pPr marL="0" indent="0">
               <a:buNone/>
             </a:pPr>
             <a:r>
@@ -11868,7 +11972,7 @@
             <a:endParaRPr lang="en-US" sz="1150" dirty="0"/>
           </a:p>
           <a:p>
-            <a:pPr indent="0" marL="0">
+            <a:pPr marL="0" indent="0">
               <a:buNone/>
             </a:pPr>
             <a:r>
@@ -11885,7 +11989,7 @@
             <a:endParaRPr lang="en-US" sz="1150" dirty="0"/>
           </a:p>
           <a:p>
-            <a:pPr indent="0" marL="0">
+            <a:pPr marL="0" indent="0">
               <a:buNone/>
             </a:pPr>
             <a:r>
@@ -11902,7 +12006,7 @@
             <a:endParaRPr lang="en-US" sz="1150" dirty="0"/>
           </a:p>
           <a:p>
-            <a:pPr indent="0" marL="0">
+            <a:pPr marL="0" indent="0">
               <a:buNone/>
             </a:pPr>
             <a:r>
@@ -11919,7 +12023,7 @@
             <a:endParaRPr lang="en-US" sz="1150" dirty="0"/>
           </a:p>
           <a:p>
-            <a:pPr indent="0" marL="0">
+            <a:pPr marL="0" indent="0">
               <a:buNone/>
             </a:pPr>
             <a:r>
@@ -11936,7 +12040,7 @@
             <a:endParaRPr lang="en-US" sz="1150" dirty="0"/>
           </a:p>
           <a:p>
-            <a:pPr indent="0" marL="0">
+            <a:pPr marL="0" indent="0">
               <a:buNone/>
             </a:pPr>
             <a:r>
@@ -11953,7 +12057,7 @@
             <a:endParaRPr lang="en-US" sz="1150" dirty="0"/>
           </a:p>
           <a:p>
-            <a:pPr indent="0" marL="0">
+            <a:pPr marL="0" indent="0">
               <a:buNone/>
             </a:pPr>
             <a:r>
@@ -11970,7 +12074,7 @@
             <a:endParaRPr lang="en-US" sz="1150" dirty="0"/>
           </a:p>
           <a:p>
-            <a:pPr indent="0" marL="0">
+            <a:pPr marL="0" indent="0">
               <a:buNone/>
             </a:pPr>
             <a:r>
@@ -11987,7 +12091,7 @@
             <a:endParaRPr lang="en-US" sz="1150" dirty="0"/>
           </a:p>
           <a:p>
-            <a:pPr indent="0" marL="0">
+            <a:pPr marL="0" indent="0">
               <a:buNone/>
             </a:pPr>
             <a:r>
@@ -12004,13 +12108,13 @@
             <a:endParaRPr lang="en-US" sz="1150" dirty="0"/>
           </a:p>
           <a:p>
-            <a:pPr indent="0" marL="0">
+            <a:pPr marL="0" indent="0">
               <a:buNone/>
             </a:pPr>
             <a:endParaRPr lang="en-US" sz="1150" dirty="0"/>
           </a:p>
           <a:p>
-            <a:pPr indent="0" marL="0">
+            <a:pPr marL="0" indent="0">
               <a:buNone/>
             </a:pPr>
             <a:r>
@@ -12027,7 +12131,7 @@
             <a:endParaRPr lang="en-US" sz="1150" dirty="0"/>
           </a:p>
           <a:p>
-            <a:pPr indent="0" marL="0">
+            <a:pPr marL="0" indent="0">
               <a:buNone/>
             </a:pPr>
             <a:r>
@@ -12044,7 +12148,7 @@
             <a:endParaRPr lang="en-US" sz="1150" dirty="0"/>
           </a:p>
           <a:p>
-            <a:pPr indent="0" marL="0">
+            <a:pPr marL="0" indent="0">
               <a:buNone/>
             </a:pPr>
             <a:r>
@@ -12078,6 +12182,7 @@
         <a:solidFill>
           <a:srgbClr val="FAF7EF"/>
         </a:solidFill>
+        <a:effectLst/>
       </p:bgPr>
     </p:bg>
     <p:spTree>
@@ -12165,7 +12270,7 @@
           <a:bodyPr wrap="square" lIns="0" tIns="0" rIns="0" bIns="0" rtlCol="0" anchor="ctr"/>
           <a:lstStyle/>
           <a:p>
-            <a:pPr algn="r" indent="0" marL="0">
+            <a:pPr marL="0" indent="0" algn="r">
               <a:buNone/>
             </a:pPr>
             <a:r>
@@ -12204,7 +12309,7 @@
           <a:bodyPr wrap="square" lIns="0" tIns="0" rIns="0" bIns="0" rtlCol="0" anchor="ctr"/>
           <a:lstStyle/>
           <a:p>
-            <a:pPr indent="0" marL="0">
+            <a:pPr marL="0" indent="0">
               <a:buNone/>
             </a:pPr>
             <a:r>
@@ -12245,11 +12350,11 @@
           </a:bodyPr>
           <a:lstStyle/>
           <a:p>
-            <a:pPr indent="0" marL="0">
-              <a:buNone/>
-            </a:pPr>
-            <a:r>
-              <a:rPr lang="en-US" sz="2500" b="1" dirty="0">
+            <a:pPr marL="0" indent="0">
+              <a:buNone/>
+            </a:pPr>
+            <a:r>
+              <a:rPr lang="ko-KR" altLang="en-US" sz="2500" b="1">
                 <a:solidFill>
                   <a:srgbClr val="17212B"/>
                 </a:solidFill>
@@ -12257,7 +12362,29 @@
                 <a:ea typeface="Malgun Gothic" pitchFamily="34" charset="-122"/>
                 <a:cs typeface="Malgun Gothic" pitchFamily="34" charset="-120"/>
               </a:rPr>
-              <a:t>객체 API를 되찾는다</a:t>
+              <a:t>객체지향 </a:t>
+            </a:r>
+            <a:r>
+              <a:rPr lang="en-US" altLang="ko-KR" sz="2500" b="1">
+                <a:solidFill>
+                  <a:srgbClr val="17212B"/>
+                </a:solidFill>
+                <a:latin typeface="Malgun Gothic" pitchFamily="34" charset="0"/>
+                <a:ea typeface="Malgun Gothic" pitchFamily="34" charset="-122"/>
+                <a:cs typeface="Malgun Gothic" pitchFamily="34" charset="-120"/>
+              </a:rPr>
+              <a:t>API</a:t>
+            </a:r>
+            <a:r>
+              <a:rPr lang="ko-KR" altLang="en-US" sz="2500" b="1">
+                <a:solidFill>
+                  <a:srgbClr val="17212B"/>
+                </a:solidFill>
+                <a:latin typeface="Malgun Gothic" pitchFamily="34" charset="0"/>
+                <a:ea typeface="Malgun Gothic" pitchFamily="34" charset="-122"/>
+                <a:cs typeface="Malgun Gothic" pitchFamily="34" charset="-120"/>
+              </a:rPr>
+              <a:t>를 되살린다</a:t>
             </a:r>
             <a:endParaRPr lang="en-US" sz="2500" dirty="0"/>
           </a:p>
@@ -12286,7 +12413,7 @@
           </a:bodyPr>
           <a:lstStyle/>
           <a:p>
-            <a:pPr indent="0" marL="0">
+            <a:pPr marL="0" indent="0">
               <a:buNone/>
             </a:pPr>
             <a:r>
@@ -12352,7 +12479,7 @@
           </a:bodyPr>
           <a:lstStyle/>
           <a:p>
-            <a:pPr indent="0" marL="0">
+            <a:pPr marL="0" indent="0">
               <a:buNone/>
             </a:pPr>
             <a:r>
@@ -12418,7 +12545,7 @@
           </a:bodyPr>
           <a:lstStyle/>
           <a:p>
-            <a:pPr indent="0" marL="0">
+            <a:pPr marL="0" indent="0">
               <a:buNone/>
             </a:pPr>
             <a:r>
@@ -12484,7 +12611,7 @@
           </a:bodyPr>
           <a:lstStyle/>
           <a:p>
-            <a:pPr indent="0" marL="0">
+            <a:pPr marL="0" indent="0">
               <a:buNone/>
             </a:pPr>
             <a:r>
@@ -12518,6 +12645,7 @@
         <a:solidFill>
           <a:srgbClr val="FAF7EF"/>
         </a:solidFill>
+        <a:effectLst/>
       </p:bgPr>
     </p:bg>
     <p:spTree>
@@ -12605,7 +12733,7 @@
           <a:bodyPr wrap="square" lIns="0" tIns="0" rIns="0" bIns="0" rtlCol="0" anchor="ctr"/>
           <a:lstStyle/>
           <a:p>
-            <a:pPr algn="r" indent="0" marL="0">
+            <a:pPr marL="0" indent="0" algn="r">
               <a:buNone/>
             </a:pPr>
             <a:r>
@@ -12644,7 +12772,7 @@
           <a:bodyPr wrap="square" lIns="0" tIns="0" rIns="0" bIns="0" rtlCol="0" anchor="ctr"/>
           <a:lstStyle/>
           <a:p>
-            <a:pPr indent="0" marL="0">
+            <a:pPr marL="0" indent="0">
               <a:buNone/>
             </a:pPr>
             <a:r>
@@ -12685,11 +12813,11 @@
           </a:bodyPr>
           <a:lstStyle/>
           <a:p>
-            <a:pPr indent="0" marL="0">
-              <a:buNone/>
-            </a:pPr>
-            <a:r>
-              <a:rPr lang="en-US" sz="2500" b="1" dirty="0">
+            <a:pPr marL="0" indent="0">
+              <a:buNone/>
+            </a:pPr>
+            <a:r>
+              <a:rPr lang="en-US" altLang="ko-KR" sz="2500" b="1">
                 <a:solidFill>
                   <a:srgbClr val="17212B"/>
                 </a:solidFill>
@@ -12697,7 +12825,40 @@
                 <a:ea typeface="Malgun Gothic" pitchFamily="34" charset="-122"/>
                 <a:cs typeface="Malgun Gothic" pitchFamily="34" charset="-120"/>
               </a:rPr>
-              <a:t>Unity에서는 ScriptableObject도 자연스럽다</a:t>
+              <a:t>Unity</a:t>
+            </a:r>
+            <a:r>
+              <a:rPr lang="ko-KR" altLang="en-US" sz="2500" b="1">
+                <a:solidFill>
+                  <a:srgbClr val="17212B"/>
+                </a:solidFill>
+                <a:latin typeface="Malgun Gothic" pitchFamily="34" charset="0"/>
+                <a:ea typeface="Malgun Gothic" pitchFamily="34" charset="-122"/>
+                <a:cs typeface="Malgun Gothic" pitchFamily="34" charset="-120"/>
+              </a:rPr>
+              <a:t>에서는 </a:t>
+            </a:r>
+            <a:r>
+              <a:rPr lang="en-US" altLang="ko-KR" sz="2500" b="1">
+                <a:solidFill>
+                  <a:srgbClr val="17212B"/>
+                </a:solidFill>
+                <a:latin typeface="Malgun Gothic" pitchFamily="34" charset="0"/>
+                <a:ea typeface="Malgun Gothic" pitchFamily="34" charset="-122"/>
+                <a:cs typeface="Malgun Gothic" pitchFamily="34" charset="-120"/>
+              </a:rPr>
+              <a:t>ScriptableObject </a:t>
+            </a:r>
+            <a:r>
+              <a:rPr lang="ko-KR" altLang="en-US" sz="2500" b="1">
+                <a:solidFill>
+                  <a:srgbClr val="17212B"/>
+                </a:solidFill>
+                <a:latin typeface="Malgun Gothic" pitchFamily="34" charset="0"/>
+                <a:ea typeface="Malgun Gothic" pitchFamily="34" charset="-122"/>
+                <a:cs typeface="Malgun Gothic" pitchFamily="34" charset="-120"/>
+              </a:rPr>
+              <a:t>활용이 자연스럽다</a:t>
             </a:r>
             <a:endParaRPr lang="en-US" sz="2500" dirty="0"/>
           </a:p>
@@ -12726,7 +12887,7 @@
           </a:bodyPr>
           <a:lstStyle/>
           <a:p>
-            <a:pPr indent="0" marL="0">
+            <a:pPr marL="0" indent="0">
               <a:buNone/>
             </a:pPr>
             <a:r>
@@ -12796,7 +12957,7 @@
           </a:bodyPr>
           <a:lstStyle/>
           <a:p>
-            <a:pPr indent="0" marL="0">
+            <a:pPr marL="0" indent="0">
               <a:buNone/>
             </a:pPr>
             <a:r>
@@ -12813,7 +12974,7 @@
             <a:endParaRPr lang="en-US" sz="1300" dirty="0"/>
           </a:p>
           <a:p>
-            <a:pPr indent="0" marL="0">
+            <a:pPr marL="0" indent="0">
               <a:buNone/>
             </a:pPr>
             <a:r>
@@ -12830,7 +12991,7 @@
             <a:endParaRPr lang="en-US" sz="1300" dirty="0"/>
           </a:p>
           <a:p>
-            <a:pPr indent="0" marL="0">
+            <a:pPr marL="0" indent="0">
               <a:buNone/>
             </a:pPr>
             <a:r>
@@ -12847,7 +13008,7 @@
             <a:endParaRPr lang="en-US" sz="1300" dirty="0"/>
           </a:p>
           <a:p>
-            <a:pPr indent="0" marL="0">
+            <a:pPr marL="0" indent="0">
               <a:buNone/>
             </a:pPr>
             <a:r>
@@ -12864,7 +13025,7 @@
             <a:endParaRPr lang="en-US" sz="1300" dirty="0"/>
           </a:p>
           <a:p>
-            <a:pPr indent="0" marL="0">
+            <a:pPr marL="0" indent="0">
               <a:buNone/>
             </a:pPr>
             <a:r>
@@ -12881,7 +13042,7 @@
             <a:endParaRPr lang="en-US" sz="1300" dirty="0"/>
           </a:p>
           <a:p>
-            <a:pPr indent="0" marL="0">
+            <a:pPr marL="0" indent="0">
               <a:buNone/>
             </a:pPr>
             <a:r>
@@ -12898,7 +13059,7 @@
             <a:endParaRPr lang="en-US" sz="1300" dirty="0"/>
           </a:p>
           <a:p>
-            <a:pPr indent="0" marL="0">
+            <a:pPr marL="0" indent="0">
               <a:buNone/>
             </a:pPr>
             <a:r>
@@ -12915,7 +13076,7 @@
             <a:endParaRPr lang="en-US" sz="1300" dirty="0"/>
           </a:p>
           <a:p>
-            <a:pPr indent="0" marL="0">
+            <a:pPr marL="0" indent="0">
               <a:buNone/>
             </a:pPr>
             <a:r>
@@ -12949,6 +13110,7 @@
         <a:solidFill>
           <a:srgbClr val="FAF7EF"/>
         </a:solidFill>
+        <a:effectLst/>
       </p:bgPr>
     </p:bg>
     <p:spTree>
@@ -13036,7 +13198,7 @@
           <a:bodyPr wrap="square" lIns="0" tIns="0" rIns="0" bIns="0" rtlCol="0" anchor="ctr"/>
           <a:lstStyle/>
           <a:p>
-            <a:pPr algn="r" indent="0" marL="0">
+            <a:pPr marL="0" indent="0" algn="r">
               <a:buNone/>
             </a:pPr>
             <a:r>
@@ -13075,7 +13237,7 @@
           <a:bodyPr wrap="square" lIns="0" tIns="0" rIns="0" bIns="0" rtlCol="0" anchor="ctr"/>
           <a:lstStyle/>
           <a:p>
-            <a:pPr indent="0" marL="0">
+            <a:pPr marL="0" indent="0">
               <a:buNone/>
             </a:pPr>
             <a:r>
@@ -13116,11 +13278,11 @@
           </a:bodyPr>
           <a:lstStyle/>
           <a:p>
-            <a:pPr indent="0" marL="0">
-              <a:buNone/>
-            </a:pPr>
-            <a:r>
-              <a:rPr lang="en-US" sz="2500" b="1" dirty="0">
+            <a:pPr marL="0" indent="0">
+              <a:buNone/>
+            </a:pPr>
+            <a:r>
+              <a:rPr lang="en-US" altLang="ko-KR" sz="2500" b="1">
                 <a:solidFill>
                   <a:srgbClr val="17212B"/>
                 </a:solidFill>
@@ -13128,7 +13290,29 @@
                 <a:ea typeface="Malgun Gothic" pitchFamily="34" charset="-122"/>
                 <a:cs typeface="Malgun Gothic" pitchFamily="34" charset="-120"/>
               </a:rPr>
-              <a:t>Unity에서 자주 보이는 Flyweight</a:t>
+              <a:t>Unity</a:t>
+            </a:r>
+            <a:r>
+              <a:rPr lang="ko-KR" altLang="en-US" sz="2500" b="1">
+                <a:solidFill>
+                  <a:srgbClr val="17212B"/>
+                </a:solidFill>
+                <a:latin typeface="Malgun Gothic" pitchFamily="34" charset="0"/>
+                <a:ea typeface="Malgun Gothic" pitchFamily="34" charset="-122"/>
+                <a:cs typeface="Malgun Gothic" pitchFamily="34" charset="-120"/>
+              </a:rPr>
+              <a:t>에서 자주 볼 수 있는 </a:t>
+            </a:r>
+            <a:r>
+              <a:rPr lang="en-US" altLang="ko-KR" sz="2500" b="1">
+                <a:solidFill>
+                  <a:srgbClr val="17212B"/>
+                </a:solidFill>
+                <a:latin typeface="Malgun Gothic" pitchFamily="34" charset="0"/>
+                <a:ea typeface="Malgun Gothic" pitchFamily="34" charset="-122"/>
+                <a:cs typeface="Malgun Gothic" pitchFamily="34" charset="-120"/>
+              </a:rPr>
+              <a:t>Flyweight</a:t>
             </a:r>
             <a:endParaRPr lang="en-US" sz="2500" dirty="0"/>
           </a:p>
@@ -13157,7 +13341,7 @@
           </a:bodyPr>
           <a:lstStyle/>
           <a:p>
-            <a:pPr indent="0" marL="0">
+            <a:pPr marL="0" indent="0">
               <a:buNone/>
             </a:pPr>
             <a:r>
@@ -13223,7 +13407,7 @@
           </a:bodyPr>
           <a:lstStyle/>
           <a:p>
-            <a:pPr indent="0" marL="0">
+            <a:pPr marL="0" indent="0">
               <a:buNone/>
             </a:pPr>
             <a:r>
@@ -13289,7 +13473,7 @@
           </a:bodyPr>
           <a:lstStyle/>
           <a:p>
-            <a:pPr indent="0" marL="0">
+            <a:pPr marL="0" indent="0">
               <a:buNone/>
             </a:pPr>
             <a:r>
@@ -13355,7 +13539,7 @@
           </a:bodyPr>
           <a:lstStyle/>
           <a:p>
-            <a:pPr indent="0" marL="0">
+            <a:pPr marL="0" indent="0">
               <a:buNone/>
             </a:pPr>
             <a:r>
@@ -13421,7 +13605,7 @@
           </a:bodyPr>
           <a:lstStyle/>
           <a:p>
-            <a:pPr indent="0" marL="0">
+            <a:pPr marL="0" indent="0">
               <a:buNone/>
             </a:pPr>
             <a:r>
@@ -13462,7 +13646,7 @@
           </a:bodyPr>
           <a:lstStyle/>
           <a:p>
-            <a:pPr indent="0" marL="0">
+            <a:pPr marL="0" indent="0">
               <a:buNone/>
             </a:pPr>
             <a:r>
@@ -13528,7 +13712,7 @@
           </a:bodyPr>
           <a:lstStyle/>
           <a:p>
-            <a:pPr indent="0" marL="0">
+            <a:pPr marL="0" indent="0">
               <a:buNone/>
             </a:pPr>
             <a:r>
@@ -13594,7 +13778,7 @@
           </a:bodyPr>
           <a:lstStyle/>
           <a:p>
-            <a:pPr indent="0" marL="0">
+            <a:pPr marL="0" indent="0">
               <a:buNone/>
             </a:pPr>
             <a:r>
@@ -13660,7 +13844,7 @@
           </a:bodyPr>
           <a:lstStyle/>
           <a:p>
-            <a:pPr indent="0" marL="0">
+            <a:pPr marL="0" indent="0">
               <a:buNone/>
             </a:pPr>
             <a:r>
@@ -13726,7 +13910,7 @@
           </a:bodyPr>
           <a:lstStyle/>
           <a:p>
-            <a:pPr indent="0" marL="0">
+            <a:pPr marL="0" indent="0">
               <a:buNone/>
             </a:pPr>
             <a:r>
@@ -13760,6 +13944,7 @@
         <a:solidFill>
           <a:srgbClr val="FAF7EF"/>
         </a:solidFill>
+        <a:effectLst/>
       </p:bgPr>
     </p:bg>
     <p:spTree>
@@ -13847,7 +14032,7 @@
           <a:bodyPr wrap="square" lIns="0" tIns="0" rIns="0" bIns="0" rtlCol="0" anchor="ctr"/>
           <a:lstStyle/>
           <a:p>
-            <a:pPr algn="r" indent="0" marL="0">
+            <a:pPr marL="0" indent="0" algn="r">
               <a:buNone/>
             </a:pPr>
             <a:r>
@@ -13886,7 +14071,7 @@
           <a:bodyPr wrap="square" lIns="0" tIns="0" rIns="0" bIns="0" rtlCol="0" anchor="ctr"/>
           <a:lstStyle/>
           <a:p>
-            <a:pPr indent="0" marL="0">
+            <a:pPr marL="0" indent="0">
               <a:buNone/>
             </a:pPr>
             <a:r>
@@ -13927,7 +14112,7 @@
           </a:bodyPr>
           <a:lstStyle/>
           <a:p>
-            <a:pPr indent="0" marL="0">
+            <a:pPr marL="0" indent="0">
               <a:buNone/>
             </a:pPr>
             <a:r>
@@ -13993,7 +14178,7 @@
           </a:bodyPr>
           <a:lstStyle/>
           <a:p>
-            <a:pPr indent="0" marL="0">
+            <a:pPr marL="0" indent="0">
               <a:buNone/>
             </a:pPr>
             <a:r>
@@ -14059,11 +14244,11 @@
           </a:bodyPr>
           <a:lstStyle/>
           <a:p>
-            <a:pPr indent="0" marL="0">
-              <a:buNone/>
-            </a:pPr>
-            <a:r>
-              <a:rPr lang="en-US" sz="1680" dirty="0">
+            <a:pPr marL="0" indent="0">
+              <a:buNone/>
+            </a:pPr>
+            <a:r>
+              <a:rPr lang="ko-KR" altLang="en-US" sz="1680">
                 <a:solidFill>
                   <a:srgbClr val="17212B"/>
                 </a:solidFill>
@@ -14071,7 +14256,18 @@
                 <a:ea typeface="Malgun Gothic" pitchFamily="34" charset="-122"/>
                 <a:cs typeface="Malgun Gothic" pitchFamily="34" charset="-120"/>
               </a:rPr>
-              <a:t>반대로 중복 객체를 줄이면 메모리와 로딩 비용이 줄 수 있다.</a:t>
+              <a:t>반대로 중복 객체를 줄이면 메모리와 로딩 비용을 줄일 수 있다</a:t>
+            </a:r>
+            <a:r>
+              <a:rPr lang="en-US" altLang="ko-KR" sz="1680">
+                <a:solidFill>
+                  <a:srgbClr val="17212B"/>
+                </a:solidFill>
+                <a:latin typeface="Malgun Gothic" pitchFamily="34" charset="0"/>
+                <a:ea typeface="Malgun Gothic" pitchFamily="34" charset="-122"/>
+                <a:cs typeface="Malgun Gothic" pitchFamily="34" charset="-120"/>
+              </a:rPr>
+              <a:t>.</a:t>
             </a:r>
             <a:endParaRPr lang="en-US" sz="1680" dirty="0"/>
           </a:p>
@@ -14125,7 +14321,7 @@
           </a:bodyPr>
           <a:lstStyle/>
           <a:p>
-            <a:pPr indent="0" marL="0">
+            <a:pPr marL="0" indent="0">
               <a:buNone/>
             </a:pPr>
             <a:r>
@@ -14191,7 +14387,7 @@
           </a:bodyPr>
           <a:lstStyle/>
           <a:p>
-            <a:pPr indent="0" marL="0">
+            <a:pPr marL="0" indent="0">
               <a:buNone/>
             </a:pPr>
             <a:r>
@@ -14225,6 +14421,7 @@
         <a:solidFill>
           <a:srgbClr val="FAF7EF"/>
         </a:solidFill>
+        <a:effectLst/>
       </p:bgPr>
     </p:bg>
     <p:spTree>
@@ -14312,7 +14509,7 @@
           <a:bodyPr wrap="square" lIns="0" tIns="0" rIns="0" bIns="0" rtlCol="0" anchor="ctr"/>
           <a:lstStyle/>
           <a:p>
-            <a:pPr algn="r" indent="0" marL="0">
+            <a:pPr marL="0" indent="0" algn="r">
               <a:buNone/>
             </a:pPr>
             <a:r>
@@ -14351,7 +14548,7 @@
           <a:bodyPr wrap="square" lIns="0" tIns="0" rIns="0" bIns="0" rtlCol="0" anchor="ctr"/>
           <a:lstStyle/>
           <a:p>
-            <a:pPr indent="0" marL="0">
+            <a:pPr marL="0" indent="0">
               <a:buNone/>
             </a:pPr>
             <a:r>
@@ -14392,11 +14589,11 @@
           </a:bodyPr>
           <a:lstStyle/>
           <a:p>
-            <a:pPr indent="0" marL="0">
-              <a:buNone/>
-            </a:pPr>
-            <a:r>
-              <a:rPr lang="en-US" sz="2500" b="1" dirty="0">
+            <a:pPr marL="0" indent="0">
+              <a:buNone/>
+            </a:pPr>
+            <a:r>
+              <a:rPr lang="en-US" altLang="ko-KR" sz="2500" b="1">
                 <a:solidFill>
                   <a:srgbClr val="17212B"/>
                 </a:solidFill>
@@ -14404,7 +14601,18 @@
                 <a:ea typeface="Malgun Gothic" pitchFamily="34" charset="-122"/>
                 <a:cs typeface="Malgun Gothic" pitchFamily="34" charset="-120"/>
               </a:rPr>
-              <a:t>Flyweight를 쓰면 좋은 신호</a:t>
+              <a:t>Flyweight</a:t>
+            </a:r>
+            <a:r>
+              <a:rPr lang="ko-KR" altLang="en-US" sz="2500" b="1">
+                <a:solidFill>
+                  <a:srgbClr val="17212B"/>
+                </a:solidFill>
+                <a:latin typeface="Malgun Gothic" pitchFamily="34" charset="0"/>
+                <a:ea typeface="Malgun Gothic" pitchFamily="34" charset="-122"/>
+                <a:cs typeface="Malgun Gothic" pitchFamily="34" charset="-120"/>
+              </a:rPr>
+              <a:t>를 적용하기 좋은 신호</a:t>
             </a:r>
             <a:endParaRPr lang="en-US" sz="2500" dirty="0"/>
           </a:p>
@@ -14458,7 +14666,7 @@
           </a:bodyPr>
           <a:lstStyle/>
           <a:p>
-            <a:pPr indent="0" marL="0">
+            <a:pPr marL="0" indent="0">
               <a:buNone/>
             </a:pPr>
             <a:r>
@@ -14524,7 +14732,7 @@
           </a:bodyPr>
           <a:lstStyle/>
           <a:p>
-            <a:pPr indent="0" marL="0">
+            <a:pPr marL="0" indent="0">
               <a:buNone/>
             </a:pPr>
             <a:r>
@@ -14590,7 +14798,7 @@
           </a:bodyPr>
           <a:lstStyle/>
           <a:p>
-            <a:pPr indent="0" marL="0">
+            <a:pPr marL="0" indent="0">
               <a:buNone/>
             </a:pPr>
             <a:r>
@@ -14656,7 +14864,7 @@
           </a:bodyPr>
           <a:lstStyle/>
           <a:p>
-            <a:pPr indent="0" marL="0">
+            <a:pPr marL="0" indent="0">
               <a:buNone/>
             </a:pPr>
             <a:r>
@@ -14690,6 +14898,7 @@
         <a:solidFill>
           <a:srgbClr val="FAF7EF"/>
         </a:solidFill>
+        <a:effectLst/>
       </p:bgPr>
     </p:bg>
     <p:spTree>
@@ -14777,7 +14986,7 @@
           <a:bodyPr wrap="square" lIns="0" tIns="0" rIns="0" bIns="0" rtlCol="0" anchor="ctr"/>
           <a:lstStyle/>
           <a:p>
-            <a:pPr algn="r" indent="0" marL="0">
+            <a:pPr marL="0" indent="0" algn="r">
               <a:buNone/>
             </a:pPr>
             <a:r>
@@ -14816,7 +15025,7 @@
           <a:bodyPr wrap="square" lIns="0" tIns="0" rIns="0" bIns="0" rtlCol="0" anchor="ctr"/>
           <a:lstStyle/>
           <a:p>
-            <a:pPr indent="0" marL="0">
+            <a:pPr marL="0" indent="0">
               <a:buNone/>
             </a:pPr>
             <a:r>
@@ -14857,7 +15066,7 @@
           </a:bodyPr>
           <a:lstStyle/>
           <a:p>
-            <a:pPr indent="0" marL="0">
+            <a:pPr marL="0" indent="0">
               <a:buNone/>
             </a:pPr>
             <a:r>
@@ -14923,11 +15132,11 @@
           </a:bodyPr>
           <a:lstStyle/>
           <a:p>
-            <a:pPr indent="0" marL="0">
-              <a:buNone/>
-            </a:pPr>
-            <a:r>
-              <a:rPr lang="en-US" sz="1680" dirty="0">
+            <a:pPr marL="0" indent="0">
+              <a:buNone/>
+            </a:pPr>
+            <a:r>
+              <a:rPr lang="ko-KR" altLang="en-US" sz="1680">
                 <a:solidFill>
                   <a:srgbClr val="17212B"/>
                 </a:solidFill>
@@ -14935,7 +15144,18 @@
                 <a:ea typeface="Malgun Gothic" pitchFamily="34" charset="-122"/>
                 <a:cs typeface="Malgun Gothic" pitchFamily="34" charset="-120"/>
               </a:rPr>
-              <a:t>공유 객체를 수정하면 모든 사용자에게 영향이 간다.</a:t>
+              <a:t>공유 객체를 수정하면 이를 참조하는 모든 곳에 영향이 간다</a:t>
+            </a:r>
+            <a:r>
+              <a:rPr lang="en-US" altLang="ko-KR" sz="1680">
+                <a:solidFill>
+                  <a:srgbClr val="17212B"/>
+                </a:solidFill>
+                <a:latin typeface="Malgun Gothic" pitchFamily="34" charset="0"/>
+                <a:ea typeface="Malgun Gothic" pitchFamily="34" charset="-122"/>
+                <a:cs typeface="Malgun Gothic" pitchFamily="34" charset="-120"/>
+              </a:rPr>
+              <a:t>.</a:t>
             </a:r>
             <a:endParaRPr lang="en-US" sz="1680" dirty="0"/>
           </a:p>
@@ -14989,11 +15209,11 @@
           </a:bodyPr>
           <a:lstStyle/>
           <a:p>
-            <a:pPr indent="0" marL="0">
-              <a:buNone/>
-            </a:pPr>
-            <a:r>
-              <a:rPr lang="en-US" sz="1680" dirty="0">
+            <a:pPr marL="0" indent="0">
+              <a:buNone/>
+            </a:pPr>
+            <a:r>
+              <a:rPr lang="ko-KR" altLang="en-US" sz="1680">
                 <a:solidFill>
                   <a:srgbClr val="17212B"/>
                 </a:solidFill>
@@ -15001,7 +15221,18 @@
                 <a:ea typeface="Malgun Gothic" pitchFamily="34" charset="-122"/>
                 <a:cs typeface="Malgun Gothic" pitchFamily="34" charset="-120"/>
               </a:rPr>
-              <a:t>공유할 상태와 개별 상태를 잘못 나누면 버그가 숨어든다.</a:t>
+              <a:t>공유할 상태와 개별 상태를 잘못 나누면 버그가 숨어들기 쉽다</a:t>
+            </a:r>
+            <a:r>
+              <a:rPr lang="en-US" altLang="ko-KR" sz="1680">
+                <a:solidFill>
+                  <a:srgbClr val="17212B"/>
+                </a:solidFill>
+                <a:latin typeface="Malgun Gothic" pitchFamily="34" charset="0"/>
+                <a:ea typeface="Malgun Gothic" pitchFamily="34" charset="-122"/>
+                <a:cs typeface="Malgun Gothic" pitchFamily="34" charset="-120"/>
+              </a:rPr>
+              <a:t>.</a:t>
             </a:r>
             <a:endParaRPr lang="en-US" sz="1680" dirty="0"/>
           </a:p>
@@ -15055,7 +15286,7 @@
           </a:bodyPr>
           <a:lstStyle/>
           <a:p>
-            <a:pPr indent="0" marL="0">
+            <a:pPr marL="0" indent="0">
               <a:buNone/>
             </a:pPr>
             <a:r>
@@ -15121,7 +15352,7 @@
           </a:bodyPr>
           <a:lstStyle/>
           <a:p>
-            <a:pPr indent="0" marL="0">
+            <a:pPr marL="0" indent="0">
               <a:buNone/>
             </a:pPr>
             <a:r>
@@ -15155,6 +15386,7 @@
         <a:solidFill>
           <a:srgbClr val="FAF7EF"/>
         </a:solidFill>
+        <a:effectLst/>
       </p:bgPr>
     </p:bg>
     <p:spTree>
@@ -15242,7 +15474,7 @@
           <a:bodyPr wrap="square" lIns="0" tIns="0" rIns="0" bIns="0" rtlCol="0" anchor="ctr"/>
           <a:lstStyle/>
           <a:p>
-            <a:pPr algn="r" indent="0" marL="0">
+            <a:pPr marL="0" indent="0" algn="r">
               <a:buNone/>
             </a:pPr>
             <a:r>
@@ -15281,7 +15513,7 @@
           <a:bodyPr wrap="square" lIns="0" tIns="0" rIns="0" bIns="0" rtlCol="0" anchor="ctr"/>
           <a:lstStyle/>
           <a:p>
-            <a:pPr indent="0" marL="0">
+            <a:pPr marL="0" indent="0">
               <a:buNone/>
             </a:pPr>
             <a:r>
@@ -15322,7 +15554,7 @@
           </a:bodyPr>
           <a:lstStyle/>
           <a:p>
-            <a:pPr indent="0" marL="0">
+            <a:pPr marL="0" indent="0">
               <a:buNone/>
             </a:pPr>
             <a:r>
@@ -15388,7 +15620,7 @@
           </a:bodyPr>
           <a:lstStyle/>
           <a:p>
-            <a:pPr indent="0" marL="0">
+            <a:pPr marL="0" indent="0">
               <a:buNone/>
             </a:pPr>
             <a:r>
@@ -15454,7 +15686,7 @@
           </a:bodyPr>
           <a:lstStyle/>
           <a:p>
-            <a:pPr indent="0" marL="0">
+            <a:pPr marL="0" indent="0">
               <a:buNone/>
             </a:pPr>
             <a:r>
@@ -15520,7 +15752,7 @@
           </a:bodyPr>
           <a:lstStyle/>
           <a:p>
-            <a:pPr indent="0" marL="0">
+            <a:pPr marL="0" indent="0">
               <a:buNone/>
             </a:pPr>
             <a:r>
@@ -15586,7 +15818,7 @@
           </a:bodyPr>
           <a:lstStyle/>
           <a:p>
-            <a:pPr indent="0" marL="0">
+            <a:pPr marL="0" indent="0">
               <a:buNone/>
             </a:pPr>
             <a:r>
@@ -15620,6 +15852,7 @@
         <a:solidFill>
           <a:srgbClr val="FAF7EF"/>
         </a:solidFill>
+        <a:effectLst/>
       </p:bgPr>
     </p:bg>
     <p:spTree>
@@ -15707,7 +15940,7 @@
           <a:bodyPr wrap="square" lIns="0" tIns="0" rIns="0" bIns="0" rtlCol="0" anchor="ctr"/>
           <a:lstStyle/>
           <a:p>
-            <a:pPr algn="r" indent="0" marL="0">
+            <a:pPr marL="0" indent="0" algn="r">
               <a:buNone/>
             </a:pPr>
             <a:r>
@@ -15746,7 +15979,7 @@
           <a:bodyPr wrap="square" lIns="0" tIns="0" rIns="0" bIns="0" rtlCol="0" anchor="ctr"/>
           <a:lstStyle/>
           <a:p>
-            <a:pPr indent="0" marL="0">
+            <a:pPr marL="0" indent="0">
               <a:buNone/>
             </a:pPr>
             <a:r>
@@ -15787,7 +16020,7 @@
           </a:bodyPr>
           <a:lstStyle/>
           <a:p>
-            <a:pPr indent="0" marL="0">
+            <a:pPr marL="0" indent="0">
               <a:buNone/>
             </a:pPr>
             <a:r>
@@ -15853,7 +16086,7 @@
           </a:bodyPr>
           <a:lstStyle/>
           <a:p>
-            <a:pPr indent="0" marL="0">
+            <a:pPr marL="0" indent="0">
               <a:buNone/>
             </a:pPr>
             <a:r>
@@ -15919,7 +16152,7 @@
           </a:bodyPr>
           <a:lstStyle/>
           <a:p>
-            <a:pPr indent="0" marL="0">
+            <a:pPr marL="0" indent="0">
               <a:buNone/>
             </a:pPr>
             <a:r>
@@ -15985,7 +16218,7 @@
           </a:bodyPr>
           <a:lstStyle/>
           <a:p>
-            <a:pPr indent="0" marL="0">
+            <a:pPr marL="0" indent="0">
               <a:buNone/>
             </a:pPr>
             <a:r>
@@ -16051,7 +16284,7 @@
           </a:bodyPr>
           <a:lstStyle/>
           <a:p>
-            <a:pPr indent="0" marL="0">
+            <a:pPr marL="0" indent="0">
               <a:buNone/>
             </a:pPr>
             <a:r>
@@ -16085,6 +16318,7 @@
         <a:solidFill>
           <a:srgbClr val="FAF7EF"/>
         </a:solidFill>
+        <a:effectLst/>
       </p:bgPr>
     </p:bg>
     <p:spTree>
@@ -16172,7 +16406,7 @@
           <a:bodyPr wrap="square" lIns="0" tIns="0" rIns="0" bIns="0" rtlCol="0" anchor="ctr"/>
           <a:lstStyle/>
           <a:p>
-            <a:pPr algn="r" indent="0" marL="0">
+            <a:pPr marL="0" indent="0" algn="r">
               <a:buNone/>
             </a:pPr>
             <a:r>
@@ -16211,7 +16445,7 @@
           <a:bodyPr wrap="square" lIns="0" tIns="0" rIns="0" bIns="0" rtlCol="0" anchor="ctr"/>
           <a:lstStyle/>
           <a:p>
-            <a:pPr indent="0" marL="0">
+            <a:pPr marL="0" indent="0">
               <a:buNone/>
             </a:pPr>
             <a:r>
@@ -16252,7 +16486,7 @@
           </a:bodyPr>
           <a:lstStyle/>
           <a:p>
-            <a:pPr indent="0" marL="0">
+            <a:pPr marL="0" indent="0">
               <a:buNone/>
             </a:pPr>
             <a:r>
@@ -16293,7 +16527,7 @@
           </a:bodyPr>
           <a:lstStyle/>
           <a:p>
-            <a:pPr indent="0" marL="0">
+            <a:pPr marL="0" indent="0">
               <a:buNone/>
             </a:pPr>
             <a:r>
@@ -16361,7 +16595,7 @@
           </a:bodyPr>
           <a:lstStyle/>
           <a:p>
-            <a:pPr algn="ctr" indent="0" marL="0">
+            <a:pPr marL="0" indent="0" algn="ctr">
               <a:buNone/>
             </a:pPr>
             <a:r>
@@ -16400,7 +16634,7 @@
           <a:bodyPr wrap="square" lIns="0" tIns="0" rIns="0" bIns="0" rtlCol="0" anchor="ctr"/>
           <a:lstStyle/>
           <a:p>
-            <a:pPr indent="0" marL="0">
+            <a:pPr marL="0" indent="0">
               <a:buNone/>
             </a:pPr>
             <a:r>
@@ -16465,7 +16699,7 @@
           </a:bodyPr>
           <a:lstStyle/>
           <a:p>
-            <a:pPr algn="ctr" indent="0" marL="0">
+            <a:pPr marL="0" indent="0" algn="ctr">
               <a:buNone/>
             </a:pPr>
             <a:r>
@@ -16504,7 +16738,7 @@
           <a:bodyPr wrap="square" lIns="0" tIns="0" rIns="0" bIns="0" rtlCol="0" anchor="ctr"/>
           <a:lstStyle/>
           <a:p>
-            <a:pPr indent="0" marL="0">
+            <a:pPr marL="0" indent="0">
               <a:buNone/>
             </a:pPr>
             <a:r>
@@ -16569,7 +16803,7 @@
           </a:bodyPr>
           <a:lstStyle/>
           <a:p>
-            <a:pPr algn="ctr" indent="0" marL="0">
+            <a:pPr marL="0" indent="0" algn="ctr">
               <a:buNone/>
             </a:pPr>
             <a:r>
@@ -16608,7 +16842,7 @@
           <a:bodyPr wrap="square" lIns="0" tIns="0" rIns="0" bIns="0" rtlCol="0" anchor="ctr"/>
           <a:lstStyle/>
           <a:p>
-            <a:pPr indent="0" marL="0">
+            <a:pPr marL="0" indent="0">
               <a:buNone/>
             </a:pPr>
             <a:r>
@@ -16673,7 +16907,7 @@
           </a:bodyPr>
           <a:lstStyle/>
           <a:p>
-            <a:pPr algn="ctr" indent="0" marL="0">
+            <a:pPr marL="0" indent="0" algn="ctr">
               <a:buNone/>
             </a:pPr>
             <a:r>
@@ -16739,7 +16973,7 @@
           </a:bodyPr>
           <a:lstStyle/>
           <a:p>
-            <a:pPr indent="0" marL="0">
+            <a:pPr marL="0" indent="0">
               <a:buNone/>
             </a:pPr>
             <a:r>
@@ -16805,7 +17039,7 @@
           </a:bodyPr>
           <a:lstStyle/>
           <a:p>
-            <a:pPr indent="0" marL="0">
+            <a:pPr marL="0" indent="0">
               <a:buNone/>
             </a:pPr>
             <a:r>
@@ -16871,7 +17105,7 @@
           </a:bodyPr>
           <a:lstStyle/>
           <a:p>
-            <a:pPr indent="0" marL="0">
+            <a:pPr marL="0" indent="0">
               <a:buNone/>
             </a:pPr>
             <a:r>
@@ -16905,6 +17139,7 @@
         <a:solidFill>
           <a:srgbClr val="FAF7EF"/>
         </a:solidFill>
+        <a:effectLst/>
       </p:bgPr>
     </p:bg>
     <p:spTree>
@@ -16992,7 +17227,7 @@
           <a:bodyPr wrap="square" lIns="0" tIns="0" rIns="0" bIns="0" rtlCol="0" anchor="ctr"/>
           <a:lstStyle/>
           <a:p>
-            <a:pPr algn="r" indent="0" marL="0">
+            <a:pPr marL="0" indent="0" algn="r">
               <a:buNone/>
             </a:pPr>
             <a:r>
@@ -17031,7 +17266,7 @@
           <a:bodyPr wrap="square" lIns="0" tIns="0" rIns="0" bIns="0" rtlCol="0" anchor="ctr"/>
           <a:lstStyle/>
           <a:p>
-            <a:pPr indent="0" marL="0">
+            <a:pPr marL="0" indent="0">
               <a:buNone/>
             </a:pPr>
             <a:r>
@@ -17072,7 +17307,7 @@
           </a:bodyPr>
           <a:lstStyle/>
           <a:p>
-            <a:pPr indent="0" marL="0">
+            <a:pPr marL="0" indent="0">
               <a:buNone/>
             </a:pPr>
             <a:r>
@@ -17138,7 +17373,7 @@
           <a:bodyPr wrap="square" lIns="0" tIns="0" rIns="0" bIns="0" rtlCol="0" anchor="ctr"/>
           <a:lstStyle/>
           <a:p>
-            <a:pPr algn="ctr" indent="0" marL="0">
+            <a:pPr marL="0" indent="0" algn="ctr">
               <a:buNone/>
             </a:pPr>
             <a:r>
@@ -17201,7 +17436,7 @@
           </a:bodyPr>
           <a:lstStyle/>
           <a:p>
-            <a:pPr indent="0" marL="0">
+            <a:pPr marL="0" indent="0">
               <a:buNone/>
             </a:pPr>
             <a:r>
@@ -17267,7 +17502,7 @@
           </a:bodyPr>
           <a:lstStyle/>
           <a:p>
-            <a:pPr indent="0" marL="0">
+            <a:pPr marL="0" indent="0">
               <a:buNone/>
             </a:pPr>
             <a:r>
@@ -17333,7 +17568,7 @@
           </a:bodyPr>
           <a:lstStyle/>
           <a:p>
-            <a:pPr indent="0" marL="0">
+            <a:pPr marL="0" indent="0">
               <a:buNone/>
             </a:pPr>
             <a:r>
@@ -17399,7 +17634,7 @@
           </a:bodyPr>
           <a:lstStyle/>
           <a:p>
-            <a:pPr indent="0" marL="0">
+            <a:pPr marL="0" indent="0">
               <a:buNone/>
             </a:pPr>
             <a:r>
@@ -17433,6 +17668,7 @@
         <a:solidFill>
           <a:srgbClr val="FAF7EF"/>
         </a:solidFill>
+        <a:effectLst/>
       </p:bgPr>
     </p:bg>
     <p:spTree>
@@ -17520,7 +17756,7 @@
           <a:bodyPr wrap="square" lIns="0" tIns="0" rIns="0" bIns="0" rtlCol="0" anchor="ctr"/>
           <a:lstStyle/>
           <a:p>
-            <a:pPr algn="r" indent="0" marL="0">
+            <a:pPr marL="0" indent="0" algn="r">
               <a:buNone/>
             </a:pPr>
             <a:r>
@@ -17559,7 +17795,7 @@
           <a:bodyPr wrap="square" lIns="0" tIns="0" rIns="0" bIns="0" rtlCol="0" anchor="ctr"/>
           <a:lstStyle/>
           <a:p>
-            <a:pPr indent="0" marL="0">
+            <a:pPr marL="0" indent="0">
               <a:buNone/>
             </a:pPr>
             <a:r>
@@ -17600,7 +17836,7 @@
           </a:bodyPr>
           <a:lstStyle/>
           <a:p>
-            <a:pPr indent="0" marL="0">
+            <a:pPr marL="0" indent="0">
               <a:buNone/>
             </a:pPr>
             <a:r>
@@ -17666,7 +17902,7 @@
           <a:bodyPr wrap="square" lIns="0" tIns="0" rIns="0" bIns="0" rtlCol="0" anchor="ctr"/>
           <a:lstStyle/>
           <a:p>
-            <a:pPr algn="ctr" indent="0" marL="0">
+            <a:pPr marL="0" indent="0" algn="ctr">
               <a:buNone/>
             </a:pPr>
             <a:r>
@@ -17729,7 +17965,7 @@
           </a:bodyPr>
           <a:lstStyle/>
           <a:p>
-            <a:pPr indent="0" marL="0">
+            <a:pPr marL="0" indent="0">
               <a:buNone/>
             </a:pPr>
             <a:r>
@@ -17795,7 +18031,7 @@
           </a:bodyPr>
           <a:lstStyle/>
           <a:p>
-            <a:pPr indent="0" marL="0">
+            <a:pPr marL="0" indent="0">
               <a:buNone/>
             </a:pPr>
             <a:r>
@@ -17861,7 +18097,7 @@
           </a:bodyPr>
           <a:lstStyle/>
           <a:p>
-            <a:pPr indent="0" marL="0">
+            <a:pPr marL="0" indent="0">
               <a:buNone/>
             </a:pPr>
             <a:r>
@@ -17927,7 +18163,7 @@
           </a:bodyPr>
           <a:lstStyle/>
           <a:p>
-            <a:pPr indent="0" marL="0">
+            <a:pPr marL="0" indent="0">
               <a:buNone/>
             </a:pPr>
             <a:r>
@@ -17961,6 +18197,7 @@
         <a:solidFill>
           <a:srgbClr val="FAF7EF"/>
         </a:solidFill>
+        <a:effectLst/>
       </p:bgPr>
     </p:bg>
     <p:spTree>
@@ -18048,7 +18285,7 @@
           <a:bodyPr wrap="square" lIns="0" tIns="0" rIns="0" bIns="0" rtlCol="0" anchor="ctr"/>
           <a:lstStyle/>
           <a:p>
-            <a:pPr algn="r" indent="0" marL="0">
+            <a:pPr marL="0" indent="0" algn="r">
               <a:buNone/>
             </a:pPr>
             <a:r>
@@ -18087,7 +18324,7 @@
           <a:bodyPr wrap="square" lIns="0" tIns="0" rIns="0" bIns="0" rtlCol="0" anchor="ctr"/>
           <a:lstStyle/>
           <a:p>
-            <a:pPr indent="0" marL="0">
+            <a:pPr marL="0" indent="0">
               <a:buNone/>
             </a:pPr>
             <a:r>
@@ -18128,7 +18365,7 @@
           </a:bodyPr>
           <a:lstStyle/>
           <a:p>
-            <a:pPr indent="0" marL="0">
+            <a:pPr marL="0" indent="0">
               <a:buNone/>
             </a:pPr>
             <a:r>
@@ -18194,7 +18431,7 @@
           <a:bodyPr wrap="square" lIns="0" tIns="0" rIns="0" bIns="0" rtlCol="0" anchor="ctr"/>
           <a:lstStyle/>
           <a:p>
-            <a:pPr algn="ctr" indent="0" marL="0">
+            <a:pPr marL="0" indent="0" algn="ctr">
               <a:buNone/>
             </a:pPr>
             <a:r>
@@ -18257,7 +18494,7 @@
           </a:bodyPr>
           <a:lstStyle/>
           <a:p>
-            <a:pPr indent="0" marL="0">
+            <a:pPr marL="0" indent="0">
               <a:buNone/>
             </a:pPr>
             <a:r>
@@ -18323,7 +18560,7 @@
           </a:bodyPr>
           <a:lstStyle/>
           <a:p>
-            <a:pPr indent="0" marL="0">
+            <a:pPr marL="0" indent="0">
               <a:buNone/>
             </a:pPr>
             <a:r>
@@ -18389,7 +18626,7 @@
           </a:bodyPr>
           <a:lstStyle/>
           <a:p>
-            <a:pPr indent="0" marL="0">
+            <a:pPr marL="0" indent="0">
               <a:buNone/>
             </a:pPr>
             <a:r>
@@ -18455,7 +18692,7 @@
           </a:bodyPr>
           <a:lstStyle/>
           <a:p>
-            <a:pPr indent="0" marL="0">
+            <a:pPr marL="0" indent="0">
               <a:buNone/>
             </a:pPr>
             <a:r>
@@ -18489,6 +18726,7 @@
         <a:solidFill>
           <a:srgbClr val="FAF7EF"/>
         </a:solidFill>
+        <a:effectLst/>
       </p:bgPr>
     </p:bg>
     <p:spTree>
@@ -18576,7 +18814,7 @@
           <a:bodyPr wrap="square" lIns="0" tIns="0" rIns="0" bIns="0" rtlCol="0" anchor="ctr"/>
           <a:lstStyle/>
           <a:p>
-            <a:pPr algn="r" indent="0" marL="0">
+            <a:pPr marL="0" indent="0" algn="r">
               <a:buNone/>
             </a:pPr>
             <a:r>
@@ -18615,7 +18853,7 @@
           <a:bodyPr wrap="square" lIns="0" tIns="0" rIns="0" bIns="0" rtlCol="0" anchor="ctr"/>
           <a:lstStyle/>
           <a:p>
-            <a:pPr indent="0" marL="0">
+            <a:pPr marL="0" indent="0">
               <a:buNone/>
             </a:pPr>
             <a:r>
@@ -18656,7 +18894,7 @@
           </a:bodyPr>
           <a:lstStyle/>
           <a:p>
-            <a:pPr indent="0" marL="0">
+            <a:pPr marL="0" indent="0">
               <a:buNone/>
             </a:pPr>
             <a:r>
@@ -18722,7 +18960,7 @@
           <a:bodyPr wrap="square" lIns="0" tIns="0" rIns="0" bIns="0" rtlCol="0" anchor="ctr"/>
           <a:lstStyle/>
           <a:p>
-            <a:pPr algn="ctr" indent="0" marL="0">
+            <a:pPr marL="0" indent="0" algn="ctr">
               <a:buNone/>
             </a:pPr>
             <a:r>
@@ -18785,7 +19023,7 @@
           </a:bodyPr>
           <a:lstStyle/>
           <a:p>
-            <a:pPr indent="0" marL="0">
+            <a:pPr marL="0" indent="0">
               <a:buNone/>
             </a:pPr>
             <a:r>
@@ -18851,7 +19089,7 @@
           </a:bodyPr>
           <a:lstStyle/>
           <a:p>
-            <a:pPr indent="0" marL="0">
+            <a:pPr marL="0" indent="0">
               <a:buNone/>
             </a:pPr>
             <a:r>
@@ -18917,7 +19155,7 @@
           </a:bodyPr>
           <a:lstStyle/>
           <a:p>
-            <a:pPr indent="0" marL="0">
+            <a:pPr marL="0" indent="0">
               <a:buNone/>
             </a:pPr>
             <a:r>
@@ -18983,7 +19221,7 @@
           </a:bodyPr>
           <a:lstStyle/>
           <a:p>
-            <a:pPr indent="0" marL="0">
+            <a:pPr marL="0" indent="0">
               <a:buNone/>
             </a:pPr>
             <a:r>
@@ -19017,6 +19255,7 @@
         <a:solidFill>
           <a:srgbClr val="FAF7EF"/>
         </a:solidFill>
+        <a:effectLst/>
       </p:bgPr>
     </p:bg>
     <p:spTree>
@@ -19104,7 +19343,7 @@
           <a:bodyPr wrap="square" lIns="0" tIns="0" rIns="0" bIns="0" rtlCol="0" anchor="ctr"/>
           <a:lstStyle/>
           <a:p>
-            <a:pPr algn="r" indent="0" marL="0">
+            <a:pPr marL="0" indent="0" algn="r">
               <a:buNone/>
             </a:pPr>
             <a:r>
@@ -19143,7 +19382,7 @@
           <a:bodyPr wrap="square" lIns="0" tIns="0" rIns="0" bIns="0" rtlCol="0" anchor="ctr"/>
           <a:lstStyle/>
           <a:p>
-            <a:pPr indent="0" marL="0">
+            <a:pPr marL="0" indent="0">
               <a:buNone/>
             </a:pPr>
             <a:r>
@@ -19184,7 +19423,7 @@
           </a:bodyPr>
           <a:lstStyle/>
           <a:p>
-            <a:pPr indent="0" marL="0">
+            <a:pPr marL="0" indent="0">
               <a:buNone/>
             </a:pPr>
             <a:r>
@@ -19250,7 +19489,7 @@
           <a:bodyPr wrap="square" lIns="0" tIns="0" rIns="0" bIns="0" rtlCol="0" anchor="ctr"/>
           <a:lstStyle/>
           <a:p>
-            <a:pPr algn="ctr" indent="0" marL="0">
+            <a:pPr marL="0" indent="0" algn="ctr">
               <a:buNone/>
             </a:pPr>
             <a:r>
@@ -19313,7 +19552,7 @@
           </a:bodyPr>
           <a:lstStyle/>
           <a:p>
-            <a:pPr indent="0" marL="0">
+            <a:pPr marL="0" indent="0">
               <a:buNone/>
             </a:pPr>
             <a:r>
@@ -19379,7 +19618,7 @@
           </a:bodyPr>
           <a:lstStyle/>
           <a:p>
-            <a:pPr indent="0" marL="0">
+            <a:pPr marL="0" indent="0">
               <a:buNone/>
             </a:pPr>
             <a:r>
@@ -19445,7 +19684,7 @@
           </a:bodyPr>
           <a:lstStyle/>
           <a:p>
-            <a:pPr indent="0" marL="0">
+            <a:pPr marL="0" indent="0">
               <a:buNone/>
             </a:pPr>
             <a:r>
@@ -19511,7 +19750,7 @@
           </a:bodyPr>
           <a:lstStyle/>
           <a:p>
-            <a:pPr indent="0" marL="0">
+            <a:pPr marL="0" indent="0">
               <a:buNone/>
             </a:pPr>
             <a:r>
@@ -19545,6 +19784,7 @@
         <a:solidFill>
           <a:srgbClr val="FAF7EF"/>
         </a:solidFill>
+        <a:effectLst/>
       </p:bgPr>
     </p:bg>
     <p:spTree>
@@ -19632,7 +19872,7 @@
           <a:bodyPr wrap="square" lIns="0" tIns="0" rIns="0" bIns="0" rtlCol="0" anchor="ctr"/>
           <a:lstStyle/>
           <a:p>
-            <a:pPr algn="r" indent="0" marL="0">
+            <a:pPr marL="0" indent="0" algn="r">
               <a:buNone/>
             </a:pPr>
             <a:r>
@@ -19671,7 +19911,7 @@
           <a:bodyPr wrap="square" lIns="0" tIns="0" rIns="0" bIns="0" rtlCol="0" anchor="ctr"/>
           <a:lstStyle/>
           <a:p>
-            <a:pPr indent="0" marL="0">
+            <a:pPr marL="0" indent="0">
               <a:buNone/>
             </a:pPr>
             <a:r>
@@ -19712,7 +19952,7 @@
           </a:bodyPr>
           <a:lstStyle/>
           <a:p>
-            <a:pPr indent="0" marL="0">
+            <a:pPr marL="0" indent="0">
               <a:buNone/>
             </a:pPr>
             <a:r>
@@ -19753,7 +19993,7 @@
           </a:bodyPr>
           <a:lstStyle/>
           <a:p>
-            <a:pPr indent="0" marL="0">
+            <a:pPr marL="0" indent="0">
               <a:buNone/>
             </a:pPr>
             <a:r>
@@ -19819,7 +20059,7 @@
           </a:bodyPr>
           <a:lstStyle/>
           <a:p>
-            <a:pPr indent="0" marL="0">
+            <a:pPr marL="0" indent="0">
               <a:buNone/>
             </a:pPr>
             <a:r>
@@ -19885,7 +20125,7 @@
           </a:bodyPr>
           <a:lstStyle/>
           <a:p>
-            <a:pPr indent="0" marL="0">
+            <a:pPr marL="0" indent="0">
               <a:buNone/>
             </a:pPr>
             <a:r>
@@ -19951,11 +20191,11 @@
           </a:bodyPr>
           <a:lstStyle/>
           <a:p>
-            <a:pPr indent="0" marL="0">
-              <a:buNone/>
-            </a:pPr>
-            <a:r>
-              <a:rPr lang="en-US" sz="1700" dirty="0">
+            <a:pPr marL="0" indent="0">
+              <a:buNone/>
+            </a:pPr>
+            <a:r>
+              <a:rPr lang="ko-KR" altLang="en-US" sz="1700">
                 <a:solidFill>
                   <a:srgbClr val="17212B"/>
                 </a:solidFill>
@@ -19963,7 +20203,40 @@
                 <a:ea typeface="Malgun Gothic" pitchFamily="34" charset="-122"/>
                 <a:cs typeface="Malgun Gothic" pitchFamily="34" charset="-120"/>
               </a:rPr>
-              <a:t>성능 패턴이지만, 측정과 불변성 규칙이 함께 필요하다.</a:t>
+              <a:t>성능 패턴이지만</a:t>
+            </a:r>
+            <a:r>
+              <a:rPr lang="en-US" altLang="ko-KR" sz="1700">
+                <a:solidFill>
+                  <a:srgbClr val="17212B"/>
+                </a:solidFill>
+                <a:latin typeface="Malgun Gothic" pitchFamily="34" charset="0"/>
+                <a:ea typeface="Malgun Gothic" pitchFamily="34" charset="-122"/>
+                <a:cs typeface="Malgun Gothic" pitchFamily="34" charset="-120"/>
+              </a:rPr>
+              <a:t>, </a:t>
+            </a:r>
+            <a:r>
+              <a:rPr lang="ko-KR" altLang="en-US" sz="1700">
+                <a:solidFill>
+                  <a:srgbClr val="17212B"/>
+                </a:solidFill>
+                <a:latin typeface="Malgun Gothic" pitchFamily="34" charset="0"/>
+                <a:ea typeface="Malgun Gothic" pitchFamily="34" charset="-122"/>
+                <a:cs typeface="Malgun Gothic" pitchFamily="34" charset="-120"/>
+              </a:rPr>
+              <a:t>측정과 불변성 원칙을 함께 지켜야 한다</a:t>
+            </a:r>
+            <a:r>
+              <a:rPr lang="en-US" altLang="ko-KR" sz="1700">
+                <a:solidFill>
+                  <a:srgbClr val="17212B"/>
+                </a:solidFill>
+                <a:latin typeface="Malgun Gothic" pitchFamily="34" charset="0"/>
+                <a:ea typeface="Malgun Gothic" pitchFamily="34" charset="-122"/>
+                <a:cs typeface="Malgun Gothic" pitchFamily="34" charset="-120"/>
+              </a:rPr>
+              <a:t>.</a:t>
             </a:r>
             <a:endParaRPr lang="en-US" sz="1700" dirty="0"/>
           </a:p>
@@ -19985,6 +20258,7 @@
         <a:solidFill>
           <a:srgbClr val="FAF7EF"/>
         </a:solidFill>
+        <a:effectLst/>
       </p:bgPr>
     </p:bg>
     <p:spTree>
@@ -20072,7 +20346,7 @@
           <a:bodyPr wrap="square" lIns="0" tIns="0" rIns="0" bIns="0" rtlCol="0" anchor="ctr"/>
           <a:lstStyle/>
           <a:p>
-            <a:pPr algn="r" indent="0" marL="0">
+            <a:pPr marL="0" indent="0" algn="r">
               <a:buNone/>
             </a:pPr>
             <a:r>
@@ -20111,7 +20385,7 @@
           <a:bodyPr wrap="square" lIns="0" tIns="0" rIns="0" bIns="0" rtlCol="0" anchor="ctr"/>
           <a:lstStyle/>
           <a:p>
-            <a:pPr indent="0" marL="0">
+            <a:pPr marL="0" indent="0">
               <a:buNone/>
             </a:pPr>
             <a:r>
@@ -20152,7 +20426,7 @@
           </a:bodyPr>
           <a:lstStyle/>
           <a:p>
-            <a:pPr indent="0" marL="0">
+            <a:pPr marL="0" indent="0">
               <a:buNone/>
             </a:pPr>
             <a:r>
@@ -20218,7 +20492,7 @@
           </a:bodyPr>
           <a:lstStyle/>
           <a:p>
-            <a:pPr indent="0" marL="0">
+            <a:pPr marL="0" indent="0">
               <a:buNone/>
             </a:pPr>
             <a:r>
@@ -20284,7 +20558,7 @@
           </a:bodyPr>
           <a:lstStyle/>
           <a:p>
-            <a:pPr indent="0" marL="0">
+            <a:pPr marL="0" indent="0">
               <a:buNone/>
             </a:pPr>
             <a:r>
@@ -20350,7 +20624,7 @@
           </a:bodyPr>
           <a:lstStyle/>
           <a:p>
-            <a:pPr indent="0" marL="0">
+            <a:pPr marL="0" indent="0">
               <a:buNone/>
             </a:pPr>
             <a:r>
@@ -20416,11 +20690,11 @@
           </a:bodyPr>
           <a:lstStyle/>
           <a:p>
-            <a:pPr indent="0" marL="0">
-              <a:buNone/>
-            </a:pPr>
-            <a:r>
-              <a:rPr lang="en-US" sz="1620" dirty="0">
+            <a:pPr marL="0" indent="0">
+              <a:buNone/>
+            </a:pPr>
+            <a:r>
+              <a:rPr lang="en-US" altLang="ko-KR" sz="1620">
                 <a:solidFill>
                   <a:srgbClr val="17212B"/>
                 </a:solidFill>
@@ -20428,7 +20702,29 @@
                 <a:ea typeface="Malgun Gothic" pitchFamily="34" charset="-122"/>
                 <a:cs typeface="Malgun Gothic" pitchFamily="34" charset="-120"/>
               </a:rPr>
-              <a:t>State 패턴의 상태 객체가 데이터가 없다면 공유 인스턴스로 쓸 수 있다.</a:t>
+              <a:t>State </a:t>
+            </a:r>
+            <a:r>
+              <a:rPr lang="ko-KR" altLang="en-US" sz="1620">
+                <a:solidFill>
+                  <a:srgbClr val="17212B"/>
+                </a:solidFill>
+                <a:latin typeface="Malgun Gothic" pitchFamily="34" charset="0"/>
+                <a:ea typeface="Malgun Gothic" pitchFamily="34" charset="-122"/>
+                <a:cs typeface="Malgun Gothic" pitchFamily="34" charset="-120"/>
+              </a:rPr>
+              <a:t>패턴의 상태 객체에 데이터가 없다면 공유 인스턴스로 쓸 수 있다</a:t>
+            </a:r>
+            <a:r>
+              <a:rPr lang="en-US" altLang="ko-KR" sz="1620">
+                <a:solidFill>
+                  <a:srgbClr val="17212B"/>
+                </a:solidFill>
+                <a:latin typeface="Malgun Gothic" pitchFamily="34" charset="0"/>
+                <a:ea typeface="Malgun Gothic" pitchFamily="34" charset="-122"/>
+                <a:cs typeface="Malgun Gothic" pitchFamily="34" charset="-120"/>
+              </a:rPr>
+              <a:t>.</a:t>
             </a:r>
             <a:endParaRPr lang="en-US" sz="1620" dirty="0"/>
           </a:p>
@@ -20450,6 +20746,7 @@
         <a:solidFill>
           <a:srgbClr val="FAF7EF"/>
         </a:solidFill>
+        <a:effectLst/>
       </p:bgPr>
     </p:bg>
     <p:spTree>
@@ -20537,7 +20834,7 @@
           <a:bodyPr wrap="square" lIns="0" tIns="0" rIns="0" bIns="0" rtlCol="0" anchor="ctr"/>
           <a:lstStyle/>
           <a:p>
-            <a:pPr algn="r" indent="0" marL="0">
+            <a:pPr marL="0" indent="0" algn="r">
               <a:buNone/>
             </a:pPr>
             <a:r>
@@ -20576,7 +20873,7 @@
           <a:bodyPr wrap="square" lIns="0" tIns="0" rIns="0" bIns="0" rtlCol="0" anchor="ctr"/>
           <a:lstStyle/>
           <a:p>
-            <a:pPr indent="0" marL="0">
+            <a:pPr marL="0" indent="0">
               <a:buNone/>
             </a:pPr>
             <a:r>
@@ -20617,7 +20914,7 @@
           </a:bodyPr>
           <a:lstStyle/>
           <a:p>
-            <a:pPr indent="0" marL="0">
+            <a:pPr marL="0" indent="0">
               <a:buNone/>
             </a:pPr>
             <a:r>
@@ -20658,7 +20955,7 @@
           </a:bodyPr>
           <a:lstStyle/>
           <a:p>
-            <a:pPr indent="0" marL="0">
+            <a:pPr marL="0" indent="0">
               <a:buNone/>
             </a:pPr>
             <a:r>
@@ -20724,7 +21021,7 @@
           </a:bodyPr>
           <a:lstStyle/>
           <a:p>
-            <a:pPr indent="0" marL="0">
+            <a:pPr marL="0" indent="0">
               <a:buNone/>
             </a:pPr>
             <a:r>
@@ -20790,7 +21087,7 @@
           </a:bodyPr>
           <a:lstStyle/>
           <a:p>
-            <a:pPr indent="0" marL="0">
+            <a:pPr marL="0" indent="0">
               <a:buNone/>
             </a:pPr>
             <a:r>
@@ -20856,7 +21153,7 @@
           </a:bodyPr>
           <a:lstStyle/>
           <a:p>
-            <a:pPr indent="0" marL="0">
+            <a:pPr marL="0" indent="0">
               <a:buNone/>
             </a:pPr>
             <a:r>
@@ -20890,6 +21187,7 @@
         <a:solidFill>
           <a:srgbClr val="FAF7EF"/>
         </a:solidFill>
+        <a:effectLst/>
       </p:bgPr>
     </p:bg>
     <p:spTree>
@@ -20977,7 +21275,7 @@
           <a:bodyPr wrap="square" lIns="0" tIns="0" rIns="0" bIns="0" rtlCol="0" anchor="ctr"/>
           <a:lstStyle/>
           <a:p>
-            <a:pPr algn="r" indent="0" marL="0">
+            <a:pPr marL="0" indent="0" algn="r">
               <a:buNone/>
             </a:pPr>
             <a:r>
@@ -21016,7 +21314,7 @@
           <a:bodyPr wrap="square" lIns="0" tIns="0" rIns="0" bIns="0" rtlCol="0" anchor="ctr"/>
           <a:lstStyle/>
           <a:p>
-            <a:pPr indent="0" marL="0">
+            <a:pPr marL="0" indent="0">
               <a:buNone/>
             </a:pPr>
             <a:r>
@@ -21057,11 +21355,11 @@
           </a:bodyPr>
           <a:lstStyle/>
           <a:p>
-            <a:pPr indent="0" marL="0">
-              <a:buNone/>
-            </a:pPr>
-            <a:r>
-              <a:rPr lang="en-US" sz="2500" b="1" dirty="0">
+            <a:pPr marL="0" indent="0">
+              <a:buNone/>
+            </a:pPr>
+            <a:r>
+              <a:rPr lang="ko-KR" altLang="en-US" sz="2500" b="1">
                 <a:solidFill>
                   <a:srgbClr val="17212B"/>
                 </a:solidFill>
@@ -21069,7 +21367,29 @@
                 <a:ea typeface="Malgun Gothic" pitchFamily="34" charset="-122"/>
                 <a:cs typeface="Malgun Gothic" pitchFamily="34" charset="-120"/>
               </a:rPr>
-              <a:t>나쁜 시작: 모든 나무가 모든 데이터를 가진다</a:t>
+              <a:t>잘못된 시작</a:t>
+            </a:r>
+            <a:r>
+              <a:rPr lang="en-US" altLang="ko-KR" sz="2500" b="1">
+                <a:solidFill>
+                  <a:srgbClr val="17212B"/>
+                </a:solidFill>
+                <a:latin typeface="Malgun Gothic" pitchFamily="34" charset="0"/>
+                <a:ea typeface="Malgun Gothic" pitchFamily="34" charset="-122"/>
+                <a:cs typeface="Malgun Gothic" pitchFamily="34" charset="-120"/>
+              </a:rPr>
+              <a:t>: </a:t>
+            </a:r>
+            <a:r>
+              <a:rPr lang="ko-KR" altLang="en-US" sz="2500" b="1">
+                <a:solidFill>
+                  <a:srgbClr val="17212B"/>
+                </a:solidFill>
+                <a:latin typeface="Malgun Gothic" pitchFamily="34" charset="0"/>
+                <a:ea typeface="Malgun Gothic" pitchFamily="34" charset="-122"/>
+                <a:cs typeface="Malgun Gothic" pitchFamily="34" charset="-120"/>
+              </a:rPr>
+              <a:t>모든 나무가 모든 데이터를 가진다</a:t>
             </a:r>
             <a:endParaRPr lang="en-US" sz="2500" dirty="0"/>
           </a:p>
@@ -21098,7 +21418,7 @@
           </a:bodyPr>
           <a:lstStyle/>
           <a:p>
-            <a:pPr indent="0" marL="0">
+            <a:pPr marL="0" indent="0">
               <a:buNone/>
             </a:pPr>
             <a:r>
@@ -21168,7 +21488,7 @@
           </a:bodyPr>
           <a:lstStyle/>
           <a:p>
-            <a:pPr indent="0" marL="0">
+            <a:pPr marL="0" indent="0">
               <a:buNone/>
             </a:pPr>
             <a:r>
@@ -21185,7 +21505,7 @@
             <a:endParaRPr lang="en-US" sz="1300" dirty="0"/>
           </a:p>
           <a:p>
-            <a:pPr indent="0" marL="0">
+            <a:pPr marL="0" indent="0">
               <a:buNone/>
             </a:pPr>
             <a:r>
@@ -21202,7 +21522,7 @@
             <a:endParaRPr lang="en-US" sz="1300" dirty="0"/>
           </a:p>
           <a:p>
-            <a:pPr indent="0" marL="0">
+            <a:pPr marL="0" indent="0">
               <a:buNone/>
             </a:pPr>
             <a:r>
@@ -21219,7 +21539,7 @@
             <a:endParaRPr lang="en-US" sz="1300" dirty="0"/>
           </a:p>
           <a:p>
-            <a:pPr indent="0" marL="0">
+            <a:pPr marL="0" indent="0">
               <a:buNone/>
             </a:pPr>
             <a:r>
@@ -21236,7 +21556,7 @@
             <a:endParaRPr lang="en-US" sz="1300" dirty="0"/>
           </a:p>
           <a:p>
-            <a:pPr indent="0" marL="0">
+            <a:pPr marL="0" indent="0">
               <a:buNone/>
             </a:pPr>
             <a:r>
@@ -21253,13 +21573,13 @@
             <a:endParaRPr lang="en-US" sz="1300" dirty="0"/>
           </a:p>
           <a:p>
-            <a:pPr indent="0" marL="0">
+            <a:pPr marL="0" indent="0">
               <a:buNone/>
             </a:pPr>
             <a:endParaRPr lang="en-US" sz="1300" dirty="0"/>
           </a:p>
           <a:p>
-            <a:pPr indent="0" marL="0">
+            <a:pPr marL="0" indent="0">
               <a:buNone/>
             </a:pPr>
             <a:r>
@@ -21276,7 +21596,7 @@
             <a:endParaRPr lang="en-US" sz="1300" dirty="0"/>
           </a:p>
           <a:p>
-            <a:pPr indent="0" marL="0">
+            <a:pPr marL="0" indent="0">
               <a:buNone/>
             </a:pPr>
             <a:r>
@@ -21293,7 +21613,7 @@
             <a:endParaRPr lang="en-US" sz="1300" dirty="0"/>
           </a:p>
           <a:p>
-            <a:pPr indent="0" marL="0">
+            <a:pPr marL="0" indent="0">
               <a:buNone/>
             </a:pPr>
             <a:r>
@@ -21310,7 +21630,7 @@
             <a:endParaRPr lang="en-US" sz="1300" dirty="0"/>
           </a:p>
           <a:p>
-            <a:pPr indent="0" marL="0">
+            <a:pPr marL="0" indent="0">
               <a:buNone/>
             </a:pPr>
             <a:r>
@@ -21344,6 +21664,7 @@
         <a:solidFill>
           <a:srgbClr val="FAF7EF"/>
         </a:solidFill>
+        <a:effectLst/>
       </p:bgPr>
     </p:bg>
     <p:spTree>
@@ -21431,7 +21752,7 @@
           <a:bodyPr wrap="square" lIns="0" tIns="0" rIns="0" bIns="0" rtlCol="0" anchor="ctr"/>
           <a:lstStyle/>
           <a:p>
-            <a:pPr algn="r" indent="0" marL="0">
+            <a:pPr marL="0" indent="0" algn="r">
               <a:buNone/>
             </a:pPr>
             <a:r>
@@ -21470,7 +21791,7 @@
           <a:bodyPr wrap="square" lIns="0" tIns="0" rIns="0" bIns="0" rtlCol="0" anchor="ctr"/>
           <a:lstStyle/>
           <a:p>
-            <a:pPr indent="0" marL="0">
+            <a:pPr marL="0" indent="0">
               <a:buNone/>
             </a:pPr>
             <a:r>
@@ -21511,7 +21832,7 @@
           </a:bodyPr>
           <a:lstStyle/>
           <a:p>
-            <a:pPr indent="0" marL="0">
+            <a:pPr marL="0" indent="0">
               <a:buNone/>
             </a:pPr>
             <a:r>
@@ -21552,7 +21873,7 @@
           </a:bodyPr>
           <a:lstStyle/>
           <a:p>
-            <a:pPr indent="0" marL="0">
+            <a:pPr marL="0" indent="0">
               <a:buNone/>
             </a:pPr>
             <a:r>
@@ -21618,7 +21939,7 @@
           </a:bodyPr>
           <a:lstStyle/>
           <a:p>
-            <a:pPr indent="0" marL="0">
+            <a:pPr marL="0" indent="0">
               <a:buNone/>
             </a:pPr>
             <a:r>
@@ -21684,7 +22005,7 @@
           </a:bodyPr>
           <a:lstStyle/>
           <a:p>
-            <a:pPr indent="0" marL="0">
+            <a:pPr marL="0" indent="0">
               <a:buNone/>
             </a:pPr>
             <a:r>
@@ -21750,7 +22071,7 @@
           </a:bodyPr>
           <a:lstStyle/>
           <a:p>
-            <a:pPr indent="0" marL="0">
+            <a:pPr marL="0" indent="0">
               <a:buNone/>
             </a:pPr>
             <a:r>
@@ -21784,6 +22105,7 @@
         <a:solidFill>
           <a:srgbClr val="FAF7EF"/>
         </a:solidFill>
+        <a:effectLst/>
       </p:bgPr>
     </p:bg>
     <p:spTree>
@@ -21871,7 +22193,7 @@
           <a:bodyPr wrap="square" lIns="0" tIns="0" rIns="0" bIns="0" rtlCol="0" anchor="ctr"/>
           <a:lstStyle/>
           <a:p>
-            <a:pPr algn="r" indent="0" marL="0">
+            <a:pPr marL="0" indent="0" algn="r">
               <a:buNone/>
             </a:pPr>
             <a:r>
@@ -21910,7 +22232,7 @@
           <a:bodyPr wrap="square" lIns="0" tIns="0" rIns="0" bIns="0" rtlCol="0" anchor="ctr"/>
           <a:lstStyle/>
           <a:p>
-            <a:pPr indent="0" marL="0">
+            <a:pPr marL="0" indent="0">
               <a:buNone/>
             </a:pPr>
             <a:r>
@@ -21951,7 +22273,7 @@
           </a:bodyPr>
           <a:lstStyle/>
           <a:p>
-            <a:pPr indent="0" marL="0">
+            <a:pPr marL="0" indent="0">
               <a:buNone/>
             </a:pPr>
             <a:r>
@@ -21992,7 +22314,7 @@
           </a:bodyPr>
           <a:lstStyle/>
           <a:p>
-            <a:pPr indent="0" marL="0">
+            <a:pPr marL="0" indent="0">
               <a:buNone/>
             </a:pPr>
             <a:r>
@@ -22062,7 +22384,7 @@
           </a:bodyPr>
           <a:lstStyle/>
           <a:p>
-            <a:pPr indent="0" marL="0">
+            <a:pPr marL="0" indent="0">
               <a:buNone/>
             </a:pPr>
             <a:r>
@@ -22079,7 +22401,7 @@
             <a:endParaRPr lang="en-US" sz="1170" dirty="0"/>
           </a:p>
           <a:p>
-            <a:pPr indent="0" marL="0">
+            <a:pPr marL="0" indent="0">
               <a:buNone/>
             </a:pPr>
             <a:r>
@@ -22096,7 +22418,7 @@
             <a:endParaRPr lang="en-US" sz="1170" dirty="0"/>
           </a:p>
           <a:p>
-            <a:pPr indent="0" marL="0">
+            <a:pPr marL="0" indent="0">
               <a:buNone/>
             </a:pPr>
             <a:r>
@@ -22113,7 +22435,7 @@
             <a:endParaRPr lang="en-US" sz="1170" dirty="0"/>
           </a:p>
           <a:p>
-            <a:pPr indent="0" marL="0">
+            <a:pPr marL="0" indent="0">
               <a:buNone/>
             </a:pPr>
             <a:r>
@@ -22130,7 +22452,7 @@
             <a:endParaRPr lang="en-US" sz="1170" dirty="0"/>
           </a:p>
           <a:p>
-            <a:pPr indent="0" marL="0">
+            <a:pPr marL="0" indent="0">
               <a:buNone/>
             </a:pPr>
             <a:r>
@@ -22147,13 +22469,13 @@
             <a:endParaRPr lang="en-US" sz="1170" dirty="0"/>
           </a:p>
           <a:p>
-            <a:pPr indent="0" marL="0">
+            <a:pPr marL="0" indent="0">
               <a:buNone/>
             </a:pPr>
             <a:endParaRPr lang="en-US" sz="1170" dirty="0"/>
           </a:p>
           <a:p>
-            <a:pPr indent="0" marL="0">
+            <a:pPr marL="0" indent="0">
               <a:buNone/>
             </a:pPr>
             <a:r>
@@ -22170,7 +22492,7 @@
             <a:endParaRPr lang="en-US" sz="1170" dirty="0"/>
           </a:p>
           <a:p>
-            <a:pPr indent="0" marL="0">
+            <a:pPr marL="0" indent="0">
               <a:buNone/>
             </a:pPr>
             <a:r>
@@ -22187,7 +22509,7 @@
             <a:endParaRPr lang="en-US" sz="1170" dirty="0"/>
           </a:p>
           <a:p>
-            <a:pPr indent="0" marL="0">
+            <a:pPr marL="0" indent="0">
               <a:buNone/>
             </a:pPr>
             <a:r>
@@ -22204,7 +22526,7 @@
             <a:endParaRPr lang="en-US" sz="1170" dirty="0"/>
           </a:p>
           <a:p>
-            <a:pPr indent="0" marL="0">
+            <a:pPr marL="0" indent="0">
               <a:buNone/>
             </a:pPr>
             <a:r>
@@ -22221,7 +22543,7 @@
             <a:endParaRPr lang="en-US" sz="1170" dirty="0"/>
           </a:p>
           <a:p>
-            <a:pPr indent="0" marL="0">
+            <a:pPr marL="0" indent="0">
               <a:buNone/>
             </a:pPr>
             <a:r>
@@ -22238,7 +22560,7 @@
             <a:endParaRPr lang="en-US" sz="1170" dirty="0"/>
           </a:p>
           <a:p>
-            <a:pPr indent="0" marL="0">
+            <a:pPr marL="0" indent="0">
               <a:buNone/>
             </a:pPr>
             <a:r>
@@ -22255,7 +22577,7 @@
             <a:endParaRPr lang="en-US" sz="1170" dirty="0"/>
           </a:p>
           <a:p>
-            <a:pPr indent="0" marL="0">
+            <a:pPr marL="0" indent="0">
               <a:buNone/>
             </a:pPr>
             <a:r>
@@ -22289,6 +22611,7 @@
         <a:solidFill>
           <a:srgbClr val="FAF7EF"/>
         </a:solidFill>
+        <a:effectLst/>
       </p:bgPr>
     </p:bg>
     <p:spTree>
@@ -22376,7 +22699,7 @@
           <a:bodyPr wrap="square" lIns="0" tIns="0" rIns="0" bIns="0" rtlCol="0" anchor="ctr"/>
           <a:lstStyle/>
           <a:p>
-            <a:pPr algn="r" indent="0" marL="0">
+            <a:pPr marL="0" indent="0" algn="r">
               <a:buNone/>
             </a:pPr>
             <a:r>
@@ -22415,7 +22738,7 @@
           <a:bodyPr wrap="square" lIns="0" tIns="0" rIns="0" bIns="0" rtlCol="0" anchor="ctr"/>
           <a:lstStyle/>
           <a:p>
-            <a:pPr indent="0" marL="0">
+            <a:pPr marL="0" indent="0">
               <a:buNone/>
             </a:pPr>
             <a:r>
@@ -22456,7 +22779,7 @@
           </a:bodyPr>
           <a:lstStyle/>
           <a:p>
-            <a:pPr indent="0" marL="0">
+            <a:pPr marL="0" indent="0">
               <a:buNone/>
             </a:pPr>
             <a:r>
@@ -22497,7 +22820,7 @@
           </a:bodyPr>
           <a:lstStyle/>
           <a:p>
-            <a:pPr indent="0" marL="0">
+            <a:pPr marL="0" indent="0">
               <a:buNone/>
             </a:pPr>
             <a:r>
@@ -22567,7 +22890,7 @@
           </a:bodyPr>
           <a:lstStyle/>
           <a:p>
-            <a:pPr indent="0" marL="0">
+            <a:pPr marL="0" indent="0">
               <a:buNone/>
             </a:pPr>
             <a:r>
@@ -22584,7 +22907,7 @@
             <a:endParaRPr lang="en-US" sz="1040" dirty="0"/>
           </a:p>
           <a:p>
-            <a:pPr indent="0" marL="0">
+            <a:pPr marL="0" indent="0">
               <a:buNone/>
             </a:pPr>
             <a:r>
@@ -22601,7 +22924,7 @@
             <a:endParaRPr lang="en-US" sz="1040" dirty="0"/>
           </a:p>
           <a:p>
-            <a:pPr indent="0" marL="0">
+            <a:pPr marL="0" indent="0">
               <a:buNone/>
             </a:pPr>
             <a:r>
@@ -22618,7 +22941,7 @@
             <a:endParaRPr lang="en-US" sz="1040" dirty="0"/>
           </a:p>
           <a:p>
-            <a:pPr indent="0" marL="0">
+            <a:pPr marL="0" indent="0">
               <a:buNone/>
             </a:pPr>
             <a:r>
@@ -22635,7 +22958,7 @@
             <a:endParaRPr lang="en-US" sz="1040" dirty="0"/>
           </a:p>
           <a:p>
-            <a:pPr indent="0" marL="0">
+            <a:pPr marL="0" indent="0">
               <a:buNone/>
             </a:pPr>
             <a:r>
@@ -22652,7 +22975,7 @@
             <a:endParaRPr lang="en-US" sz="1040" dirty="0"/>
           </a:p>
           <a:p>
-            <a:pPr indent="0" marL="0">
+            <a:pPr marL="0" indent="0">
               <a:buNone/>
             </a:pPr>
             <a:r>
@@ -22669,13 +22992,13 @@
             <a:endParaRPr lang="en-US" sz="1040" dirty="0"/>
           </a:p>
           <a:p>
-            <a:pPr indent="0" marL="0">
+            <a:pPr marL="0" indent="0">
               <a:buNone/>
             </a:pPr>
             <a:endParaRPr lang="en-US" sz="1040" dirty="0"/>
           </a:p>
           <a:p>
-            <a:pPr indent="0" marL="0">
+            <a:pPr marL="0" indent="0">
               <a:buNone/>
             </a:pPr>
             <a:r>
@@ -22692,7 +23015,7 @@
             <a:endParaRPr lang="en-US" sz="1040" dirty="0"/>
           </a:p>
           <a:p>
-            <a:pPr indent="0" marL="0">
+            <a:pPr marL="0" indent="0">
               <a:buNone/>
             </a:pPr>
             <a:r>
@@ -22709,7 +23032,7 @@
             <a:endParaRPr lang="en-US" sz="1040" dirty="0"/>
           </a:p>
           <a:p>
-            <a:pPr indent="0" marL="0">
+            <a:pPr marL="0" indent="0">
               <a:buNone/>
             </a:pPr>
             <a:r>
@@ -22726,7 +23049,7 @@
             <a:endParaRPr lang="en-US" sz="1040" dirty="0"/>
           </a:p>
           <a:p>
-            <a:pPr indent="0" marL="0">
+            <a:pPr marL="0" indent="0">
               <a:buNone/>
             </a:pPr>
             <a:r>
@@ -22743,7 +23066,7 @@
             <a:endParaRPr lang="en-US" sz="1040" dirty="0"/>
           </a:p>
           <a:p>
-            <a:pPr indent="0" marL="0">
+            <a:pPr marL="0" indent="0">
               <a:buNone/>
             </a:pPr>
             <a:r>
@@ -22760,7 +23083,7 @@
             <a:endParaRPr lang="en-US" sz="1040" dirty="0"/>
           </a:p>
           <a:p>
-            <a:pPr indent="0" marL="0">
+            <a:pPr marL="0" indent="0">
               <a:buNone/>
             </a:pPr>
             <a:r>
@@ -22777,7 +23100,7 @@
             <a:endParaRPr lang="en-US" sz="1040" dirty="0"/>
           </a:p>
           <a:p>
-            <a:pPr indent="0" marL="0">
+            <a:pPr marL="0" indent="0">
               <a:buNone/>
             </a:pPr>
             <a:r>
@@ -22794,7 +23117,7 @@
             <a:endParaRPr lang="en-US" sz="1040" dirty="0"/>
           </a:p>
           <a:p>
-            <a:pPr indent="0" marL="0">
+            <a:pPr marL="0" indent="0">
               <a:buNone/>
             </a:pPr>
             <a:r>
@@ -22811,7 +23134,7 @@
             <a:endParaRPr lang="en-US" sz="1040" dirty="0"/>
           </a:p>
           <a:p>
-            <a:pPr indent="0" marL="0">
+            <a:pPr marL="0" indent="0">
               <a:buNone/>
             </a:pPr>
             <a:r>
@@ -23130,4 +23453,319 @@
     </a:ext>
   </a:extLst>
 </a:theme>
+</file>
+
+<file path=ppt/theme/theme2.xml><?xml version="1.0" encoding="utf-8"?>
+<a:theme xmlns:a="http://schemas.openxmlformats.org/drawingml/2006/main" name="Office 테마">
+  <a:themeElements>
+    <a:clrScheme name="Office">
+      <a:dk1>
+        <a:sysClr val="windowText" lastClr="000000"/>
+      </a:dk1>
+      <a:lt1>
+        <a:sysClr val="window" lastClr="FFFFFF"/>
+      </a:lt1>
+      <a:dk2>
+        <a:srgbClr val="0E2841"/>
+      </a:dk2>
+      <a:lt2>
+        <a:srgbClr val="E8E8E8"/>
+      </a:lt2>
+      <a:accent1>
+        <a:srgbClr val="156082"/>
+      </a:accent1>
+      <a:accent2>
+        <a:srgbClr val="E97132"/>
+      </a:accent2>
+      <a:accent3>
+        <a:srgbClr val="196B24"/>
+      </a:accent3>
+      <a:accent4>
+        <a:srgbClr val="0F9ED5"/>
+      </a:accent4>
+      <a:accent5>
+        <a:srgbClr val="A02B93"/>
+      </a:accent5>
+      <a:accent6>
+        <a:srgbClr val="4EA72E"/>
+      </a:accent6>
+      <a:hlink>
+        <a:srgbClr val="467886"/>
+      </a:hlink>
+      <a:folHlink>
+        <a:srgbClr val="96607D"/>
+      </a:folHlink>
+    </a:clrScheme>
+    <a:fontScheme name="Office">
+      <a:majorFont>
+        <a:latin typeface="맑은 고딕" panose="02110004020202020204"/>
+        <a:ea typeface=""/>
+        <a:cs typeface=""/>
+        <a:font script="Jpan" typeface="游ゴシック Light"/>
+        <a:font script="Hang" typeface="맑은 고딕"/>
+        <a:font script="Hans" typeface="等线 Light"/>
+        <a:font script="Hant" typeface="新細明體"/>
+        <a:font script="Arab" typeface="Times New Roman"/>
+        <a:font script="Hebr" typeface="Times New Roman"/>
+        <a:font script="Thai" typeface="Angsana New"/>
+        <a:font script="Ethi" typeface="Nyala"/>
+        <a:font script="Beng" typeface="Vrinda"/>
+        <a:font script="Gujr" typeface="Shruti"/>
+        <a:font script="Khmr" typeface="MoolBoran"/>
+        <a:font script="Knda" typeface="Tunga"/>
+        <a:font script="Guru" typeface="Raavi"/>
+        <a:font script="Cans" typeface="Euphemia"/>
+        <a:font script="Cher" typeface="Plantagenet Cherokee"/>
+        <a:font script="Yiii" typeface="Microsoft Yi Baiti"/>
+        <a:font script="Tibt" typeface="Microsoft Himalaya"/>
+        <a:font script="Thaa" typeface="MV Boli"/>
+        <a:font script="Deva" typeface="Mangal"/>
+        <a:font script="Telu" typeface="Gautami"/>
+        <a:font script="Taml" typeface="Latha"/>
+        <a:font script="Syrc" typeface="Estrangelo Edessa"/>
+        <a:font script="Orya" typeface="Kalinga"/>
+        <a:font script="Mlym" typeface="Kartika"/>
+        <a:font script="Laoo" typeface="DokChampa"/>
+        <a:font script="Sinh" typeface="Iskoola Pota"/>
+        <a:font script="Mong" typeface="Mongolian Baiti"/>
+        <a:font script="Viet" typeface="Times New Roman"/>
+        <a:font script="Uigh" typeface="Microsoft Uighur"/>
+        <a:font script="Geor" typeface="Sylfaen"/>
+        <a:font script="Armn" typeface="Arial"/>
+        <a:font script="Bugi" typeface="Leelawadee UI"/>
+        <a:font script="Bopo" typeface="Microsoft JhengHei"/>
+        <a:font script="Java" typeface="Javanese Text"/>
+        <a:font script="Lisu" typeface="Segoe UI"/>
+        <a:font script="Mymr" typeface="Myanmar Text"/>
+        <a:font script="Nkoo" typeface="Ebrima"/>
+        <a:font script="Olck" typeface="Nirmala UI"/>
+        <a:font script="Osma" typeface="Ebrima"/>
+        <a:font script="Phag" typeface="Phagspa"/>
+        <a:font script="Syrn" typeface="Estrangelo Edessa"/>
+        <a:font script="Syrj" typeface="Estrangelo Edessa"/>
+        <a:font script="Syre" typeface="Estrangelo Edessa"/>
+        <a:font script="Sora" typeface="Nirmala UI"/>
+        <a:font script="Tale" typeface="Microsoft Tai Le"/>
+        <a:font script="Talu" typeface="Microsoft New Tai Lue"/>
+        <a:font script="Tfng" typeface="Ebrima"/>
+      </a:majorFont>
+      <a:minorFont>
+        <a:latin typeface="맑은 고딕" panose="02110004020202020204"/>
+        <a:ea typeface=""/>
+        <a:cs typeface=""/>
+        <a:font script="Jpan" typeface="游ゴシック"/>
+        <a:font script="Hang" typeface="맑은 고딕"/>
+        <a:font script="Hans" typeface="等线"/>
+        <a:font script="Hant" typeface="新細明體"/>
+        <a:font script="Arab" typeface="Arial"/>
+        <a:font script="Hebr" typeface="Arial"/>
+        <a:font script="Thai" typeface="Cordia New"/>
+        <a:font script="Ethi" typeface="Nyala"/>
+        <a:font script="Beng" typeface="Vrinda"/>
+        <a:font script="Gujr" typeface="Shruti"/>
+        <a:font script="Khmr" typeface="DaunPenh"/>
+        <a:font script="Knda" typeface="Tunga"/>
+        <a:font script="Guru" typeface="Raavi"/>
+        <a:font script="Cans" typeface="Euphemia"/>
+        <a:font script="Cher" typeface="Plantagenet Cherokee"/>
+        <a:font script="Yiii" typeface="Microsoft Yi Baiti"/>
+        <a:font script="Tibt" typeface="Microsoft Himalaya"/>
+        <a:font script="Thaa" typeface="MV Boli"/>
+        <a:font script="Deva" typeface="Mangal"/>
+        <a:font script="Telu" typeface="Gautami"/>
+        <a:font script="Taml" typeface="Latha"/>
+        <a:font script="Syrc" typeface="Estrangelo Edessa"/>
+        <a:font script="Orya" typeface="Kalinga"/>
+        <a:font script="Mlym" typeface="Kartika"/>
+        <a:font script="Laoo" typeface="DokChampa"/>
+        <a:font script="Sinh" typeface="Iskoola Pota"/>
+        <a:font script="Mong" typeface="Mongolian Baiti"/>
+        <a:font script="Viet" typeface="Arial"/>
+        <a:font script="Uigh" typeface="Microsoft Uighur"/>
+        <a:font script="Geor" typeface="Sylfaen"/>
+        <a:font script="Armn" typeface="Arial"/>
+        <a:font script="Bugi" typeface="Leelawadee UI"/>
+        <a:font script="Bopo" typeface="Microsoft JhengHei"/>
+        <a:font script="Java" typeface="Javanese Text"/>
+        <a:font script="Lisu" typeface="Segoe UI"/>
+        <a:font script="Mymr" typeface="Myanmar Text"/>
+        <a:font script="Nkoo" typeface="Ebrima"/>
+        <a:font script="Olck" typeface="Nirmala UI"/>
+        <a:font script="Osma" typeface="Ebrima"/>
+        <a:font script="Phag" typeface="Phagspa"/>
+        <a:font script="Syrn" typeface="Estrangelo Edessa"/>
+        <a:font script="Syrj" typeface="Estrangelo Edessa"/>
+        <a:font script="Syre" typeface="Estrangelo Edessa"/>
+        <a:font script="Sora" typeface="Nirmala UI"/>
+        <a:font script="Tale" typeface="Microsoft Tai Le"/>
+        <a:font script="Talu" typeface="Microsoft New Tai Lue"/>
+        <a:font script="Tfng" typeface="Ebrima"/>
+      </a:minorFont>
+    </a:fontScheme>
+    <a:fmtScheme name="Office">
+      <a:fillStyleLst>
+        <a:solidFill>
+          <a:schemeClr val="phClr"/>
+        </a:solidFill>
+        <a:gradFill rotWithShape="1">
+          <a:gsLst>
+            <a:gs pos="0">
+              <a:schemeClr val="phClr">
+                <a:lumMod val="110000"/>
+                <a:satMod val="105000"/>
+                <a:tint val="67000"/>
+              </a:schemeClr>
+            </a:gs>
+            <a:gs pos="50000">
+              <a:schemeClr val="phClr">
+                <a:lumMod val="105000"/>
+                <a:satMod val="103000"/>
+                <a:tint val="73000"/>
+              </a:schemeClr>
+            </a:gs>
+            <a:gs pos="100000">
+              <a:schemeClr val="phClr">
+                <a:lumMod val="105000"/>
+                <a:satMod val="109000"/>
+                <a:tint val="81000"/>
+              </a:schemeClr>
+            </a:gs>
+          </a:gsLst>
+          <a:lin ang="5400000" scaled="0"/>
+        </a:gradFill>
+        <a:gradFill rotWithShape="1">
+          <a:gsLst>
+            <a:gs pos="0">
+              <a:schemeClr val="phClr">
+                <a:satMod val="103000"/>
+                <a:lumMod val="102000"/>
+                <a:tint val="94000"/>
+              </a:schemeClr>
+            </a:gs>
+            <a:gs pos="50000">
+              <a:schemeClr val="phClr">
+                <a:satMod val="110000"/>
+                <a:lumMod val="100000"/>
+                <a:shade val="100000"/>
+              </a:schemeClr>
+            </a:gs>
+            <a:gs pos="100000">
+              <a:schemeClr val="phClr">
+                <a:lumMod val="99000"/>
+                <a:satMod val="120000"/>
+                <a:shade val="78000"/>
+              </a:schemeClr>
+            </a:gs>
+          </a:gsLst>
+          <a:lin ang="5400000" scaled="0"/>
+        </a:gradFill>
+      </a:fillStyleLst>
+      <a:lnStyleLst>
+        <a:ln w="12700" cap="flat" cmpd="sng" algn="ctr">
+          <a:solidFill>
+            <a:schemeClr val="phClr"/>
+          </a:solidFill>
+          <a:prstDash val="solid"/>
+          <a:miter lim="800000"/>
+        </a:ln>
+        <a:ln w="19050" cap="flat" cmpd="sng" algn="ctr">
+          <a:solidFill>
+            <a:schemeClr val="phClr"/>
+          </a:solidFill>
+          <a:prstDash val="solid"/>
+          <a:miter lim="800000"/>
+        </a:ln>
+        <a:ln w="25400" cap="flat" cmpd="sng" algn="ctr">
+          <a:solidFill>
+            <a:schemeClr val="phClr"/>
+          </a:solidFill>
+          <a:prstDash val="solid"/>
+          <a:miter lim="800000"/>
+        </a:ln>
+      </a:lnStyleLst>
+      <a:effectStyleLst>
+        <a:effectStyle>
+          <a:effectLst/>
+        </a:effectStyle>
+        <a:effectStyle>
+          <a:effectLst/>
+        </a:effectStyle>
+        <a:effectStyle>
+          <a:effectLst>
+            <a:outerShdw blurRad="57150" dist="19050" dir="5400000" algn="ctr" rotWithShape="0">
+              <a:srgbClr val="000000">
+                <a:alpha val="63000"/>
+              </a:srgbClr>
+            </a:outerShdw>
+          </a:effectLst>
+        </a:effectStyle>
+      </a:effectStyleLst>
+      <a:bgFillStyleLst>
+        <a:solidFill>
+          <a:schemeClr val="phClr"/>
+        </a:solidFill>
+        <a:solidFill>
+          <a:schemeClr val="phClr">
+            <a:tint val="95000"/>
+            <a:satMod val="170000"/>
+          </a:schemeClr>
+        </a:solidFill>
+        <a:gradFill rotWithShape="1">
+          <a:gsLst>
+            <a:gs pos="0">
+              <a:schemeClr val="phClr">
+                <a:tint val="93000"/>
+                <a:satMod val="150000"/>
+                <a:shade val="98000"/>
+                <a:lumMod val="102000"/>
+              </a:schemeClr>
+            </a:gs>
+            <a:gs pos="50000">
+              <a:schemeClr val="phClr">
+                <a:tint val="98000"/>
+                <a:satMod val="130000"/>
+                <a:shade val="90000"/>
+                <a:lumMod val="103000"/>
+              </a:schemeClr>
+            </a:gs>
+            <a:gs pos="100000">
+              <a:schemeClr val="phClr">
+                <a:shade val="63000"/>
+                <a:satMod val="120000"/>
+              </a:schemeClr>
+            </a:gs>
+          </a:gsLst>
+          <a:lin ang="5400000" scaled="0"/>
+        </a:gradFill>
+      </a:bgFillStyleLst>
+    </a:fmtScheme>
+  </a:themeElements>
+  <a:objectDefaults>
+    <a:lnDef>
+      <a:spPr/>
+      <a:bodyPr/>
+      <a:lstStyle/>
+      <a:style>
+        <a:lnRef idx="2">
+          <a:schemeClr val="accent1"/>
+        </a:lnRef>
+        <a:fillRef idx="0">
+          <a:schemeClr val="accent1"/>
+        </a:fillRef>
+        <a:effectRef idx="1">
+          <a:schemeClr val="accent1"/>
+        </a:effectRef>
+        <a:fontRef idx="minor">
+          <a:schemeClr val="tx1"/>
+        </a:fontRef>
+      </a:style>
+    </a:lnDef>
+  </a:objectDefaults>
+  <a:extraClrSchemeLst/>
+  <a:extLst>
+    <a:ext uri="{05A4C25C-085E-4340-85A3-A5531E510DB2}">
+      <thm15:themeFamily xmlns:thm15="http://schemas.microsoft.com/office/thememl/2012/main" name="Office Theme" id="{2E142A2C-CD16-42D6-873A-C26D2A0506FA}" vid="{1BDDFF52-6CD6-40A5-AB3C-68EB2F1E4D0A}"/>
+    </a:ext>
+  </a:extLst>
+</a:theme>
 </file>
--- a/03차시_Flyweight/강의자료/유니티 프로그래밍 패턴 3차시 - Flyweight.pptx
+++ b/03차시_Flyweight/강의자료/유니티 프로그래밍 패턴 3차시 - Flyweight.pptx
@@ -5,45 +5,43 @@
     <p:sldMasterId id="2147483648" r:id="rId1"/>
   </p:sldMasterIdLst>
   <p:notesMasterIdLst>
-    <p:notesMasterId r:id="rId38"/>
+    <p:notesMasterId r:id="rId36"/>
   </p:notesMasterIdLst>
   <p:sldIdLst>
     <p:sldId id="256" r:id="rId2"/>
     <p:sldId id="257" r:id="rId3"/>
-    <p:sldId id="258" r:id="rId4"/>
-    <p:sldId id="259" r:id="rId5"/>
-    <p:sldId id="260" r:id="rId6"/>
-    <p:sldId id="261" r:id="rId7"/>
-    <p:sldId id="262" r:id="rId8"/>
-    <p:sldId id="263" r:id="rId9"/>
-    <p:sldId id="264" r:id="rId10"/>
-    <p:sldId id="265" r:id="rId11"/>
-    <p:sldId id="266" r:id="rId12"/>
-    <p:sldId id="267" r:id="rId13"/>
-    <p:sldId id="268" r:id="rId14"/>
-    <p:sldId id="269" r:id="rId15"/>
-    <p:sldId id="270" r:id="rId16"/>
-    <p:sldId id="271" r:id="rId17"/>
-    <p:sldId id="272" r:id="rId18"/>
-    <p:sldId id="273" r:id="rId19"/>
-    <p:sldId id="274" r:id="rId20"/>
-    <p:sldId id="275" r:id="rId21"/>
-    <p:sldId id="276" r:id="rId22"/>
-    <p:sldId id="277" r:id="rId23"/>
-    <p:sldId id="278" r:id="rId24"/>
-    <p:sldId id="279" r:id="rId25"/>
-    <p:sldId id="280" r:id="rId26"/>
-    <p:sldId id="281" r:id="rId27"/>
-    <p:sldId id="282" r:id="rId28"/>
-    <p:sldId id="283" r:id="rId29"/>
-    <p:sldId id="284" r:id="rId30"/>
-    <p:sldId id="285" r:id="rId31"/>
-    <p:sldId id="286" r:id="rId32"/>
-    <p:sldId id="287" r:id="rId33"/>
-    <p:sldId id="288" r:id="rId34"/>
-    <p:sldId id="289" r:id="rId35"/>
-    <p:sldId id="290" r:id="rId36"/>
-    <p:sldId id="291" r:id="rId37"/>
+    <p:sldId id="260" r:id="rId4"/>
+    <p:sldId id="261" r:id="rId5"/>
+    <p:sldId id="262" r:id="rId6"/>
+    <p:sldId id="263" r:id="rId7"/>
+    <p:sldId id="264" r:id="rId8"/>
+    <p:sldId id="265" r:id="rId9"/>
+    <p:sldId id="266" r:id="rId10"/>
+    <p:sldId id="267" r:id="rId11"/>
+    <p:sldId id="268" r:id="rId12"/>
+    <p:sldId id="269" r:id="rId13"/>
+    <p:sldId id="270" r:id="rId14"/>
+    <p:sldId id="271" r:id="rId15"/>
+    <p:sldId id="272" r:id="rId16"/>
+    <p:sldId id="273" r:id="rId17"/>
+    <p:sldId id="274" r:id="rId18"/>
+    <p:sldId id="275" r:id="rId19"/>
+    <p:sldId id="276" r:id="rId20"/>
+    <p:sldId id="277" r:id="rId21"/>
+    <p:sldId id="278" r:id="rId22"/>
+    <p:sldId id="279" r:id="rId23"/>
+    <p:sldId id="280" r:id="rId24"/>
+    <p:sldId id="281" r:id="rId25"/>
+    <p:sldId id="282" r:id="rId26"/>
+    <p:sldId id="283" r:id="rId27"/>
+    <p:sldId id="284" r:id="rId28"/>
+    <p:sldId id="285" r:id="rId29"/>
+    <p:sldId id="286" r:id="rId30"/>
+    <p:sldId id="287" r:id="rId31"/>
+    <p:sldId id="288" r:id="rId32"/>
+    <p:sldId id="289" r:id="rId33"/>
+    <p:sldId id="290" r:id="rId34"/>
+    <p:sldId id="291" r:id="rId35"/>
   </p:sldIdLst>
   <p:sldSz cx="9144000" cy="5715000" type="screen16x10"/>
   <p:notesSz cx="5715000" cy="9144000"/>
@@ -449,9 +447,66 @@
           <a:lstStyle/>
           <a:p>
             <a:r>
-              <a:rPr lang="en-US" dirty="0"/>
-              <a:t>원문의 그림은 여러 나무가 하나의 Model을 공유하는 구조를 보여준다.</a:t>
-            </a:r>
+              <a:rPr lang="ko-KR" altLang="en-US"/>
+              <a:t>원문은 </a:t>
+            </a:r>
+            <a:r>
+              <a:rPr lang="en-US"/>
+              <a:t>Direct3D</a:t>
+            </a:r>
+            <a:r>
+              <a:rPr lang="ko-KR" altLang="en-US"/>
+              <a:t>와 </a:t>
+            </a:r>
+            <a:r>
+              <a:rPr lang="en-US"/>
+              <a:t>OpenGL</a:t>
+            </a:r>
+            <a:r>
+              <a:rPr lang="ko-KR" altLang="en-US"/>
+              <a:t>의 </a:t>
+            </a:r>
+            <a:r>
+              <a:rPr lang="en-US"/>
+              <a:t>instanced rendering</a:t>
+            </a:r>
+            <a:r>
+              <a:rPr lang="ko-KR" altLang="en-US"/>
+              <a:t>을 언급한다</a:t>
+            </a:r>
+            <a:r>
+              <a:rPr lang="en-US" altLang="ko-KR"/>
+              <a:t>. </a:t>
+            </a:r>
+            <a:r>
+              <a:rPr lang="en-US"/>
+              <a:t>Unity</a:t>
+            </a:r>
+            <a:r>
+              <a:rPr lang="ko-KR" altLang="en-US"/>
+              <a:t>에서도 </a:t>
+            </a:r>
+            <a:r>
+              <a:rPr lang="en-US"/>
+              <a:t>GPU Instancing</a:t>
+            </a:r>
+            <a:r>
+              <a:rPr lang="ko-KR" altLang="en-US"/>
+              <a:t>과 </a:t>
+            </a:r>
+            <a:r>
+              <a:rPr lang="en-US"/>
+              <a:t>Graphics.DrawMeshInstanced</a:t>
+            </a:r>
+            <a:r>
+              <a:rPr lang="ko-KR" altLang="en-US"/>
+              <a:t>가 같은 개념을 따른다</a:t>
+            </a:r>
+            <a:r>
+              <a:rPr lang="en-US" altLang="ko-KR"/>
+              <a:t>.</a:t>
+            </a:r>
+            <a:endParaRPr lang="en-US" dirty="0"/>
           </a:p>
         </p:txBody>
       </p:sp>
@@ -536,9 +591,46 @@
           <a:lstStyle/>
           <a:p>
             <a:r>
-              <a:rPr lang="en-US" dirty="0"/>
-              <a:t>원문은 Flyweight와 Type Object가 비슷해 보이지만 의도가 다르다고 설명한다.</a:t>
-            </a:r>
+              <a:rPr lang="ko-KR" altLang="en-US"/>
+              <a:t>실제 </a:t>
+            </a:r>
+            <a:r>
+              <a:rPr lang="en-US" altLang="ko-KR"/>
+              <a:t>Unity </a:t>
+            </a:r>
+            <a:r>
+              <a:rPr lang="ko-KR" altLang="en-US"/>
+              <a:t>프로젝트에서는 배치 크기</a:t>
+            </a:r>
+            <a:r>
+              <a:rPr lang="en-US" altLang="ko-KR"/>
+              <a:t>, </a:t>
+            </a:r>
+            <a:r>
+              <a:rPr lang="ko-KR" altLang="en-US"/>
+              <a:t>머티리얼 설정</a:t>
+            </a:r>
+            <a:r>
+              <a:rPr lang="en-US" altLang="ko-KR"/>
+              <a:t>, SRP Batcher </a:t>
+            </a:r>
+            <a:r>
+              <a:rPr lang="ko-KR" altLang="en-US"/>
+              <a:t>등 추가로 고려할 사항이 있지만</a:t>
+            </a:r>
+            <a:r>
+              <a:rPr lang="en-US" altLang="ko-KR"/>
+              <a:t>, </a:t>
+            </a:r>
+            <a:r>
+              <a:rPr lang="ko-KR" altLang="en-US"/>
+              <a:t>수업에서는 핵심 구조만 보여준다</a:t>
+            </a:r>
+            <a:r>
+              <a:rPr lang="en-US" altLang="ko-KR"/>
+              <a:t>.</a:t>
+            </a:r>
+            <a:endParaRPr lang="en-US" dirty="0"/>
           </a:p>
         </p:txBody>
       </p:sp>
@@ -623,66 +715,9 @@
           <a:lstStyle/>
           <a:p>
             <a:r>
-              <a:rPr lang="ko-KR" altLang="en-US"/>
-              <a:t>원문은 </a:t>
-            </a:r>
-            <a:r>
-              <a:rPr lang="en-US"/>
-              <a:t>Direct3D</a:t>
-            </a:r>
-            <a:r>
-              <a:rPr lang="ko-KR" altLang="en-US"/>
-              <a:t>와 </a:t>
-            </a:r>
-            <a:r>
-              <a:rPr lang="en-US"/>
-              <a:t>OpenGL</a:t>
-            </a:r>
-            <a:r>
-              <a:rPr lang="ko-KR" altLang="en-US"/>
-              <a:t>의 </a:t>
-            </a:r>
-            <a:r>
-              <a:rPr lang="en-US"/>
-              <a:t>instanced rendering</a:t>
-            </a:r>
-            <a:r>
-              <a:rPr lang="ko-KR" altLang="en-US"/>
-              <a:t>을 언급한다</a:t>
-            </a:r>
-            <a:r>
-              <a:rPr lang="en-US" altLang="ko-KR"/>
-              <a:t>. </a:t>
-            </a:r>
-            <a:r>
-              <a:rPr lang="en-US"/>
-              <a:t>Unity</a:t>
-            </a:r>
-            <a:r>
-              <a:rPr lang="ko-KR" altLang="en-US"/>
-              <a:t>에서도 </a:t>
-            </a:r>
-            <a:r>
-              <a:rPr lang="en-US"/>
-              <a:t>GPU Instancing</a:t>
-            </a:r>
-            <a:r>
-              <a:rPr lang="ko-KR" altLang="en-US"/>
-              <a:t>과 </a:t>
-            </a:r>
-            <a:r>
-              <a:rPr lang="en-US"/>
-              <a:t>Graphics.DrawMeshInstanced</a:t>
-            </a:r>
-            <a:r>
-              <a:rPr lang="ko-KR" altLang="en-US"/>
-              <a:t>가 같은 개념을 따른다</a:t>
-            </a:r>
-            <a:r>
-              <a:rPr lang="en-US" altLang="ko-KR"/>
-              <a:t>.</a:t>
-            </a:r>
-            <a:endParaRPr lang="en-US" dirty="0"/>
+              <a:rPr lang="en-US" dirty="0"/>
+              <a:t>원문은 context-free 상태를 intrinsic state로 설명하고, 인스턴스마다 다른 값을 extrinsic state로 설명한다.</a:t>
+            </a:r>
           </a:p>
         </p:txBody>
       </p:sp>
@@ -767,46 +802,9 @@
           <a:lstStyle/>
           <a:p>
             <a:r>
-              <a:rPr lang="ko-KR" altLang="en-US"/>
-              <a:t>실제 </a:t>
-            </a:r>
-            <a:r>
-              <a:rPr lang="en-US" altLang="ko-KR"/>
-              <a:t>Unity </a:t>
-            </a:r>
-            <a:r>
-              <a:rPr lang="ko-KR" altLang="en-US"/>
-              <a:t>프로젝트에서는 배치 크기</a:t>
-            </a:r>
-            <a:r>
-              <a:rPr lang="en-US" altLang="ko-KR"/>
-              <a:t>, </a:t>
-            </a:r>
-            <a:r>
-              <a:rPr lang="ko-KR" altLang="en-US"/>
-              <a:t>머티리얼 설정</a:t>
-            </a:r>
-            <a:r>
-              <a:rPr lang="en-US" altLang="ko-KR"/>
-              <a:t>, SRP Batcher </a:t>
-            </a:r>
-            <a:r>
-              <a:rPr lang="ko-KR" altLang="en-US"/>
-              <a:t>등 추가로 고려할 사항이 있지만</a:t>
-            </a:r>
-            <a:r>
-              <a:rPr lang="en-US" altLang="ko-KR"/>
-              <a:t>, </a:t>
-            </a:r>
-            <a:r>
-              <a:rPr lang="ko-KR" altLang="en-US"/>
-              <a:t>수업에서는 핵심 구조만 보여준다</a:t>
-            </a:r>
-            <a:r>
-              <a:rPr lang="en-US" altLang="ko-KR"/>
-              <a:t>.</a:t>
-            </a:r>
-            <a:endParaRPr lang="en-US" dirty="0"/>
+              <a:rPr lang="en-US" dirty="0"/>
+              <a:t>학생에게 Flyweight 판단 기준을 연습시키는 슬라이드다.</a:t>
+            </a:r>
           </a:p>
         </p:txBody>
       </p:sp>
@@ -891,9 +889,30 @@
           <a:lstStyle/>
           <a:p>
             <a:r>
-              <a:rPr lang="en-US" dirty="0"/>
-              <a:t>원문은 context-free 상태를 intrinsic state로 설명하고, 인스턴스마다 다른 값을 extrinsic state로 설명한다.</a:t>
-            </a:r>
+              <a:rPr lang="ko-KR" altLang="en-US"/>
+              <a:t>원문은 </a:t>
+            </a:r>
+            <a:r>
+              <a:rPr lang="en-US" altLang="ko-KR"/>
+              <a:t>Terrain</a:t>
+            </a:r>
+            <a:r>
+              <a:rPr lang="ko-KR" altLang="en-US"/>
+              <a:t>의 메서드가 </a:t>
+            </a:r>
+            <a:r>
+              <a:rPr lang="en-US" altLang="ko-KR"/>
+              <a:t>const</a:t>
+            </a:r>
+            <a:r>
+              <a:rPr lang="ko-KR" altLang="en-US"/>
+              <a:t>라는 점을 들어 공유 객체를 함부로 변경하면 안 된다고 강조한다</a:t>
+            </a:r>
+            <a:r>
+              <a:rPr lang="en-US" altLang="ko-KR"/>
+              <a:t>.</a:t>
+            </a:r>
+            <a:endParaRPr lang="en-US" dirty="0"/>
           </a:p>
         </p:txBody>
       </p:sp>
@@ -979,7 +998,7 @@
           <a:p>
             <a:r>
               <a:rPr lang="en-US" dirty="0"/>
-              <a:t>학생에게 Flyweight 판단 기준을 연습시키는 슬라이드다.</a:t>
+              <a:t>원문은 나무 다음으로 지형 타일 예시를 든다.</a:t>
             </a:r>
           </a:p>
         </p:txBody>
@@ -1066,7 +1085,7 @@
           <a:p>
             <a:r>
               <a:rPr lang="en-US" dirty="0"/>
-              <a:t>원문은 Terrain의 메서드가 const인 점을 짚으며 공유 객체는 변경하면 안 된다고 설명한다.</a:t>
+              <a:t>원문은 enum으로 지형 타입을 저장하고 switch로 movement cost와 water 여부를 반환하는 방식을 먼저 보여준다.</a:t>
             </a:r>
           </a:p>
         </p:txBody>
@@ -1152,9 +1171,22 @@
           <a:lstStyle/>
           <a:p>
             <a:r>
-              <a:rPr lang="en-US" dirty="0"/>
-              <a:t>원문은 나무 다음으로 지형 타일 예시를 든다.</a:t>
-            </a:r>
+              <a:rPr lang="ko-KR" altLang="en-US"/>
+              <a:t>원문은 이 방식이 동작은 하지만 보기 좋지 않다고 설명한다</a:t>
+            </a:r>
+            <a:r>
+              <a:rPr lang="en-US" altLang="ko-KR"/>
+              <a:t>. </a:t>
+            </a:r>
+            <a:r>
+              <a:rPr lang="ko-KR" altLang="en-US"/>
+              <a:t>객체가 본래 제공해야 할 캡슐화를 잃기 때문이다</a:t>
+            </a:r>
+            <a:r>
+              <a:rPr lang="en-US" altLang="ko-KR"/>
+              <a:t>.</a:t>
+            </a:r>
+            <a:endParaRPr lang="en-US" dirty="0"/>
           </a:p>
         </p:txBody>
       </p:sp>
@@ -1239,9 +1271,38 @@
           <a:lstStyle/>
           <a:p>
             <a:r>
-              <a:rPr lang="en-US" dirty="0"/>
-              <a:t>원문은 enum으로 지형 타입을 저장하고 switch로 movement cost와 water 여부를 반환하는 방식을 먼저 보여준다.</a:t>
-            </a:r>
+              <a:rPr lang="ko-KR" altLang="en-US"/>
+              <a:t>원문의 </a:t>
+            </a:r>
+            <a:r>
+              <a:rPr lang="en-US" altLang="ko-KR"/>
+              <a:t>Terrain </a:t>
+            </a:r>
+            <a:r>
+              <a:rPr lang="ko-KR" altLang="en-US"/>
+              <a:t>클래스를 </a:t>
+            </a:r>
+            <a:r>
+              <a:rPr lang="en-US" altLang="ko-KR"/>
+              <a:t>C#</a:t>
+            </a:r>
+            <a:r>
+              <a:rPr lang="ko-KR" altLang="en-US"/>
+              <a:t>으로 옮긴다</a:t>
+            </a:r>
+            <a:r>
+              <a:rPr lang="en-US" altLang="ko-KR"/>
+              <a:t>. </a:t>
+            </a:r>
+            <a:r>
+              <a:rPr lang="ko-KR" altLang="en-US"/>
+              <a:t>모든 프로퍼티는 읽기 전용이다</a:t>
+            </a:r>
+            <a:r>
+              <a:rPr lang="en-US" altLang="ko-KR"/>
+              <a:t>.</a:t>
+            </a:r>
+            <a:endParaRPr lang="en-US" dirty="0"/>
           </a:p>
         </p:txBody>
       </p:sp>
@@ -1326,22 +1387,9 @@
           <a:lstStyle/>
           <a:p>
             <a:r>
-              <a:rPr lang="ko-KR" altLang="en-US"/>
-              <a:t>원문은 이 방식이 동작은 하지만 보기 좋지 않다고 설명한다</a:t>
-            </a:r>
-            <a:r>
-              <a:rPr lang="en-US" altLang="ko-KR"/>
-              <a:t>. </a:t>
-            </a:r>
-            <a:r>
-              <a:rPr lang="ko-KR" altLang="en-US"/>
-              <a:t>객체가 본래 제공해야 할 캡슐화를 잃기 때문이다</a:t>
-            </a:r>
-            <a:r>
-              <a:rPr lang="en-US" altLang="ko-KR"/>
-              <a:t>.</a:t>
-            </a:r>
-            <a:endParaRPr lang="en-US" dirty="0"/>
+              <a:rPr lang="en-US" dirty="0"/>
+              <a:t>원문은 Terrain* tiles_[WIDTH][HEIGHT] 구조를 사용한다. C#에서는 2차원 배열에 TerrainType 참조를 저장한다.</a:t>
+            </a:r>
           </a:p>
         </p:txBody>
       </p:sp>
@@ -1426,9 +1474,38 @@
           <a:lstStyle/>
           <a:p>
             <a:r>
-              <a:rPr lang="en-US" dirty="0"/>
-              <a:t>원문 출처는 Robert Nystrom의 Game Programming Patterns, Flyweight 장이다. 슬라이드는 원문을 그대로 옮기지 않고 수업용 설명으로 재구성했다. 장의 흐름은 숲과 나무, GPU 인스턴싱, intrinsic/extrinsic state, 지형 타일 예시, 성능 논의, 관련 패턴 순서다.</a:t>
-            </a:r>
+              <a:rPr lang="ko-KR" altLang="en-US"/>
+              <a:t>원문 출처는 </a:t>
+            </a:r>
+            <a:r>
+              <a:rPr lang="en-US" altLang="ko-KR"/>
+              <a:t>Robert Nystrom</a:t>
+            </a:r>
+            <a:r>
+              <a:rPr lang="ko-KR" altLang="en-US"/>
+              <a:t>의 </a:t>
+            </a:r>
+            <a:r>
+              <a:rPr lang="en-US" altLang="ko-KR"/>
+              <a:t>Game Programming Patterns, Flyweight </a:t>
+            </a:r>
+            <a:r>
+              <a:rPr lang="ko-KR" altLang="en-US"/>
+              <a:t>장이다</a:t>
+            </a:r>
+            <a:r>
+              <a:rPr lang="en-US" altLang="ko-KR"/>
+              <a:t>. </a:t>
+            </a:r>
+            <a:r>
+              <a:rPr lang="ko-KR" altLang="en-US"/>
+              <a:t>슬라이드는 원문을 그대로 옮기지 않고 수업용 설명으로 재구성했다</a:t>
+            </a:r>
+            <a:r>
+              <a:rPr lang="en-US" altLang="ko-KR"/>
+              <a:t>.</a:t>
+            </a:r>
+            <a:endParaRPr lang="en-US" dirty="0"/>
           </a:p>
         </p:txBody>
       </p:sp>
@@ -1514,31 +1591,7 @@
           <a:p>
             <a:r>
               <a:rPr lang="ko-KR" altLang="en-US"/>
-              <a:t>원문의 </a:t>
-            </a:r>
-            <a:r>
-              <a:rPr lang="en-US" altLang="ko-KR"/>
-              <a:t>Terrain </a:t>
-            </a:r>
-            <a:r>
-              <a:rPr lang="ko-KR" altLang="en-US"/>
-              <a:t>클래스를 </a:t>
-            </a:r>
-            <a:r>
-              <a:rPr lang="en-US" altLang="ko-KR"/>
-              <a:t>C#</a:t>
-            </a:r>
-            <a:r>
-              <a:rPr lang="ko-KR" altLang="en-US"/>
-              <a:t>으로 옮긴다</a:t>
-            </a:r>
-            <a:r>
-              <a:rPr lang="en-US" altLang="ko-KR"/>
-              <a:t>. </a:t>
-            </a:r>
-            <a:r>
-              <a:rPr lang="ko-KR" altLang="en-US"/>
-              <a:t>모든 프로퍼티는 읽기 전용이다</a:t>
+              <a:t>원문은 초원으로 채우고 군데군데 언덕을 배치한 뒤 강을 그리는 간단한 생성 예시를 보여준다</a:t>
             </a:r>
             <a:r>
               <a:rPr lang="en-US" altLang="ko-KR"/>
@@ -1629,9 +1682,30 @@
           <a:lstStyle/>
           <a:p>
             <a:r>
-              <a:rPr lang="en-US" dirty="0"/>
-              <a:t>원문은 Terrain* tiles_[WIDTH][HEIGHT] 구조를 사용한다. C#에서는 2차원 배열에 TerrainType 참조를 저장한다.</a:t>
-            </a:r>
+              <a:rPr lang="ko-KR" altLang="en-US"/>
+              <a:t>원문은 포인터가 </a:t>
+            </a:r>
+            <a:r>
+              <a:rPr lang="en-US" altLang="ko-KR"/>
+              <a:t>enum</a:t>
+            </a:r>
+            <a:r>
+              <a:rPr lang="ko-KR" altLang="en-US"/>
+              <a:t>보다 크게 무겁지 않으면서 객체지향 </a:t>
+            </a:r>
+            <a:r>
+              <a:rPr lang="en-US" altLang="ko-KR"/>
+              <a:t>API</a:t>
+            </a:r>
+            <a:r>
+              <a:rPr lang="ko-KR" altLang="en-US"/>
+              <a:t>를 되살린다고 설명한다</a:t>
+            </a:r>
+            <a:r>
+              <a:rPr lang="en-US" altLang="ko-KR"/>
+              <a:t>.</a:t>
+            </a:r>
+            <a:endParaRPr lang="en-US" dirty="0"/>
           </a:p>
         </p:txBody>
       </p:sp>
@@ -1717,7 +1791,7 @@
           <a:p>
             <a:r>
               <a:rPr lang="en-US" dirty="0"/>
-              <a:t>원문은 풀로 채우고 일부 언덕을 뿌린 뒤 강을 놓는 간단한 생성 예시를 보여준다.</a:t>
+              <a:t>Unity에서는 ScriptableObject가 flyweight 역할을 하기 좋다. 여러 타일이 같은 TerrainTypeAsset을 참조한다.</a:t>
             </a:r>
           </a:p>
         </p:txBody>
@@ -1803,30 +1877,9 @@
           <a:lstStyle/>
           <a:p>
             <a:r>
-              <a:rPr lang="ko-KR" altLang="en-US"/>
-              <a:t>원문은 포인터가 </a:t>
-            </a:r>
-            <a:r>
-              <a:rPr lang="en-US" altLang="ko-KR"/>
-              <a:t>enum</a:t>
-            </a:r>
-            <a:r>
-              <a:rPr lang="ko-KR" altLang="en-US"/>
-              <a:t>보다 크게 무겁지 않으면서 객체지향 </a:t>
-            </a:r>
-            <a:r>
-              <a:rPr lang="en-US" altLang="ko-KR"/>
-              <a:t>API</a:t>
-            </a:r>
-            <a:r>
-              <a:rPr lang="ko-KR" altLang="en-US"/>
-              <a:t>를 되살린다고 설명한다</a:t>
-            </a:r>
-            <a:r>
-              <a:rPr lang="en-US" altLang="ko-KR"/>
-              <a:t>.</a:t>
-            </a:r>
-            <a:endParaRPr lang="en-US" dirty="0"/>
+              <a:rPr lang="en-US" dirty="0"/>
+              <a:t>Unity 개발에서 이미 많은 리소스가 flyweight처럼 동작한다.</a:t>
+            </a:r>
           </a:p>
         </p:txBody>
       </p:sp>
@@ -1912,7 +1965,7 @@
           <a:p>
             <a:r>
               <a:rPr lang="en-US" dirty="0"/>
-              <a:t>Unity에서는 ScriptableObject가 flyweight 역할을 하기 좋다. 여러 타일이 같은 TerrainTypeAsset을 참조한다.</a:t>
+              <a:t>원문 What About Performance 절이다. Flyweight가 항상 빠르다고 단정하지 않고 프로파일링을 강조한다.</a:t>
             </a:r>
           </a:p>
         </p:txBody>
@@ -1999,7 +2052,7 @@
           <a:p>
             <a:r>
               <a:rPr lang="en-US" dirty="0"/>
-              <a:t>Unity 개발에서 이미 많은 리소스가 flyweight처럼 동작한다.</a:t>
+              <a:t>패턴 적용 기준을 정리한다.</a:t>
             </a:r>
           </a:p>
         </p:txBody>
@@ -2086,7 +2139,7 @@
           <a:p>
             <a:r>
               <a:rPr lang="en-US" dirty="0"/>
-              <a:t>원문 What About Performance 절이다. Flyweight가 항상 빠르다고 단정하지 않고 프로파일링을 강조한다.</a:t>
+              <a:t>Flyweight의 대표적인 실수는 공유 객체에 개별 상태를 넣는 것이다.</a:t>
             </a:r>
           </a:p>
         </p:txBody>
@@ -2173,7 +2226,7 @@
           <a:p>
             <a:r>
               <a:rPr lang="en-US" dirty="0"/>
-              <a:t>패턴 적용 기준을 정리한다.</a:t>
+              <a:t>원문 See Also를 수업용으로 정리한다.</a:t>
             </a:r>
           </a:p>
         </p:txBody>
@@ -2259,9 +2312,46 @@
           <a:lstStyle/>
           <a:p>
             <a:r>
-              <a:rPr lang="en-US" dirty="0"/>
-              <a:t>Flyweight의 대표적인 실수는 공유 객체에 개별 상태를 넣는 것이다.</a:t>
-            </a:r>
+              <a:rPr lang="ko-KR" altLang="en-US"/>
+              <a:t>실습은 </a:t>
+            </a:r>
+            <a:r>
+              <a:rPr lang="en-US" altLang="ko-KR"/>
+              <a:t>ScriptableObject </a:t>
+            </a:r>
+            <a:r>
+              <a:rPr lang="ko-KR" altLang="en-US"/>
+              <a:t>없이 </a:t>
+            </a:r>
+            <a:r>
+              <a:rPr lang="en-US" altLang="ko-KR"/>
+              <a:t>C# </a:t>
+            </a:r>
+            <a:r>
+              <a:rPr lang="ko-KR" altLang="en-US"/>
+              <a:t>객체만으로도 할 수 있고</a:t>
+            </a:r>
+            <a:r>
+              <a:rPr lang="en-US" altLang="ko-KR"/>
+              <a:t>, </a:t>
+            </a:r>
+            <a:r>
+              <a:rPr lang="ko-KR" altLang="en-US"/>
+              <a:t>확장 과제에서 </a:t>
+            </a:r>
+            <a:r>
+              <a:rPr lang="en-US" altLang="ko-KR"/>
+              <a:t>ScriptableObject </a:t>
+            </a:r>
+            <a:r>
+              <a:rPr lang="ko-KR" altLang="en-US"/>
+              <a:t>기반으로 바꿀 수 있다</a:t>
+            </a:r>
+            <a:r>
+              <a:rPr lang="en-US" altLang="ko-KR"/>
+              <a:t>.</a:t>
+            </a:r>
+            <a:endParaRPr lang="en-US" dirty="0"/>
           </a:p>
         </p:txBody>
       </p:sp>
@@ -2347,7 +2437,7 @@
           <a:p>
             <a:r>
               <a:rPr lang="en-US" dirty="0"/>
-              <a:t>원문 See Also를 수업용으로 정리한다.</a:t>
+              <a:t>학생 실습 과제 명세다.</a:t>
             </a:r>
           </a:p>
         </p:txBody>
@@ -2434,7 +2524,7 @@
           <a:p>
             <a:r>
               <a:rPr lang="en-US" dirty="0"/>
-              <a:t>원문 출처는 Robert Nystrom의 Game Programming Patterns, Flyweight 장이다. 슬라이드는 원문을 그대로 옮기지 않고 수업용 설명으로 재구성했다. 장의 흐름은 숲과 나무, GPU 인스턴싱, intrinsic/extrinsic state, 지형 타일 예시, 성능 논의, 관련 패턴 순서다.</a:t>
+              <a:t>원문은 장대한 숲을 예시로 시작한다. 실제 게임에서는 수천 개의 나무를 렌더링해야 하므로 데이터 중복이 문제가 된다.</a:t>
             </a:r>
           </a:p>
         </p:txBody>
@@ -2520,46 +2610,9 @@
           <a:lstStyle/>
           <a:p>
             <a:r>
-              <a:rPr lang="ko-KR" altLang="en-US"/>
-              <a:t>실습은 </a:t>
-            </a:r>
-            <a:r>
-              <a:rPr lang="en-US" altLang="ko-KR"/>
-              <a:t>ScriptableObject </a:t>
-            </a:r>
-            <a:r>
-              <a:rPr lang="ko-KR" altLang="en-US"/>
-              <a:t>없이 </a:t>
-            </a:r>
-            <a:r>
-              <a:rPr lang="en-US" altLang="ko-KR"/>
-              <a:t>C# </a:t>
-            </a:r>
-            <a:r>
-              <a:rPr lang="ko-KR" altLang="en-US"/>
-              <a:t>객체만으로도 할 수 있고</a:t>
-            </a:r>
-            <a:r>
-              <a:rPr lang="en-US" altLang="ko-KR"/>
-              <a:t>, </a:t>
-            </a:r>
-            <a:r>
-              <a:rPr lang="ko-KR" altLang="en-US"/>
-              <a:t>확장 과제에서 </a:t>
-            </a:r>
-            <a:r>
-              <a:rPr lang="en-US" altLang="ko-KR"/>
-              <a:t>ScriptableObject </a:t>
-            </a:r>
-            <a:r>
-              <a:rPr lang="ko-KR" altLang="en-US"/>
-              <a:t>기반으로 바꿀 수 있다</a:t>
-            </a:r>
-            <a:r>
-              <a:rPr lang="en-US" altLang="ko-KR"/>
-              <a:t>.</a:t>
-            </a:r>
-            <a:endParaRPr lang="en-US" dirty="0"/>
+              <a:rPr lang="en-US" dirty="0"/>
+              <a:t>첫 번째 구현 단계다.</a:t>
+            </a:r>
           </a:p>
         </p:txBody>
       </p:sp>
@@ -2645,7 +2698,7 @@
           <a:p>
             <a:r>
               <a:rPr lang="en-US" dirty="0"/>
-              <a:t>학생 실습 과제 명세다.</a:t>
+              <a:t>두 번째 구현 단계다.</a:t>
             </a:r>
           </a:p>
         </p:txBody>
@@ -2732,7 +2785,7 @@
           <a:p>
             <a:r>
               <a:rPr lang="en-US" dirty="0"/>
-              <a:t>첫 번째 구현 단계다.</a:t>
+              <a:t>기능과 구조를 함께 평가한다.</a:t>
             </a:r>
           </a:p>
         </p:txBody>
@@ -2819,7 +2872,7 @@
           <a:p>
             <a:r>
               <a:rPr lang="en-US" dirty="0"/>
-              <a:t>두 번째 구현 단계다.</a:t>
+              <a:t>빠른 학생을 위한 확장 과제다.</a:t>
             </a:r>
           </a:p>
         </p:txBody>
@@ -2906,7 +2959,7 @@
           <a:p>
             <a:r>
               <a:rPr lang="en-US" dirty="0"/>
-              <a:t>기능과 구조를 함께 평가한다.</a:t>
+              <a:t>수업 마지막에는 intrinsic/extrinsic state 구분을 다시 강조한다.</a:t>
             </a:r>
           </a:p>
         </p:txBody>
@@ -2929,180 +2982,6 @@
             <a:fld id="{F7021451-1387-4CA6-816F-3879F97B5CBC}" type="slidenum">
               <a:rPr lang="en-US"/>
               <a:t>34</a:t>
-            </a:fld>
-            <a:endParaRPr lang="en-US"/>
-          </a:p>
-        </p:txBody>
-      </p:sp>
-    </p:spTree>
-    <p:extLst>
-      <p:ext uri="{BB962C8B-B14F-4D97-AF65-F5344CB8AC3E}">
-        <p14:creationId xmlns:p14="http://schemas.microsoft.com/office/powerpoint/2010/main" val="1024086991"/>
-      </p:ext>
-    </p:extLst>
-  </p:cSld>
-  <p:clrMapOvr>
-    <a:masterClrMapping/>
-  </p:clrMapOvr>
-</p:notes>
-</file>
-
-<file path=ppt/notesSlides/notesSlide35.xml><?xml version="1.0" encoding="utf-8"?>
-<p:notes xmlns:a="http://schemas.openxmlformats.org/drawingml/2006/main" xmlns:r="http://schemas.openxmlformats.org/officeDocument/2006/relationships" xmlns:p="http://schemas.openxmlformats.org/presentationml/2006/main">
-  <p:cSld>
-    <p:spTree>
-      <p:nvGrpSpPr>
-        <p:cNvPr id="1" name=""/>
-        <p:cNvGrpSpPr/>
-        <p:nvPr/>
-      </p:nvGrpSpPr>
-      <p:grpSpPr>
-        <a:xfrm>
-          <a:off x="0" y="0"/>
-          <a:ext cx="0" cy="0"/>
-          <a:chOff x="0" y="0"/>
-          <a:chExt cx="0" cy="0"/>
-        </a:xfrm>
-      </p:grpSpPr>
-      <p:sp>
-        <p:nvSpPr>
-          <p:cNvPr id="2" name="Slide Image Placeholder 1"/>
-          <p:cNvSpPr>
-            <a:spLocks noGrp="1" noRot="1" noChangeAspect="1"/>
-          </p:cNvSpPr>
-          <p:nvPr>
-            <p:ph type="sldImg"/>
-          </p:nvPr>
-        </p:nvSpPr>
-        <p:spPr/>
-      </p:sp>
-      <p:sp>
-        <p:nvSpPr>
-          <p:cNvPr id="3" name="Notes Placeholder 2"/>
-          <p:cNvSpPr>
-            <a:spLocks noGrp="1"/>
-          </p:cNvSpPr>
-          <p:nvPr>
-            <p:ph type="body" idx="1"/>
-          </p:nvPr>
-        </p:nvSpPr>
-        <p:spPr/>
-        <p:txBody>
-          <a:bodyPr/>
-          <a:lstStyle/>
-          <a:p>
-            <a:r>
-              <a:rPr lang="en-US" dirty="0"/>
-              <a:t>빠른 학생을 위한 확장 과제다.</a:t>
-            </a:r>
-          </a:p>
-        </p:txBody>
-      </p:sp>
-      <p:sp>
-        <p:nvSpPr>
-          <p:cNvPr id="4" name="Slide Number Placeholder 3"/>
-          <p:cNvSpPr>
-            <a:spLocks noGrp="1"/>
-          </p:cNvSpPr>
-          <p:nvPr>
-            <p:ph type="sldNum" sz="quarter" idx="10"/>
-          </p:nvPr>
-        </p:nvSpPr>
-        <p:spPr/>
-        <p:txBody>
-          <a:bodyPr/>
-          <a:lstStyle/>
-          <a:p>
-            <a:fld id="{F7021451-1387-4CA6-816F-3879F97B5CBC}" type="slidenum">
-              <a:rPr lang="en-US"/>
-              <a:t>35</a:t>
-            </a:fld>
-            <a:endParaRPr lang="en-US"/>
-          </a:p>
-        </p:txBody>
-      </p:sp>
-    </p:spTree>
-    <p:extLst>
-      <p:ext uri="{BB962C8B-B14F-4D97-AF65-F5344CB8AC3E}">
-        <p14:creationId xmlns:p14="http://schemas.microsoft.com/office/powerpoint/2010/main" val="1024086991"/>
-      </p:ext>
-    </p:extLst>
-  </p:cSld>
-  <p:clrMapOvr>
-    <a:masterClrMapping/>
-  </p:clrMapOvr>
-</p:notes>
-</file>
-
-<file path=ppt/notesSlides/notesSlide36.xml><?xml version="1.0" encoding="utf-8"?>
-<p:notes xmlns:a="http://schemas.openxmlformats.org/drawingml/2006/main" xmlns:r="http://schemas.openxmlformats.org/officeDocument/2006/relationships" xmlns:p="http://schemas.openxmlformats.org/presentationml/2006/main">
-  <p:cSld>
-    <p:spTree>
-      <p:nvGrpSpPr>
-        <p:cNvPr id="1" name=""/>
-        <p:cNvGrpSpPr/>
-        <p:nvPr/>
-      </p:nvGrpSpPr>
-      <p:grpSpPr>
-        <a:xfrm>
-          <a:off x="0" y="0"/>
-          <a:ext cx="0" cy="0"/>
-          <a:chOff x="0" y="0"/>
-          <a:chExt cx="0" cy="0"/>
-        </a:xfrm>
-      </p:grpSpPr>
-      <p:sp>
-        <p:nvSpPr>
-          <p:cNvPr id="2" name="Slide Image Placeholder 1"/>
-          <p:cNvSpPr>
-            <a:spLocks noGrp="1" noRot="1" noChangeAspect="1"/>
-          </p:cNvSpPr>
-          <p:nvPr>
-            <p:ph type="sldImg"/>
-          </p:nvPr>
-        </p:nvSpPr>
-        <p:spPr/>
-      </p:sp>
-      <p:sp>
-        <p:nvSpPr>
-          <p:cNvPr id="3" name="Notes Placeholder 2"/>
-          <p:cNvSpPr>
-            <a:spLocks noGrp="1"/>
-          </p:cNvSpPr>
-          <p:nvPr>
-            <p:ph type="body" idx="1"/>
-          </p:nvPr>
-        </p:nvSpPr>
-        <p:spPr/>
-        <p:txBody>
-          <a:bodyPr/>
-          <a:lstStyle/>
-          <a:p>
-            <a:r>
-              <a:rPr lang="en-US" dirty="0"/>
-              <a:t>수업 마지막에는 intrinsic/extrinsic state 구분을 다시 강조한다.</a:t>
-            </a:r>
-          </a:p>
-        </p:txBody>
-      </p:sp>
-      <p:sp>
-        <p:nvSpPr>
-          <p:cNvPr id="4" name="Slide Number Placeholder 3"/>
-          <p:cNvSpPr>
-            <a:spLocks noGrp="1"/>
-          </p:cNvSpPr>
-          <p:nvPr>
-            <p:ph type="sldNum" sz="quarter" idx="10"/>
-          </p:nvPr>
-        </p:nvSpPr>
-        <p:spPr/>
-        <p:txBody>
-          <a:bodyPr/>
-          <a:lstStyle/>
-          <a:p>
-            <a:fld id="{F7021451-1387-4CA6-816F-3879F97B5CBC}" type="slidenum">
-              <a:rPr lang="en-US"/>
-              <a:t>36</a:t>
             </a:fld>
             <a:endParaRPr lang="en-US"/>
           </a:p>
@@ -3167,7 +3046,7 @@
           <a:p>
             <a:r>
               <a:rPr lang="en-US" dirty="0"/>
-              <a:t>원문 출처는 Robert Nystrom의 Game Programming Patterns, Flyweight 장이다. 슬라이드는 원문을 그대로 옮기지 않고 수업용 설명으로 재구성했다. 장의 흐름은 숲과 나무, GPU 인스턴싱, intrinsic/extrinsic state, 지형 타일 예시, 성능 논의, 관련 패턴 순서다.</a:t>
+              <a:t>원문의 Tree 클래스 예시를 C#으로 바꾸었다. 큰 데이터인 Mesh와 Texture가 각 객체 안에 들어가면 중복이 커진다.</a:t>
             </a:r>
           </a:p>
         </p:txBody>
@@ -3254,7 +3133,7 @@
           <a:p>
             <a:r>
               <a:rPr lang="en-US" dirty="0"/>
-              <a:t>원문은 장대한 숲을 예시로 시작한다. 실제 게임에서는 수천 개의 나무를 렌더링해야 하므로 데이터 중복이 문제가 된다.</a:t>
+              <a:t>Flyweight의 출발점은 반복되는 큰 데이터와 개별 데이터가 섞여 있다는 사실을 보는 것이다.</a:t>
             </a:r>
           </a:p>
         </p:txBody>
@@ -3340,9 +3219,54 @@
           <a:lstStyle/>
           <a:p>
             <a:r>
-              <a:rPr lang="en-US" dirty="0"/>
-              <a:t>원문의 Tree 클래스 예시를 C#으로 바꾸었다. 큰 데이터인 Mesh와 Texture가 각 객체 안에 들어가면 중복이 커진다.</a:t>
-            </a:r>
+              <a:rPr lang="ko-KR" altLang="en-US"/>
+              <a:t>원문은 </a:t>
+            </a:r>
+            <a:r>
+              <a:rPr lang="en-US" altLang="ko-KR"/>
+              <a:t>TreeModel</a:t>
+            </a:r>
+            <a:r>
+              <a:rPr lang="ko-KR" altLang="en-US"/>
+              <a:t>에 </a:t>
+            </a:r>
+            <a:r>
+              <a:rPr lang="en-US" altLang="ko-KR"/>
+              <a:t>mesh, bark texture, leaf texture</a:t>
+            </a:r>
+            <a:r>
+              <a:rPr lang="ko-KR" altLang="en-US"/>
+              <a:t>를 담는다</a:t>
+            </a:r>
+            <a:r>
+              <a:rPr lang="en-US" altLang="ko-KR"/>
+              <a:t>. Unity</a:t>
+            </a:r>
+            <a:r>
+              <a:rPr lang="ko-KR" altLang="en-US"/>
+              <a:t>에서는 </a:t>
+            </a:r>
+            <a:r>
+              <a:rPr lang="en-US" altLang="ko-KR"/>
+              <a:t>Mesh</a:t>
+            </a:r>
+            <a:r>
+              <a:rPr lang="ko-KR" altLang="en-US"/>
+              <a:t>와 </a:t>
+            </a:r>
+            <a:r>
+              <a:rPr lang="en-US" altLang="ko-KR"/>
+              <a:t>Material</a:t>
+            </a:r>
+            <a:r>
+              <a:rPr lang="ko-KR" altLang="en-US"/>
+              <a:t>로 표현하면 자연스럽다</a:t>
+            </a:r>
+            <a:r>
+              <a:rPr lang="en-US" altLang="ko-KR"/>
+              <a:t>.</a:t>
+            </a:r>
+            <a:endParaRPr lang="en-US" dirty="0"/>
           </a:p>
         </p:txBody>
       </p:sp>
@@ -3428,7 +3352,7 @@
           <a:p>
             <a:r>
               <a:rPr lang="en-US" dirty="0"/>
-              <a:t>Flyweight의 출발점은 반복되는 큰 데이터와 개별 데이터가 섞여 있다는 사실을 보는 것이다.</a:t>
+              <a:t>TreeInstance는 공유 TreeModel 참조와 위치, 높이, 색만 가진다.</a:t>
             </a:r>
           </a:p>
         </p:txBody>
@@ -3514,54 +3438,9 @@
           <a:lstStyle/>
           <a:p>
             <a:r>
-              <a:rPr lang="ko-KR" altLang="en-US"/>
-              <a:t>원문은 </a:t>
-            </a:r>
-            <a:r>
-              <a:rPr lang="en-US" altLang="ko-KR"/>
-              <a:t>TreeModel</a:t>
-            </a:r>
-            <a:r>
-              <a:rPr lang="ko-KR" altLang="en-US"/>
-              <a:t>에 </a:t>
-            </a:r>
-            <a:r>
-              <a:rPr lang="en-US" altLang="ko-KR"/>
-              <a:t>mesh, bark texture, leaf texture</a:t>
-            </a:r>
-            <a:r>
-              <a:rPr lang="ko-KR" altLang="en-US"/>
-              <a:t>를 담는다</a:t>
-            </a:r>
-            <a:r>
-              <a:rPr lang="en-US" altLang="ko-KR"/>
-              <a:t>. Unity</a:t>
-            </a:r>
-            <a:r>
-              <a:rPr lang="ko-KR" altLang="en-US"/>
-              <a:t>에서는 </a:t>
-            </a:r>
-            <a:r>
-              <a:rPr lang="en-US" altLang="ko-KR"/>
-              <a:t>Mesh</a:t>
-            </a:r>
-            <a:r>
-              <a:rPr lang="ko-KR" altLang="en-US"/>
-              <a:t>와 </a:t>
-            </a:r>
-            <a:r>
-              <a:rPr lang="en-US" altLang="ko-KR"/>
-              <a:t>Material</a:t>
-            </a:r>
-            <a:r>
-              <a:rPr lang="ko-KR" altLang="en-US"/>
-              <a:t>로 표현하면 자연스럽다</a:t>
-            </a:r>
-            <a:r>
-              <a:rPr lang="en-US" altLang="ko-KR"/>
-              <a:t>.</a:t>
-            </a:r>
-            <a:endParaRPr lang="en-US" dirty="0"/>
+              <a:rPr lang="en-US" dirty="0"/>
+              <a:t>원문의 그림은 여러 나무가 하나의 Model을 공유하는 구조를 보여준다.</a:t>
+            </a:r>
           </a:p>
         </p:txBody>
       </p:sp>
@@ -3647,7 +3526,7 @@
           <a:p>
             <a:r>
               <a:rPr lang="en-US" dirty="0"/>
-              <a:t>TreeInstance는 공유 TreeModel 참조와 위치, 높이, 색만 가진다.</a:t>
+              <a:t>원문은 Flyweight와 Type Object가 비슷해 보이지만 의도가 다르다고 설명한다.</a:t>
             </a:r>
           </a:p>
         </p:txBody>
@@ -4588,1452 +4467,6 @@
 
 <file path=ppt/slides/slide10.xml><?xml version="1.0" encoding="utf-8"?>
 <p:sld xmlns:a="http://schemas.openxmlformats.org/drawingml/2006/main" xmlns:r="http://schemas.openxmlformats.org/officeDocument/2006/relationships" xmlns:p="http://schemas.openxmlformats.org/presentationml/2006/main">
-  <p:cSld name="Slide 10">
-    <p:bg>
-      <p:bgPr>
-        <a:solidFill>
-          <a:srgbClr val="FAF7EF"/>
-        </a:solidFill>
-        <a:effectLst/>
-      </p:bgPr>
-    </p:bg>
-    <p:spTree>
-      <p:nvGrpSpPr>
-        <p:cNvPr id="1" name=""/>
-        <p:cNvGrpSpPr/>
-        <p:nvPr/>
-      </p:nvGrpSpPr>
-      <p:grpSpPr>
-        <a:xfrm>
-          <a:off x="0" y="0"/>
-          <a:ext cx="0" cy="0"/>
-          <a:chOff x="0" y="0"/>
-          <a:chExt cx="0" cy="0"/>
-        </a:xfrm>
-      </p:grpSpPr>
-      <p:sp>
-        <p:nvSpPr>
-          <p:cNvPr id="2" name="Shape 0"/>
-          <p:cNvSpPr/>
-          <p:nvPr/>
-        </p:nvSpPr>
-        <p:spPr>
-          <a:xfrm>
-            <a:off x="0" y="0"/>
-            <a:ext cx="9144000" cy="5715000"/>
-          </a:xfrm>
-          <a:prstGeom prst="rect">
-            <a:avLst/>
-          </a:prstGeom>
-          <a:solidFill>
-            <a:srgbClr val="FAF7EF"/>
-          </a:solidFill>
-          <a:ln w="12700">
-            <a:solidFill>
-              <a:srgbClr val="FAF7EF"/>
-            </a:solidFill>
-            <a:prstDash val="solid"/>
-          </a:ln>
-        </p:spPr>
-      </p:sp>
-      <p:sp>
-        <p:nvSpPr>
-          <p:cNvPr id="3" name="Shape 1"/>
-          <p:cNvSpPr/>
-          <p:nvPr/>
-        </p:nvSpPr>
-        <p:spPr>
-          <a:xfrm>
-            <a:off x="0" y="0"/>
-            <a:ext cx="118872" cy="5715000"/>
-          </a:xfrm>
-          <a:prstGeom prst="rect">
-            <a:avLst/>
-          </a:prstGeom>
-          <a:solidFill>
-            <a:srgbClr val="2563EB"/>
-          </a:solidFill>
-          <a:ln w="12700">
-            <a:solidFill>
-              <a:srgbClr val="2563EB"/>
-            </a:solidFill>
-            <a:prstDash val="solid"/>
-          </a:ln>
-        </p:spPr>
-      </p:sp>
-      <p:sp>
-        <p:nvSpPr>
-          <p:cNvPr id="4" name="Text 2"/>
-          <p:cNvSpPr/>
-          <p:nvPr/>
-        </p:nvSpPr>
-        <p:spPr>
-          <a:xfrm>
-            <a:off x="8549640" y="5358384"/>
-            <a:ext cx="310896" cy="146304"/>
-          </a:xfrm>
-          <a:prstGeom prst="rect">
-            <a:avLst/>
-          </a:prstGeom>
-          <a:noFill/>
-          <a:ln/>
-        </p:spPr>
-        <p:txBody>
-          <a:bodyPr wrap="square" lIns="0" tIns="0" rIns="0" bIns="0" rtlCol="0" anchor="ctr"/>
-          <a:lstStyle/>
-          <a:p>
-            <a:pPr marL="0" indent="0" algn="r">
-              <a:buNone/>
-            </a:pPr>
-            <a:r>
-              <a:rPr lang="en-US" sz="700" dirty="0">
-                <a:solidFill>
-                  <a:srgbClr val="9F968C"/>
-                </a:solidFill>
-                <a:latin typeface="Aptos" pitchFamily="34" charset="0"/>
-                <a:ea typeface="Aptos" pitchFamily="34" charset="-122"/>
-                <a:cs typeface="Aptos" pitchFamily="34" charset="-120"/>
-              </a:rPr>
-              <a:t>10</a:t>
-            </a:r>
-            <a:endParaRPr lang="en-US" sz="700" dirty="0"/>
-          </a:p>
-        </p:txBody>
-      </p:sp>
-      <p:sp>
-        <p:nvSpPr>
-          <p:cNvPr id="5" name="Text 3"/>
-          <p:cNvSpPr/>
-          <p:nvPr/>
-        </p:nvSpPr>
-        <p:spPr>
-          <a:xfrm>
-            <a:off x="594360" y="5340096"/>
-            <a:ext cx="4663440" cy="164592"/>
-          </a:xfrm>
-          <a:prstGeom prst="rect">
-            <a:avLst/>
-          </a:prstGeom>
-          <a:noFill/>
-          <a:ln/>
-        </p:spPr>
-        <p:txBody>
-          <a:bodyPr wrap="square" lIns="0" tIns="0" rIns="0" bIns="0" rtlCol="0" anchor="ctr"/>
-          <a:lstStyle/>
-          <a:p>
-            <a:pPr marL="0" indent="0">
-              <a:buNone/>
-            </a:pPr>
-            <a:r>
-              <a:rPr lang="en-US" sz="700" dirty="0">
-                <a:solidFill>
-                  <a:srgbClr val="9F968C"/>
-                </a:solidFill>
-                <a:latin typeface="Malgun Gothic" pitchFamily="34" charset="0"/>
-                <a:ea typeface="Malgun Gothic" pitchFamily="34" charset="-122"/>
-                <a:cs typeface="Malgun Gothic" pitchFamily="34" charset="-120"/>
-              </a:rPr>
-              <a:t>Game Programming Patterns - Flyweight | Unity/C#</a:t>
-            </a:r>
-            <a:endParaRPr lang="en-US" sz="700" dirty="0"/>
-          </a:p>
-        </p:txBody>
-      </p:sp>
-      <p:sp>
-        <p:nvSpPr>
-          <p:cNvPr id="6" name="Text 4"/>
-          <p:cNvSpPr/>
-          <p:nvPr/>
-        </p:nvSpPr>
-        <p:spPr>
-          <a:xfrm>
-            <a:off x="594360" y="347472"/>
-            <a:ext cx="8046720" cy="420624"/>
-          </a:xfrm>
-          <a:prstGeom prst="rect">
-            <a:avLst/>
-          </a:prstGeom>
-          <a:noFill/>
-          <a:ln/>
-        </p:spPr>
-        <p:txBody>
-          <a:bodyPr wrap="square" lIns="0" tIns="0" rIns="0" bIns="0" rtlCol="0" anchor="ctr">
-            <a:normAutofit/>
-          </a:bodyPr>
-          <a:lstStyle/>
-          <a:p>
-            <a:pPr marL="0" indent="0">
-              <a:buNone/>
-            </a:pPr>
-            <a:r>
-              <a:rPr lang="en-US" sz="2500" b="1" dirty="0">
-                <a:solidFill>
-                  <a:srgbClr val="17212B"/>
-                </a:solidFill>
-                <a:latin typeface="Malgun Gothic" pitchFamily="34" charset="0"/>
-                <a:ea typeface="Malgun Gothic" pitchFamily="34" charset="-122"/>
-                <a:cs typeface="Malgun Gothic" pitchFamily="34" charset="-120"/>
-              </a:rPr>
-              <a:t>Flyweight 구조</a:t>
-            </a:r>
-            <a:endParaRPr lang="en-US" sz="2500" dirty="0"/>
-          </a:p>
-        </p:txBody>
-      </p:sp>
-      <p:sp>
-        <p:nvSpPr>
-          <p:cNvPr id="7" name="Text 5"/>
-          <p:cNvSpPr/>
-          <p:nvPr/>
-        </p:nvSpPr>
-        <p:spPr>
-          <a:xfrm>
-            <a:off x="749808" y="1335024"/>
-            <a:ext cx="7498080" cy="512064"/>
-          </a:xfrm>
-          <a:prstGeom prst="rect">
-            <a:avLst/>
-          </a:prstGeom>
-          <a:noFill/>
-          <a:ln/>
-        </p:spPr>
-        <p:txBody>
-          <a:bodyPr wrap="square" lIns="254" tIns="254" rIns="254" bIns="254" rtlCol="0" anchor="t">
-            <a:normAutofit/>
-          </a:bodyPr>
-          <a:lstStyle/>
-          <a:p>
-            <a:pPr marL="0" indent="0">
-              <a:buNone/>
-            </a:pPr>
-            <a:r>
-              <a:rPr lang="en-US" sz="1820" b="1" dirty="0">
-                <a:solidFill>
-                  <a:srgbClr val="17212B"/>
-                </a:solidFill>
-                <a:latin typeface="Malgun Gothic" pitchFamily="34" charset="0"/>
-                <a:ea typeface="Malgun Gothic" pitchFamily="34" charset="-122"/>
-                <a:cs typeface="Malgun Gothic" pitchFamily="34" charset="-120"/>
-              </a:rPr>
-              <a:t>하나의 큰 모델을 여러 인스턴스가 가리킨다.</a:t>
-            </a:r>
-            <a:endParaRPr lang="en-US" sz="1820" dirty="0"/>
-          </a:p>
-        </p:txBody>
-      </p:sp>
-      <p:sp>
-        <p:nvSpPr>
-          <p:cNvPr id="8" name="Shape 6"/>
-          <p:cNvSpPr/>
-          <p:nvPr/>
-        </p:nvSpPr>
-        <p:spPr>
-          <a:xfrm>
-            <a:off x="685800" y="2359152"/>
-            <a:ext cx="1819656" cy="658368"/>
-          </a:xfrm>
-          <a:prstGeom prst="roundRect">
-            <a:avLst>
-              <a:gd name="adj" fmla="val 8333"/>
-            </a:avLst>
-          </a:prstGeom>
-          <a:solidFill>
-            <a:srgbClr val="15803D"/>
-          </a:solidFill>
-          <a:ln w="12700">
-            <a:solidFill>
-              <a:srgbClr val="15803D"/>
-            </a:solidFill>
-            <a:prstDash val="solid"/>
-          </a:ln>
-        </p:spPr>
-      </p:sp>
-      <p:sp>
-        <p:nvSpPr>
-          <p:cNvPr id="9" name="Text 7"/>
-          <p:cNvSpPr/>
-          <p:nvPr/>
-        </p:nvSpPr>
-        <p:spPr>
-          <a:xfrm>
-            <a:off x="758952" y="2560320"/>
-            <a:ext cx="1673352" cy="219456"/>
-          </a:xfrm>
-          <a:prstGeom prst="rect">
-            <a:avLst/>
-          </a:prstGeom>
-          <a:noFill/>
-          <a:ln/>
-        </p:spPr>
-        <p:txBody>
-          <a:bodyPr wrap="square" lIns="0" tIns="0" rIns="0" bIns="0" rtlCol="0" anchor="ctr">
-            <a:normAutofit/>
-          </a:bodyPr>
-          <a:lstStyle/>
-          <a:p>
-            <a:pPr marL="0" indent="0" algn="ctr">
-              <a:buNone/>
-            </a:pPr>
-            <a:r>
-              <a:rPr lang="en-US" sz="1280" b="1" dirty="0">
-                <a:solidFill>
-                  <a:srgbClr val="FFFFFF"/>
-                </a:solidFill>
-                <a:latin typeface="Malgun Gothic" pitchFamily="34" charset="0"/>
-                <a:ea typeface="Malgun Gothic" pitchFamily="34" charset="-122"/>
-                <a:cs typeface="Malgun Gothic" pitchFamily="34" charset="-120"/>
-              </a:rPr>
-              <a:t>TreeModel</a:t>
-            </a:r>
-            <a:endParaRPr lang="en-US" sz="1280" dirty="0"/>
-          </a:p>
-        </p:txBody>
-      </p:sp>
-      <p:sp>
-        <p:nvSpPr>
-          <p:cNvPr id="10" name="Text 8"/>
-          <p:cNvSpPr/>
-          <p:nvPr/>
-        </p:nvSpPr>
-        <p:spPr>
-          <a:xfrm>
-            <a:off x="2532888" y="2569464"/>
-            <a:ext cx="109728" cy="182880"/>
-          </a:xfrm>
-          <a:prstGeom prst="rect">
-            <a:avLst/>
-          </a:prstGeom>
-          <a:noFill/>
-          <a:ln/>
-        </p:spPr>
-        <p:txBody>
-          <a:bodyPr wrap="square" lIns="0" tIns="0" rIns="0" bIns="0" rtlCol="0" anchor="ctr"/>
-          <a:lstStyle/>
-          <a:p>
-            <a:pPr marL="0" indent="0">
-              <a:buNone/>
-            </a:pPr>
-            <a:r>
-              <a:rPr lang="en-US" sz="1250" dirty="0">
-                <a:solidFill>
-                  <a:srgbClr val="64707D"/>
-                </a:solidFill>
-              </a:rPr>
-              <a:t>→</a:t>
-            </a:r>
-            <a:endParaRPr lang="en-US" sz="1250" dirty="0"/>
-          </a:p>
-        </p:txBody>
-      </p:sp>
-      <p:sp>
-        <p:nvSpPr>
-          <p:cNvPr id="11" name="Shape 9"/>
-          <p:cNvSpPr/>
-          <p:nvPr/>
-        </p:nvSpPr>
-        <p:spPr>
-          <a:xfrm>
-            <a:off x="2670048" y="2359152"/>
-            <a:ext cx="1819656" cy="658368"/>
-          </a:xfrm>
-          <a:prstGeom prst="roundRect">
-            <a:avLst>
-              <a:gd name="adj" fmla="val 8333"/>
-            </a:avLst>
-          </a:prstGeom>
-          <a:solidFill>
-            <a:srgbClr val="F59E0B"/>
-          </a:solidFill>
-          <a:ln w="12700">
-            <a:solidFill>
-              <a:srgbClr val="F59E0B"/>
-            </a:solidFill>
-            <a:prstDash val="solid"/>
-          </a:ln>
-        </p:spPr>
-      </p:sp>
-      <p:sp>
-        <p:nvSpPr>
-          <p:cNvPr id="12" name="Text 10"/>
-          <p:cNvSpPr/>
-          <p:nvPr/>
-        </p:nvSpPr>
-        <p:spPr>
-          <a:xfrm>
-            <a:off x="2743200" y="2560320"/>
-            <a:ext cx="1673352" cy="219456"/>
-          </a:xfrm>
-          <a:prstGeom prst="rect">
-            <a:avLst/>
-          </a:prstGeom>
-          <a:noFill/>
-          <a:ln/>
-        </p:spPr>
-        <p:txBody>
-          <a:bodyPr wrap="square" lIns="0" tIns="0" rIns="0" bIns="0" rtlCol="0" anchor="ctr">
-            <a:normAutofit/>
-          </a:bodyPr>
-          <a:lstStyle/>
-          <a:p>
-            <a:pPr marL="0" indent="0" algn="ctr">
-              <a:buNone/>
-            </a:pPr>
-            <a:r>
-              <a:rPr lang="en-US" sz="1280" b="1" dirty="0">
-                <a:solidFill>
-                  <a:srgbClr val="FFFFFF"/>
-                </a:solidFill>
-                <a:latin typeface="Malgun Gothic" pitchFamily="34" charset="0"/>
-                <a:ea typeface="Malgun Gothic" pitchFamily="34" charset="-122"/>
-                <a:cs typeface="Malgun Gothic" pitchFamily="34" charset="-120"/>
-              </a:rPr>
-              <a:t>Tree A</a:t>
-            </a:r>
-            <a:endParaRPr lang="en-US" sz="1280" dirty="0"/>
-          </a:p>
-        </p:txBody>
-      </p:sp>
-      <p:sp>
-        <p:nvSpPr>
-          <p:cNvPr id="13" name="Text 11"/>
-          <p:cNvSpPr/>
-          <p:nvPr/>
-        </p:nvSpPr>
-        <p:spPr>
-          <a:xfrm>
-            <a:off x="4517136" y="2569464"/>
-            <a:ext cx="109728" cy="182880"/>
-          </a:xfrm>
-          <a:prstGeom prst="rect">
-            <a:avLst/>
-          </a:prstGeom>
-          <a:noFill/>
-          <a:ln/>
-        </p:spPr>
-        <p:txBody>
-          <a:bodyPr wrap="square" lIns="0" tIns="0" rIns="0" bIns="0" rtlCol="0" anchor="ctr"/>
-          <a:lstStyle/>
-          <a:p>
-            <a:pPr marL="0" indent="0">
-              <a:buNone/>
-            </a:pPr>
-            <a:r>
-              <a:rPr lang="en-US" sz="1250" dirty="0">
-                <a:solidFill>
-                  <a:srgbClr val="64707D"/>
-                </a:solidFill>
-              </a:rPr>
-              <a:t>→</a:t>
-            </a:r>
-            <a:endParaRPr lang="en-US" sz="1250" dirty="0"/>
-          </a:p>
-        </p:txBody>
-      </p:sp>
-      <p:sp>
-        <p:nvSpPr>
-          <p:cNvPr id="14" name="Shape 12"/>
-          <p:cNvSpPr/>
-          <p:nvPr/>
-        </p:nvSpPr>
-        <p:spPr>
-          <a:xfrm>
-            <a:off x="4654296" y="2359152"/>
-            <a:ext cx="1819656" cy="658368"/>
-          </a:xfrm>
-          <a:prstGeom prst="roundRect">
-            <a:avLst>
-              <a:gd name="adj" fmla="val 8333"/>
-            </a:avLst>
-          </a:prstGeom>
-          <a:solidFill>
-            <a:srgbClr val="E45745"/>
-          </a:solidFill>
-          <a:ln w="12700">
-            <a:solidFill>
-              <a:srgbClr val="E45745"/>
-            </a:solidFill>
-            <a:prstDash val="solid"/>
-          </a:ln>
-        </p:spPr>
-      </p:sp>
-      <p:sp>
-        <p:nvSpPr>
-          <p:cNvPr id="15" name="Text 13"/>
-          <p:cNvSpPr/>
-          <p:nvPr/>
-        </p:nvSpPr>
-        <p:spPr>
-          <a:xfrm>
-            <a:off x="4727448" y="2560320"/>
-            <a:ext cx="1673352" cy="219456"/>
-          </a:xfrm>
-          <a:prstGeom prst="rect">
-            <a:avLst/>
-          </a:prstGeom>
-          <a:noFill/>
-          <a:ln/>
-        </p:spPr>
-        <p:txBody>
-          <a:bodyPr wrap="square" lIns="0" tIns="0" rIns="0" bIns="0" rtlCol="0" anchor="ctr">
-            <a:normAutofit/>
-          </a:bodyPr>
-          <a:lstStyle/>
-          <a:p>
-            <a:pPr marL="0" indent="0" algn="ctr">
-              <a:buNone/>
-            </a:pPr>
-            <a:r>
-              <a:rPr lang="en-US" sz="1280" b="1" dirty="0">
-                <a:solidFill>
-                  <a:srgbClr val="FFFFFF"/>
-                </a:solidFill>
-                <a:latin typeface="Malgun Gothic" pitchFamily="34" charset="0"/>
-                <a:ea typeface="Malgun Gothic" pitchFamily="34" charset="-122"/>
-                <a:cs typeface="Malgun Gothic" pitchFamily="34" charset="-120"/>
-              </a:rPr>
-              <a:t>Tree B</a:t>
-            </a:r>
-            <a:endParaRPr lang="en-US" sz="1280" dirty="0"/>
-          </a:p>
-        </p:txBody>
-      </p:sp>
-      <p:sp>
-        <p:nvSpPr>
-          <p:cNvPr id="16" name="Text 14"/>
-          <p:cNvSpPr/>
-          <p:nvPr/>
-        </p:nvSpPr>
-        <p:spPr>
-          <a:xfrm>
-            <a:off x="6501384" y="2569464"/>
-            <a:ext cx="109728" cy="182880"/>
-          </a:xfrm>
-          <a:prstGeom prst="rect">
-            <a:avLst/>
-          </a:prstGeom>
-          <a:noFill/>
-          <a:ln/>
-        </p:spPr>
-        <p:txBody>
-          <a:bodyPr wrap="square" lIns="0" tIns="0" rIns="0" bIns="0" rtlCol="0" anchor="ctr"/>
-          <a:lstStyle/>
-          <a:p>
-            <a:pPr marL="0" indent="0">
-              <a:buNone/>
-            </a:pPr>
-            <a:r>
-              <a:rPr lang="en-US" sz="1250" dirty="0">
-                <a:solidFill>
-                  <a:srgbClr val="64707D"/>
-                </a:solidFill>
-              </a:rPr>
-              <a:t>→</a:t>
-            </a:r>
-            <a:endParaRPr lang="en-US" sz="1250" dirty="0"/>
-          </a:p>
-        </p:txBody>
-      </p:sp>
-      <p:sp>
-        <p:nvSpPr>
-          <p:cNvPr id="17" name="Shape 15"/>
-          <p:cNvSpPr/>
-          <p:nvPr/>
-        </p:nvSpPr>
-        <p:spPr>
-          <a:xfrm>
-            <a:off x="6638544" y="2359152"/>
-            <a:ext cx="1819656" cy="658368"/>
-          </a:xfrm>
-          <a:prstGeom prst="roundRect">
-            <a:avLst>
-              <a:gd name="adj" fmla="val 8333"/>
-            </a:avLst>
-          </a:prstGeom>
-          <a:solidFill>
-            <a:srgbClr val="2563EB"/>
-          </a:solidFill>
-          <a:ln w="12700">
-            <a:solidFill>
-              <a:srgbClr val="2563EB"/>
-            </a:solidFill>
-            <a:prstDash val="solid"/>
-          </a:ln>
-        </p:spPr>
-      </p:sp>
-      <p:sp>
-        <p:nvSpPr>
-          <p:cNvPr id="18" name="Text 16"/>
-          <p:cNvSpPr/>
-          <p:nvPr/>
-        </p:nvSpPr>
-        <p:spPr>
-          <a:xfrm>
-            <a:off x="6711696" y="2560320"/>
-            <a:ext cx="1673352" cy="219456"/>
-          </a:xfrm>
-          <a:prstGeom prst="rect">
-            <a:avLst/>
-          </a:prstGeom>
-          <a:noFill/>
-          <a:ln/>
-        </p:spPr>
-        <p:txBody>
-          <a:bodyPr wrap="square" lIns="0" tIns="0" rIns="0" bIns="0" rtlCol="0" anchor="ctr">
-            <a:normAutofit/>
-          </a:bodyPr>
-          <a:lstStyle/>
-          <a:p>
-            <a:pPr marL="0" indent="0" algn="ctr">
-              <a:buNone/>
-            </a:pPr>
-            <a:r>
-              <a:rPr lang="en-US" sz="1280" b="1" dirty="0">
-                <a:solidFill>
-                  <a:srgbClr val="FFFFFF"/>
-                </a:solidFill>
-                <a:latin typeface="Malgun Gothic" pitchFamily="34" charset="0"/>
-                <a:ea typeface="Malgun Gothic" pitchFamily="34" charset="-122"/>
-                <a:cs typeface="Malgun Gothic" pitchFamily="34" charset="-120"/>
-              </a:rPr>
-              <a:t>Tree C</a:t>
-            </a:r>
-            <a:endParaRPr lang="en-US" sz="1280" dirty="0"/>
-          </a:p>
-        </p:txBody>
-      </p:sp>
-      <p:sp>
-        <p:nvSpPr>
-          <p:cNvPr id="19" name="Shape 17"/>
-          <p:cNvSpPr/>
-          <p:nvPr/>
-        </p:nvSpPr>
-        <p:spPr>
-          <a:xfrm>
-            <a:off x="822960" y="3621024"/>
-            <a:ext cx="82296" cy="82296"/>
-          </a:xfrm>
-          <a:prstGeom prst="ellipse">
-            <a:avLst/>
-          </a:prstGeom>
-          <a:solidFill>
-            <a:srgbClr val="15803D"/>
-          </a:solidFill>
-          <a:ln w="12700">
-            <a:solidFill>
-              <a:srgbClr val="15803D"/>
-            </a:solidFill>
-            <a:prstDash val="solid"/>
-          </a:ln>
-        </p:spPr>
-      </p:sp>
-      <p:sp>
-        <p:nvSpPr>
-          <p:cNvPr id="20" name="Text 18"/>
-          <p:cNvSpPr/>
-          <p:nvPr/>
-        </p:nvSpPr>
-        <p:spPr>
-          <a:xfrm>
-            <a:off x="1024128" y="3520440"/>
-            <a:ext cx="7406640" cy="310896"/>
-          </a:xfrm>
-          <a:prstGeom prst="rect">
-            <a:avLst/>
-          </a:prstGeom>
-          <a:noFill/>
-          <a:ln/>
-        </p:spPr>
-        <p:txBody>
-          <a:bodyPr wrap="square" lIns="254" tIns="254" rIns="254" bIns="254" rtlCol="0" anchor="t">
-            <a:normAutofit/>
-          </a:bodyPr>
-          <a:lstStyle/>
-          <a:p>
-            <a:pPr marL="0" indent="0">
-              <a:buNone/>
-            </a:pPr>
-            <a:r>
-              <a:rPr lang="en-US" sz="1580" dirty="0">
-                <a:solidFill>
-                  <a:srgbClr val="17212B"/>
-                </a:solidFill>
-                <a:latin typeface="Malgun Gothic" pitchFamily="34" charset="0"/>
-                <a:ea typeface="Malgun Gothic" pitchFamily="34" charset="-122"/>
-                <a:cs typeface="Malgun Gothic" pitchFamily="34" charset="-120"/>
-              </a:rPr>
-              <a:t>TreeModel: Mesh, Material처럼 무겁고 공통인 데이터</a:t>
-            </a:r>
-            <a:endParaRPr lang="en-US" sz="1580" dirty="0"/>
-          </a:p>
-        </p:txBody>
-      </p:sp>
-      <p:sp>
-        <p:nvSpPr>
-          <p:cNvPr id="21" name="Shape 19"/>
-          <p:cNvSpPr/>
-          <p:nvPr/>
-        </p:nvSpPr>
-        <p:spPr>
-          <a:xfrm>
-            <a:off x="822960" y="4078224"/>
-            <a:ext cx="82296" cy="82296"/>
-          </a:xfrm>
-          <a:prstGeom prst="ellipse">
-            <a:avLst/>
-          </a:prstGeom>
-          <a:solidFill>
-            <a:srgbClr val="15803D"/>
-          </a:solidFill>
-          <a:ln w="12700">
-            <a:solidFill>
-              <a:srgbClr val="15803D"/>
-            </a:solidFill>
-            <a:prstDash val="solid"/>
-          </a:ln>
-        </p:spPr>
-      </p:sp>
-      <p:sp>
-        <p:nvSpPr>
-          <p:cNvPr id="22" name="Text 20"/>
-          <p:cNvSpPr/>
-          <p:nvPr/>
-        </p:nvSpPr>
-        <p:spPr>
-          <a:xfrm>
-            <a:off x="1024128" y="3977640"/>
-            <a:ext cx="7406640" cy="310896"/>
-          </a:xfrm>
-          <a:prstGeom prst="rect">
-            <a:avLst/>
-          </a:prstGeom>
-          <a:noFill/>
-          <a:ln/>
-        </p:spPr>
-        <p:txBody>
-          <a:bodyPr wrap="square" lIns="254" tIns="254" rIns="254" bIns="254" rtlCol="0" anchor="t">
-            <a:normAutofit/>
-          </a:bodyPr>
-          <a:lstStyle/>
-          <a:p>
-            <a:pPr marL="0" indent="0">
-              <a:buNone/>
-            </a:pPr>
-            <a:r>
-              <a:rPr lang="en-US" sz="1580" dirty="0">
-                <a:solidFill>
-                  <a:srgbClr val="17212B"/>
-                </a:solidFill>
-                <a:latin typeface="Malgun Gothic" pitchFamily="34" charset="0"/>
-                <a:ea typeface="Malgun Gothic" pitchFamily="34" charset="-122"/>
-                <a:cs typeface="Malgun Gothic" pitchFamily="34" charset="-120"/>
-              </a:rPr>
-              <a:t>TreeInstance: Position, Scale, Tint처럼 가볍고 개별적인 데이터</a:t>
-            </a:r>
-            <a:endParaRPr lang="en-US" sz="1580" dirty="0"/>
-          </a:p>
-        </p:txBody>
-      </p:sp>
-    </p:spTree>
-  </p:cSld>
-  <p:clrMapOvr>
-    <a:masterClrMapping/>
-  </p:clrMapOvr>
-</p:sld>
-</file>
-
-<file path=ppt/slides/slide11.xml><?xml version="1.0" encoding="utf-8"?>
-<p:sld xmlns:a="http://schemas.openxmlformats.org/drawingml/2006/main" xmlns:r="http://schemas.openxmlformats.org/officeDocument/2006/relationships" xmlns:p="http://schemas.openxmlformats.org/presentationml/2006/main">
-  <p:cSld name="Slide 11">
-    <p:bg>
-      <p:bgPr>
-        <a:solidFill>
-          <a:srgbClr val="FAF7EF"/>
-        </a:solidFill>
-        <a:effectLst/>
-      </p:bgPr>
-    </p:bg>
-    <p:spTree>
-      <p:nvGrpSpPr>
-        <p:cNvPr id="1" name=""/>
-        <p:cNvGrpSpPr/>
-        <p:nvPr/>
-      </p:nvGrpSpPr>
-      <p:grpSpPr>
-        <a:xfrm>
-          <a:off x="0" y="0"/>
-          <a:ext cx="0" cy="0"/>
-          <a:chOff x="0" y="0"/>
-          <a:chExt cx="0" cy="0"/>
-        </a:xfrm>
-      </p:grpSpPr>
-      <p:sp>
-        <p:nvSpPr>
-          <p:cNvPr id="2" name="Shape 0"/>
-          <p:cNvSpPr/>
-          <p:nvPr/>
-        </p:nvSpPr>
-        <p:spPr>
-          <a:xfrm>
-            <a:off x="0" y="0"/>
-            <a:ext cx="9144000" cy="5715000"/>
-          </a:xfrm>
-          <a:prstGeom prst="rect">
-            <a:avLst/>
-          </a:prstGeom>
-          <a:solidFill>
-            <a:srgbClr val="FAF7EF"/>
-          </a:solidFill>
-          <a:ln w="12700">
-            <a:solidFill>
-              <a:srgbClr val="FAF7EF"/>
-            </a:solidFill>
-            <a:prstDash val="solid"/>
-          </a:ln>
-        </p:spPr>
-      </p:sp>
-      <p:sp>
-        <p:nvSpPr>
-          <p:cNvPr id="3" name="Shape 1"/>
-          <p:cNvSpPr/>
-          <p:nvPr/>
-        </p:nvSpPr>
-        <p:spPr>
-          <a:xfrm>
-            <a:off x="0" y="0"/>
-            <a:ext cx="118872" cy="5715000"/>
-          </a:xfrm>
-          <a:prstGeom prst="rect">
-            <a:avLst/>
-          </a:prstGeom>
-          <a:solidFill>
-            <a:srgbClr val="E45745"/>
-          </a:solidFill>
-          <a:ln w="12700">
-            <a:solidFill>
-              <a:srgbClr val="E45745"/>
-            </a:solidFill>
-            <a:prstDash val="solid"/>
-          </a:ln>
-        </p:spPr>
-      </p:sp>
-      <p:sp>
-        <p:nvSpPr>
-          <p:cNvPr id="4" name="Text 2"/>
-          <p:cNvSpPr/>
-          <p:nvPr/>
-        </p:nvSpPr>
-        <p:spPr>
-          <a:xfrm>
-            <a:off x="8549640" y="5358384"/>
-            <a:ext cx="310896" cy="146304"/>
-          </a:xfrm>
-          <a:prstGeom prst="rect">
-            <a:avLst/>
-          </a:prstGeom>
-          <a:noFill/>
-          <a:ln/>
-        </p:spPr>
-        <p:txBody>
-          <a:bodyPr wrap="square" lIns="0" tIns="0" rIns="0" bIns="0" rtlCol="0" anchor="ctr"/>
-          <a:lstStyle/>
-          <a:p>
-            <a:pPr marL="0" indent="0" algn="r">
-              <a:buNone/>
-            </a:pPr>
-            <a:r>
-              <a:rPr lang="en-US" sz="700" dirty="0">
-                <a:solidFill>
-                  <a:srgbClr val="9F968C"/>
-                </a:solidFill>
-                <a:latin typeface="Aptos" pitchFamily="34" charset="0"/>
-                <a:ea typeface="Aptos" pitchFamily="34" charset="-122"/>
-                <a:cs typeface="Aptos" pitchFamily="34" charset="-120"/>
-              </a:rPr>
-              <a:t>11</a:t>
-            </a:r>
-            <a:endParaRPr lang="en-US" sz="700" dirty="0"/>
-          </a:p>
-        </p:txBody>
-      </p:sp>
-      <p:sp>
-        <p:nvSpPr>
-          <p:cNvPr id="5" name="Text 3"/>
-          <p:cNvSpPr/>
-          <p:nvPr/>
-        </p:nvSpPr>
-        <p:spPr>
-          <a:xfrm>
-            <a:off x="594360" y="5340096"/>
-            <a:ext cx="4663440" cy="164592"/>
-          </a:xfrm>
-          <a:prstGeom prst="rect">
-            <a:avLst/>
-          </a:prstGeom>
-          <a:noFill/>
-          <a:ln/>
-        </p:spPr>
-        <p:txBody>
-          <a:bodyPr wrap="square" lIns="0" tIns="0" rIns="0" bIns="0" rtlCol="0" anchor="ctr"/>
-          <a:lstStyle/>
-          <a:p>
-            <a:pPr marL="0" indent="0">
-              <a:buNone/>
-            </a:pPr>
-            <a:r>
-              <a:rPr lang="en-US" sz="700" dirty="0">
-                <a:solidFill>
-                  <a:srgbClr val="9F968C"/>
-                </a:solidFill>
-                <a:latin typeface="Malgun Gothic" pitchFamily="34" charset="0"/>
-                <a:ea typeface="Malgun Gothic" pitchFamily="34" charset="-122"/>
-                <a:cs typeface="Malgun Gothic" pitchFamily="34" charset="-120"/>
-              </a:rPr>
-              <a:t>Game Programming Patterns - Flyweight | Unity/C#</a:t>
-            </a:r>
-            <a:endParaRPr lang="en-US" sz="700" dirty="0"/>
-          </a:p>
-        </p:txBody>
-      </p:sp>
-      <p:sp>
-        <p:nvSpPr>
-          <p:cNvPr id="6" name="Text 4"/>
-          <p:cNvSpPr/>
-          <p:nvPr/>
-        </p:nvSpPr>
-        <p:spPr>
-          <a:xfrm>
-            <a:off x="594360" y="347472"/>
-            <a:ext cx="8046720" cy="420624"/>
-          </a:xfrm>
-          <a:prstGeom prst="rect">
-            <a:avLst/>
-          </a:prstGeom>
-          <a:noFill/>
-          <a:ln/>
-        </p:spPr>
-        <p:txBody>
-          <a:bodyPr wrap="square" lIns="0" tIns="0" rIns="0" bIns="0" rtlCol="0" anchor="ctr">
-            <a:normAutofit/>
-          </a:bodyPr>
-          <a:lstStyle/>
-          <a:p>
-            <a:pPr marL="0" indent="0">
-              <a:buNone/>
-            </a:pPr>
-            <a:r>
-              <a:rPr lang="en-US" sz="2500" b="1" dirty="0">
-                <a:solidFill>
-                  <a:srgbClr val="17212B"/>
-                </a:solidFill>
-                <a:latin typeface="Malgun Gothic" pitchFamily="34" charset="0"/>
-                <a:ea typeface="Malgun Gothic" pitchFamily="34" charset="-122"/>
-                <a:cs typeface="Malgun Gothic" pitchFamily="34" charset="-120"/>
-              </a:rPr>
-              <a:t>Type Object와 비슷하지만 목적이 다르다</a:t>
-            </a:r>
-            <a:endParaRPr lang="en-US" sz="2500" dirty="0"/>
-          </a:p>
-        </p:txBody>
-      </p:sp>
-      <p:sp>
-        <p:nvSpPr>
-          <p:cNvPr id="7" name="Text 5"/>
-          <p:cNvSpPr/>
-          <p:nvPr/>
-        </p:nvSpPr>
-        <p:spPr>
-          <a:xfrm>
-            <a:off x="804672" y="1371600"/>
-            <a:ext cx="3474720" cy="320040"/>
-          </a:xfrm>
-          <a:prstGeom prst="rect">
-            <a:avLst/>
-          </a:prstGeom>
-          <a:noFill/>
-          <a:ln/>
-        </p:spPr>
-        <p:txBody>
-          <a:bodyPr wrap="square" lIns="254" tIns="254" rIns="254" bIns="254" rtlCol="0" anchor="t">
-            <a:normAutofit/>
-          </a:bodyPr>
-          <a:lstStyle/>
-          <a:p>
-            <a:pPr marL="0" indent="0">
-              <a:buNone/>
-            </a:pPr>
-            <a:r>
-              <a:rPr lang="en-US" sz="1950" b="1" dirty="0">
-                <a:solidFill>
-                  <a:srgbClr val="E45745"/>
-                </a:solidFill>
-                <a:latin typeface="Malgun Gothic" pitchFamily="34" charset="0"/>
-                <a:ea typeface="Malgun Gothic" pitchFamily="34" charset="-122"/>
-                <a:cs typeface="Malgun Gothic" pitchFamily="34" charset="-120"/>
-              </a:rPr>
-              <a:t>Type Object</a:t>
-            </a:r>
-            <a:endParaRPr lang="en-US" sz="1950" dirty="0"/>
-          </a:p>
-        </p:txBody>
-      </p:sp>
-      <p:sp>
-        <p:nvSpPr>
-          <p:cNvPr id="8" name="Shape 6"/>
-          <p:cNvSpPr/>
-          <p:nvPr/>
-        </p:nvSpPr>
-        <p:spPr>
-          <a:xfrm>
-            <a:off x="859536" y="1947672"/>
-            <a:ext cx="82296" cy="82296"/>
-          </a:xfrm>
-          <a:prstGeom prst="ellipse">
-            <a:avLst/>
-          </a:prstGeom>
-          <a:solidFill>
-            <a:srgbClr val="E45745"/>
-          </a:solidFill>
-          <a:ln w="12700">
-            <a:solidFill>
-              <a:srgbClr val="E45745"/>
-            </a:solidFill>
-            <a:prstDash val="solid"/>
-          </a:ln>
-        </p:spPr>
-      </p:sp>
-      <p:sp>
-        <p:nvSpPr>
-          <p:cNvPr id="9" name="Text 7"/>
-          <p:cNvSpPr/>
-          <p:nvPr/>
-        </p:nvSpPr>
-        <p:spPr>
-          <a:xfrm>
-            <a:off x="1060704" y="1847088"/>
-            <a:ext cx="3246120" cy="621792"/>
-          </a:xfrm>
-          <a:prstGeom prst="rect">
-            <a:avLst/>
-          </a:prstGeom>
-          <a:noFill/>
-          <a:ln/>
-        </p:spPr>
-        <p:txBody>
-          <a:bodyPr wrap="square" lIns="254" tIns="254" rIns="254" bIns="254" rtlCol="0" anchor="t">
-            <a:normAutofit/>
-          </a:bodyPr>
-          <a:lstStyle/>
-          <a:p>
-            <a:pPr marL="0" indent="0">
-              <a:buNone/>
-            </a:pPr>
-            <a:r>
-              <a:rPr lang="en-US" sz="1420" dirty="0">
-                <a:solidFill>
-                  <a:srgbClr val="17212B"/>
-                </a:solidFill>
-                <a:latin typeface="Malgun Gothic" pitchFamily="34" charset="0"/>
-                <a:ea typeface="Malgun Gothic" pitchFamily="34" charset="-122"/>
-                <a:cs typeface="Malgun Gothic" pitchFamily="34" charset="-120"/>
-              </a:rPr>
-              <a:t>클래스 수를 줄이기 위해 타입을 데이터로 만든다.</a:t>
-            </a:r>
-            <a:endParaRPr lang="en-US" sz="1420" dirty="0"/>
-          </a:p>
-        </p:txBody>
-      </p:sp>
-      <p:sp>
-        <p:nvSpPr>
-          <p:cNvPr id="10" name="Shape 8"/>
-          <p:cNvSpPr/>
-          <p:nvPr/>
-        </p:nvSpPr>
-        <p:spPr>
-          <a:xfrm>
-            <a:off x="859536" y="2734056"/>
-            <a:ext cx="82296" cy="82296"/>
-          </a:xfrm>
-          <a:prstGeom prst="ellipse">
-            <a:avLst/>
-          </a:prstGeom>
-          <a:solidFill>
-            <a:srgbClr val="E45745"/>
-          </a:solidFill>
-          <a:ln w="12700">
-            <a:solidFill>
-              <a:srgbClr val="E45745"/>
-            </a:solidFill>
-            <a:prstDash val="solid"/>
-          </a:ln>
-        </p:spPr>
-      </p:sp>
-      <p:sp>
-        <p:nvSpPr>
-          <p:cNvPr id="11" name="Text 9"/>
-          <p:cNvSpPr/>
-          <p:nvPr/>
-        </p:nvSpPr>
-        <p:spPr>
-          <a:xfrm>
-            <a:off x="1060704" y="2633472"/>
-            <a:ext cx="3246120" cy="621792"/>
-          </a:xfrm>
-          <a:prstGeom prst="rect">
-            <a:avLst/>
-          </a:prstGeom>
-          <a:noFill/>
-          <a:ln/>
-        </p:spPr>
-        <p:txBody>
-          <a:bodyPr wrap="square" lIns="254" tIns="254" rIns="254" bIns="254" rtlCol="0" anchor="t">
-            <a:normAutofit/>
-          </a:bodyPr>
-          <a:lstStyle/>
-          <a:p>
-            <a:pPr marL="0" indent="0">
-              <a:buNone/>
-            </a:pPr>
-            <a:r>
-              <a:rPr lang="en-US" sz="1420" dirty="0">
-                <a:solidFill>
-                  <a:srgbClr val="17212B"/>
-                </a:solidFill>
-                <a:latin typeface="Malgun Gothic" pitchFamily="34" charset="0"/>
-                <a:ea typeface="Malgun Gothic" pitchFamily="34" charset="-122"/>
-                <a:cs typeface="Malgun Gothic" pitchFamily="34" charset="-120"/>
-              </a:rPr>
-              <a:t>설계 유연성이 주목적이다.</a:t>
-            </a:r>
-            <a:endParaRPr lang="en-US" sz="1420" dirty="0"/>
-          </a:p>
-        </p:txBody>
-      </p:sp>
-      <p:sp>
-        <p:nvSpPr>
-          <p:cNvPr id="12" name="Shape 10"/>
-          <p:cNvSpPr/>
-          <p:nvPr/>
-        </p:nvSpPr>
-        <p:spPr>
-          <a:xfrm>
-            <a:off x="859536" y="3520440"/>
-            <a:ext cx="82296" cy="82296"/>
-          </a:xfrm>
-          <a:prstGeom prst="ellipse">
-            <a:avLst/>
-          </a:prstGeom>
-          <a:solidFill>
-            <a:srgbClr val="E45745"/>
-          </a:solidFill>
-          <a:ln w="12700">
-            <a:solidFill>
-              <a:srgbClr val="E45745"/>
-            </a:solidFill>
-            <a:prstDash val="solid"/>
-          </a:ln>
-        </p:spPr>
-      </p:sp>
-      <p:sp>
-        <p:nvSpPr>
-          <p:cNvPr id="13" name="Text 11"/>
-          <p:cNvSpPr/>
-          <p:nvPr/>
-        </p:nvSpPr>
-        <p:spPr>
-          <a:xfrm>
-            <a:off x="1060704" y="3419856"/>
-            <a:ext cx="3246120" cy="621792"/>
-          </a:xfrm>
-          <a:prstGeom prst="rect">
-            <a:avLst/>
-          </a:prstGeom>
-          <a:noFill/>
-          <a:ln/>
-        </p:spPr>
-        <p:txBody>
-          <a:bodyPr wrap="square" lIns="254" tIns="254" rIns="254" bIns="254" rtlCol="0" anchor="t">
-            <a:normAutofit/>
-          </a:bodyPr>
-          <a:lstStyle/>
-          <a:p>
-            <a:pPr marL="0" indent="0">
-              <a:buNone/>
-            </a:pPr>
-            <a:r>
-              <a:rPr lang="en-US" sz="1420" dirty="0">
-                <a:solidFill>
-                  <a:srgbClr val="17212B"/>
-                </a:solidFill>
-                <a:latin typeface="Malgun Gothic" pitchFamily="34" charset="0"/>
-                <a:ea typeface="Malgun Gothic" pitchFamily="34" charset="-122"/>
-                <a:cs typeface="Malgun Gothic" pitchFamily="34" charset="-120"/>
-              </a:rPr>
-              <a:t>메모리 공유는 부수 효과일 수 있다.</a:t>
-            </a:r>
-            <a:endParaRPr lang="en-US" sz="1420" dirty="0"/>
-          </a:p>
-        </p:txBody>
-      </p:sp>
-      <p:sp>
-        <p:nvSpPr>
-          <p:cNvPr id="14" name="Text 12"/>
-          <p:cNvSpPr/>
-          <p:nvPr/>
-        </p:nvSpPr>
-        <p:spPr>
-          <a:xfrm>
-            <a:off x="4800600" y="1371600"/>
-            <a:ext cx="3474720" cy="320040"/>
-          </a:xfrm>
-          <a:prstGeom prst="rect">
-            <a:avLst/>
-          </a:prstGeom>
-          <a:noFill/>
-          <a:ln/>
-        </p:spPr>
-        <p:txBody>
-          <a:bodyPr wrap="square" lIns="254" tIns="254" rIns="254" bIns="254" rtlCol="0" anchor="t">
-            <a:normAutofit/>
-          </a:bodyPr>
-          <a:lstStyle/>
-          <a:p>
-            <a:pPr marL="0" indent="0">
-              <a:buNone/>
-            </a:pPr>
-            <a:r>
-              <a:rPr lang="en-US" sz="1950" b="1" dirty="0">
-                <a:solidFill>
-                  <a:srgbClr val="15803D"/>
-                </a:solidFill>
-                <a:latin typeface="Malgun Gothic" pitchFamily="34" charset="0"/>
-                <a:ea typeface="Malgun Gothic" pitchFamily="34" charset="-122"/>
-                <a:cs typeface="Malgun Gothic" pitchFamily="34" charset="-120"/>
-              </a:rPr>
-              <a:t>Flyweight</a:t>
-            </a:r>
-            <a:endParaRPr lang="en-US" sz="1950" dirty="0"/>
-          </a:p>
-        </p:txBody>
-      </p:sp>
-      <p:sp>
-        <p:nvSpPr>
-          <p:cNvPr id="15" name="Shape 13"/>
-          <p:cNvSpPr/>
-          <p:nvPr/>
-        </p:nvSpPr>
-        <p:spPr>
-          <a:xfrm>
-            <a:off x="4855464" y="1947672"/>
-            <a:ext cx="82296" cy="82296"/>
-          </a:xfrm>
-          <a:prstGeom prst="ellipse">
-            <a:avLst/>
-          </a:prstGeom>
-          <a:solidFill>
-            <a:srgbClr val="15803D"/>
-          </a:solidFill>
-          <a:ln w="12700">
-            <a:solidFill>
-              <a:srgbClr val="15803D"/>
-            </a:solidFill>
-            <a:prstDash val="solid"/>
-          </a:ln>
-        </p:spPr>
-      </p:sp>
-      <p:sp>
-        <p:nvSpPr>
-          <p:cNvPr id="16" name="Text 14"/>
-          <p:cNvSpPr/>
-          <p:nvPr/>
-        </p:nvSpPr>
-        <p:spPr>
-          <a:xfrm>
-            <a:off x="5056632" y="1847088"/>
-            <a:ext cx="3246120" cy="621792"/>
-          </a:xfrm>
-          <a:prstGeom prst="rect">
-            <a:avLst/>
-          </a:prstGeom>
-          <a:noFill/>
-          <a:ln/>
-        </p:spPr>
-        <p:txBody>
-          <a:bodyPr wrap="square" lIns="254" tIns="254" rIns="254" bIns="254" rtlCol="0" anchor="t">
-            <a:normAutofit/>
-          </a:bodyPr>
-          <a:lstStyle/>
-          <a:p>
-            <a:pPr marL="0" indent="0">
-              <a:buNone/>
-            </a:pPr>
-            <a:r>
-              <a:rPr lang="en-US" sz="1420" dirty="0">
-                <a:solidFill>
-                  <a:srgbClr val="17212B"/>
-                </a:solidFill>
-                <a:latin typeface="Malgun Gothic" pitchFamily="34" charset="0"/>
-                <a:ea typeface="Malgun Gothic" pitchFamily="34" charset="-122"/>
-                <a:cs typeface="Malgun Gothic" pitchFamily="34" charset="-120"/>
-              </a:rPr>
-              <a:t>많은 객체의 중복 데이터를 줄인다.</a:t>
-            </a:r>
-            <a:endParaRPr lang="en-US" sz="1420" dirty="0"/>
-          </a:p>
-        </p:txBody>
-      </p:sp>
-      <p:sp>
-        <p:nvSpPr>
-          <p:cNvPr id="17" name="Shape 15"/>
-          <p:cNvSpPr/>
-          <p:nvPr/>
-        </p:nvSpPr>
-        <p:spPr>
-          <a:xfrm>
-            <a:off x="4855464" y="2734056"/>
-            <a:ext cx="82296" cy="82296"/>
-          </a:xfrm>
-          <a:prstGeom prst="ellipse">
-            <a:avLst/>
-          </a:prstGeom>
-          <a:solidFill>
-            <a:srgbClr val="15803D"/>
-          </a:solidFill>
-          <a:ln w="12700">
-            <a:solidFill>
-              <a:srgbClr val="15803D"/>
-            </a:solidFill>
-            <a:prstDash val="solid"/>
-          </a:ln>
-        </p:spPr>
-      </p:sp>
-      <p:sp>
-        <p:nvSpPr>
-          <p:cNvPr id="18" name="Text 16"/>
-          <p:cNvSpPr/>
-          <p:nvPr/>
-        </p:nvSpPr>
-        <p:spPr>
-          <a:xfrm>
-            <a:off x="5056632" y="2633472"/>
-            <a:ext cx="3246120" cy="621792"/>
-          </a:xfrm>
-          <a:prstGeom prst="rect">
-            <a:avLst/>
-          </a:prstGeom>
-          <a:noFill/>
-          <a:ln/>
-        </p:spPr>
-        <p:txBody>
-          <a:bodyPr wrap="square" lIns="254" tIns="254" rIns="254" bIns="254" rtlCol="0" anchor="t">
-            <a:normAutofit/>
-          </a:bodyPr>
-          <a:lstStyle/>
-          <a:p>
-            <a:pPr marL="0" indent="0">
-              <a:buNone/>
-            </a:pPr>
-            <a:r>
-              <a:rPr lang="ko-KR" altLang="en-US" sz="1420">
-                <a:solidFill>
-                  <a:srgbClr val="17212B"/>
-                </a:solidFill>
-                <a:latin typeface="Malgun Gothic" pitchFamily="34" charset="0"/>
-                <a:ea typeface="Malgun Gothic" pitchFamily="34" charset="-122"/>
-                <a:cs typeface="Malgun Gothic" pitchFamily="34" charset="-120"/>
-              </a:rPr>
-              <a:t>메모리 효율이 주목적이다</a:t>
-            </a:r>
-            <a:r>
-              <a:rPr lang="en-US" altLang="ko-KR" sz="1420">
-                <a:solidFill>
-                  <a:srgbClr val="17212B"/>
-                </a:solidFill>
-                <a:latin typeface="Malgun Gothic" pitchFamily="34" charset="0"/>
-                <a:ea typeface="Malgun Gothic" pitchFamily="34" charset="-122"/>
-                <a:cs typeface="Malgun Gothic" pitchFamily="34" charset="-120"/>
-              </a:rPr>
-              <a:t>.</a:t>
-            </a:r>
-            <a:endParaRPr lang="en-US" sz="1420" dirty="0"/>
-          </a:p>
-        </p:txBody>
-      </p:sp>
-      <p:sp>
-        <p:nvSpPr>
-          <p:cNvPr id="19" name="Shape 17"/>
-          <p:cNvSpPr/>
-          <p:nvPr/>
-        </p:nvSpPr>
-        <p:spPr>
-          <a:xfrm>
-            <a:off x="4855464" y="3520440"/>
-            <a:ext cx="82296" cy="82296"/>
-          </a:xfrm>
-          <a:prstGeom prst="ellipse">
-            <a:avLst/>
-          </a:prstGeom>
-          <a:solidFill>
-            <a:srgbClr val="15803D"/>
-          </a:solidFill>
-          <a:ln w="12700">
-            <a:solidFill>
-              <a:srgbClr val="15803D"/>
-            </a:solidFill>
-            <a:prstDash val="solid"/>
-          </a:ln>
-        </p:spPr>
-      </p:sp>
-      <p:sp>
-        <p:nvSpPr>
-          <p:cNvPr id="20" name="Text 18"/>
-          <p:cNvSpPr/>
-          <p:nvPr/>
-        </p:nvSpPr>
-        <p:spPr>
-          <a:xfrm>
-            <a:off x="5056632" y="3419856"/>
-            <a:ext cx="3246120" cy="621792"/>
-          </a:xfrm>
-          <a:prstGeom prst="rect">
-            <a:avLst/>
-          </a:prstGeom>
-          <a:noFill/>
-          <a:ln/>
-        </p:spPr>
-        <p:txBody>
-          <a:bodyPr wrap="square" lIns="254" tIns="254" rIns="254" bIns="254" rtlCol="0" anchor="t">
-            <a:normAutofit/>
-          </a:bodyPr>
-          <a:lstStyle/>
-          <a:p>
-            <a:pPr marL="0" indent="0">
-              <a:buNone/>
-            </a:pPr>
-            <a:r>
-              <a:rPr lang="en-US" sz="1420" dirty="0">
-                <a:solidFill>
-                  <a:srgbClr val="17212B"/>
-                </a:solidFill>
-                <a:latin typeface="Malgun Gothic" pitchFamily="34" charset="0"/>
-                <a:ea typeface="Malgun Gothic" pitchFamily="34" charset="-122"/>
-                <a:cs typeface="Malgun Gothic" pitchFamily="34" charset="-120"/>
-              </a:rPr>
-              <a:t>공유 상태는 거의 불변이어야 한다.</a:t>
-            </a:r>
-            <a:endParaRPr lang="en-US" sz="1420" dirty="0"/>
-          </a:p>
-        </p:txBody>
-      </p:sp>
-    </p:spTree>
-  </p:cSld>
-  <p:clrMapOvr>
-    <a:masterClrMapping/>
-  </p:clrMapOvr>
-</p:sld>
-</file>
-
-<file path=ppt/slides/slide12.xml><?xml version="1.0" encoding="utf-8"?>
-<p:sld xmlns:a="http://schemas.openxmlformats.org/drawingml/2006/main" xmlns:r="http://schemas.openxmlformats.org/officeDocument/2006/relationships" xmlns:p="http://schemas.openxmlformats.org/presentationml/2006/main">
   <p:cSld name="Slide 12">
     <p:bg>
       <p:bgPr>
@@ -6132,7 +4565,7 @@
               <a:buNone/>
             </a:pPr>
             <a:r>
-              <a:rPr lang="en-US" sz="700" dirty="0">
+              <a:rPr lang="en-US" sz="700">
                 <a:solidFill>
                   <a:srgbClr val="9F968C"/>
                 </a:solidFill>
@@ -6140,7 +4573,7 @@
                 <a:ea typeface="Aptos" pitchFamily="34" charset="-122"/>
                 <a:cs typeface="Aptos" pitchFamily="34" charset="-120"/>
               </a:rPr>
-              <a:t>12</a:t>
+              <a:t>10</a:t>
             </a:r>
             <a:endParaRPr lang="en-US" sz="700" dirty="0"/>
           </a:p>
@@ -6473,7 +4906,7 @@
 </p:sld>
 </file>
 
-<file path=ppt/slides/slide13.xml><?xml version="1.0" encoding="utf-8"?>
+<file path=ppt/slides/slide11.xml><?xml version="1.0" encoding="utf-8"?>
 <p:sld xmlns:a="http://schemas.openxmlformats.org/drawingml/2006/main" xmlns:r="http://schemas.openxmlformats.org/officeDocument/2006/relationships" xmlns:p="http://schemas.openxmlformats.org/presentationml/2006/main">
   <p:cSld name="Slide 13">
     <p:bg>
@@ -6573,7 +5006,7 @@
               <a:buNone/>
             </a:pPr>
             <a:r>
-              <a:rPr lang="en-US" sz="700" dirty="0">
+              <a:rPr lang="en-US" sz="700">
                 <a:solidFill>
                   <a:srgbClr val="9F968C"/>
                 </a:solidFill>
@@ -6581,7 +5014,7 @@
                 <a:ea typeface="Aptos" pitchFamily="34" charset="-122"/>
                 <a:cs typeface="Aptos" pitchFamily="34" charset="-120"/>
               </a:rPr>
-              <a:t>13</a:t>
+              <a:t>11</a:t>
             </a:r>
             <a:endParaRPr lang="en-US" sz="700" dirty="0"/>
           </a:p>
@@ -6672,7 +5105,7 @@
                 <a:ea typeface="Malgun Gothic" pitchFamily="34" charset="-122"/>
                 <a:cs typeface="Malgun Gothic" pitchFamily="34" charset="-120"/>
               </a:rPr>
-              <a:t>에서의 인스턴싱 사고방식</a:t>
+              <a:t>에서 인스턴싱 구현하기</a:t>
             </a:r>
             <a:endParaRPr lang="en-US" sz="2500" dirty="0"/>
           </a:p>
@@ -6950,7 +5383,7 @@
 </p:sld>
 </file>
 
-<file path=ppt/slides/slide14.xml><?xml version="1.0" encoding="utf-8"?>
+<file path=ppt/slides/slide12.xml><?xml version="1.0" encoding="utf-8"?>
 <p:sld xmlns:a="http://schemas.openxmlformats.org/drawingml/2006/main" xmlns:r="http://schemas.openxmlformats.org/officeDocument/2006/relationships" xmlns:p="http://schemas.openxmlformats.org/presentationml/2006/main">
   <p:cSld name="Slide 14">
     <p:bg>
@@ -7050,7 +5483,7 @@
               <a:buNone/>
             </a:pPr>
             <a:r>
-              <a:rPr lang="en-US" sz="700" dirty="0">
+              <a:rPr lang="en-US" sz="700">
                 <a:solidFill>
                   <a:srgbClr val="9F968C"/>
                 </a:solidFill>
@@ -7058,7 +5491,7 @@
                 <a:ea typeface="Aptos" pitchFamily="34" charset="-122"/>
                 <a:cs typeface="Aptos" pitchFamily="34" charset="-120"/>
               </a:rPr>
-              <a:t>14</a:t>
+              <a:t>12</a:t>
             </a:r>
             <a:endParaRPr lang="en-US" sz="700" dirty="0"/>
           </a:p>
@@ -7369,7 +5802,7 @@
               <a:buNone/>
             </a:pPr>
             <a:r>
-              <a:rPr lang="en-US" sz="1700" dirty="0">
+              <a:rPr lang="ko-KR" altLang="en-US" sz="1700">
                 <a:solidFill>
                   <a:srgbClr val="17212B"/>
                 </a:solidFill>
@@ -7377,7 +5810,18 @@
                 <a:ea typeface="Malgun Gothic" pitchFamily="34" charset="-122"/>
                 <a:cs typeface="Malgun Gothic" pitchFamily="34" charset="-120"/>
               </a:rPr>
-              <a:t>공통 데이터 한 벌을 여러 인스턴스가 공유한다.</a:t>
+              <a:t>공통 데이터 한 세트를 여러 인스턴스가 공유한다</a:t>
+            </a:r>
+            <a:r>
+              <a:rPr lang="en-US" altLang="ko-KR" sz="1700">
+                <a:solidFill>
+                  <a:srgbClr val="17212B"/>
+                </a:solidFill>
+                <a:latin typeface="Malgun Gothic" pitchFamily="34" charset="0"/>
+                <a:ea typeface="Malgun Gothic" pitchFamily="34" charset="-122"/>
+                <a:cs typeface="Malgun Gothic" pitchFamily="34" charset="-120"/>
+              </a:rPr>
+              <a:t>.</a:t>
             </a:r>
             <a:endParaRPr lang="en-US" sz="1700" dirty="0"/>
           </a:p>
@@ -7391,7 +5835,7 @@
 </p:sld>
 </file>
 
-<file path=ppt/slides/slide15.xml><?xml version="1.0" encoding="utf-8"?>
+<file path=ppt/slides/slide13.xml><?xml version="1.0" encoding="utf-8"?>
 <p:sld xmlns:a="http://schemas.openxmlformats.org/drawingml/2006/main" xmlns:r="http://schemas.openxmlformats.org/officeDocument/2006/relationships" xmlns:p="http://schemas.openxmlformats.org/presentationml/2006/main">
   <p:cSld name="Slide 15">
     <p:bg>
@@ -7491,7 +5935,7 @@
               <a:buNone/>
             </a:pPr>
             <a:r>
-              <a:rPr lang="en-US" sz="700" dirty="0">
+              <a:rPr lang="en-US" sz="700">
                 <a:solidFill>
                   <a:srgbClr val="9F968C"/>
                 </a:solidFill>
@@ -7499,7 +5943,7 @@
                 <a:ea typeface="Aptos" pitchFamily="34" charset="-122"/>
                 <a:cs typeface="Aptos" pitchFamily="34" charset="-120"/>
               </a:rPr>
-              <a:t>15</a:t>
+              <a:t>13</a:t>
             </a:r>
             <a:endParaRPr lang="en-US" sz="700" dirty="0"/>
           </a:p>
@@ -8124,7 +6568,7 @@
               <a:buNone/>
             </a:pPr>
             <a:r>
-              <a:rPr lang="en-US" sz="1580" dirty="0">
+              <a:rPr lang="en-US" altLang="ko-KR" sz="1580">
                 <a:solidFill>
                   <a:srgbClr val="17212B"/>
                 </a:solidFill>
@@ -8132,7 +6576,29 @@
                 <a:ea typeface="Malgun Gothic" pitchFamily="34" charset="-122"/>
                 <a:cs typeface="Malgun Gothic" pitchFamily="34" charset="-120"/>
               </a:rPr>
-              <a:t>Position, Tint: 인스턴스마다 다르므로 개별 보관한다.</a:t>
+              <a:t>Position, Tint: </a:t>
+            </a:r>
+            <a:r>
+              <a:rPr lang="ko-KR" altLang="en-US" sz="1580">
+                <a:solidFill>
+                  <a:srgbClr val="17212B"/>
+                </a:solidFill>
+                <a:latin typeface="Malgun Gothic" pitchFamily="34" charset="0"/>
+                <a:ea typeface="Malgun Gothic" pitchFamily="34" charset="-122"/>
+                <a:cs typeface="Malgun Gothic" pitchFamily="34" charset="-120"/>
+              </a:rPr>
+              <a:t>인스턴스마다 다르므로 따로 보관한다</a:t>
+            </a:r>
+            <a:r>
+              <a:rPr lang="en-US" altLang="ko-KR" sz="1580">
+                <a:solidFill>
+                  <a:srgbClr val="17212B"/>
+                </a:solidFill>
+                <a:latin typeface="Malgun Gothic" pitchFamily="34" charset="0"/>
+                <a:ea typeface="Malgun Gothic" pitchFamily="34" charset="-122"/>
+                <a:cs typeface="Malgun Gothic" pitchFamily="34" charset="-120"/>
+              </a:rPr>
+              <a:t>.</a:t>
             </a:r>
             <a:endParaRPr lang="en-US" sz="1580" dirty="0"/>
           </a:p>
@@ -8146,7 +6612,7 @@
 </p:sld>
 </file>
 
-<file path=ppt/slides/slide16.xml><?xml version="1.0" encoding="utf-8"?>
+<file path=ppt/slides/slide14.xml><?xml version="1.0" encoding="utf-8"?>
 <p:sld xmlns:a="http://schemas.openxmlformats.org/drawingml/2006/main" xmlns:r="http://schemas.openxmlformats.org/officeDocument/2006/relationships" xmlns:p="http://schemas.openxmlformats.org/presentationml/2006/main">
   <p:cSld name="Slide 16">
     <p:bg>
@@ -8246,7 +6712,7 @@
               <a:buNone/>
             </a:pPr>
             <a:r>
-              <a:rPr lang="en-US" sz="700" dirty="0">
+              <a:rPr lang="en-US" sz="700">
                 <a:solidFill>
                   <a:srgbClr val="9F968C"/>
                 </a:solidFill>
@@ -8254,7 +6720,7 @@
                 <a:ea typeface="Aptos" pitchFamily="34" charset="-122"/>
                 <a:cs typeface="Aptos" pitchFamily="34" charset="-120"/>
               </a:rPr>
-              <a:t>16</a:t>
+              <a:t>14</a:t>
             </a:r>
             <a:endParaRPr lang="en-US" sz="700" dirty="0"/>
           </a:p>
@@ -8590,7 +7056,7 @@
               <a:buNone/>
             </a:pPr>
             <a:r>
-              <a:rPr lang="en-US" sz="1680" dirty="0">
+              <a:rPr lang="ko-KR" altLang="en-US" sz="1680">
                 <a:solidFill>
                   <a:srgbClr val="17212B"/>
                 </a:solidFill>
@@ -8598,7 +7064,40 @@
                 <a:ea typeface="Malgun Gothic" pitchFamily="34" charset="-122"/>
                 <a:cs typeface="Malgun Gothic" pitchFamily="34" charset="-120"/>
               </a:rPr>
-              <a:t>개별 색이 필요하면 MaterialPropertyBlock 같은 별도 경로를 고려한다.</a:t>
+              <a:t>개별 색이 필요하면 </a:t>
+            </a:r>
+            <a:r>
+              <a:rPr lang="en-US" altLang="ko-KR" sz="1680">
+                <a:solidFill>
+                  <a:srgbClr val="17212B"/>
+                </a:solidFill>
+                <a:latin typeface="Malgun Gothic" pitchFamily="34" charset="0"/>
+                <a:ea typeface="Malgun Gothic" pitchFamily="34" charset="-122"/>
+                <a:cs typeface="Malgun Gothic" pitchFamily="34" charset="-120"/>
+              </a:rPr>
+              <a:t>MaterialPropertyBlock </a:t>
+            </a:r>
+            <a:r>
+              <a:rPr lang="ko-KR" altLang="en-US" sz="1680">
+                <a:solidFill>
+                  <a:srgbClr val="17212B"/>
+                </a:solidFill>
+                <a:latin typeface="Malgun Gothic" pitchFamily="34" charset="0"/>
+                <a:ea typeface="Malgun Gothic" pitchFamily="34" charset="-122"/>
+                <a:cs typeface="Malgun Gothic" pitchFamily="34" charset="-120"/>
+              </a:rPr>
+              <a:t>같은 다른 방법을 고려한다</a:t>
+            </a:r>
+            <a:r>
+              <a:rPr lang="en-US" altLang="ko-KR" sz="1680">
+                <a:solidFill>
+                  <a:srgbClr val="17212B"/>
+                </a:solidFill>
+                <a:latin typeface="Malgun Gothic" pitchFamily="34" charset="0"/>
+                <a:ea typeface="Malgun Gothic" pitchFamily="34" charset="-122"/>
+                <a:cs typeface="Malgun Gothic" pitchFamily="34" charset="-120"/>
+              </a:rPr>
+              <a:t>.</a:t>
             </a:r>
             <a:endParaRPr lang="en-US" sz="1680" dirty="0"/>
           </a:p>
@@ -8612,7 +7111,7 @@
 </p:sld>
 </file>
 
-<file path=ppt/slides/slide17.xml><?xml version="1.0" encoding="utf-8"?>
+<file path=ppt/slides/slide15.xml><?xml version="1.0" encoding="utf-8"?>
 <p:sld xmlns:a="http://schemas.openxmlformats.org/drawingml/2006/main" xmlns:r="http://schemas.openxmlformats.org/officeDocument/2006/relationships" xmlns:p="http://schemas.openxmlformats.org/presentationml/2006/main">
   <p:cSld name="Slide 17">
     <p:bg>
@@ -8712,7 +7211,7 @@
               <a:buNone/>
             </a:pPr>
             <a:r>
-              <a:rPr lang="en-US" sz="700" dirty="0">
+              <a:rPr lang="en-US" sz="700">
                 <a:solidFill>
                   <a:srgbClr val="9F968C"/>
                 </a:solidFill>
@@ -8720,7 +7219,7 @@
                 <a:ea typeface="Aptos" pitchFamily="34" charset="-122"/>
                 <a:cs typeface="Aptos" pitchFamily="34" charset="-120"/>
               </a:rPr>
-              <a:t>17</a:t>
+              <a:t>15</a:t>
             </a:r>
             <a:endParaRPr lang="en-US" sz="700" dirty="0"/>
           </a:p>
@@ -9075,7 +7574,7 @@
 </p:sld>
 </file>
 
-<file path=ppt/slides/slide18.xml><?xml version="1.0" encoding="utf-8"?>
+<file path=ppt/slides/slide16.xml><?xml version="1.0" encoding="utf-8"?>
 <p:sld xmlns:a="http://schemas.openxmlformats.org/drawingml/2006/main" xmlns:r="http://schemas.openxmlformats.org/officeDocument/2006/relationships" xmlns:p="http://schemas.openxmlformats.org/presentationml/2006/main">
   <p:cSld name="Slide 18">
     <p:bg>
@@ -9175,7 +7674,7 @@
               <a:buNone/>
             </a:pPr>
             <a:r>
-              <a:rPr lang="en-US" sz="700" dirty="0">
+              <a:rPr lang="en-US" sz="700">
                 <a:solidFill>
                   <a:srgbClr val="9F968C"/>
                 </a:solidFill>
@@ -9183,7 +7682,7 @@
                 <a:ea typeface="Aptos" pitchFamily="34" charset="-122"/>
                 <a:cs typeface="Aptos" pitchFamily="34" charset="-120"/>
               </a:rPr>
-              <a:t>18</a:t>
+              <a:t>16</a:t>
             </a:r>
             <a:endParaRPr lang="en-US" sz="700" dirty="0"/>
           </a:p>
@@ -9649,7 +8148,7 @@
 </p:sld>
 </file>
 
-<file path=ppt/slides/slide19.xml><?xml version="1.0" encoding="utf-8"?>
+<file path=ppt/slides/slide17.xml><?xml version="1.0" encoding="utf-8"?>
 <p:sld xmlns:a="http://schemas.openxmlformats.org/drawingml/2006/main" xmlns:r="http://schemas.openxmlformats.org/officeDocument/2006/relationships" xmlns:p="http://schemas.openxmlformats.org/presentationml/2006/main">
   <p:cSld name="Slide 19">
     <p:bg>
@@ -9749,7 +8248,7 @@
               <a:buNone/>
             </a:pPr>
             <a:r>
-              <a:rPr lang="en-US" sz="700" dirty="0">
+              <a:rPr lang="en-US" sz="700">
                 <a:solidFill>
                   <a:srgbClr val="9F968C"/>
                 </a:solidFill>
@@ -9757,7 +8256,7 @@
                 <a:ea typeface="Aptos" pitchFamily="34" charset="-122"/>
                 <a:cs typeface="Aptos" pitchFamily="34" charset="-120"/>
               </a:rPr>
-              <a:t>19</a:t>
+              <a:t>17</a:t>
             </a:r>
             <a:endParaRPr lang="en-US" sz="700" dirty="0"/>
           </a:p>
@@ -10068,7 +8567,7 @@
               <a:buNone/>
             </a:pPr>
             <a:r>
-              <a:rPr lang="en-US" sz="1700" dirty="0">
+              <a:rPr lang="ko-KR" altLang="en-US" sz="1700">
                 <a:solidFill>
                   <a:srgbClr val="17212B"/>
                 </a:solidFill>
@@ -10076,7 +8575,18 @@
                 <a:ea typeface="Malgun Gothic" pitchFamily="34" charset="-122"/>
                 <a:cs typeface="Malgun Gothic" pitchFamily="34" charset="-120"/>
               </a:rPr>
-              <a:t>텍스처도 또 다른 곳에서 관리될 수 있다.</a:t>
+              <a:t>텍스처도 또 다른 곳에서 따로 관리되기 쉽다</a:t>
+            </a:r>
+            <a:r>
+              <a:rPr lang="en-US" altLang="ko-KR" sz="1700">
+                <a:solidFill>
+                  <a:srgbClr val="17212B"/>
+                </a:solidFill>
+                <a:latin typeface="Malgun Gothic" pitchFamily="34" charset="0"/>
+                <a:ea typeface="Malgun Gothic" pitchFamily="34" charset="-122"/>
+                <a:cs typeface="Malgun Gothic" pitchFamily="34" charset="-120"/>
+              </a:rPr>
+              <a:t>.</a:t>
             </a:r>
             <a:endParaRPr lang="en-US" sz="1700" dirty="0"/>
           </a:p>
@@ -10156,6 +8666,1041 @@
               <a:t>.</a:t>
             </a:r>
             <a:endParaRPr lang="en-US" sz="1700" dirty="0"/>
+          </a:p>
+        </p:txBody>
+      </p:sp>
+    </p:spTree>
+  </p:cSld>
+  <p:clrMapOvr>
+    <a:masterClrMapping/>
+  </p:clrMapOvr>
+</p:sld>
+</file>
+
+<file path=ppt/slides/slide18.xml><?xml version="1.0" encoding="utf-8"?>
+<p:sld xmlns:a="http://schemas.openxmlformats.org/drawingml/2006/main" xmlns:r="http://schemas.openxmlformats.org/officeDocument/2006/relationships" xmlns:p="http://schemas.openxmlformats.org/presentationml/2006/main">
+  <p:cSld name="Slide 20">
+    <p:bg>
+      <p:bgPr>
+        <a:solidFill>
+          <a:srgbClr val="FAF7EF"/>
+        </a:solidFill>
+        <a:effectLst/>
+      </p:bgPr>
+    </p:bg>
+    <p:spTree>
+      <p:nvGrpSpPr>
+        <p:cNvPr id="1" name=""/>
+        <p:cNvGrpSpPr/>
+        <p:nvPr/>
+      </p:nvGrpSpPr>
+      <p:grpSpPr>
+        <a:xfrm>
+          <a:off x="0" y="0"/>
+          <a:ext cx="0" cy="0"/>
+          <a:chOff x="0" y="0"/>
+          <a:chExt cx="0" cy="0"/>
+        </a:xfrm>
+      </p:grpSpPr>
+      <p:sp>
+        <p:nvSpPr>
+          <p:cNvPr id="2" name="Shape 0"/>
+          <p:cNvSpPr/>
+          <p:nvPr/>
+        </p:nvSpPr>
+        <p:spPr>
+          <a:xfrm>
+            <a:off x="0" y="0"/>
+            <a:ext cx="9144000" cy="5715000"/>
+          </a:xfrm>
+          <a:prstGeom prst="rect">
+            <a:avLst/>
+          </a:prstGeom>
+          <a:solidFill>
+            <a:srgbClr val="FAF7EF"/>
+          </a:solidFill>
+          <a:ln w="12700">
+            <a:solidFill>
+              <a:srgbClr val="FAF7EF"/>
+            </a:solidFill>
+            <a:prstDash val="solid"/>
+          </a:ln>
+        </p:spPr>
+      </p:sp>
+      <p:sp>
+        <p:nvSpPr>
+          <p:cNvPr id="3" name="Shape 1"/>
+          <p:cNvSpPr/>
+          <p:nvPr/>
+        </p:nvSpPr>
+        <p:spPr>
+          <a:xfrm>
+            <a:off x="0" y="0"/>
+            <a:ext cx="118872" cy="5715000"/>
+          </a:xfrm>
+          <a:prstGeom prst="rect">
+            <a:avLst/>
+          </a:prstGeom>
+          <a:solidFill>
+            <a:srgbClr val="15803D"/>
+          </a:solidFill>
+          <a:ln w="12700">
+            <a:solidFill>
+              <a:srgbClr val="15803D"/>
+            </a:solidFill>
+            <a:prstDash val="solid"/>
+          </a:ln>
+        </p:spPr>
+      </p:sp>
+      <p:sp>
+        <p:nvSpPr>
+          <p:cNvPr id="4" name="Text 2"/>
+          <p:cNvSpPr/>
+          <p:nvPr/>
+        </p:nvSpPr>
+        <p:spPr>
+          <a:xfrm>
+            <a:off x="8549640" y="5358384"/>
+            <a:ext cx="310896" cy="146304"/>
+          </a:xfrm>
+          <a:prstGeom prst="rect">
+            <a:avLst/>
+          </a:prstGeom>
+          <a:noFill/>
+          <a:ln/>
+        </p:spPr>
+        <p:txBody>
+          <a:bodyPr wrap="square" lIns="0" tIns="0" rIns="0" bIns="0" rtlCol="0" anchor="ctr"/>
+          <a:lstStyle/>
+          <a:p>
+            <a:pPr marL="0" indent="0" algn="r">
+              <a:buNone/>
+            </a:pPr>
+            <a:r>
+              <a:rPr lang="en-US" sz="700">
+                <a:solidFill>
+                  <a:srgbClr val="9F968C"/>
+                </a:solidFill>
+                <a:latin typeface="Aptos" pitchFamily="34" charset="0"/>
+                <a:ea typeface="Aptos" pitchFamily="34" charset="-122"/>
+                <a:cs typeface="Aptos" pitchFamily="34" charset="-120"/>
+              </a:rPr>
+              <a:t>18</a:t>
+            </a:r>
+            <a:endParaRPr lang="en-US" sz="700" dirty="0"/>
+          </a:p>
+        </p:txBody>
+      </p:sp>
+      <p:sp>
+        <p:nvSpPr>
+          <p:cNvPr id="5" name="Text 3"/>
+          <p:cNvSpPr/>
+          <p:nvPr/>
+        </p:nvSpPr>
+        <p:spPr>
+          <a:xfrm>
+            <a:off x="594360" y="5340096"/>
+            <a:ext cx="4663440" cy="164592"/>
+          </a:xfrm>
+          <a:prstGeom prst="rect">
+            <a:avLst/>
+          </a:prstGeom>
+          <a:noFill/>
+          <a:ln/>
+        </p:spPr>
+        <p:txBody>
+          <a:bodyPr wrap="square" lIns="0" tIns="0" rIns="0" bIns="0" rtlCol="0" anchor="ctr"/>
+          <a:lstStyle/>
+          <a:p>
+            <a:pPr marL="0" indent="0">
+              <a:buNone/>
+            </a:pPr>
+            <a:r>
+              <a:rPr lang="en-US" sz="700" dirty="0">
+                <a:solidFill>
+                  <a:srgbClr val="9F968C"/>
+                </a:solidFill>
+                <a:latin typeface="Malgun Gothic" pitchFamily="34" charset="0"/>
+                <a:ea typeface="Malgun Gothic" pitchFamily="34" charset="-122"/>
+                <a:cs typeface="Malgun Gothic" pitchFamily="34" charset="-120"/>
+              </a:rPr>
+              <a:t>Game Programming Patterns - Flyweight | Unity/C#</a:t>
+            </a:r>
+            <a:endParaRPr lang="en-US" sz="700" dirty="0"/>
+          </a:p>
+        </p:txBody>
+      </p:sp>
+      <p:sp>
+        <p:nvSpPr>
+          <p:cNvPr id="6" name="Text 4"/>
+          <p:cNvSpPr/>
+          <p:nvPr/>
+        </p:nvSpPr>
+        <p:spPr>
+          <a:xfrm>
+            <a:off x="594360" y="347472"/>
+            <a:ext cx="8046720" cy="420624"/>
+          </a:xfrm>
+          <a:prstGeom prst="rect">
+            <a:avLst/>
+          </a:prstGeom>
+          <a:noFill/>
+          <a:ln/>
+        </p:spPr>
+        <p:txBody>
+          <a:bodyPr wrap="square" lIns="0" tIns="0" rIns="0" bIns="0" rtlCol="0" anchor="ctr">
+            <a:normAutofit/>
+          </a:bodyPr>
+          <a:lstStyle/>
+          <a:p>
+            <a:pPr marL="0" indent="0">
+              <a:buNone/>
+            </a:pPr>
+            <a:r>
+              <a:rPr lang="en-US" sz="2500" b="1" dirty="0">
+                <a:solidFill>
+                  <a:srgbClr val="17212B"/>
+                </a:solidFill>
+                <a:latin typeface="Malgun Gothic" pitchFamily="34" charset="0"/>
+                <a:ea typeface="Malgun Gothic" pitchFamily="34" charset="-122"/>
+                <a:cs typeface="Malgun Gothic" pitchFamily="34" charset="-120"/>
+              </a:rPr>
+              <a:t>Terrain을 객체로 만들기</a:t>
+            </a:r>
+            <a:endParaRPr lang="en-US" sz="2500" dirty="0"/>
+          </a:p>
+        </p:txBody>
+      </p:sp>
+      <p:sp>
+        <p:nvSpPr>
+          <p:cNvPr id="7" name="Text 5"/>
+          <p:cNvSpPr/>
+          <p:nvPr/>
+        </p:nvSpPr>
+        <p:spPr>
+          <a:xfrm>
+            <a:off x="713232" y="1115568"/>
+            <a:ext cx="7498080" cy="274320"/>
+          </a:xfrm>
+          <a:prstGeom prst="rect">
+            <a:avLst/>
+          </a:prstGeom>
+          <a:noFill/>
+          <a:ln/>
+        </p:spPr>
+        <p:txBody>
+          <a:bodyPr wrap="square" lIns="254" tIns="254" rIns="254" bIns="254" rtlCol="0" anchor="t">
+            <a:normAutofit/>
+          </a:bodyPr>
+          <a:lstStyle/>
+          <a:p>
+            <a:pPr marL="0" indent="0">
+              <a:buNone/>
+            </a:pPr>
+            <a:r>
+              <a:rPr lang="en-US" sz="1550" b="1" dirty="0">
+                <a:solidFill>
+                  <a:srgbClr val="15803D"/>
+                </a:solidFill>
+                <a:latin typeface="Malgun Gothic" pitchFamily="34" charset="0"/>
+                <a:ea typeface="Malgun Gothic" pitchFamily="34" charset="-122"/>
+                <a:cs typeface="Malgun Gothic" pitchFamily="34" charset="-120"/>
+              </a:rPr>
+              <a:t>지형의 데이터를 한 객체에 모은다.</a:t>
+            </a:r>
+            <a:endParaRPr lang="en-US" sz="1550" dirty="0"/>
+          </a:p>
+        </p:txBody>
+      </p:sp>
+      <p:sp>
+        <p:nvSpPr>
+          <p:cNvPr id="8" name="Shape 6"/>
+          <p:cNvSpPr/>
+          <p:nvPr/>
+        </p:nvSpPr>
+        <p:spPr>
+          <a:xfrm>
+            <a:off x="713232" y="1417320"/>
+            <a:ext cx="7909560" cy="3520440"/>
+          </a:xfrm>
+          <a:prstGeom prst="roundRect">
+            <a:avLst>
+              <a:gd name="adj" fmla="val 1558"/>
+            </a:avLst>
+          </a:prstGeom>
+          <a:solidFill>
+            <a:srgbClr val="101827"/>
+          </a:solidFill>
+          <a:ln w="12700">
+            <a:solidFill>
+              <a:srgbClr val="2B3648">
+                <a:alpha val="90000"/>
+              </a:srgbClr>
+            </a:solidFill>
+            <a:prstDash val="solid"/>
+          </a:ln>
+        </p:spPr>
+      </p:sp>
+      <p:sp>
+        <p:nvSpPr>
+          <p:cNvPr id="9" name="Text 7"/>
+          <p:cNvSpPr/>
+          <p:nvPr/>
+        </p:nvSpPr>
+        <p:spPr>
+          <a:xfrm>
+            <a:off x="914400" y="1581912"/>
+            <a:ext cx="7507224" cy="3191256"/>
+          </a:xfrm>
+          <a:prstGeom prst="rect">
+            <a:avLst/>
+          </a:prstGeom>
+          <a:noFill/>
+          <a:ln/>
+        </p:spPr>
+        <p:txBody>
+          <a:bodyPr wrap="square" lIns="0" tIns="0" rIns="0" bIns="0" rtlCol="0" anchor="t">
+            <a:normAutofit/>
+          </a:bodyPr>
+          <a:lstStyle/>
+          <a:p>
+            <a:pPr marL="0" indent="0">
+              <a:buNone/>
+            </a:pPr>
+            <a:r>
+              <a:rPr lang="en-US" sz="1100" dirty="0">
+                <a:solidFill>
+                  <a:srgbClr val="E7EDF6"/>
+                </a:solidFill>
+                <a:latin typeface="Consolas" pitchFamily="34" charset="0"/>
+                <a:ea typeface="Consolas" pitchFamily="34" charset="-122"/>
+                <a:cs typeface="Consolas" pitchFamily="34" charset="-120"/>
+              </a:rPr>
+              <a:t>public sealed class TerrainType</a:t>
+            </a:r>
+            <a:endParaRPr lang="en-US" sz="1100" dirty="0"/>
+          </a:p>
+          <a:p>
+            <a:pPr marL="0" indent="0">
+              <a:buNone/>
+            </a:pPr>
+            <a:r>
+              <a:rPr lang="en-US" sz="1100" dirty="0">
+                <a:solidFill>
+                  <a:srgbClr val="E7EDF6"/>
+                </a:solidFill>
+                <a:latin typeface="Consolas" pitchFamily="34" charset="0"/>
+                <a:ea typeface="Consolas" pitchFamily="34" charset="-122"/>
+                <a:cs typeface="Consolas" pitchFamily="34" charset="-120"/>
+              </a:rPr>
+              <a:t>{</a:t>
+            </a:r>
+            <a:endParaRPr lang="en-US" sz="1100" dirty="0"/>
+          </a:p>
+          <a:p>
+            <a:pPr marL="0" indent="0">
+              <a:buNone/>
+            </a:pPr>
+            <a:r>
+              <a:rPr lang="en-US" sz="1100" dirty="0">
+                <a:solidFill>
+                  <a:srgbClr val="E7EDF6"/>
+                </a:solidFill>
+                <a:latin typeface="Consolas" pitchFamily="34" charset="0"/>
+                <a:ea typeface="Consolas" pitchFamily="34" charset="-122"/>
+                <a:cs typeface="Consolas" pitchFamily="34" charset="-120"/>
+              </a:rPr>
+              <a:t>    public int MovementCost { get; }</a:t>
+            </a:r>
+            <a:endParaRPr lang="en-US" sz="1100" dirty="0"/>
+          </a:p>
+          <a:p>
+            <a:pPr marL="0" indent="0">
+              <a:buNone/>
+            </a:pPr>
+            <a:r>
+              <a:rPr lang="en-US" sz="1100" dirty="0">
+                <a:solidFill>
+                  <a:srgbClr val="E7EDF6"/>
+                </a:solidFill>
+                <a:latin typeface="Consolas" pitchFamily="34" charset="0"/>
+                <a:ea typeface="Consolas" pitchFamily="34" charset="-122"/>
+                <a:cs typeface="Consolas" pitchFamily="34" charset="-120"/>
+              </a:rPr>
+              <a:t>    public bool IsWater { get; }</a:t>
+            </a:r>
+            <a:endParaRPr lang="en-US" sz="1100" dirty="0"/>
+          </a:p>
+          <a:p>
+            <a:pPr marL="0" indent="0">
+              <a:buNone/>
+            </a:pPr>
+            <a:r>
+              <a:rPr lang="en-US" sz="1100" dirty="0">
+                <a:solidFill>
+                  <a:srgbClr val="E7EDF6"/>
+                </a:solidFill>
+                <a:latin typeface="Consolas" pitchFamily="34" charset="0"/>
+                <a:ea typeface="Consolas" pitchFamily="34" charset="-122"/>
+                <a:cs typeface="Consolas" pitchFamily="34" charset="-120"/>
+              </a:rPr>
+              <a:t>    public Sprite Sprite { get; }</a:t>
+            </a:r>
+            <a:endParaRPr lang="en-US" sz="1100" dirty="0"/>
+          </a:p>
+          <a:p>
+            <a:pPr marL="0" indent="0">
+              <a:buNone/>
+            </a:pPr>
+            <a:endParaRPr lang="en-US" sz="1100" dirty="0"/>
+          </a:p>
+          <a:p>
+            <a:pPr marL="0" indent="0">
+              <a:buNone/>
+            </a:pPr>
+            <a:r>
+              <a:rPr lang="en-US" sz="1100" dirty="0">
+                <a:solidFill>
+                  <a:srgbClr val="E7EDF6"/>
+                </a:solidFill>
+                <a:latin typeface="Consolas" pitchFamily="34" charset="0"/>
+                <a:ea typeface="Consolas" pitchFamily="34" charset="-122"/>
+                <a:cs typeface="Consolas" pitchFamily="34" charset="-120"/>
+              </a:rPr>
+              <a:t>    public TerrainType(int movementCost,</a:t>
+            </a:r>
+            <a:endParaRPr lang="en-US" sz="1100" dirty="0"/>
+          </a:p>
+          <a:p>
+            <a:pPr marL="0" indent="0">
+              <a:buNone/>
+            </a:pPr>
+            <a:r>
+              <a:rPr lang="en-US" sz="1100" dirty="0">
+                <a:solidFill>
+                  <a:srgbClr val="E7EDF6"/>
+                </a:solidFill>
+                <a:latin typeface="Consolas" pitchFamily="34" charset="0"/>
+                <a:ea typeface="Consolas" pitchFamily="34" charset="-122"/>
+                <a:cs typeface="Consolas" pitchFamily="34" charset="-120"/>
+              </a:rPr>
+              <a:t>                       bool isWater,</a:t>
+            </a:r>
+            <a:endParaRPr lang="en-US" sz="1100" dirty="0"/>
+          </a:p>
+          <a:p>
+            <a:pPr marL="0" indent="0">
+              <a:buNone/>
+            </a:pPr>
+            <a:r>
+              <a:rPr lang="en-US" sz="1100" dirty="0">
+                <a:solidFill>
+                  <a:srgbClr val="E7EDF6"/>
+                </a:solidFill>
+                <a:latin typeface="Consolas" pitchFamily="34" charset="0"/>
+                <a:ea typeface="Consolas" pitchFamily="34" charset="-122"/>
+                <a:cs typeface="Consolas" pitchFamily="34" charset="-120"/>
+              </a:rPr>
+              <a:t>                       Sprite sprite)</a:t>
+            </a:r>
+            <a:endParaRPr lang="en-US" sz="1100" dirty="0"/>
+          </a:p>
+          <a:p>
+            <a:pPr marL="0" indent="0">
+              <a:buNone/>
+            </a:pPr>
+            <a:r>
+              <a:rPr lang="en-US" sz="1100" dirty="0">
+                <a:solidFill>
+                  <a:srgbClr val="E7EDF6"/>
+                </a:solidFill>
+                <a:latin typeface="Consolas" pitchFamily="34" charset="0"/>
+                <a:ea typeface="Consolas" pitchFamily="34" charset="-122"/>
+                <a:cs typeface="Consolas" pitchFamily="34" charset="-120"/>
+              </a:rPr>
+              <a:t>    {</a:t>
+            </a:r>
+            <a:endParaRPr lang="en-US" sz="1100" dirty="0"/>
+          </a:p>
+          <a:p>
+            <a:pPr marL="0" indent="0">
+              <a:buNone/>
+            </a:pPr>
+            <a:r>
+              <a:rPr lang="en-US" sz="1100" dirty="0">
+                <a:solidFill>
+                  <a:srgbClr val="E7EDF6"/>
+                </a:solidFill>
+                <a:latin typeface="Consolas" pitchFamily="34" charset="0"/>
+                <a:ea typeface="Consolas" pitchFamily="34" charset="-122"/>
+                <a:cs typeface="Consolas" pitchFamily="34" charset="-120"/>
+              </a:rPr>
+              <a:t>        MovementCost = movementCost;</a:t>
+            </a:r>
+            <a:endParaRPr lang="en-US" sz="1100" dirty="0"/>
+          </a:p>
+          <a:p>
+            <a:pPr marL="0" indent="0">
+              <a:buNone/>
+            </a:pPr>
+            <a:r>
+              <a:rPr lang="en-US" sz="1100" dirty="0">
+                <a:solidFill>
+                  <a:srgbClr val="E7EDF6"/>
+                </a:solidFill>
+                <a:latin typeface="Consolas" pitchFamily="34" charset="0"/>
+                <a:ea typeface="Consolas" pitchFamily="34" charset="-122"/>
+                <a:cs typeface="Consolas" pitchFamily="34" charset="-120"/>
+              </a:rPr>
+              <a:t>        IsWater = isWater;</a:t>
+            </a:r>
+            <a:endParaRPr lang="en-US" sz="1100" dirty="0"/>
+          </a:p>
+          <a:p>
+            <a:pPr marL="0" indent="0">
+              <a:buNone/>
+            </a:pPr>
+            <a:r>
+              <a:rPr lang="en-US" sz="1100" dirty="0">
+                <a:solidFill>
+                  <a:srgbClr val="E7EDF6"/>
+                </a:solidFill>
+                <a:latin typeface="Consolas" pitchFamily="34" charset="0"/>
+                <a:ea typeface="Consolas" pitchFamily="34" charset="-122"/>
+                <a:cs typeface="Consolas" pitchFamily="34" charset="-120"/>
+              </a:rPr>
+              <a:t>        Sprite = sprite;</a:t>
+            </a:r>
+            <a:endParaRPr lang="en-US" sz="1100" dirty="0"/>
+          </a:p>
+          <a:p>
+            <a:pPr marL="0" indent="0">
+              <a:buNone/>
+            </a:pPr>
+            <a:r>
+              <a:rPr lang="en-US" sz="1100" dirty="0">
+                <a:solidFill>
+                  <a:srgbClr val="E7EDF6"/>
+                </a:solidFill>
+                <a:latin typeface="Consolas" pitchFamily="34" charset="0"/>
+                <a:ea typeface="Consolas" pitchFamily="34" charset="-122"/>
+                <a:cs typeface="Consolas" pitchFamily="34" charset="-120"/>
+              </a:rPr>
+              <a:t>    }</a:t>
+            </a:r>
+            <a:endParaRPr lang="en-US" sz="1100" dirty="0"/>
+          </a:p>
+          <a:p>
+            <a:pPr marL="0" indent="0">
+              <a:buNone/>
+            </a:pPr>
+            <a:r>
+              <a:rPr lang="en-US" sz="1100" dirty="0">
+                <a:solidFill>
+                  <a:srgbClr val="E7EDF6"/>
+                </a:solidFill>
+                <a:latin typeface="Consolas" pitchFamily="34" charset="0"/>
+                <a:ea typeface="Consolas" pitchFamily="34" charset="-122"/>
+                <a:cs typeface="Consolas" pitchFamily="34" charset="-120"/>
+              </a:rPr>
+              <a:t>}</a:t>
+            </a:r>
+            <a:endParaRPr lang="en-US" sz="1100" dirty="0"/>
+          </a:p>
+        </p:txBody>
+      </p:sp>
+    </p:spTree>
+  </p:cSld>
+  <p:clrMapOvr>
+    <a:masterClrMapping/>
+  </p:clrMapOvr>
+</p:sld>
+</file>
+
+<file path=ppt/slides/slide19.xml><?xml version="1.0" encoding="utf-8"?>
+<p:sld xmlns:a="http://schemas.openxmlformats.org/drawingml/2006/main" xmlns:r="http://schemas.openxmlformats.org/officeDocument/2006/relationships" xmlns:p="http://schemas.openxmlformats.org/presentationml/2006/main">
+  <p:cSld name="Slide 21">
+    <p:bg>
+      <p:bgPr>
+        <a:solidFill>
+          <a:srgbClr val="FAF7EF"/>
+        </a:solidFill>
+        <a:effectLst/>
+      </p:bgPr>
+    </p:bg>
+    <p:spTree>
+      <p:nvGrpSpPr>
+        <p:cNvPr id="1" name=""/>
+        <p:cNvGrpSpPr/>
+        <p:nvPr/>
+      </p:nvGrpSpPr>
+      <p:grpSpPr>
+        <a:xfrm>
+          <a:off x="0" y="0"/>
+          <a:ext cx="0" cy="0"/>
+          <a:chOff x="0" y="0"/>
+          <a:chExt cx="0" cy="0"/>
+        </a:xfrm>
+      </p:grpSpPr>
+      <p:sp>
+        <p:nvSpPr>
+          <p:cNvPr id="2" name="Shape 0"/>
+          <p:cNvSpPr/>
+          <p:nvPr/>
+        </p:nvSpPr>
+        <p:spPr>
+          <a:xfrm>
+            <a:off x="0" y="0"/>
+            <a:ext cx="9144000" cy="5715000"/>
+          </a:xfrm>
+          <a:prstGeom prst="rect">
+            <a:avLst/>
+          </a:prstGeom>
+          <a:solidFill>
+            <a:srgbClr val="FAF7EF"/>
+          </a:solidFill>
+          <a:ln w="12700">
+            <a:solidFill>
+              <a:srgbClr val="FAF7EF"/>
+            </a:solidFill>
+            <a:prstDash val="solid"/>
+          </a:ln>
+        </p:spPr>
+      </p:sp>
+      <p:sp>
+        <p:nvSpPr>
+          <p:cNvPr id="3" name="Shape 1"/>
+          <p:cNvSpPr/>
+          <p:nvPr/>
+        </p:nvSpPr>
+        <p:spPr>
+          <a:xfrm>
+            <a:off x="0" y="0"/>
+            <a:ext cx="118872" cy="5715000"/>
+          </a:xfrm>
+          <a:prstGeom prst="rect">
+            <a:avLst/>
+          </a:prstGeom>
+          <a:solidFill>
+            <a:srgbClr val="F59E0B"/>
+          </a:solidFill>
+          <a:ln w="12700">
+            <a:solidFill>
+              <a:srgbClr val="F59E0B"/>
+            </a:solidFill>
+            <a:prstDash val="solid"/>
+          </a:ln>
+        </p:spPr>
+      </p:sp>
+      <p:sp>
+        <p:nvSpPr>
+          <p:cNvPr id="4" name="Text 2"/>
+          <p:cNvSpPr/>
+          <p:nvPr/>
+        </p:nvSpPr>
+        <p:spPr>
+          <a:xfrm>
+            <a:off x="8549640" y="5358384"/>
+            <a:ext cx="310896" cy="146304"/>
+          </a:xfrm>
+          <a:prstGeom prst="rect">
+            <a:avLst/>
+          </a:prstGeom>
+          <a:noFill/>
+          <a:ln/>
+        </p:spPr>
+        <p:txBody>
+          <a:bodyPr wrap="square" lIns="0" tIns="0" rIns="0" bIns="0" rtlCol="0" anchor="ctr"/>
+          <a:lstStyle/>
+          <a:p>
+            <a:pPr marL="0" indent="0" algn="r">
+              <a:buNone/>
+            </a:pPr>
+            <a:r>
+              <a:rPr lang="en-US" sz="700">
+                <a:solidFill>
+                  <a:srgbClr val="9F968C"/>
+                </a:solidFill>
+                <a:latin typeface="Aptos" pitchFamily="34" charset="0"/>
+                <a:ea typeface="Aptos" pitchFamily="34" charset="-122"/>
+                <a:cs typeface="Aptos" pitchFamily="34" charset="-120"/>
+              </a:rPr>
+              <a:t>19</a:t>
+            </a:r>
+            <a:endParaRPr lang="en-US" sz="700" dirty="0"/>
+          </a:p>
+        </p:txBody>
+      </p:sp>
+      <p:sp>
+        <p:nvSpPr>
+          <p:cNvPr id="5" name="Text 3"/>
+          <p:cNvSpPr/>
+          <p:nvPr/>
+        </p:nvSpPr>
+        <p:spPr>
+          <a:xfrm>
+            <a:off x="594360" y="5340096"/>
+            <a:ext cx="4663440" cy="164592"/>
+          </a:xfrm>
+          <a:prstGeom prst="rect">
+            <a:avLst/>
+          </a:prstGeom>
+          <a:noFill/>
+          <a:ln/>
+        </p:spPr>
+        <p:txBody>
+          <a:bodyPr wrap="square" lIns="0" tIns="0" rIns="0" bIns="0" rtlCol="0" anchor="ctr"/>
+          <a:lstStyle/>
+          <a:p>
+            <a:pPr marL="0" indent="0">
+              <a:buNone/>
+            </a:pPr>
+            <a:r>
+              <a:rPr lang="en-US" sz="700" dirty="0">
+                <a:solidFill>
+                  <a:srgbClr val="9F968C"/>
+                </a:solidFill>
+                <a:latin typeface="Malgun Gothic" pitchFamily="34" charset="0"/>
+                <a:ea typeface="Malgun Gothic" pitchFamily="34" charset="-122"/>
+                <a:cs typeface="Malgun Gothic" pitchFamily="34" charset="-120"/>
+              </a:rPr>
+              <a:t>Game Programming Patterns - Flyweight | Unity/C#</a:t>
+            </a:r>
+            <a:endParaRPr lang="en-US" sz="700" dirty="0"/>
+          </a:p>
+        </p:txBody>
+      </p:sp>
+      <p:sp>
+        <p:nvSpPr>
+          <p:cNvPr id="6" name="Text 4"/>
+          <p:cNvSpPr/>
+          <p:nvPr/>
+        </p:nvSpPr>
+        <p:spPr>
+          <a:xfrm>
+            <a:off x="594360" y="347472"/>
+            <a:ext cx="8046720" cy="420624"/>
+          </a:xfrm>
+          <a:prstGeom prst="rect">
+            <a:avLst/>
+          </a:prstGeom>
+          <a:noFill/>
+          <a:ln/>
+        </p:spPr>
+        <p:txBody>
+          <a:bodyPr wrap="square" lIns="0" tIns="0" rIns="0" bIns="0" rtlCol="0" anchor="ctr">
+            <a:normAutofit/>
+          </a:bodyPr>
+          <a:lstStyle/>
+          <a:p>
+            <a:pPr marL="0" indent="0">
+              <a:buNone/>
+            </a:pPr>
+            <a:r>
+              <a:rPr lang="en-US" sz="2500" b="1" dirty="0">
+                <a:solidFill>
+                  <a:srgbClr val="17212B"/>
+                </a:solidFill>
+                <a:latin typeface="Malgun Gothic" pitchFamily="34" charset="0"/>
+                <a:ea typeface="Malgun Gothic" pitchFamily="34" charset="-122"/>
+                <a:cs typeface="Malgun Gothic" pitchFamily="34" charset="-120"/>
+              </a:rPr>
+              <a:t>World는 TerrainType 참조를 저장한다</a:t>
+            </a:r>
+            <a:endParaRPr lang="en-US" sz="2500" dirty="0"/>
+          </a:p>
+        </p:txBody>
+      </p:sp>
+      <p:sp>
+        <p:nvSpPr>
+          <p:cNvPr id="7" name="Text 5"/>
+          <p:cNvSpPr/>
+          <p:nvPr/>
+        </p:nvSpPr>
+        <p:spPr>
+          <a:xfrm>
+            <a:off x="713232" y="1115568"/>
+            <a:ext cx="7498080" cy="274320"/>
+          </a:xfrm>
+          <a:prstGeom prst="rect">
+            <a:avLst/>
+          </a:prstGeom>
+          <a:noFill/>
+          <a:ln/>
+        </p:spPr>
+        <p:txBody>
+          <a:bodyPr wrap="square" lIns="254" tIns="254" rIns="254" bIns="254" rtlCol="0" anchor="t">
+            <a:normAutofit/>
+          </a:bodyPr>
+          <a:lstStyle/>
+          <a:p>
+            <a:pPr marL="0" indent="0">
+              <a:buNone/>
+            </a:pPr>
+            <a:r>
+              <a:rPr lang="en-US" sz="1550" b="1" dirty="0">
+                <a:solidFill>
+                  <a:srgbClr val="15803D"/>
+                </a:solidFill>
+                <a:latin typeface="Malgun Gothic" pitchFamily="34" charset="0"/>
+                <a:ea typeface="Malgun Gothic" pitchFamily="34" charset="-122"/>
+                <a:cs typeface="Malgun Gothic" pitchFamily="34" charset="-120"/>
+              </a:rPr>
+              <a:t>타일마다 객체를 새로 만들지 않고 공유 객체를 가리킨다.</a:t>
+            </a:r>
+            <a:endParaRPr lang="en-US" sz="1550" dirty="0"/>
+          </a:p>
+        </p:txBody>
+      </p:sp>
+      <p:sp>
+        <p:nvSpPr>
+          <p:cNvPr id="8" name="Shape 6"/>
+          <p:cNvSpPr/>
+          <p:nvPr/>
+        </p:nvSpPr>
+        <p:spPr>
+          <a:xfrm>
+            <a:off x="713232" y="1417320"/>
+            <a:ext cx="7909560" cy="3520440"/>
+          </a:xfrm>
+          <a:prstGeom prst="roundRect">
+            <a:avLst>
+              <a:gd name="adj" fmla="val 1558"/>
+            </a:avLst>
+          </a:prstGeom>
+          <a:solidFill>
+            <a:srgbClr val="101827"/>
+          </a:solidFill>
+          <a:ln w="12700">
+            <a:solidFill>
+              <a:srgbClr val="2B3648">
+                <a:alpha val="90000"/>
+              </a:srgbClr>
+            </a:solidFill>
+            <a:prstDash val="solid"/>
+          </a:ln>
+        </p:spPr>
+      </p:sp>
+      <p:sp>
+        <p:nvSpPr>
+          <p:cNvPr id="9" name="Text 7"/>
+          <p:cNvSpPr/>
+          <p:nvPr/>
+        </p:nvSpPr>
+        <p:spPr>
+          <a:xfrm>
+            <a:off x="914400" y="1581912"/>
+            <a:ext cx="7507224" cy="3191256"/>
+          </a:xfrm>
+          <a:prstGeom prst="rect">
+            <a:avLst/>
+          </a:prstGeom>
+          <a:noFill/>
+          <a:ln/>
+        </p:spPr>
+        <p:txBody>
+          <a:bodyPr wrap="square" lIns="0" tIns="0" rIns="0" bIns="0" rtlCol="0" anchor="t">
+            <a:normAutofit/>
+          </a:bodyPr>
+          <a:lstStyle/>
+          <a:p>
+            <a:pPr marL="0" indent="0">
+              <a:buNone/>
+            </a:pPr>
+            <a:r>
+              <a:rPr lang="en-US" sz="1220" dirty="0">
+                <a:solidFill>
+                  <a:srgbClr val="E7EDF6"/>
+                </a:solidFill>
+                <a:latin typeface="Consolas" pitchFamily="34" charset="0"/>
+                <a:ea typeface="Consolas" pitchFamily="34" charset="-122"/>
+                <a:cs typeface="Consolas" pitchFamily="34" charset="-120"/>
+              </a:rPr>
+              <a:t>public sealed class WorldGrid</a:t>
+            </a:r>
+            <a:endParaRPr lang="en-US" sz="1220" dirty="0"/>
+          </a:p>
+          <a:p>
+            <a:pPr marL="0" indent="0">
+              <a:buNone/>
+            </a:pPr>
+            <a:r>
+              <a:rPr lang="en-US" sz="1220" dirty="0">
+                <a:solidFill>
+                  <a:srgbClr val="E7EDF6"/>
+                </a:solidFill>
+                <a:latin typeface="Consolas" pitchFamily="34" charset="0"/>
+                <a:ea typeface="Consolas" pitchFamily="34" charset="-122"/>
+                <a:cs typeface="Consolas" pitchFamily="34" charset="-120"/>
+              </a:rPr>
+              <a:t>{</a:t>
+            </a:r>
+            <a:endParaRPr lang="en-US" sz="1220" dirty="0"/>
+          </a:p>
+          <a:p>
+            <a:pPr marL="0" indent="0">
+              <a:buNone/>
+            </a:pPr>
+            <a:r>
+              <a:rPr lang="en-US" sz="1220" dirty="0">
+                <a:solidFill>
+                  <a:srgbClr val="E7EDF6"/>
+                </a:solidFill>
+                <a:latin typeface="Consolas" pitchFamily="34" charset="0"/>
+                <a:ea typeface="Consolas" pitchFamily="34" charset="-122"/>
+                <a:cs typeface="Consolas" pitchFamily="34" charset="-120"/>
+              </a:rPr>
+              <a:t>    private readonly TerrainType[,] tiles;</a:t>
+            </a:r>
+            <a:endParaRPr lang="en-US" sz="1220" dirty="0"/>
+          </a:p>
+          <a:p>
+            <a:pPr marL="0" indent="0">
+              <a:buNone/>
+            </a:pPr>
+            <a:endParaRPr lang="en-US" sz="1220" dirty="0"/>
+          </a:p>
+          <a:p>
+            <a:pPr marL="0" indent="0">
+              <a:buNone/>
+            </a:pPr>
+            <a:r>
+              <a:rPr lang="en-US" sz="1220" dirty="0">
+                <a:solidFill>
+                  <a:srgbClr val="E7EDF6"/>
+                </a:solidFill>
+                <a:latin typeface="Consolas" pitchFamily="34" charset="0"/>
+                <a:ea typeface="Consolas" pitchFamily="34" charset="-122"/>
+                <a:cs typeface="Consolas" pitchFamily="34" charset="-120"/>
+              </a:rPr>
+              <a:t>    private readonly TerrainType grass;</a:t>
+            </a:r>
+            <a:endParaRPr lang="en-US" sz="1220" dirty="0"/>
+          </a:p>
+          <a:p>
+            <a:pPr marL="0" indent="0">
+              <a:buNone/>
+            </a:pPr>
+            <a:r>
+              <a:rPr lang="en-US" sz="1220" dirty="0">
+                <a:solidFill>
+                  <a:srgbClr val="E7EDF6"/>
+                </a:solidFill>
+                <a:latin typeface="Consolas" pitchFamily="34" charset="0"/>
+                <a:ea typeface="Consolas" pitchFamily="34" charset="-122"/>
+                <a:cs typeface="Consolas" pitchFamily="34" charset="-120"/>
+              </a:rPr>
+              <a:t>    private readonly TerrainType hill;</a:t>
+            </a:r>
+            <a:endParaRPr lang="en-US" sz="1220" dirty="0"/>
+          </a:p>
+          <a:p>
+            <a:pPr marL="0" indent="0">
+              <a:buNone/>
+            </a:pPr>
+            <a:r>
+              <a:rPr lang="en-US" sz="1220" dirty="0">
+                <a:solidFill>
+                  <a:srgbClr val="E7EDF6"/>
+                </a:solidFill>
+                <a:latin typeface="Consolas" pitchFamily="34" charset="0"/>
+                <a:ea typeface="Consolas" pitchFamily="34" charset="-122"/>
+                <a:cs typeface="Consolas" pitchFamily="34" charset="-120"/>
+              </a:rPr>
+              <a:t>    private readonly TerrainType river;</a:t>
+            </a:r>
+            <a:endParaRPr lang="en-US" sz="1220" dirty="0"/>
+          </a:p>
+          <a:p>
+            <a:pPr marL="0" indent="0">
+              <a:buNone/>
+            </a:pPr>
+            <a:endParaRPr lang="en-US" sz="1220" dirty="0"/>
+          </a:p>
+          <a:p>
+            <a:pPr marL="0" indent="0">
+              <a:buNone/>
+            </a:pPr>
+            <a:r>
+              <a:rPr lang="en-US" sz="1220" dirty="0">
+                <a:solidFill>
+                  <a:srgbClr val="E7EDF6"/>
+                </a:solidFill>
+                <a:latin typeface="Consolas" pitchFamily="34" charset="0"/>
+                <a:ea typeface="Consolas" pitchFamily="34" charset="-122"/>
+                <a:cs typeface="Consolas" pitchFamily="34" charset="-120"/>
+              </a:rPr>
+              <a:t>    public TerrainType GetTile(int x, int y)</a:t>
+            </a:r>
+            <a:endParaRPr lang="en-US" sz="1220" dirty="0"/>
+          </a:p>
+          <a:p>
+            <a:pPr marL="0" indent="0">
+              <a:buNone/>
+            </a:pPr>
+            <a:r>
+              <a:rPr lang="en-US" sz="1220" dirty="0">
+                <a:solidFill>
+                  <a:srgbClr val="E7EDF6"/>
+                </a:solidFill>
+                <a:latin typeface="Consolas" pitchFamily="34" charset="0"/>
+                <a:ea typeface="Consolas" pitchFamily="34" charset="-122"/>
+                <a:cs typeface="Consolas" pitchFamily="34" charset="-120"/>
+              </a:rPr>
+              <a:t>    {</a:t>
+            </a:r>
+            <a:endParaRPr lang="en-US" sz="1220" dirty="0"/>
+          </a:p>
+          <a:p>
+            <a:pPr marL="0" indent="0">
+              <a:buNone/>
+            </a:pPr>
+            <a:r>
+              <a:rPr lang="en-US" sz="1220" dirty="0">
+                <a:solidFill>
+                  <a:srgbClr val="E7EDF6"/>
+                </a:solidFill>
+                <a:latin typeface="Consolas" pitchFamily="34" charset="0"/>
+                <a:ea typeface="Consolas" pitchFamily="34" charset="-122"/>
+                <a:cs typeface="Consolas" pitchFamily="34" charset="-120"/>
+              </a:rPr>
+              <a:t>        return tiles[x, y];</a:t>
+            </a:r>
+            <a:endParaRPr lang="en-US" sz="1220" dirty="0"/>
+          </a:p>
+          <a:p>
+            <a:pPr marL="0" indent="0">
+              <a:buNone/>
+            </a:pPr>
+            <a:r>
+              <a:rPr lang="en-US" sz="1220" dirty="0">
+                <a:solidFill>
+                  <a:srgbClr val="E7EDF6"/>
+                </a:solidFill>
+                <a:latin typeface="Consolas" pitchFamily="34" charset="0"/>
+                <a:ea typeface="Consolas" pitchFamily="34" charset="-122"/>
+                <a:cs typeface="Consolas" pitchFamily="34" charset="-120"/>
+              </a:rPr>
+              <a:t>    }</a:t>
+            </a:r>
+            <a:endParaRPr lang="en-US" sz="1220" dirty="0"/>
+          </a:p>
+          <a:p>
+            <a:pPr marL="0" indent="0">
+              <a:buNone/>
+            </a:pPr>
+            <a:r>
+              <a:rPr lang="en-US" sz="1220" dirty="0">
+                <a:solidFill>
+                  <a:srgbClr val="E7EDF6"/>
+                </a:solidFill>
+                <a:latin typeface="Consolas" pitchFamily="34" charset="0"/>
+                <a:ea typeface="Consolas" pitchFamily="34" charset="-122"/>
+                <a:cs typeface="Consolas" pitchFamily="34" charset="-120"/>
+              </a:rPr>
+              <a:t>}</a:t>
+            </a:r>
+            <a:endParaRPr lang="en-US" sz="1220" dirty="0"/>
           </a:p>
         </p:txBody>
       </p:sp>
@@ -10413,7 +9958,7 @@
               <a:buNone/>
             </a:pPr>
             <a:r>
-              <a:rPr lang="en-US" sz="1720" dirty="0">
+              <a:rPr lang="en-US" altLang="ko-KR" sz="1720">
                 <a:solidFill>
                   <a:srgbClr val="17212B"/>
                 </a:solidFill>
@@ -10421,7 +9966,73 @@
                 <a:ea typeface="Malgun Gothic" pitchFamily="34" charset="-122"/>
                 <a:cs typeface="Malgun Gothic" pitchFamily="34" charset="-120"/>
               </a:rPr>
-              <a:t>Flyweight를 '공유 가능한 큰 상태를 분리하는 패턴'으로 설명한다.</a:t>
+              <a:t>Flyweight</a:t>
+            </a:r>
+            <a:r>
+              <a:rPr lang="ko-KR" altLang="en-US" sz="1720">
+                <a:solidFill>
+                  <a:srgbClr val="17212B"/>
+                </a:solidFill>
+                <a:latin typeface="Malgun Gothic" pitchFamily="34" charset="0"/>
+                <a:ea typeface="Malgun Gothic" pitchFamily="34" charset="-122"/>
+                <a:cs typeface="Malgun Gothic" pitchFamily="34" charset="-120"/>
+              </a:rPr>
+              <a:t>를 </a:t>
+            </a:r>
+            <a:r>
+              <a:rPr lang="en-US" altLang="ko-KR" sz="1720">
+                <a:solidFill>
+                  <a:srgbClr val="17212B"/>
+                </a:solidFill>
+                <a:latin typeface="Malgun Gothic" pitchFamily="34" charset="0"/>
+                <a:ea typeface="Malgun Gothic" pitchFamily="34" charset="-122"/>
+                <a:cs typeface="Malgun Gothic" pitchFamily="34" charset="-120"/>
+              </a:rPr>
+              <a:t>'</a:t>
+            </a:r>
+            <a:r>
+              <a:rPr lang="ko-KR" altLang="en-US" sz="1720">
+                <a:solidFill>
+                  <a:srgbClr val="17212B"/>
+                </a:solidFill>
+                <a:latin typeface="Malgun Gothic" pitchFamily="34" charset="0"/>
+                <a:ea typeface="Malgun Gothic" pitchFamily="34" charset="-122"/>
+                <a:cs typeface="Malgun Gothic" pitchFamily="34" charset="-120"/>
+              </a:rPr>
+              <a:t>공유 가능한 공통 상태를 분리하는 패턴</a:t>
+            </a:r>
+            <a:r>
+              <a:rPr lang="en-US" altLang="ko-KR" sz="1720">
+                <a:solidFill>
+                  <a:srgbClr val="17212B"/>
+                </a:solidFill>
+                <a:latin typeface="Malgun Gothic" pitchFamily="34" charset="0"/>
+                <a:ea typeface="Malgun Gothic" pitchFamily="34" charset="-122"/>
+                <a:cs typeface="Malgun Gothic" pitchFamily="34" charset="-120"/>
+              </a:rPr>
+              <a:t>'</a:t>
+            </a:r>
+            <a:r>
+              <a:rPr lang="ko-KR" altLang="en-US" sz="1720">
+                <a:solidFill>
+                  <a:srgbClr val="17212B"/>
+                </a:solidFill>
+                <a:latin typeface="Malgun Gothic" pitchFamily="34" charset="0"/>
+                <a:ea typeface="Malgun Gothic" pitchFamily="34" charset="-122"/>
+                <a:cs typeface="Malgun Gothic" pitchFamily="34" charset="-120"/>
+              </a:rPr>
+              <a:t>으로 설명한다</a:t>
+            </a:r>
+            <a:r>
+              <a:rPr lang="en-US" altLang="ko-KR" sz="1720">
+                <a:solidFill>
+                  <a:srgbClr val="17212B"/>
+                </a:solidFill>
+                <a:latin typeface="Malgun Gothic" pitchFamily="34" charset="0"/>
+                <a:ea typeface="Malgun Gothic" pitchFamily="34" charset="-122"/>
+                <a:cs typeface="Malgun Gothic" pitchFamily="34" charset="-120"/>
+              </a:rPr>
+              <a:t>.</a:t>
             </a:r>
             <a:endParaRPr lang="en-US" sz="1720" dirty="0"/>
           </a:p>
@@ -10634,1041 +10245,6 @@
 </file>
 
 <file path=ppt/slides/slide20.xml><?xml version="1.0" encoding="utf-8"?>
-<p:sld xmlns:a="http://schemas.openxmlformats.org/drawingml/2006/main" xmlns:r="http://schemas.openxmlformats.org/officeDocument/2006/relationships" xmlns:p="http://schemas.openxmlformats.org/presentationml/2006/main">
-  <p:cSld name="Slide 20">
-    <p:bg>
-      <p:bgPr>
-        <a:solidFill>
-          <a:srgbClr val="FAF7EF"/>
-        </a:solidFill>
-        <a:effectLst/>
-      </p:bgPr>
-    </p:bg>
-    <p:spTree>
-      <p:nvGrpSpPr>
-        <p:cNvPr id="1" name=""/>
-        <p:cNvGrpSpPr/>
-        <p:nvPr/>
-      </p:nvGrpSpPr>
-      <p:grpSpPr>
-        <a:xfrm>
-          <a:off x="0" y="0"/>
-          <a:ext cx="0" cy="0"/>
-          <a:chOff x="0" y="0"/>
-          <a:chExt cx="0" cy="0"/>
-        </a:xfrm>
-      </p:grpSpPr>
-      <p:sp>
-        <p:nvSpPr>
-          <p:cNvPr id="2" name="Shape 0"/>
-          <p:cNvSpPr/>
-          <p:nvPr/>
-        </p:nvSpPr>
-        <p:spPr>
-          <a:xfrm>
-            <a:off x="0" y="0"/>
-            <a:ext cx="9144000" cy="5715000"/>
-          </a:xfrm>
-          <a:prstGeom prst="rect">
-            <a:avLst/>
-          </a:prstGeom>
-          <a:solidFill>
-            <a:srgbClr val="FAF7EF"/>
-          </a:solidFill>
-          <a:ln w="12700">
-            <a:solidFill>
-              <a:srgbClr val="FAF7EF"/>
-            </a:solidFill>
-            <a:prstDash val="solid"/>
-          </a:ln>
-        </p:spPr>
-      </p:sp>
-      <p:sp>
-        <p:nvSpPr>
-          <p:cNvPr id="3" name="Shape 1"/>
-          <p:cNvSpPr/>
-          <p:nvPr/>
-        </p:nvSpPr>
-        <p:spPr>
-          <a:xfrm>
-            <a:off x="0" y="0"/>
-            <a:ext cx="118872" cy="5715000"/>
-          </a:xfrm>
-          <a:prstGeom prst="rect">
-            <a:avLst/>
-          </a:prstGeom>
-          <a:solidFill>
-            <a:srgbClr val="15803D"/>
-          </a:solidFill>
-          <a:ln w="12700">
-            <a:solidFill>
-              <a:srgbClr val="15803D"/>
-            </a:solidFill>
-            <a:prstDash val="solid"/>
-          </a:ln>
-        </p:spPr>
-      </p:sp>
-      <p:sp>
-        <p:nvSpPr>
-          <p:cNvPr id="4" name="Text 2"/>
-          <p:cNvSpPr/>
-          <p:nvPr/>
-        </p:nvSpPr>
-        <p:spPr>
-          <a:xfrm>
-            <a:off x="8549640" y="5358384"/>
-            <a:ext cx="310896" cy="146304"/>
-          </a:xfrm>
-          <a:prstGeom prst="rect">
-            <a:avLst/>
-          </a:prstGeom>
-          <a:noFill/>
-          <a:ln/>
-        </p:spPr>
-        <p:txBody>
-          <a:bodyPr wrap="square" lIns="0" tIns="0" rIns="0" bIns="0" rtlCol="0" anchor="ctr"/>
-          <a:lstStyle/>
-          <a:p>
-            <a:pPr marL="0" indent="0" algn="r">
-              <a:buNone/>
-            </a:pPr>
-            <a:r>
-              <a:rPr lang="en-US" sz="700" dirty="0">
-                <a:solidFill>
-                  <a:srgbClr val="9F968C"/>
-                </a:solidFill>
-                <a:latin typeface="Aptos" pitchFamily="34" charset="0"/>
-                <a:ea typeface="Aptos" pitchFamily="34" charset="-122"/>
-                <a:cs typeface="Aptos" pitchFamily="34" charset="-120"/>
-              </a:rPr>
-              <a:t>20</a:t>
-            </a:r>
-            <a:endParaRPr lang="en-US" sz="700" dirty="0"/>
-          </a:p>
-        </p:txBody>
-      </p:sp>
-      <p:sp>
-        <p:nvSpPr>
-          <p:cNvPr id="5" name="Text 3"/>
-          <p:cNvSpPr/>
-          <p:nvPr/>
-        </p:nvSpPr>
-        <p:spPr>
-          <a:xfrm>
-            <a:off x="594360" y="5340096"/>
-            <a:ext cx="4663440" cy="164592"/>
-          </a:xfrm>
-          <a:prstGeom prst="rect">
-            <a:avLst/>
-          </a:prstGeom>
-          <a:noFill/>
-          <a:ln/>
-        </p:spPr>
-        <p:txBody>
-          <a:bodyPr wrap="square" lIns="0" tIns="0" rIns="0" bIns="0" rtlCol="0" anchor="ctr"/>
-          <a:lstStyle/>
-          <a:p>
-            <a:pPr marL="0" indent="0">
-              <a:buNone/>
-            </a:pPr>
-            <a:r>
-              <a:rPr lang="en-US" sz="700" dirty="0">
-                <a:solidFill>
-                  <a:srgbClr val="9F968C"/>
-                </a:solidFill>
-                <a:latin typeface="Malgun Gothic" pitchFamily="34" charset="0"/>
-                <a:ea typeface="Malgun Gothic" pitchFamily="34" charset="-122"/>
-                <a:cs typeface="Malgun Gothic" pitchFamily="34" charset="-120"/>
-              </a:rPr>
-              <a:t>Game Programming Patterns - Flyweight | Unity/C#</a:t>
-            </a:r>
-            <a:endParaRPr lang="en-US" sz="700" dirty="0"/>
-          </a:p>
-        </p:txBody>
-      </p:sp>
-      <p:sp>
-        <p:nvSpPr>
-          <p:cNvPr id="6" name="Text 4"/>
-          <p:cNvSpPr/>
-          <p:nvPr/>
-        </p:nvSpPr>
-        <p:spPr>
-          <a:xfrm>
-            <a:off x="594360" y="347472"/>
-            <a:ext cx="8046720" cy="420624"/>
-          </a:xfrm>
-          <a:prstGeom prst="rect">
-            <a:avLst/>
-          </a:prstGeom>
-          <a:noFill/>
-          <a:ln/>
-        </p:spPr>
-        <p:txBody>
-          <a:bodyPr wrap="square" lIns="0" tIns="0" rIns="0" bIns="0" rtlCol="0" anchor="ctr">
-            <a:normAutofit/>
-          </a:bodyPr>
-          <a:lstStyle/>
-          <a:p>
-            <a:pPr marL="0" indent="0">
-              <a:buNone/>
-            </a:pPr>
-            <a:r>
-              <a:rPr lang="en-US" sz="2500" b="1" dirty="0">
-                <a:solidFill>
-                  <a:srgbClr val="17212B"/>
-                </a:solidFill>
-                <a:latin typeface="Malgun Gothic" pitchFamily="34" charset="0"/>
-                <a:ea typeface="Malgun Gothic" pitchFamily="34" charset="-122"/>
-                <a:cs typeface="Malgun Gothic" pitchFamily="34" charset="-120"/>
-              </a:rPr>
-              <a:t>Terrain을 객체로 만들기</a:t>
-            </a:r>
-            <a:endParaRPr lang="en-US" sz="2500" dirty="0"/>
-          </a:p>
-        </p:txBody>
-      </p:sp>
-      <p:sp>
-        <p:nvSpPr>
-          <p:cNvPr id="7" name="Text 5"/>
-          <p:cNvSpPr/>
-          <p:nvPr/>
-        </p:nvSpPr>
-        <p:spPr>
-          <a:xfrm>
-            <a:off x="713232" y="1115568"/>
-            <a:ext cx="7498080" cy="274320"/>
-          </a:xfrm>
-          <a:prstGeom prst="rect">
-            <a:avLst/>
-          </a:prstGeom>
-          <a:noFill/>
-          <a:ln/>
-        </p:spPr>
-        <p:txBody>
-          <a:bodyPr wrap="square" lIns="254" tIns="254" rIns="254" bIns="254" rtlCol="0" anchor="t">
-            <a:normAutofit/>
-          </a:bodyPr>
-          <a:lstStyle/>
-          <a:p>
-            <a:pPr marL="0" indent="0">
-              <a:buNone/>
-            </a:pPr>
-            <a:r>
-              <a:rPr lang="en-US" sz="1550" b="1" dirty="0">
-                <a:solidFill>
-                  <a:srgbClr val="15803D"/>
-                </a:solidFill>
-                <a:latin typeface="Malgun Gothic" pitchFamily="34" charset="0"/>
-                <a:ea typeface="Malgun Gothic" pitchFamily="34" charset="-122"/>
-                <a:cs typeface="Malgun Gothic" pitchFamily="34" charset="-120"/>
-              </a:rPr>
-              <a:t>지형의 데이터를 한 객체에 모은다.</a:t>
-            </a:r>
-            <a:endParaRPr lang="en-US" sz="1550" dirty="0"/>
-          </a:p>
-        </p:txBody>
-      </p:sp>
-      <p:sp>
-        <p:nvSpPr>
-          <p:cNvPr id="8" name="Shape 6"/>
-          <p:cNvSpPr/>
-          <p:nvPr/>
-        </p:nvSpPr>
-        <p:spPr>
-          <a:xfrm>
-            <a:off x="713232" y="1417320"/>
-            <a:ext cx="7909560" cy="3520440"/>
-          </a:xfrm>
-          <a:prstGeom prst="roundRect">
-            <a:avLst>
-              <a:gd name="adj" fmla="val 1558"/>
-            </a:avLst>
-          </a:prstGeom>
-          <a:solidFill>
-            <a:srgbClr val="101827"/>
-          </a:solidFill>
-          <a:ln w="12700">
-            <a:solidFill>
-              <a:srgbClr val="2B3648">
-                <a:alpha val="90000"/>
-              </a:srgbClr>
-            </a:solidFill>
-            <a:prstDash val="solid"/>
-          </a:ln>
-        </p:spPr>
-      </p:sp>
-      <p:sp>
-        <p:nvSpPr>
-          <p:cNvPr id="9" name="Text 7"/>
-          <p:cNvSpPr/>
-          <p:nvPr/>
-        </p:nvSpPr>
-        <p:spPr>
-          <a:xfrm>
-            <a:off x="914400" y="1581912"/>
-            <a:ext cx="7507224" cy="3191256"/>
-          </a:xfrm>
-          <a:prstGeom prst="rect">
-            <a:avLst/>
-          </a:prstGeom>
-          <a:noFill/>
-          <a:ln/>
-        </p:spPr>
-        <p:txBody>
-          <a:bodyPr wrap="square" lIns="0" tIns="0" rIns="0" bIns="0" rtlCol="0" anchor="t">
-            <a:normAutofit/>
-          </a:bodyPr>
-          <a:lstStyle/>
-          <a:p>
-            <a:pPr marL="0" indent="0">
-              <a:buNone/>
-            </a:pPr>
-            <a:r>
-              <a:rPr lang="en-US" sz="1100" dirty="0">
-                <a:solidFill>
-                  <a:srgbClr val="E7EDF6"/>
-                </a:solidFill>
-                <a:latin typeface="Consolas" pitchFamily="34" charset="0"/>
-                <a:ea typeface="Consolas" pitchFamily="34" charset="-122"/>
-                <a:cs typeface="Consolas" pitchFamily="34" charset="-120"/>
-              </a:rPr>
-              <a:t>public sealed class TerrainType</a:t>
-            </a:r>
-            <a:endParaRPr lang="en-US" sz="1100" dirty="0"/>
-          </a:p>
-          <a:p>
-            <a:pPr marL="0" indent="0">
-              <a:buNone/>
-            </a:pPr>
-            <a:r>
-              <a:rPr lang="en-US" sz="1100" dirty="0">
-                <a:solidFill>
-                  <a:srgbClr val="E7EDF6"/>
-                </a:solidFill>
-                <a:latin typeface="Consolas" pitchFamily="34" charset="0"/>
-                <a:ea typeface="Consolas" pitchFamily="34" charset="-122"/>
-                <a:cs typeface="Consolas" pitchFamily="34" charset="-120"/>
-              </a:rPr>
-              <a:t>{</a:t>
-            </a:r>
-            <a:endParaRPr lang="en-US" sz="1100" dirty="0"/>
-          </a:p>
-          <a:p>
-            <a:pPr marL="0" indent="0">
-              <a:buNone/>
-            </a:pPr>
-            <a:r>
-              <a:rPr lang="en-US" sz="1100" dirty="0">
-                <a:solidFill>
-                  <a:srgbClr val="E7EDF6"/>
-                </a:solidFill>
-                <a:latin typeface="Consolas" pitchFamily="34" charset="0"/>
-                <a:ea typeface="Consolas" pitchFamily="34" charset="-122"/>
-                <a:cs typeface="Consolas" pitchFamily="34" charset="-120"/>
-              </a:rPr>
-              <a:t>    public int MovementCost { get; }</a:t>
-            </a:r>
-            <a:endParaRPr lang="en-US" sz="1100" dirty="0"/>
-          </a:p>
-          <a:p>
-            <a:pPr marL="0" indent="0">
-              <a:buNone/>
-            </a:pPr>
-            <a:r>
-              <a:rPr lang="en-US" sz="1100" dirty="0">
-                <a:solidFill>
-                  <a:srgbClr val="E7EDF6"/>
-                </a:solidFill>
-                <a:latin typeface="Consolas" pitchFamily="34" charset="0"/>
-                <a:ea typeface="Consolas" pitchFamily="34" charset="-122"/>
-                <a:cs typeface="Consolas" pitchFamily="34" charset="-120"/>
-              </a:rPr>
-              <a:t>    public bool IsWater { get; }</a:t>
-            </a:r>
-            <a:endParaRPr lang="en-US" sz="1100" dirty="0"/>
-          </a:p>
-          <a:p>
-            <a:pPr marL="0" indent="0">
-              <a:buNone/>
-            </a:pPr>
-            <a:r>
-              <a:rPr lang="en-US" sz="1100" dirty="0">
-                <a:solidFill>
-                  <a:srgbClr val="E7EDF6"/>
-                </a:solidFill>
-                <a:latin typeface="Consolas" pitchFamily="34" charset="0"/>
-                <a:ea typeface="Consolas" pitchFamily="34" charset="-122"/>
-                <a:cs typeface="Consolas" pitchFamily="34" charset="-120"/>
-              </a:rPr>
-              <a:t>    public Sprite Sprite { get; }</a:t>
-            </a:r>
-            <a:endParaRPr lang="en-US" sz="1100" dirty="0"/>
-          </a:p>
-          <a:p>
-            <a:pPr marL="0" indent="0">
-              <a:buNone/>
-            </a:pPr>
-            <a:endParaRPr lang="en-US" sz="1100" dirty="0"/>
-          </a:p>
-          <a:p>
-            <a:pPr marL="0" indent="0">
-              <a:buNone/>
-            </a:pPr>
-            <a:r>
-              <a:rPr lang="en-US" sz="1100" dirty="0">
-                <a:solidFill>
-                  <a:srgbClr val="E7EDF6"/>
-                </a:solidFill>
-                <a:latin typeface="Consolas" pitchFamily="34" charset="0"/>
-                <a:ea typeface="Consolas" pitchFamily="34" charset="-122"/>
-                <a:cs typeface="Consolas" pitchFamily="34" charset="-120"/>
-              </a:rPr>
-              <a:t>    public TerrainType(int movementCost,</a:t>
-            </a:r>
-            <a:endParaRPr lang="en-US" sz="1100" dirty="0"/>
-          </a:p>
-          <a:p>
-            <a:pPr marL="0" indent="0">
-              <a:buNone/>
-            </a:pPr>
-            <a:r>
-              <a:rPr lang="en-US" sz="1100" dirty="0">
-                <a:solidFill>
-                  <a:srgbClr val="E7EDF6"/>
-                </a:solidFill>
-                <a:latin typeface="Consolas" pitchFamily="34" charset="0"/>
-                <a:ea typeface="Consolas" pitchFamily="34" charset="-122"/>
-                <a:cs typeface="Consolas" pitchFamily="34" charset="-120"/>
-              </a:rPr>
-              <a:t>                       bool isWater,</a:t>
-            </a:r>
-            <a:endParaRPr lang="en-US" sz="1100" dirty="0"/>
-          </a:p>
-          <a:p>
-            <a:pPr marL="0" indent="0">
-              <a:buNone/>
-            </a:pPr>
-            <a:r>
-              <a:rPr lang="en-US" sz="1100" dirty="0">
-                <a:solidFill>
-                  <a:srgbClr val="E7EDF6"/>
-                </a:solidFill>
-                <a:latin typeface="Consolas" pitchFamily="34" charset="0"/>
-                <a:ea typeface="Consolas" pitchFamily="34" charset="-122"/>
-                <a:cs typeface="Consolas" pitchFamily="34" charset="-120"/>
-              </a:rPr>
-              <a:t>                       Sprite sprite)</a:t>
-            </a:r>
-            <a:endParaRPr lang="en-US" sz="1100" dirty="0"/>
-          </a:p>
-          <a:p>
-            <a:pPr marL="0" indent="0">
-              <a:buNone/>
-            </a:pPr>
-            <a:r>
-              <a:rPr lang="en-US" sz="1100" dirty="0">
-                <a:solidFill>
-                  <a:srgbClr val="E7EDF6"/>
-                </a:solidFill>
-                <a:latin typeface="Consolas" pitchFamily="34" charset="0"/>
-                <a:ea typeface="Consolas" pitchFamily="34" charset="-122"/>
-                <a:cs typeface="Consolas" pitchFamily="34" charset="-120"/>
-              </a:rPr>
-              <a:t>    {</a:t>
-            </a:r>
-            <a:endParaRPr lang="en-US" sz="1100" dirty="0"/>
-          </a:p>
-          <a:p>
-            <a:pPr marL="0" indent="0">
-              <a:buNone/>
-            </a:pPr>
-            <a:r>
-              <a:rPr lang="en-US" sz="1100" dirty="0">
-                <a:solidFill>
-                  <a:srgbClr val="E7EDF6"/>
-                </a:solidFill>
-                <a:latin typeface="Consolas" pitchFamily="34" charset="0"/>
-                <a:ea typeface="Consolas" pitchFamily="34" charset="-122"/>
-                <a:cs typeface="Consolas" pitchFamily="34" charset="-120"/>
-              </a:rPr>
-              <a:t>        MovementCost = movementCost;</a:t>
-            </a:r>
-            <a:endParaRPr lang="en-US" sz="1100" dirty="0"/>
-          </a:p>
-          <a:p>
-            <a:pPr marL="0" indent="0">
-              <a:buNone/>
-            </a:pPr>
-            <a:r>
-              <a:rPr lang="en-US" sz="1100" dirty="0">
-                <a:solidFill>
-                  <a:srgbClr val="E7EDF6"/>
-                </a:solidFill>
-                <a:latin typeface="Consolas" pitchFamily="34" charset="0"/>
-                <a:ea typeface="Consolas" pitchFamily="34" charset="-122"/>
-                <a:cs typeface="Consolas" pitchFamily="34" charset="-120"/>
-              </a:rPr>
-              <a:t>        IsWater = isWater;</a:t>
-            </a:r>
-            <a:endParaRPr lang="en-US" sz="1100" dirty="0"/>
-          </a:p>
-          <a:p>
-            <a:pPr marL="0" indent="0">
-              <a:buNone/>
-            </a:pPr>
-            <a:r>
-              <a:rPr lang="en-US" sz="1100" dirty="0">
-                <a:solidFill>
-                  <a:srgbClr val="E7EDF6"/>
-                </a:solidFill>
-                <a:latin typeface="Consolas" pitchFamily="34" charset="0"/>
-                <a:ea typeface="Consolas" pitchFamily="34" charset="-122"/>
-                <a:cs typeface="Consolas" pitchFamily="34" charset="-120"/>
-              </a:rPr>
-              <a:t>        Sprite = sprite;</a:t>
-            </a:r>
-            <a:endParaRPr lang="en-US" sz="1100" dirty="0"/>
-          </a:p>
-          <a:p>
-            <a:pPr marL="0" indent="0">
-              <a:buNone/>
-            </a:pPr>
-            <a:r>
-              <a:rPr lang="en-US" sz="1100" dirty="0">
-                <a:solidFill>
-                  <a:srgbClr val="E7EDF6"/>
-                </a:solidFill>
-                <a:latin typeface="Consolas" pitchFamily="34" charset="0"/>
-                <a:ea typeface="Consolas" pitchFamily="34" charset="-122"/>
-                <a:cs typeface="Consolas" pitchFamily="34" charset="-120"/>
-              </a:rPr>
-              <a:t>    }</a:t>
-            </a:r>
-            <a:endParaRPr lang="en-US" sz="1100" dirty="0"/>
-          </a:p>
-          <a:p>
-            <a:pPr marL="0" indent="0">
-              <a:buNone/>
-            </a:pPr>
-            <a:r>
-              <a:rPr lang="en-US" sz="1100" dirty="0">
-                <a:solidFill>
-                  <a:srgbClr val="E7EDF6"/>
-                </a:solidFill>
-                <a:latin typeface="Consolas" pitchFamily="34" charset="0"/>
-                <a:ea typeface="Consolas" pitchFamily="34" charset="-122"/>
-                <a:cs typeface="Consolas" pitchFamily="34" charset="-120"/>
-              </a:rPr>
-              <a:t>}</a:t>
-            </a:r>
-            <a:endParaRPr lang="en-US" sz="1100" dirty="0"/>
-          </a:p>
-        </p:txBody>
-      </p:sp>
-    </p:spTree>
-  </p:cSld>
-  <p:clrMapOvr>
-    <a:masterClrMapping/>
-  </p:clrMapOvr>
-</p:sld>
-</file>
-
-<file path=ppt/slides/slide21.xml><?xml version="1.0" encoding="utf-8"?>
-<p:sld xmlns:a="http://schemas.openxmlformats.org/drawingml/2006/main" xmlns:r="http://schemas.openxmlformats.org/officeDocument/2006/relationships" xmlns:p="http://schemas.openxmlformats.org/presentationml/2006/main">
-  <p:cSld name="Slide 21">
-    <p:bg>
-      <p:bgPr>
-        <a:solidFill>
-          <a:srgbClr val="FAF7EF"/>
-        </a:solidFill>
-        <a:effectLst/>
-      </p:bgPr>
-    </p:bg>
-    <p:spTree>
-      <p:nvGrpSpPr>
-        <p:cNvPr id="1" name=""/>
-        <p:cNvGrpSpPr/>
-        <p:nvPr/>
-      </p:nvGrpSpPr>
-      <p:grpSpPr>
-        <a:xfrm>
-          <a:off x="0" y="0"/>
-          <a:ext cx="0" cy="0"/>
-          <a:chOff x="0" y="0"/>
-          <a:chExt cx="0" cy="0"/>
-        </a:xfrm>
-      </p:grpSpPr>
-      <p:sp>
-        <p:nvSpPr>
-          <p:cNvPr id="2" name="Shape 0"/>
-          <p:cNvSpPr/>
-          <p:nvPr/>
-        </p:nvSpPr>
-        <p:spPr>
-          <a:xfrm>
-            <a:off x="0" y="0"/>
-            <a:ext cx="9144000" cy="5715000"/>
-          </a:xfrm>
-          <a:prstGeom prst="rect">
-            <a:avLst/>
-          </a:prstGeom>
-          <a:solidFill>
-            <a:srgbClr val="FAF7EF"/>
-          </a:solidFill>
-          <a:ln w="12700">
-            <a:solidFill>
-              <a:srgbClr val="FAF7EF"/>
-            </a:solidFill>
-            <a:prstDash val="solid"/>
-          </a:ln>
-        </p:spPr>
-      </p:sp>
-      <p:sp>
-        <p:nvSpPr>
-          <p:cNvPr id="3" name="Shape 1"/>
-          <p:cNvSpPr/>
-          <p:nvPr/>
-        </p:nvSpPr>
-        <p:spPr>
-          <a:xfrm>
-            <a:off x="0" y="0"/>
-            <a:ext cx="118872" cy="5715000"/>
-          </a:xfrm>
-          <a:prstGeom prst="rect">
-            <a:avLst/>
-          </a:prstGeom>
-          <a:solidFill>
-            <a:srgbClr val="F59E0B"/>
-          </a:solidFill>
-          <a:ln w="12700">
-            <a:solidFill>
-              <a:srgbClr val="F59E0B"/>
-            </a:solidFill>
-            <a:prstDash val="solid"/>
-          </a:ln>
-        </p:spPr>
-      </p:sp>
-      <p:sp>
-        <p:nvSpPr>
-          <p:cNvPr id="4" name="Text 2"/>
-          <p:cNvSpPr/>
-          <p:nvPr/>
-        </p:nvSpPr>
-        <p:spPr>
-          <a:xfrm>
-            <a:off x="8549640" y="5358384"/>
-            <a:ext cx="310896" cy="146304"/>
-          </a:xfrm>
-          <a:prstGeom prst="rect">
-            <a:avLst/>
-          </a:prstGeom>
-          <a:noFill/>
-          <a:ln/>
-        </p:spPr>
-        <p:txBody>
-          <a:bodyPr wrap="square" lIns="0" tIns="0" rIns="0" bIns="0" rtlCol="0" anchor="ctr"/>
-          <a:lstStyle/>
-          <a:p>
-            <a:pPr marL="0" indent="0" algn="r">
-              <a:buNone/>
-            </a:pPr>
-            <a:r>
-              <a:rPr lang="en-US" sz="700" dirty="0">
-                <a:solidFill>
-                  <a:srgbClr val="9F968C"/>
-                </a:solidFill>
-                <a:latin typeface="Aptos" pitchFamily="34" charset="0"/>
-                <a:ea typeface="Aptos" pitchFamily="34" charset="-122"/>
-                <a:cs typeface="Aptos" pitchFamily="34" charset="-120"/>
-              </a:rPr>
-              <a:t>21</a:t>
-            </a:r>
-            <a:endParaRPr lang="en-US" sz="700" dirty="0"/>
-          </a:p>
-        </p:txBody>
-      </p:sp>
-      <p:sp>
-        <p:nvSpPr>
-          <p:cNvPr id="5" name="Text 3"/>
-          <p:cNvSpPr/>
-          <p:nvPr/>
-        </p:nvSpPr>
-        <p:spPr>
-          <a:xfrm>
-            <a:off x="594360" y="5340096"/>
-            <a:ext cx="4663440" cy="164592"/>
-          </a:xfrm>
-          <a:prstGeom prst="rect">
-            <a:avLst/>
-          </a:prstGeom>
-          <a:noFill/>
-          <a:ln/>
-        </p:spPr>
-        <p:txBody>
-          <a:bodyPr wrap="square" lIns="0" tIns="0" rIns="0" bIns="0" rtlCol="0" anchor="ctr"/>
-          <a:lstStyle/>
-          <a:p>
-            <a:pPr marL="0" indent="0">
-              <a:buNone/>
-            </a:pPr>
-            <a:r>
-              <a:rPr lang="en-US" sz="700" dirty="0">
-                <a:solidFill>
-                  <a:srgbClr val="9F968C"/>
-                </a:solidFill>
-                <a:latin typeface="Malgun Gothic" pitchFamily="34" charset="0"/>
-                <a:ea typeface="Malgun Gothic" pitchFamily="34" charset="-122"/>
-                <a:cs typeface="Malgun Gothic" pitchFamily="34" charset="-120"/>
-              </a:rPr>
-              <a:t>Game Programming Patterns - Flyweight | Unity/C#</a:t>
-            </a:r>
-            <a:endParaRPr lang="en-US" sz="700" dirty="0"/>
-          </a:p>
-        </p:txBody>
-      </p:sp>
-      <p:sp>
-        <p:nvSpPr>
-          <p:cNvPr id="6" name="Text 4"/>
-          <p:cNvSpPr/>
-          <p:nvPr/>
-        </p:nvSpPr>
-        <p:spPr>
-          <a:xfrm>
-            <a:off x="594360" y="347472"/>
-            <a:ext cx="8046720" cy="420624"/>
-          </a:xfrm>
-          <a:prstGeom prst="rect">
-            <a:avLst/>
-          </a:prstGeom>
-          <a:noFill/>
-          <a:ln/>
-        </p:spPr>
-        <p:txBody>
-          <a:bodyPr wrap="square" lIns="0" tIns="0" rIns="0" bIns="0" rtlCol="0" anchor="ctr">
-            <a:normAutofit/>
-          </a:bodyPr>
-          <a:lstStyle/>
-          <a:p>
-            <a:pPr marL="0" indent="0">
-              <a:buNone/>
-            </a:pPr>
-            <a:r>
-              <a:rPr lang="en-US" sz="2500" b="1" dirty="0">
-                <a:solidFill>
-                  <a:srgbClr val="17212B"/>
-                </a:solidFill>
-                <a:latin typeface="Malgun Gothic" pitchFamily="34" charset="0"/>
-                <a:ea typeface="Malgun Gothic" pitchFamily="34" charset="-122"/>
-                <a:cs typeface="Malgun Gothic" pitchFamily="34" charset="-120"/>
-              </a:rPr>
-              <a:t>World는 TerrainType 참조를 저장한다</a:t>
-            </a:r>
-            <a:endParaRPr lang="en-US" sz="2500" dirty="0"/>
-          </a:p>
-        </p:txBody>
-      </p:sp>
-      <p:sp>
-        <p:nvSpPr>
-          <p:cNvPr id="7" name="Text 5"/>
-          <p:cNvSpPr/>
-          <p:nvPr/>
-        </p:nvSpPr>
-        <p:spPr>
-          <a:xfrm>
-            <a:off x="713232" y="1115568"/>
-            <a:ext cx="7498080" cy="274320"/>
-          </a:xfrm>
-          <a:prstGeom prst="rect">
-            <a:avLst/>
-          </a:prstGeom>
-          <a:noFill/>
-          <a:ln/>
-        </p:spPr>
-        <p:txBody>
-          <a:bodyPr wrap="square" lIns="254" tIns="254" rIns="254" bIns="254" rtlCol="0" anchor="t">
-            <a:normAutofit/>
-          </a:bodyPr>
-          <a:lstStyle/>
-          <a:p>
-            <a:pPr marL="0" indent="0">
-              <a:buNone/>
-            </a:pPr>
-            <a:r>
-              <a:rPr lang="en-US" sz="1550" b="1" dirty="0">
-                <a:solidFill>
-                  <a:srgbClr val="15803D"/>
-                </a:solidFill>
-                <a:latin typeface="Malgun Gothic" pitchFamily="34" charset="0"/>
-                <a:ea typeface="Malgun Gothic" pitchFamily="34" charset="-122"/>
-                <a:cs typeface="Malgun Gothic" pitchFamily="34" charset="-120"/>
-              </a:rPr>
-              <a:t>타일마다 객체를 새로 만들지 않고 공유 객체를 가리킨다.</a:t>
-            </a:r>
-            <a:endParaRPr lang="en-US" sz="1550" dirty="0"/>
-          </a:p>
-        </p:txBody>
-      </p:sp>
-      <p:sp>
-        <p:nvSpPr>
-          <p:cNvPr id="8" name="Shape 6"/>
-          <p:cNvSpPr/>
-          <p:nvPr/>
-        </p:nvSpPr>
-        <p:spPr>
-          <a:xfrm>
-            <a:off x="713232" y="1417320"/>
-            <a:ext cx="7909560" cy="3520440"/>
-          </a:xfrm>
-          <a:prstGeom prst="roundRect">
-            <a:avLst>
-              <a:gd name="adj" fmla="val 1558"/>
-            </a:avLst>
-          </a:prstGeom>
-          <a:solidFill>
-            <a:srgbClr val="101827"/>
-          </a:solidFill>
-          <a:ln w="12700">
-            <a:solidFill>
-              <a:srgbClr val="2B3648">
-                <a:alpha val="90000"/>
-              </a:srgbClr>
-            </a:solidFill>
-            <a:prstDash val="solid"/>
-          </a:ln>
-        </p:spPr>
-      </p:sp>
-      <p:sp>
-        <p:nvSpPr>
-          <p:cNvPr id="9" name="Text 7"/>
-          <p:cNvSpPr/>
-          <p:nvPr/>
-        </p:nvSpPr>
-        <p:spPr>
-          <a:xfrm>
-            <a:off x="914400" y="1581912"/>
-            <a:ext cx="7507224" cy="3191256"/>
-          </a:xfrm>
-          <a:prstGeom prst="rect">
-            <a:avLst/>
-          </a:prstGeom>
-          <a:noFill/>
-          <a:ln/>
-        </p:spPr>
-        <p:txBody>
-          <a:bodyPr wrap="square" lIns="0" tIns="0" rIns="0" bIns="0" rtlCol="0" anchor="t">
-            <a:normAutofit/>
-          </a:bodyPr>
-          <a:lstStyle/>
-          <a:p>
-            <a:pPr marL="0" indent="0">
-              <a:buNone/>
-            </a:pPr>
-            <a:r>
-              <a:rPr lang="en-US" sz="1220" dirty="0">
-                <a:solidFill>
-                  <a:srgbClr val="E7EDF6"/>
-                </a:solidFill>
-                <a:latin typeface="Consolas" pitchFamily="34" charset="0"/>
-                <a:ea typeface="Consolas" pitchFamily="34" charset="-122"/>
-                <a:cs typeface="Consolas" pitchFamily="34" charset="-120"/>
-              </a:rPr>
-              <a:t>public sealed class WorldGrid</a:t>
-            </a:r>
-            <a:endParaRPr lang="en-US" sz="1220" dirty="0"/>
-          </a:p>
-          <a:p>
-            <a:pPr marL="0" indent="0">
-              <a:buNone/>
-            </a:pPr>
-            <a:r>
-              <a:rPr lang="en-US" sz="1220" dirty="0">
-                <a:solidFill>
-                  <a:srgbClr val="E7EDF6"/>
-                </a:solidFill>
-                <a:latin typeface="Consolas" pitchFamily="34" charset="0"/>
-                <a:ea typeface="Consolas" pitchFamily="34" charset="-122"/>
-                <a:cs typeface="Consolas" pitchFamily="34" charset="-120"/>
-              </a:rPr>
-              <a:t>{</a:t>
-            </a:r>
-            <a:endParaRPr lang="en-US" sz="1220" dirty="0"/>
-          </a:p>
-          <a:p>
-            <a:pPr marL="0" indent="0">
-              <a:buNone/>
-            </a:pPr>
-            <a:r>
-              <a:rPr lang="en-US" sz="1220" dirty="0">
-                <a:solidFill>
-                  <a:srgbClr val="E7EDF6"/>
-                </a:solidFill>
-                <a:latin typeface="Consolas" pitchFamily="34" charset="0"/>
-                <a:ea typeface="Consolas" pitchFamily="34" charset="-122"/>
-                <a:cs typeface="Consolas" pitchFamily="34" charset="-120"/>
-              </a:rPr>
-              <a:t>    private readonly TerrainType[,] tiles;</a:t>
-            </a:r>
-            <a:endParaRPr lang="en-US" sz="1220" dirty="0"/>
-          </a:p>
-          <a:p>
-            <a:pPr marL="0" indent="0">
-              <a:buNone/>
-            </a:pPr>
-            <a:endParaRPr lang="en-US" sz="1220" dirty="0"/>
-          </a:p>
-          <a:p>
-            <a:pPr marL="0" indent="0">
-              <a:buNone/>
-            </a:pPr>
-            <a:r>
-              <a:rPr lang="en-US" sz="1220" dirty="0">
-                <a:solidFill>
-                  <a:srgbClr val="E7EDF6"/>
-                </a:solidFill>
-                <a:latin typeface="Consolas" pitchFamily="34" charset="0"/>
-                <a:ea typeface="Consolas" pitchFamily="34" charset="-122"/>
-                <a:cs typeface="Consolas" pitchFamily="34" charset="-120"/>
-              </a:rPr>
-              <a:t>    private readonly TerrainType grass;</a:t>
-            </a:r>
-            <a:endParaRPr lang="en-US" sz="1220" dirty="0"/>
-          </a:p>
-          <a:p>
-            <a:pPr marL="0" indent="0">
-              <a:buNone/>
-            </a:pPr>
-            <a:r>
-              <a:rPr lang="en-US" sz="1220" dirty="0">
-                <a:solidFill>
-                  <a:srgbClr val="E7EDF6"/>
-                </a:solidFill>
-                <a:latin typeface="Consolas" pitchFamily="34" charset="0"/>
-                <a:ea typeface="Consolas" pitchFamily="34" charset="-122"/>
-                <a:cs typeface="Consolas" pitchFamily="34" charset="-120"/>
-              </a:rPr>
-              <a:t>    private readonly TerrainType hill;</a:t>
-            </a:r>
-            <a:endParaRPr lang="en-US" sz="1220" dirty="0"/>
-          </a:p>
-          <a:p>
-            <a:pPr marL="0" indent="0">
-              <a:buNone/>
-            </a:pPr>
-            <a:r>
-              <a:rPr lang="en-US" sz="1220" dirty="0">
-                <a:solidFill>
-                  <a:srgbClr val="E7EDF6"/>
-                </a:solidFill>
-                <a:latin typeface="Consolas" pitchFamily="34" charset="0"/>
-                <a:ea typeface="Consolas" pitchFamily="34" charset="-122"/>
-                <a:cs typeface="Consolas" pitchFamily="34" charset="-120"/>
-              </a:rPr>
-              <a:t>    private readonly TerrainType river;</a:t>
-            </a:r>
-            <a:endParaRPr lang="en-US" sz="1220" dirty="0"/>
-          </a:p>
-          <a:p>
-            <a:pPr marL="0" indent="0">
-              <a:buNone/>
-            </a:pPr>
-            <a:endParaRPr lang="en-US" sz="1220" dirty="0"/>
-          </a:p>
-          <a:p>
-            <a:pPr marL="0" indent="0">
-              <a:buNone/>
-            </a:pPr>
-            <a:r>
-              <a:rPr lang="en-US" sz="1220" dirty="0">
-                <a:solidFill>
-                  <a:srgbClr val="E7EDF6"/>
-                </a:solidFill>
-                <a:latin typeface="Consolas" pitchFamily="34" charset="0"/>
-                <a:ea typeface="Consolas" pitchFamily="34" charset="-122"/>
-                <a:cs typeface="Consolas" pitchFamily="34" charset="-120"/>
-              </a:rPr>
-              <a:t>    public TerrainType GetTile(int x, int y)</a:t>
-            </a:r>
-            <a:endParaRPr lang="en-US" sz="1220" dirty="0"/>
-          </a:p>
-          <a:p>
-            <a:pPr marL="0" indent="0">
-              <a:buNone/>
-            </a:pPr>
-            <a:r>
-              <a:rPr lang="en-US" sz="1220" dirty="0">
-                <a:solidFill>
-                  <a:srgbClr val="E7EDF6"/>
-                </a:solidFill>
-                <a:latin typeface="Consolas" pitchFamily="34" charset="0"/>
-                <a:ea typeface="Consolas" pitchFamily="34" charset="-122"/>
-                <a:cs typeface="Consolas" pitchFamily="34" charset="-120"/>
-              </a:rPr>
-              <a:t>    {</a:t>
-            </a:r>
-            <a:endParaRPr lang="en-US" sz="1220" dirty="0"/>
-          </a:p>
-          <a:p>
-            <a:pPr marL="0" indent="0">
-              <a:buNone/>
-            </a:pPr>
-            <a:r>
-              <a:rPr lang="en-US" sz="1220" dirty="0">
-                <a:solidFill>
-                  <a:srgbClr val="E7EDF6"/>
-                </a:solidFill>
-                <a:latin typeface="Consolas" pitchFamily="34" charset="0"/>
-                <a:ea typeface="Consolas" pitchFamily="34" charset="-122"/>
-                <a:cs typeface="Consolas" pitchFamily="34" charset="-120"/>
-              </a:rPr>
-              <a:t>        return tiles[x, y];</a:t>
-            </a:r>
-            <a:endParaRPr lang="en-US" sz="1220" dirty="0"/>
-          </a:p>
-          <a:p>
-            <a:pPr marL="0" indent="0">
-              <a:buNone/>
-            </a:pPr>
-            <a:r>
-              <a:rPr lang="en-US" sz="1220" dirty="0">
-                <a:solidFill>
-                  <a:srgbClr val="E7EDF6"/>
-                </a:solidFill>
-                <a:latin typeface="Consolas" pitchFamily="34" charset="0"/>
-                <a:ea typeface="Consolas" pitchFamily="34" charset="-122"/>
-                <a:cs typeface="Consolas" pitchFamily="34" charset="-120"/>
-              </a:rPr>
-              <a:t>    }</a:t>
-            </a:r>
-            <a:endParaRPr lang="en-US" sz="1220" dirty="0"/>
-          </a:p>
-          <a:p>
-            <a:pPr marL="0" indent="0">
-              <a:buNone/>
-            </a:pPr>
-            <a:r>
-              <a:rPr lang="en-US" sz="1220" dirty="0">
-                <a:solidFill>
-                  <a:srgbClr val="E7EDF6"/>
-                </a:solidFill>
-                <a:latin typeface="Consolas" pitchFamily="34" charset="0"/>
-                <a:ea typeface="Consolas" pitchFamily="34" charset="-122"/>
-                <a:cs typeface="Consolas" pitchFamily="34" charset="-120"/>
-              </a:rPr>
-              <a:t>}</a:t>
-            </a:r>
-            <a:endParaRPr lang="en-US" sz="1220" dirty="0"/>
-          </a:p>
-        </p:txBody>
-      </p:sp>
-    </p:spTree>
-  </p:cSld>
-  <p:clrMapOvr>
-    <a:masterClrMapping/>
-  </p:clrMapOvr>
-</p:sld>
-</file>
-
-<file path=ppt/slides/slide22.xml><?xml version="1.0" encoding="utf-8"?>
 <p:sld xmlns:a="http://schemas.openxmlformats.org/drawingml/2006/main" xmlns:r="http://schemas.openxmlformats.org/officeDocument/2006/relationships" xmlns:p="http://schemas.openxmlformats.org/presentationml/2006/main">
   <p:cSld name="Slide 22">
     <p:bg>
@@ -11768,7 +10344,7 @@
               <a:buNone/>
             </a:pPr>
             <a:r>
-              <a:rPr lang="en-US" sz="700" dirty="0">
+              <a:rPr lang="en-US" sz="700">
                 <a:solidFill>
                   <a:srgbClr val="9F968C"/>
                 </a:solidFill>
@@ -11776,7 +10352,7 @@
                 <a:ea typeface="Aptos" pitchFamily="34" charset="-122"/>
                 <a:cs typeface="Aptos" pitchFamily="34" charset="-120"/>
               </a:rPr>
-              <a:t>22</a:t>
+              <a:t>20</a:t>
             </a:r>
             <a:endParaRPr lang="en-US" sz="700" dirty="0"/>
           </a:p>
@@ -12174,7 +10750,7 @@
 </p:sld>
 </file>
 
-<file path=ppt/slides/slide23.xml><?xml version="1.0" encoding="utf-8"?>
+<file path=ppt/slides/slide21.xml><?xml version="1.0" encoding="utf-8"?>
 <p:sld xmlns:a="http://schemas.openxmlformats.org/drawingml/2006/main" xmlns:r="http://schemas.openxmlformats.org/officeDocument/2006/relationships" xmlns:p="http://schemas.openxmlformats.org/presentationml/2006/main">
   <p:cSld name="Slide 23">
     <p:bg>
@@ -12274,7 +10850,7 @@
               <a:buNone/>
             </a:pPr>
             <a:r>
-              <a:rPr lang="en-US" sz="700" dirty="0">
+              <a:rPr lang="en-US" sz="700">
                 <a:solidFill>
                   <a:srgbClr val="9F968C"/>
                 </a:solidFill>
@@ -12282,7 +10858,7 @@
                 <a:ea typeface="Aptos" pitchFamily="34" charset="-122"/>
                 <a:cs typeface="Aptos" pitchFamily="34" charset="-120"/>
               </a:rPr>
-              <a:t>23</a:t>
+              <a:t>21</a:t>
             </a:r>
             <a:endParaRPr lang="en-US" sz="700" dirty="0"/>
           </a:p>
@@ -12615,7 +11191,7 @@
               <a:buNone/>
             </a:pPr>
             <a:r>
-              <a:rPr lang="en-US" sz="1700" dirty="0">
+              <a:rPr lang="en-US" altLang="ko-KR" sz="1700">
                 <a:solidFill>
                   <a:srgbClr val="17212B"/>
                 </a:solidFill>
@@ -12623,7 +11199,51 @@
                 <a:ea typeface="Malgun Gothic" pitchFamily="34" charset="-122"/>
                 <a:cs typeface="Malgun Gothic" pitchFamily="34" charset="-120"/>
               </a:rPr>
-              <a:t>enum 하나 크기와 비슷한 참조로 객체지향 API를 얻는다.</a:t>
+              <a:t>enum </a:t>
+            </a:r>
+            <a:r>
+              <a:rPr lang="ko-KR" altLang="en-US" sz="1700">
+                <a:solidFill>
+                  <a:srgbClr val="17212B"/>
+                </a:solidFill>
+                <a:latin typeface="Malgun Gothic" pitchFamily="34" charset="0"/>
+                <a:ea typeface="Malgun Gothic" pitchFamily="34" charset="-122"/>
+                <a:cs typeface="Malgun Gothic" pitchFamily="34" charset="-120"/>
+              </a:rPr>
+              <a:t>한 개 정도의 가벼운 비용으로 객체지향 </a:t>
+            </a:r>
+            <a:r>
+              <a:rPr lang="en-US" altLang="ko-KR" sz="1700">
+                <a:solidFill>
+                  <a:srgbClr val="17212B"/>
+                </a:solidFill>
+                <a:latin typeface="Malgun Gothic" pitchFamily="34" charset="0"/>
+                <a:ea typeface="Malgun Gothic" pitchFamily="34" charset="-122"/>
+                <a:cs typeface="Malgun Gothic" pitchFamily="34" charset="-120"/>
+              </a:rPr>
+              <a:t>API</a:t>
+            </a:r>
+            <a:r>
+              <a:rPr lang="ko-KR" altLang="en-US" sz="1700">
+                <a:solidFill>
+                  <a:srgbClr val="17212B"/>
+                </a:solidFill>
+                <a:latin typeface="Malgun Gothic" pitchFamily="34" charset="0"/>
+                <a:ea typeface="Malgun Gothic" pitchFamily="34" charset="-122"/>
+                <a:cs typeface="Malgun Gothic" pitchFamily="34" charset="-120"/>
+              </a:rPr>
+              <a:t>를 얻는다</a:t>
+            </a:r>
+            <a:r>
+              <a:rPr lang="en-US" altLang="ko-KR" sz="1700">
+                <a:solidFill>
+                  <a:srgbClr val="17212B"/>
+                </a:solidFill>
+                <a:latin typeface="Malgun Gothic" pitchFamily="34" charset="0"/>
+                <a:ea typeface="Malgun Gothic" pitchFamily="34" charset="-122"/>
+                <a:cs typeface="Malgun Gothic" pitchFamily="34" charset="-120"/>
+              </a:rPr>
+              <a:t>.</a:t>
             </a:r>
             <a:endParaRPr lang="en-US" sz="1700" dirty="0"/>
           </a:p>
@@ -12637,7 +11257,7 @@
 </p:sld>
 </file>
 
-<file path=ppt/slides/slide24.xml><?xml version="1.0" encoding="utf-8"?>
+<file path=ppt/slides/slide22.xml><?xml version="1.0" encoding="utf-8"?>
 <p:sld xmlns:a="http://schemas.openxmlformats.org/drawingml/2006/main" xmlns:r="http://schemas.openxmlformats.org/officeDocument/2006/relationships" xmlns:p="http://schemas.openxmlformats.org/presentationml/2006/main">
   <p:cSld name="Slide 24">
     <p:bg>
@@ -12737,7 +11357,7 @@
               <a:buNone/>
             </a:pPr>
             <a:r>
-              <a:rPr lang="en-US" sz="700" dirty="0">
+              <a:rPr lang="en-US" sz="700">
                 <a:solidFill>
                   <a:srgbClr val="9F968C"/>
                 </a:solidFill>
@@ -12745,7 +11365,7 @@
                 <a:ea typeface="Aptos" pitchFamily="34" charset="-122"/>
                 <a:cs typeface="Aptos" pitchFamily="34" charset="-120"/>
               </a:rPr>
-              <a:t>24</a:t>
+              <a:t>22</a:t>
             </a:r>
             <a:endParaRPr lang="en-US" sz="700" dirty="0"/>
           </a:p>
@@ -13102,7 +11722,7 @@
 </p:sld>
 </file>
 
-<file path=ppt/slides/slide25.xml><?xml version="1.0" encoding="utf-8"?>
+<file path=ppt/slides/slide23.xml><?xml version="1.0" encoding="utf-8"?>
 <p:sld xmlns:a="http://schemas.openxmlformats.org/drawingml/2006/main" xmlns:r="http://schemas.openxmlformats.org/officeDocument/2006/relationships" xmlns:p="http://schemas.openxmlformats.org/presentationml/2006/main">
   <p:cSld name="Slide 25">
     <p:bg>
@@ -13202,7 +11822,7 @@
               <a:buNone/>
             </a:pPr>
             <a:r>
-              <a:rPr lang="en-US" sz="700" dirty="0">
+              <a:rPr lang="en-US" sz="700">
                 <a:solidFill>
                   <a:srgbClr val="9F968C"/>
                 </a:solidFill>
@@ -13210,7 +11830,7 @@
                 <a:ea typeface="Aptos" pitchFamily="34" charset="-122"/>
                 <a:cs typeface="Aptos" pitchFamily="34" charset="-120"/>
               </a:rPr>
-              <a:t>25</a:t>
+              <a:t>23</a:t>
             </a:r>
             <a:endParaRPr lang="en-US" sz="700" dirty="0"/>
           </a:p>
@@ -13914,7 +12534,7 @@
               <a:buNone/>
             </a:pPr>
             <a:r>
-              <a:rPr lang="en-US" sz="1420" dirty="0">
+              <a:rPr lang="ko-KR" altLang="en-US" sz="1420">
                 <a:solidFill>
                   <a:srgbClr val="17212B"/>
                 </a:solidFill>
@@ -13922,7 +12542,29 @@
                 <a:ea typeface="Malgun Gothic" pitchFamily="34" charset="-122"/>
                 <a:cs typeface="Malgun Gothic" pitchFamily="34" charset="-120"/>
               </a:rPr>
-              <a:t>랜덤 seed나 변형 값</a:t>
+              <a:t>랜덤 </a:t>
+            </a:r>
+            <a:r>
+              <a:rPr lang="en-US" altLang="ko-KR" sz="1420">
+                <a:solidFill>
+                  <a:srgbClr val="17212B"/>
+                </a:solidFill>
+                <a:latin typeface="Malgun Gothic" pitchFamily="34" charset="0"/>
+                <a:ea typeface="Malgun Gothic" pitchFamily="34" charset="-122"/>
+                <a:cs typeface="Malgun Gothic" pitchFamily="34" charset="-120"/>
+              </a:rPr>
+              <a:t>seed</a:t>
+            </a:r>
+            <a:r>
+              <a:rPr lang="ko-KR" altLang="en-US" sz="1420">
+                <a:solidFill>
+                  <a:srgbClr val="17212B"/>
+                </a:solidFill>
+                <a:latin typeface="Malgun Gothic" pitchFamily="34" charset="0"/>
+                <a:ea typeface="Malgun Gothic" pitchFamily="34" charset="-122"/>
+                <a:cs typeface="Malgun Gothic" pitchFamily="34" charset="-120"/>
+              </a:rPr>
+              <a:t>나 인스턴스별 변형 값</a:t>
             </a:r>
             <a:endParaRPr lang="en-US" sz="1420" dirty="0"/>
           </a:p>
@@ -13936,7 +12578,7 @@
 </p:sld>
 </file>
 
-<file path=ppt/slides/slide26.xml><?xml version="1.0" encoding="utf-8"?>
+<file path=ppt/slides/slide24.xml><?xml version="1.0" encoding="utf-8"?>
 <p:sld xmlns:a="http://schemas.openxmlformats.org/drawingml/2006/main" xmlns:r="http://schemas.openxmlformats.org/officeDocument/2006/relationships" xmlns:p="http://schemas.openxmlformats.org/presentationml/2006/main">
   <p:cSld name="Slide 26">
     <p:bg>
@@ -14036,7 +12678,7 @@
               <a:buNone/>
             </a:pPr>
             <a:r>
-              <a:rPr lang="en-US" sz="700" dirty="0">
+              <a:rPr lang="en-US" sz="700">
                 <a:solidFill>
                   <a:srgbClr val="9F968C"/>
                 </a:solidFill>
@@ -14044,7 +12686,7 @@
                 <a:ea typeface="Aptos" pitchFamily="34" charset="-122"/>
                 <a:cs typeface="Aptos" pitchFamily="34" charset="-120"/>
               </a:rPr>
-              <a:t>26</a:t>
+              <a:t>24</a:t>
             </a:r>
             <a:endParaRPr lang="en-US" sz="700" dirty="0"/>
           </a:p>
@@ -14413,7 +13055,7 @@
 </p:sld>
 </file>
 
-<file path=ppt/slides/slide27.xml><?xml version="1.0" encoding="utf-8"?>
+<file path=ppt/slides/slide25.xml><?xml version="1.0" encoding="utf-8"?>
 <p:sld xmlns:a="http://schemas.openxmlformats.org/drawingml/2006/main" xmlns:r="http://schemas.openxmlformats.org/officeDocument/2006/relationships" xmlns:p="http://schemas.openxmlformats.org/presentationml/2006/main">
   <p:cSld name="Slide 27">
     <p:bg>
@@ -14513,7 +13155,7 @@
               <a:buNone/>
             </a:pPr>
             <a:r>
-              <a:rPr lang="en-US" sz="700" dirty="0">
+              <a:rPr lang="en-US" sz="700">
                 <a:solidFill>
                   <a:srgbClr val="9F968C"/>
                 </a:solidFill>
@@ -14521,7 +13163,7 @@
                 <a:ea typeface="Aptos" pitchFamily="34" charset="-122"/>
                 <a:cs typeface="Aptos" pitchFamily="34" charset="-120"/>
               </a:rPr>
-              <a:t>27</a:t>
+              <a:t>25</a:t>
             </a:r>
             <a:endParaRPr lang="en-US" sz="700" dirty="0"/>
           </a:p>
@@ -14736,7 +13378,7 @@
               <a:buNone/>
             </a:pPr>
             <a:r>
-              <a:rPr lang="en-US" sz="1680" dirty="0">
+              <a:rPr lang="ko-KR" altLang="en-US" sz="1680">
                 <a:solidFill>
                   <a:srgbClr val="17212B"/>
                 </a:solidFill>
@@ -14744,7 +13386,40 @@
                 <a:ea typeface="Malgun Gothic" pitchFamily="34" charset="-122"/>
                 <a:cs typeface="Malgun Gothic" pitchFamily="34" charset="-120"/>
               </a:rPr>
-              <a:t>각 객체가 같은 Mesh, Texture, 설정 데이터를 들고 있다.</a:t>
+              <a:t>각 객체가 같은 </a:t>
+            </a:r>
+            <a:r>
+              <a:rPr lang="en-US" altLang="ko-KR" sz="1680">
+                <a:solidFill>
+                  <a:srgbClr val="17212B"/>
+                </a:solidFill>
+                <a:latin typeface="Malgun Gothic" pitchFamily="34" charset="0"/>
+                <a:ea typeface="Malgun Gothic" pitchFamily="34" charset="-122"/>
+                <a:cs typeface="Malgun Gothic" pitchFamily="34" charset="-120"/>
+              </a:rPr>
+              <a:t>Mesh, Texture, </a:t>
+            </a:r>
+            <a:r>
+              <a:rPr lang="ko-KR" altLang="en-US" sz="1680">
+                <a:solidFill>
+                  <a:srgbClr val="17212B"/>
+                </a:solidFill>
+                <a:latin typeface="Malgun Gothic" pitchFamily="34" charset="0"/>
+                <a:ea typeface="Malgun Gothic" pitchFamily="34" charset="-122"/>
+                <a:cs typeface="Malgun Gothic" pitchFamily="34" charset="-120"/>
+              </a:rPr>
+              <a:t>설정 데이터를 그대로 가지고 있다</a:t>
+            </a:r>
+            <a:r>
+              <a:rPr lang="en-US" altLang="ko-KR" sz="1680">
+                <a:solidFill>
+                  <a:srgbClr val="17212B"/>
+                </a:solidFill>
+                <a:latin typeface="Malgun Gothic" pitchFamily="34" charset="0"/>
+                <a:ea typeface="Malgun Gothic" pitchFamily="34" charset="-122"/>
+                <a:cs typeface="Malgun Gothic" pitchFamily="34" charset="-120"/>
+              </a:rPr>
+              <a:t>.</a:t>
             </a:r>
             <a:endParaRPr lang="en-US" sz="1680" dirty="0"/>
           </a:p>
@@ -14802,7 +13477,7 @@
               <a:buNone/>
             </a:pPr>
             <a:r>
-              <a:rPr lang="en-US" sz="1680" dirty="0">
+              <a:rPr lang="ko-KR" altLang="en-US" sz="1680">
                 <a:solidFill>
                   <a:srgbClr val="17212B"/>
                 </a:solidFill>
@@ -14810,7 +13485,40 @@
                 <a:ea typeface="Malgun Gothic" pitchFamily="34" charset="-122"/>
                 <a:cs typeface="Malgun Gothic" pitchFamily="34" charset="-120"/>
               </a:rPr>
-              <a:t>메모리 사용량이나 Draw Call이 문제로 보인다.</a:t>
+              <a:t>메모리 사용량이나 </a:t>
+            </a:r>
+            <a:r>
+              <a:rPr lang="en-US" altLang="ko-KR" sz="1680">
+                <a:solidFill>
+                  <a:srgbClr val="17212B"/>
+                </a:solidFill>
+                <a:latin typeface="Malgun Gothic" pitchFamily="34" charset="0"/>
+                <a:ea typeface="Malgun Gothic" pitchFamily="34" charset="-122"/>
+                <a:cs typeface="Malgun Gothic" pitchFamily="34" charset="-120"/>
+              </a:rPr>
+              <a:t>Draw Call</a:t>
+            </a:r>
+            <a:r>
+              <a:rPr lang="ko-KR" altLang="en-US" sz="1680">
+                <a:solidFill>
+                  <a:srgbClr val="17212B"/>
+                </a:solidFill>
+                <a:latin typeface="Malgun Gothic" pitchFamily="34" charset="0"/>
+                <a:ea typeface="Malgun Gothic" pitchFamily="34" charset="-122"/>
+                <a:cs typeface="Malgun Gothic" pitchFamily="34" charset="-120"/>
+              </a:rPr>
+              <a:t>이 병목으로 나타난다</a:t>
+            </a:r>
+            <a:r>
+              <a:rPr lang="en-US" altLang="ko-KR" sz="1680">
+                <a:solidFill>
+                  <a:srgbClr val="17212B"/>
+                </a:solidFill>
+                <a:latin typeface="Malgun Gothic" pitchFamily="34" charset="0"/>
+                <a:ea typeface="Malgun Gothic" pitchFamily="34" charset="-122"/>
+                <a:cs typeface="Malgun Gothic" pitchFamily="34" charset="-120"/>
+              </a:rPr>
+              <a:t>.</a:t>
             </a:r>
             <a:endParaRPr lang="en-US" sz="1680" dirty="0"/>
           </a:p>
@@ -14890,7 +13598,7 @@
 </p:sld>
 </file>
 
-<file path=ppt/slides/slide28.xml><?xml version="1.0" encoding="utf-8"?>
+<file path=ppt/slides/slide26.xml><?xml version="1.0" encoding="utf-8"?>
 <p:sld xmlns:a="http://schemas.openxmlformats.org/drawingml/2006/main" xmlns:r="http://schemas.openxmlformats.org/officeDocument/2006/relationships" xmlns:p="http://schemas.openxmlformats.org/presentationml/2006/main">
   <p:cSld name="Slide 28">
     <p:bg>
@@ -14990,7 +13698,7 @@
               <a:buNone/>
             </a:pPr>
             <a:r>
-              <a:rPr lang="en-US" sz="700" dirty="0">
+              <a:rPr lang="en-US" sz="700">
                 <a:solidFill>
                   <a:srgbClr val="9F968C"/>
                 </a:solidFill>
@@ -14998,7 +13706,7 @@
                 <a:ea typeface="Aptos" pitchFamily="34" charset="-122"/>
                 <a:cs typeface="Aptos" pitchFamily="34" charset="-120"/>
               </a:rPr>
-              <a:t>28</a:t>
+              <a:t>26</a:t>
             </a:r>
             <a:endParaRPr lang="en-US" sz="700" dirty="0"/>
           </a:p>
@@ -15378,7 +14086,7 @@
 </p:sld>
 </file>
 
-<file path=ppt/slides/slide29.xml><?xml version="1.0" encoding="utf-8"?>
+<file path=ppt/slides/slide27.xml><?xml version="1.0" encoding="utf-8"?>
 <p:sld xmlns:a="http://schemas.openxmlformats.org/drawingml/2006/main" xmlns:r="http://schemas.openxmlformats.org/officeDocument/2006/relationships" xmlns:p="http://schemas.openxmlformats.org/presentationml/2006/main">
   <p:cSld name="Slide 29">
     <p:bg>
@@ -15478,7 +14186,7 @@
               <a:buNone/>
             </a:pPr>
             <a:r>
-              <a:rPr lang="en-US" sz="700" dirty="0">
+              <a:rPr lang="en-US" sz="700">
                 <a:solidFill>
                   <a:srgbClr val="9F968C"/>
                 </a:solidFill>
@@ -15486,7 +14194,7 @@
                 <a:ea typeface="Aptos" pitchFamily="34" charset="-122"/>
                 <a:cs typeface="Aptos" pitchFamily="34" charset="-120"/>
               </a:rPr>
-              <a:t>29</a:t>
+              <a:t>27</a:t>
             </a:r>
             <a:endParaRPr lang="en-US" sz="700" dirty="0"/>
           </a:p>
@@ -15822,7 +14530,7 @@
               <a:buNone/>
             </a:pPr>
             <a:r>
-              <a:rPr lang="en-US" sz="1570" dirty="0">
+              <a:rPr lang="en-US" altLang="ko-KR" sz="1570">
                 <a:solidFill>
                   <a:srgbClr val="17212B"/>
                 </a:solidFill>
@@ -15830,7 +14538,29 @@
                 <a:ea typeface="Malgun Gothic" pitchFamily="34" charset="-122"/>
                 <a:cs typeface="Malgun Gothic" pitchFamily="34" charset="-120"/>
               </a:rPr>
-              <a:t>Data Locality: 포인터 추적과 캐시 미스 관점에서 함께 생각해야 한다.</a:t>
+              <a:t>Data Locality: </a:t>
+            </a:r>
+            <a:r>
+              <a:rPr lang="ko-KR" altLang="en-US" sz="1570">
+                <a:solidFill>
+                  <a:srgbClr val="17212B"/>
+                </a:solidFill>
+                <a:latin typeface="Malgun Gothic" pitchFamily="34" charset="0"/>
+                <a:ea typeface="Malgun Gothic" pitchFamily="34" charset="-122"/>
+                <a:cs typeface="Malgun Gothic" pitchFamily="34" charset="-120"/>
+              </a:rPr>
+              <a:t>포인터 추적과 캐시 미스 관점에서 함께 고려해야 한다</a:t>
+            </a:r>
+            <a:r>
+              <a:rPr lang="en-US" altLang="ko-KR" sz="1570">
+                <a:solidFill>
+                  <a:srgbClr val="17212B"/>
+                </a:solidFill>
+                <a:latin typeface="Malgun Gothic" pitchFamily="34" charset="0"/>
+                <a:ea typeface="Malgun Gothic" pitchFamily="34" charset="-122"/>
+                <a:cs typeface="Malgun Gothic" pitchFamily="34" charset="-120"/>
+              </a:rPr>
+              <a:t>.</a:t>
             </a:r>
             <a:endParaRPr lang="en-US" sz="1570" dirty="0"/>
           </a:p>
@@ -15844,473 +14574,7 @@
 </p:sld>
 </file>
 
-<file path=ppt/slides/slide3.xml><?xml version="1.0" encoding="utf-8"?>
-<p:sld xmlns:a="http://schemas.openxmlformats.org/drawingml/2006/main" xmlns:r="http://schemas.openxmlformats.org/officeDocument/2006/relationships" xmlns:p="http://schemas.openxmlformats.org/presentationml/2006/main">
-  <p:cSld name="Slide 3">
-    <p:bg>
-      <p:bgPr>
-        <a:solidFill>
-          <a:srgbClr val="FAF7EF"/>
-        </a:solidFill>
-        <a:effectLst/>
-      </p:bgPr>
-    </p:bg>
-    <p:spTree>
-      <p:nvGrpSpPr>
-        <p:cNvPr id="1" name=""/>
-        <p:cNvGrpSpPr/>
-        <p:nvPr/>
-      </p:nvGrpSpPr>
-      <p:grpSpPr>
-        <a:xfrm>
-          <a:off x="0" y="0"/>
-          <a:ext cx="0" cy="0"/>
-          <a:chOff x="0" y="0"/>
-          <a:chExt cx="0" cy="0"/>
-        </a:xfrm>
-      </p:grpSpPr>
-      <p:sp>
-        <p:nvSpPr>
-          <p:cNvPr id="2" name="Shape 0"/>
-          <p:cNvSpPr/>
-          <p:nvPr/>
-        </p:nvSpPr>
-        <p:spPr>
-          <a:xfrm>
-            <a:off x="0" y="0"/>
-            <a:ext cx="9144000" cy="5715000"/>
-          </a:xfrm>
-          <a:prstGeom prst="rect">
-            <a:avLst/>
-          </a:prstGeom>
-          <a:solidFill>
-            <a:srgbClr val="FAF7EF"/>
-          </a:solidFill>
-          <a:ln w="12700">
-            <a:solidFill>
-              <a:srgbClr val="FAF7EF"/>
-            </a:solidFill>
-            <a:prstDash val="solid"/>
-          </a:ln>
-        </p:spPr>
-      </p:sp>
-      <p:sp>
-        <p:nvSpPr>
-          <p:cNvPr id="3" name="Shape 1"/>
-          <p:cNvSpPr/>
-          <p:nvPr/>
-        </p:nvSpPr>
-        <p:spPr>
-          <a:xfrm>
-            <a:off x="0" y="0"/>
-            <a:ext cx="118872" cy="5715000"/>
-          </a:xfrm>
-          <a:prstGeom prst="rect">
-            <a:avLst/>
-          </a:prstGeom>
-          <a:solidFill>
-            <a:srgbClr val="E45745"/>
-          </a:solidFill>
-          <a:ln w="12700">
-            <a:solidFill>
-              <a:srgbClr val="E45745"/>
-            </a:solidFill>
-            <a:prstDash val="solid"/>
-          </a:ln>
-        </p:spPr>
-      </p:sp>
-      <p:sp>
-        <p:nvSpPr>
-          <p:cNvPr id="4" name="Text 2"/>
-          <p:cNvSpPr/>
-          <p:nvPr/>
-        </p:nvSpPr>
-        <p:spPr>
-          <a:xfrm>
-            <a:off x="8549640" y="5358384"/>
-            <a:ext cx="310896" cy="146304"/>
-          </a:xfrm>
-          <a:prstGeom prst="rect">
-            <a:avLst/>
-          </a:prstGeom>
-          <a:noFill/>
-          <a:ln/>
-        </p:spPr>
-        <p:txBody>
-          <a:bodyPr wrap="square" lIns="0" tIns="0" rIns="0" bIns="0" rtlCol="0" anchor="ctr"/>
-          <a:lstStyle/>
-          <a:p>
-            <a:pPr marL="0" indent="0" algn="r">
-              <a:buNone/>
-            </a:pPr>
-            <a:r>
-              <a:rPr lang="en-US" sz="700" dirty="0">
-                <a:solidFill>
-                  <a:srgbClr val="9F968C"/>
-                </a:solidFill>
-                <a:latin typeface="Aptos" pitchFamily="34" charset="0"/>
-                <a:ea typeface="Aptos" pitchFamily="34" charset="-122"/>
-                <a:cs typeface="Aptos" pitchFamily="34" charset="-120"/>
-              </a:rPr>
-              <a:t>03</a:t>
-            </a:r>
-            <a:endParaRPr lang="en-US" sz="700" dirty="0"/>
-          </a:p>
-        </p:txBody>
-      </p:sp>
-      <p:sp>
-        <p:nvSpPr>
-          <p:cNvPr id="5" name="Text 3"/>
-          <p:cNvSpPr/>
-          <p:nvPr/>
-        </p:nvSpPr>
-        <p:spPr>
-          <a:xfrm>
-            <a:off x="594360" y="5340096"/>
-            <a:ext cx="4663440" cy="164592"/>
-          </a:xfrm>
-          <a:prstGeom prst="rect">
-            <a:avLst/>
-          </a:prstGeom>
-          <a:noFill/>
-          <a:ln/>
-        </p:spPr>
-        <p:txBody>
-          <a:bodyPr wrap="square" lIns="0" tIns="0" rIns="0" bIns="0" rtlCol="0" anchor="ctr"/>
-          <a:lstStyle/>
-          <a:p>
-            <a:pPr marL="0" indent="0">
-              <a:buNone/>
-            </a:pPr>
-            <a:r>
-              <a:rPr lang="en-US" sz="700" dirty="0">
-                <a:solidFill>
-                  <a:srgbClr val="9F968C"/>
-                </a:solidFill>
-                <a:latin typeface="Malgun Gothic" pitchFamily="34" charset="0"/>
-                <a:ea typeface="Malgun Gothic" pitchFamily="34" charset="-122"/>
-                <a:cs typeface="Malgun Gothic" pitchFamily="34" charset="-120"/>
-              </a:rPr>
-              <a:t>Game Programming Patterns - Flyweight | Unity/C#</a:t>
-            </a:r>
-            <a:endParaRPr lang="en-US" sz="700" dirty="0"/>
-          </a:p>
-        </p:txBody>
-      </p:sp>
-      <p:sp>
-        <p:nvSpPr>
-          <p:cNvPr id="6" name="Text 4"/>
-          <p:cNvSpPr/>
-          <p:nvPr/>
-        </p:nvSpPr>
-        <p:spPr>
-          <a:xfrm>
-            <a:off x="594360" y="347472"/>
-            <a:ext cx="8046720" cy="420624"/>
-          </a:xfrm>
-          <a:prstGeom prst="rect">
-            <a:avLst/>
-          </a:prstGeom>
-          <a:noFill/>
-          <a:ln/>
-        </p:spPr>
-        <p:txBody>
-          <a:bodyPr wrap="square" lIns="0" tIns="0" rIns="0" bIns="0" rtlCol="0" anchor="ctr">
-            <a:normAutofit/>
-          </a:bodyPr>
-          <a:lstStyle/>
-          <a:p>
-            <a:pPr marL="0" indent="0">
-              <a:buNone/>
-            </a:pPr>
-            <a:r>
-              <a:rPr lang="en-US" sz="2500" b="1" dirty="0">
-                <a:solidFill>
-                  <a:srgbClr val="17212B"/>
-                </a:solidFill>
-                <a:latin typeface="Malgun Gothic" pitchFamily="34" charset="0"/>
-                <a:ea typeface="Malgun Gothic" pitchFamily="34" charset="-122"/>
-                <a:cs typeface="Malgun Gothic" pitchFamily="34" charset="-120"/>
-              </a:rPr>
-              <a:t>원문 장의 전체 흐름</a:t>
-            </a:r>
-            <a:endParaRPr lang="en-US" sz="2500" dirty="0"/>
-          </a:p>
-        </p:txBody>
-      </p:sp>
-      <p:sp>
-        <p:nvSpPr>
-          <p:cNvPr id="7" name="Shape 5"/>
-          <p:cNvSpPr/>
-          <p:nvPr/>
-        </p:nvSpPr>
-        <p:spPr>
-          <a:xfrm>
-            <a:off x="822960" y="1453896"/>
-            <a:ext cx="82296" cy="82296"/>
-          </a:xfrm>
-          <a:prstGeom prst="ellipse">
-            <a:avLst/>
-          </a:prstGeom>
-          <a:solidFill>
-            <a:srgbClr val="15803D"/>
-          </a:solidFill>
-          <a:ln w="12700">
-            <a:solidFill>
-              <a:srgbClr val="15803D"/>
-            </a:solidFill>
-            <a:prstDash val="solid"/>
-          </a:ln>
-        </p:spPr>
-      </p:sp>
-      <p:sp>
-        <p:nvSpPr>
-          <p:cNvPr id="8" name="Text 6"/>
-          <p:cNvSpPr/>
-          <p:nvPr/>
-        </p:nvSpPr>
-        <p:spPr>
-          <a:xfrm>
-            <a:off x="1024128" y="1353312"/>
-            <a:ext cx="7360920" cy="530352"/>
-          </a:xfrm>
-          <a:prstGeom prst="rect">
-            <a:avLst/>
-          </a:prstGeom>
-          <a:noFill/>
-          <a:ln/>
-        </p:spPr>
-        <p:txBody>
-          <a:bodyPr wrap="square" lIns="254" tIns="254" rIns="254" bIns="254" rtlCol="0" anchor="t">
-            <a:normAutofit/>
-          </a:bodyPr>
-          <a:lstStyle/>
-          <a:p>
-            <a:pPr marL="0" indent="0">
-              <a:buNone/>
-            </a:pPr>
-            <a:r>
-              <a:rPr lang="en-US" sz="1640" dirty="0">
-                <a:solidFill>
-                  <a:srgbClr val="17212B"/>
-                </a:solidFill>
-                <a:latin typeface="Malgun Gothic" pitchFamily="34" charset="0"/>
-                <a:ea typeface="Malgun Gothic" pitchFamily="34" charset="-122"/>
-                <a:cs typeface="Malgun Gothic" pitchFamily="34" charset="-120"/>
-              </a:rPr>
-              <a:t>Forest for the Trees: 숲 전체를 개별 나무 객체로 만들면 데이터가 커진다.</a:t>
-            </a:r>
-            <a:endParaRPr lang="en-US" sz="1640" dirty="0"/>
-          </a:p>
-        </p:txBody>
-      </p:sp>
-      <p:sp>
-        <p:nvSpPr>
-          <p:cNvPr id="9" name="Shape 7"/>
-          <p:cNvSpPr/>
-          <p:nvPr/>
-        </p:nvSpPr>
-        <p:spPr>
-          <a:xfrm>
-            <a:off x="822960" y="2185416"/>
-            <a:ext cx="82296" cy="82296"/>
-          </a:xfrm>
-          <a:prstGeom prst="ellipse">
-            <a:avLst/>
-          </a:prstGeom>
-          <a:solidFill>
-            <a:srgbClr val="15803D"/>
-          </a:solidFill>
-          <a:ln w="12700">
-            <a:solidFill>
-              <a:srgbClr val="15803D"/>
-            </a:solidFill>
-            <a:prstDash val="solid"/>
-          </a:ln>
-        </p:spPr>
-      </p:sp>
-      <p:sp>
-        <p:nvSpPr>
-          <p:cNvPr id="10" name="Text 8"/>
-          <p:cNvSpPr/>
-          <p:nvPr/>
-        </p:nvSpPr>
-        <p:spPr>
-          <a:xfrm>
-            <a:off x="1024128" y="2084832"/>
-            <a:ext cx="7360920" cy="530352"/>
-          </a:xfrm>
-          <a:prstGeom prst="rect">
-            <a:avLst/>
-          </a:prstGeom>
-          <a:noFill/>
-          <a:ln/>
-        </p:spPr>
-        <p:txBody>
-          <a:bodyPr wrap="square" lIns="254" tIns="254" rIns="254" bIns="254" rtlCol="0" anchor="t">
-            <a:normAutofit/>
-          </a:bodyPr>
-          <a:lstStyle/>
-          <a:p>
-            <a:pPr marL="0" indent="0">
-              <a:buNone/>
-            </a:pPr>
-            <a:r>
-              <a:rPr lang="en-US" sz="1640" dirty="0">
-                <a:solidFill>
-                  <a:srgbClr val="17212B"/>
-                </a:solidFill>
-                <a:latin typeface="Malgun Gothic" pitchFamily="34" charset="0"/>
-                <a:ea typeface="Malgun Gothic" pitchFamily="34" charset="-122"/>
-                <a:cs typeface="Malgun Gothic" pitchFamily="34" charset="-120"/>
-              </a:rPr>
-              <a:t>A Thousand Instances: GPU에는 공유 모델과 인스턴스 데이터를 따로 보낸다.</a:t>
-            </a:r>
-            <a:endParaRPr lang="en-US" sz="1640" dirty="0"/>
-          </a:p>
-        </p:txBody>
-      </p:sp>
-      <p:sp>
-        <p:nvSpPr>
-          <p:cNvPr id="11" name="Shape 9"/>
-          <p:cNvSpPr/>
-          <p:nvPr/>
-        </p:nvSpPr>
-        <p:spPr>
-          <a:xfrm>
-            <a:off x="822960" y="2916936"/>
-            <a:ext cx="82296" cy="82296"/>
-          </a:xfrm>
-          <a:prstGeom prst="ellipse">
-            <a:avLst/>
-          </a:prstGeom>
-          <a:solidFill>
-            <a:srgbClr val="15803D"/>
-          </a:solidFill>
-          <a:ln w="12700">
-            <a:solidFill>
-              <a:srgbClr val="15803D"/>
-            </a:solidFill>
-            <a:prstDash val="solid"/>
-          </a:ln>
-        </p:spPr>
-      </p:sp>
-      <p:sp>
-        <p:nvSpPr>
-          <p:cNvPr id="12" name="Text 10"/>
-          <p:cNvSpPr/>
-          <p:nvPr/>
-        </p:nvSpPr>
-        <p:spPr>
-          <a:xfrm>
-            <a:off x="1024128" y="2816352"/>
-            <a:ext cx="7360920" cy="530352"/>
-          </a:xfrm>
-          <a:prstGeom prst="rect">
-            <a:avLst/>
-          </a:prstGeom>
-          <a:noFill/>
-          <a:ln/>
-        </p:spPr>
-        <p:txBody>
-          <a:bodyPr wrap="square" lIns="254" tIns="254" rIns="254" bIns="254" rtlCol="0" anchor="t">
-            <a:normAutofit/>
-          </a:bodyPr>
-          <a:lstStyle/>
-          <a:p>
-            <a:pPr marL="0" indent="0">
-              <a:buNone/>
-            </a:pPr>
-            <a:r>
-              <a:rPr lang="en-US" sz="1640" dirty="0">
-                <a:solidFill>
-                  <a:srgbClr val="17212B"/>
-                </a:solidFill>
-                <a:latin typeface="Malgun Gothic" pitchFamily="34" charset="0"/>
-                <a:ea typeface="Malgun Gothic" pitchFamily="34" charset="-122"/>
-                <a:cs typeface="Malgun Gothic" pitchFamily="34" charset="-120"/>
-              </a:rPr>
-              <a:t>The Flyweight Pattern: 공통 상태와 개별 상태를 분리한다.</a:t>
-            </a:r>
-            <a:endParaRPr lang="en-US" sz="1640" dirty="0"/>
-          </a:p>
-        </p:txBody>
-      </p:sp>
-      <p:sp>
-        <p:nvSpPr>
-          <p:cNvPr id="13" name="Shape 11"/>
-          <p:cNvSpPr/>
-          <p:nvPr/>
-        </p:nvSpPr>
-        <p:spPr>
-          <a:xfrm>
-            <a:off x="822960" y="3648456"/>
-            <a:ext cx="82296" cy="82296"/>
-          </a:xfrm>
-          <a:prstGeom prst="ellipse">
-            <a:avLst/>
-          </a:prstGeom>
-          <a:solidFill>
-            <a:srgbClr val="15803D"/>
-          </a:solidFill>
-          <a:ln w="12700">
-            <a:solidFill>
-              <a:srgbClr val="15803D"/>
-            </a:solidFill>
-            <a:prstDash val="solid"/>
-          </a:ln>
-        </p:spPr>
-      </p:sp>
-      <p:sp>
-        <p:nvSpPr>
-          <p:cNvPr id="14" name="Text 12"/>
-          <p:cNvSpPr/>
-          <p:nvPr/>
-        </p:nvSpPr>
-        <p:spPr>
-          <a:xfrm>
-            <a:off x="1024128" y="3547872"/>
-            <a:ext cx="7360920" cy="530352"/>
-          </a:xfrm>
-          <a:prstGeom prst="rect">
-            <a:avLst/>
-          </a:prstGeom>
-          <a:noFill/>
-          <a:ln/>
-        </p:spPr>
-        <p:txBody>
-          <a:bodyPr wrap="square" lIns="254" tIns="254" rIns="254" bIns="254" rtlCol="0" anchor="t">
-            <a:normAutofit/>
-          </a:bodyPr>
-          <a:lstStyle/>
-          <a:p>
-            <a:pPr marL="0" indent="0">
-              <a:buNone/>
-            </a:pPr>
-            <a:r>
-              <a:rPr lang="en-US" sz="1640" dirty="0">
-                <a:solidFill>
-                  <a:srgbClr val="17212B"/>
-                </a:solidFill>
-                <a:latin typeface="Malgun Gothic" pitchFamily="34" charset="0"/>
-                <a:ea typeface="Malgun Gothic" pitchFamily="34" charset="-122"/>
-                <a:cs typeface="Malgun Gothic" pitchFamily="34" charset="-120"/>
-              </a:rPr>
-              <a:t>A Place To Put Down Roots: 타일 지형을 enum 대신 공유 객체로 표현한다.</a:t>
-            </a:r>
-            <a:endParaRPr lang="en-US" sz="1640" dirty="0"/>
-          </a:p>
-        </p:txBody>
-      </p:sp>
-    </p:spTree>
-  </p:cSld>
-  <p:clrMapOvr>
-    <a:masterClrMapping/>
-  </p:clrMapOvr>
-</p:sld>
-</file>
-
-<file path=ppt/slides/slide30.xml><?xml version="1.0" encoding="utf-8"?>
+<file path=ppt/slides/slide28.xml><?xml version="1.0" encoding="utf-8"?>
 <p:sld xmlns:a="http://schemas.openxmlformats.org/drawingml/2006/main" xmlns:r="http://schemas.openxmlformats.org/officeDocument/2006/relationships" xmlns:p="http://schemas.openxmlformats.org/presentationml/2006/main">
   <p:cSld name="Slide 30">
     <p:bg>
@@ -16410,7 +14674,7 @@
               <a:buNone/>
             </a:pPr>
             <a:r>
-              <a:rPr lang="en-US" sz="700" dirty="0">
+              <a:rPr lang="en-US" sz="700">
                 <a:solidFill>
                   <a:srgbClr val="9F968C"/>
                 </a:solidFill>
@@ -16418,7 +14682,7 @@
                 <a:ea typeface="Aptos" pitchFamily="34" charset="-122"/>
                 <a:cs typeface="Aptos" pitchFamily="34" charset="-120"/>
               </a:rPr>
-              <a:t>30</a:t>
+              <a:t>28</a:t>
             </a:r>
             <a:endParaRPr lang="en-US" sz="700" dirty="0"/>
           </a:p>
@@ -17131,7 +15395,7 @@
 </p:sld>
 </file>
 
-<file path=ppt/slides/slide31.xml><?xml version="1.0" encoding="utf-8"?>
+<file path=ppt/slides/slide29.xml><?xml version="1.0" encoding="utf-8"?>
 <p:sld xmlns:a="http://schemas.openxmlformats.org/drawingml/2006/main" xmlns:r="http://schemas.openxmlformats.org/officeDocument/2006/relationships" xmlns:p="http://schemas.openxmlformats.org/presentationml/2006/main">
   <p:cSld name="Slide 31">
     <p:bg>
@@ -17231,7 +15495,7 @@
               <a:buNone/>
             </a:pPr>
             <a:r>
-              <a:rPr lang="en-US" sz="700" dirty="0">
+              <a:rPr lang="en-US" sz="700">
                 <a:solidFill>
                   <a:srgbClr val="9F968C"/>
                 </a:solidFill>
@@ -17239,7 +15503,7 @@
                 <a:ea typeface="Aptos" pitchFamily="34" charset="-122"/>
                 <a:cs typeface="Aptos" pitchFamily="34" charset="-120"/>
               </a:rPr>
-              <a:t>31</a:t>
+              <a:t>29</a:t>
             </a:r>
             <a:endParaRPr lang="en-US" sz="700" dirty="0"/>
           </a:p>
@@ -17660,7 +15924,459 @@
 </p:sld>
 </file>
 
-<file path=ppt/slides/slide32.xml><?xml version="1.0" encoding="utf-8"?>
+<file path=ppt/slides/slide3.xml><?xml version="1.0" encoding="utf-8"?>
+<p:sld xmlns:a="http://schemas.openxmlformats.org/drawingml/2006/main" xmlns:r="http://schemas.openxmlformats.org/officeDocument/2006/relationships" xmlns:p="http://schemas.openxmlformats.org/presentationml/2006/main">
+  <p:cSld name="Slide 5">
+    <p:bg>
+      <p:bgPr>
+        <a:solidFill>
+          <a:srgbClr val="FAF7EF"/>
+        </a:solidFill>
+        <a:effectLst/>
+      </p:bgPr>
+    </p:bg>
+    <p:spTree>
+      <p:nvGrpSpPr>
+        <p:cNvPr id="1" name=""/>
+        <p:cNvGrpSpPr/>
+        <p:nvPr/>
+      </p:nvGrpSpPr>
+      <p:grpSpPr>
+        <a:xfrm>
+          <a:off x="0" y="0"/>
+          <a:ext cx="0" cy="0"/>
+          <a:chOff x="0" y="0"/>
+          <a:chExt cx="0" cy="0"/>
+        </a:xfrm>
+      </p:grpSpPr>
+      <p:sp>
+        <p:nvSpPr>
+          <p:cNvPr id="2" name="Shape 0"/>
+          <p:cNvSpPr/>
+          <p:nvPr/>
+        </p:nvSpPr>
+        <p:spPr>
+          <a:xfrm>
+            <a:off x="0" y="0"/>
+            <a:ext cx="9144000" cy="5715000"/>
+          </a:xfrm>
+          <a:prstGeom prst="rect">
+            <a:avLst/>
+          </a:prstGeom>
+          <a:solidFill>
+            <a:srgbClr val="FAF7EF"/>
+          </a:solidFill>
+          <a:ln w="12700">
+            <a:solidFill>
+              <a:srgbClr val="FAF7EF"/>
+            </a:solidFill>
+            <a:prstDash val="solid"/>
+          </a:ln>
+        </p:spPr>
+      </p:sp>
+      <p:sp>
+        <p:nvSpPr>
+          <p:cNvPr id="3" name="Shape 1"/>
+          <p:cNvSpPr/>
+          <p:nvPr/>
+        </p:nvSpPr>
+        <p:spPr>
+          <a:xfrm>
+            <a:off x="0" y="0"/>
+            <a:ext cx="118872" cy="5715000"/>
+          </a:xfrm>
+          <a:prstGeom prst="rect">
+            <a:avLst/>
+          </a:prstGeom>
+          <a:solidFill>
+            <a:srgbClr val="F59E0B"/>
+          </a:solidFill>
+          <a:ln w="12700">
+            <a:solidFill>
+              <a:srgbClr val="F59E0B"/>
+            </a:solidFill>
+            <a:prstDash val="solid"/>
+          </a:ln>
+        </p:spPr>
+      </p:sp>
+      <p:sp>
+        <p:nvSpPr>
+          <p:cNvPr id="4" name="Text 2"/>
+          <p:cNvSpPr/>
+          <p:nvPr/>
+        </p:nvSpPr>
+        <p:spPr>
+          <a:xfrm>
+            <a:off x="8549640" y="5358384"/>
+            <a:ext cx="310896" cy="146304"/>
+          </a:xfrm>
+          <a:prstGeom prst="rect">
+            <a:avLst/>
+          </a:prstGeom>
+          <a:noFill/>
+          <a:ln/>
+        </p:spPr>
+        <p:txBody>
+          <a:bodyPr wrap="square" lIns="0" tIns="0" rIns="0" bIns="0" rtlCol="0" anchor="ctr"/>
+          <a:lstStyle/>
+          <a:p>
+            <a:pPr marL="0" indent="0" algn="r">
+              <a:buNone/>
+            </a:pPr>
+            <a:r>
+              <a:rPr lang="en-US" sz="700">
+                <a:solidFill>
+                  <a:srgbClr val="9F968C"/>
+                </a:solidFill>
+                <a:latin typeface="Aptos" pitchFamily="34" charset="0"/>
+                <a:ea typeface="Aptos" pitchFamily="34" charset="-122"/>
+                <a:cs typeface="Aptos" pitchFamily="34" charset="-120"/>
+              </a:rPr>
+              <a:t>03</a:t>
+            </a:r>
+            <a:endParaRPr lang="en-US" sz="700" dirty="0"/>
+          </a:p>
+        </p:txBody>
+      </p:sp>
+      <p:sp>
+        <p:nvSpPr>
+          <p:cNvPr id="5" name="Text 3"/>
+          <p:cNvSpPr/>
+          <p:nvPr/>
+        </p:nvSpPr>
+        <p:spPr>
+          <a:xfrm>
+            <a:off x="594360" y="5340096"/>
+            <a:ext cx="4663440" cy="164592"/>
+          </a:xfrm>
+          <a:prstGeom prst="rect">
+            <a:avLst/>
+          </a:prstGeom>
+          <a:noFill/>
+          <a:ln/>
+        </p:spPr>
+        <p:txBody>
+          <a:bodyPr wrap="square" lIns="0" tIns="0" rIns="0" bIns="0" rtlCol="0" anchor="ctr"/>
+          <a:lstStyle/>
+          <a:p>
+            <a:pPr marL="0" indent="0">
+              <a:buNone/>
+            </a:pPr>
+            <a:r>
+              <a:rPr lang="en-US" sz="700" dirty="0">
+                <a:solidFill>
+                  <a:srgbClr val="9F968C"/>
+                </a:solidFill>
+                <a:latin typeface="Malgun Gothic" pitchFamily="34" charset="0"/>
+                <a:ea typeface="Malgun Gothic" pitchFamily="34" charset="-122"/>
+                <a:cs typeface="Malgun Gothic" pitchFamily="34" charset="-120"/>
+              </a:rPr>
+              <a:t>Game Programming Patterns - Flyweight | Unity/C#</a:t>
+            </a:r>
+            <a:endParaRPr lang="en-US" sz="700" dirty="0"/>
+          </a:p>
+        </p:txBody>
+      </p:sp>
+      <p:sp>
+        <p:nvSpPr>
+          <p:cNvPr id="6" name="Text 4"/>
+          <p:cNvSpPr/>
+          <p:nvPr/>
+        </p:nvSpPr>
+        <p:spPr>
+          <a:xfrm>
+            <a:off x="594360" y="347472"/>
+            <a:ext cx="8046720" cy="420624"/>
+          </a:xfrm>
+          <a:prstGeom prst="rect">
+            <a:avLst/>
+          </a:prstGeom>
+          <a:noFill/>
+          <a:ln/>
+        </p:spPr>
+        <p:txBody>
+          <a:bodyPr wrap="square" lIns="0" tIns="0" rIns="0" bIns="0" rtlCol="0" anchor="ctr">
+            <a:normAutofit/>
+          </a:bodyPr>
+          <a:lstStyle/>
+          <a:p>
+            <a:pPr marL="0" indent="0">
+              <a:buNone/>
+            </a:pPr>
+            <a:r>
+              <a:rPr lang="en-US" sz="2500" b="1" dirty="0">
+                <a:solidFill>
+                  <a:srgbClr val="17212B"/>
+                </a:solidFill>
+                <a:latin typeface="Malgun Gothic" pitchFamily="34" charset="0"/>
+                <a:ea typeface="Malgun Gothic" pitchFamily="34" charset="-122"/>
+                <a:cs typeface="Malgun Gothic" pitchFamily="34" charset="-120"/>
+              </a:rPr>
+              <a:t>문제 출발점</a:t>
+            </a:r>
+            <a:endParaRPr lang="en-US" sz="2500" dirty="0"/>
+          </a:p>
+        </p:txBody>
+      </p:sp>
+      <p:sp>
+        <p:nvSpPr>
+          <p:cNvPr id="7" name="Text 5"/>
+          <p:cNvSpPr/>
+          <p:nvPr/>
+        </p:nvSpPr>
+        <p:spPr>
+          <a:xfrm>
+            <a:off x="685800" y="1353312"/>
+            <a:ext cx="7635240" cy="914400"/>
+          </a:xfrm>
+          <a:prstGeom prst="rect">
+            <a:avLst/>
+          </a:prstGeom>
+          <a:noFill/>
+          <a:ln/>
+        </p:spPr>
+        <p:txBody>
+          <a:bodyPr wrap="square" lIns="254" tIns="254" rIns="254" bIns="254" rtlCol="0" anchor="ctr">
+            <a:normAutofit/>
+          </a:bodyPr>
+          <a:lstStyle/>
+          <a:p>
+            <a:pPr marL="0" indent="0">
+              <a:buNone/>
+            </a:pPr>
+            <a:r>
+              <a:rPr lang="en-US" sz="3000" b="1" dirty="0">
+                <a:solidFill>
+                  <a:srgbClr val="E45745"/>
+                </a:solidFill>
+                <a:latin typeface="Malgun Gothic" pitchFamily="34" charset="0"/>
+                <a:ea typeface="Malgun Gothic" pitchFamily="34" charset="-122"/>
+                <a:cs typeface="Malgun Gothic" pitchFamily="34" charset="-120"/>
+              </a:rPr>
+              <a:t>숲을 만들고 싶은데, 나무 하나하나가 너무 무겁다</a:t>
+            </a:r>
+            <a:endParaRPr lang="en-US" sz="3000" dirty="0"/>
+          </a:p>
+        </p:txBody>
+      </p:sp>
+      <p:sp>
+        <p:nvSpPr>
+          <p:cNvPr id="8" name="Shape 6"/>
+          <p:cNvSpPr/>
+          <p:nvPr/>
+        </p:nvSpPr>
+        <p:spPr>
+          <a:xfrm>
+            <a:off x="822960" y="2953512"/>
+            <a:ext cx="82296" cy="82296"/>
+          </a:xfrm>
+          <a:prstGeom prst="ellipse">
+            <a:avLst/>
+          </a:prstGeom>
+          <a:solidFill>
+            <a:srgbClr val="E45745"/>
+          </a:solidFill>
+          <a:ln w="12700">
+            <a:solidFill>
+              <a:srgbClr val="E45745"/>
+            </a:solidFill>
+            <a:prstDash val="solid"/>
+          </a:ln>
+        </p:spPr>
+      </p:sp>
+      <p:sp>
+        <p:nvSpPr>
+          <p:cNvPr id="9" name="Text 7"/>
+          <p:cNvSpPr/>
+          <p:nvPr/>
+        </p:nvSpPr>
+        <p:spPr>
+          <a:xfrm>
+            <a:off x="1024128" y="2852928"/>
+            <a:ext cx="7406640" cy="365760"/>
+          </a:xfrm>
+          <a:prstGeom prst="rect">
+            <a:avLst/>
+          </a:prstGeom>
+          <a:noFill/>
+          <a:ln/>
+        </p:spPr>
+        <p:txBody>
+          <a:bodyPr wrap="square" lIns="254" tIns="254" rIns="254" bIns="254" rtlCol="0" anchor="t">
+            <a:normAutofit/>
+          </a:bodyPr>
+          <a:lstStyle/>
+          <a:p>
+            <a:pPr marL="0" indent="0">
+              <a:buNone/>
+            </a:pPr>
+            <a:r>
+              <a:rPr lang="en-US" sz="1700" dirty="0">
+                <a:solidFill>
+                  <a:srgbClr val="17212B"/>
+                </a:solidFill>
+                <a:latin typeface="Malgun Gothic" pitchFamily="34" charset="0"/>
+                <a:ea typeface="Malgun Gothic" pitchFamily="34" charset="-122"/>
+                <a:cs typeface="Malgun Gothic" pitchFamily="34" charset="-120"/>
+              </a:rPr>
+              <a:t>각 나무가 Mesh, Texture, 위치, 크기, 색을 모두 가진다.</a:t>
+            </a:r>
+            <a:endParaRPr lang="en-US" sz="1700" dirty="0"/>
+          </a:p>
+        </p:txBody>
+      </p:sp>
+      <p:sp>
+        <p:nvSpPr>
+          <p:cNvPr id="10" name="Shape 8"/>
+          <p:cNvSpPr/>
+          <p:nvPr/>
+        </p:nvSpPr>
+        <p:spPr>
+          <a:xfrm>
+            <a:off x="822960" y="3502152"/>
+            <a:ext cx="82296" cy="82296"/>
+          </a:xfrm>
+          <a:prstGeom prst="ellipse">
+            <a:avLst/>
+          </a:prstGeom>
+          <a:solidFill>
+            <a:srgbClr val="E45745"/>
+          </a:solidFill>
+          <a:ln w="12700">
+            <a:solidFill>
+              <a:srgbClr val="E45745"/>
+            </a:solidFill>
+            <a:prstDash val="solid"/>
+          </a:ln>
+        </p:spPr>
+      </p:sp>
+      <p:sp>
+        <p:nvSpPr>
+          <p:cNvPr id="11" name="Text 9"/>
+          <p:cNvSpPr/>
+          <p:nvPr/>
+        </p:nvSpPr>
+        <p:spPr>
+          <a:xfrm>
+            <a:off x="1024128" y="3401568"/>
+            <a:ext cx="7406640" cy="365760"/>
+          </a:xfrm>
+          <a:prstGeom prst="rect">
+            <a:avLst/>
+          </a:prstGeom>
+          <a:noFill/>
+          <a:ln/>
+        </p:spPr>
+        <p:txBody>
+          <a:bodyPr wrap="square" lIns="254" tIns="254" rIns="254" bIns="254" rtlCol="0" anchor="t">
+            <a:normAutofit/>
+          </a:bodyPr>
+          <a:lstStyle/>
+          <a:p>
+            <a:pPr marL="0" indent="0">
+              <a:buNone/>
+            </a:pPr>
+            <a:r>
+              <a:rPr lang="en-US" sz="1700" dirty="0">
+                <a:solidFill>
+                  <a:srgbClr val="17212B"/>
+                </a:solidFill>
+                <a:latin typeface="Malgun Gothic" pitchFamily="34" charset="0"/>
+                <a:ea typeface="Malgun Gothic" pitchFamily="34" charset="-122"/>
+                <a:cs typeface="Malgun Gothic" pitchFamily="34" charset="-120"/>
+              </a:rPr>
+              <a:t>수천 개의 나무가 있으면 메모리와 렌더링 비용이 커진다.</a:t>
+            </a:r>
+            <a:endParaRPr lang="en-US" sz="1700" dirty="0"/>
+          </a:p>
+        </p:txBody>
+      </p:sp>
+      <p:sp>
+        <p:nvSpPr>
+          <p:cNvPr id="12" name="Shape 10"/>
+          <p:cNvSpPr/>
+          <p:nvPr/>
+        </p:nvSpPr>
+        <p:spPr>
+          <a:xfrm>
+            <a:off x="822960" y="4050792"/>
+            <a:ext cx="82296" cy="82296"/>
+          </a:xfrm>
+          <a:prstGeom prst="ellipse">
+            <a:avLst/>
+          </a:prstGeom>
+          <a:solidFill>
+            <a:srgbClr val="E45745"/>
+          </a:solidFill>
+          <a:ln w="12700">
+            <a:solidFill>
+              <a:srgbClr val="E45745"/>
+            </a:solidFill>
+            <a:prstDash val="solid"/>
+          </a:ln>
+        </p:spPr>
+      </p:sp>
+      <p:sp>
+        <p:nvSpPr>
+          <p:cNvPr id="13" name="Text 11"/>
+          <p:cNvSpPr/>
+          <p:nvPr/>
+        </p:nvSpPr>
+        <p:spPr>
+          <a:xfrm>
+            <a:off x="1024128" y="3950208"/>
+            <a:ext cx="7406640" cy="365760"/>
+          </a:xfrm>
+          <a:prstGeom prst="rect">
+            <a:avLst/>
+          </a:prstGeom>
+          <a:noFill/>
+          <a:ln/>
+        </p:spPr>
+        <p:txBody>
+          <a:bodyPr wrap="square" lIns="254" tIns="254" rIns="254" bIns="254" rtlCol="0" anchor="t">
+            <a:normAutofit/>
+          </a:bodyPr>
+          <a:lstStyle/>
+          <a:p>
+            <a:pPr marL="0" indent="0">
+              <a:buNone/>
+            </a:pPr>
+            <a:r>
+              <a:rPr lang="ko-KR" altLang="en-US" sz="1700">
+                <a:solidFill>
+                  <a:srgbClr val="17212B"/>
+                </a:solidFill>
+                <a:latin typeface="Malgun Gothic" pitchFamily="34" charset="0"/>
+                <a:ea typeface="Malgun Gothic" pitchFamily="34" charset="-122"/>
+                <a:cs typeface="Malgun Gothic" pitchFamily="34" charset="-120"/>
+              </a:rPr>
+              <a:t>하지만 대부분의 나무는 같은 모델과 텍스처를 공유할 수 있다</a:t>
+            </a:r>
+            <a:r>
+              <a:rPr lang="en-US" altLang="ko-KR" sz="1700">
+                <a:solidFill>
+                  <a:srgbClr val="17212B"/>
+                </a:solidFill>
+                <a:latin typeface="Malgun Gothic" pitchFamily="34" charset="0"/>
+                <a:ea typeface="Malgun Gothic" pitchFamily="34" charset="-122"/>
+                <a:cs typeface="Malgun Gothic" pitchFamily="34" charset="-120"/>
+              </a:rPr>
+              <a:t>.</a:t>
+            </a:r>
+            <a:endParaRPr lang="en-US" sz="1700" dirty="0"/>
+          </a:p>
+        </p:txBody>
+      </p:sp>
+    </p:spTree>
+  </p:cSld>
+  <p:clrMapOvr>
+    <a:masterClrMapping/>
+  </p:clrMapOvr>
+</p:sld>
+</file>
+
+<file path=ppt/slides/slide30.xml><?xml version="1.0" encoding="utf-8"?>
 <p:sld xmlns:a="http://schemas.openxmlformats.org/drawingml/2006/main" xmlns:r="http://schemas.openxmlformats.org/officeDocument/2006/relationships" xmlns:p="http://schemas.openxmlformats.org/presentationml/2006/main">
   <p:cSld name="Slide 32">
     <p:bg>
@@ -17760,7 +16476,7 @@
               <a:buNone/>
             </a:pPr>
             <a:r>
-              <a:rPr lang="en-US" sz="700" dirty="0">
+              <a:rPr lang="en-US" sz="700">
                 <a:solidFill>
                   <a:srgbClr val="9F968C"/>
                 </a:solidFill>
@@ -17768,7 +16484,7 @@
                 <a:ea typeface="Aptos" pitchFamily="34" charset="-122"/>
                 <a:cs typeface="Aptos" pitchFamily="34" charset="-120"/>
               </a:rPr>
-              <a:t>32</a:t>
+              <a:t>30</a:t>
             </a:r>
             <a:endParaRPr lang="en-US" sz="700" dirty="0"/>
           </a:p>
@@ -18189,7 +16905,7 @@
 </p:sld>
 </file>
 
-<file path=ppt/slides/slide33.xml><?xml version="1.0" encoding="utf-8"?>
+<file path=ppt/slides/slide31.xml><?xml version="1.0" encoding="utf-8"?>
 <p:sld xmlns:a="http://schemas.openxmlformats.org/drawingml/2006/main" xmlns:r="http://schemas.openxmlformats.org/officeDocument/2006/relationships" xmlns:p="http://schemas.openxmlformats.org/presentationml/2006/main">
   <p:cSld name="Slide 33">
     <p:bg>
@@ -18289,7 +17005,7 @@
               <a:buNone/>
             </a:pPr>
             <a:r>
-              <a:rPr lang="en-US" sz="700" dirty="0">
+              <a:rPr lang="en-US" sz="700">
                 <a:solidFill>
                   <a:srgbClr val="9F968C"/>
                 </a:solidFill>
@@ -18297,7 +17013,7 @@
                 <a:ea typeface="Aptos" pitchFamily="34" charset="-122"/>
                 <a:cs typeface="Aptos" pitchFamily="34" charset="-120"/>
               </a:rPr>
-              <a:t>33</a:t>
+              <a:t>31</a:t>
             </a:r>
             <a:endParaRPr lang="en-US" sz="700" dirty="0"/>
           </a:p>
@@ -18718,7 +17434,7 @@
 </p:sld>
 </file>
 
-<file path=ppt/slides/slide34.xml><?xml version="1.0" encoding="utf-8"?>
+<file path=ppt/slides/slide32.xml><?xml version="1.0" encoding="utf-8"?>
 <p:sld xmlns:a="http://schemas.openxmlformats.org/drawingml/2006/main" xmlns:r="http://schemas.openxmlformats.org/officeDocument/2006/relationships" xmlns:p="http://schemas.openxmlformats.org/presentationml/2006/main">
   <p:cSld name="Slide 34">
     <p:bg>
@@ -18818,7 +17534,7 @@
               <a:buNone/>
             </a:pPr>
             <a:r>
-              <a:rPr lang="en-US" sz="700" dirty="0">
+              <a:rPr lang="en-US" sz="700">
                 <a:solidFill>
                   <a:srgbClr val="9F968C"/>
                 </a:solidFill>
@@ -18826,7 +17542,7 @@
                 <a:ea typeface="Aptos" pitchFamily="34" charset="-122"/>
                 <a:cs typeface="Aptos" pitchFamily="34" charset="-120"/>
               </a:rPr>
-              <a:t>34</a:t>
+              <a:t>32</a:t>
             </a:r>
             <a:endParaRPr lang="en-US" sz="700" dirty="0"/>
           </a:p>
@@ -19093,7 +17809,7 @@
               <a:buNone/>
             </a:pPr>
             <a:r>
-              <a:rPr lang="en-US" sz="1530" dirty="0">
+              <a:rPr lang="en-US" altLang="ko-KR" sz="1530">
                 <a:solidFill>
                   <a:srgbClr val="17212B"/>
                 </a:solidFill>
@@ -19101,7 +17817,29 @@
                 <a:ea typeface="Malgun Gothic" pitchFamily="34" charset="-122"/>
                 <a:cs typeface="Malgun Gothic" pitchFamily="34" charset="-120"/>
               </a:rPr>
-              <a:t>TerrainType에 좌표나 개별 타일 상태가 들어가지 않는다.</a:t>
+              <a:t>TerrainType</a:t>
+            </a:r>
+            <a:r>
+              <a:rPr lang="ko-KR" altLang="en-US" sz="1530">
+                <a:solidFill>
+                  <a:srgbClr val="17212B"/>
+                </a:solidFill>
+                <a:latin typeface="Malgun Gothic" pitchFamily="34" charset="0"/>
+                <a:ea typeface="Malgun Gothic" pitchFamily="34" charset="-122"/>
+                <a:cs typeface="Malgun Gothic" pitchFamily="34" charset="-120"/>
+              </a:rPr>
+              <a:t>에 좌표나 개별 타일 상태가 포함되지 않는다</a:t>
+            </a:r>
+            <a:r>
+              <a:rPr lang="en-US" altLang="ko-KR" sz="1530">
+                <a:solidFill>
+                  <a:srgbClr val="17212B"/>
+                </a:solidFill>
+                <a:latin typeface="Malgun Gothic" pitchFamily="34" charset="0"/>
+                <a:ea typeface="Malgun Gothic" pitchFamily="34" charset="-122"/>
+                <a:cs typeface="Malgun Gothic" pitchFamily="34" charset="-120"/>
+              </a:rPr>
+              <a:t>.</a:t>
             </a:r>
             <a:endParaRPr lang="en-US" sz="1530" dirty="0"/>
           </a:p>
@@ -19247,7 +17985,7 @@
 </p:sld>
 </file>
 
-<file path=ppt/slides/slide35.xml><?xml version="1.0" encoding="utf-8"?>
+<file path=ppt/slides/slide33.xml><?xml version="1.0" encoding="utf-8"?>
 <p:sld xmlns:a="http://schemas.openxmlformats.org/drawingml/2006/main" xmlns:r="http://schemas.openxmlformats.org/officeDocument/2006/relationships" xmlns:p="http://schemas.openxmlformats.org/presentationml/2006/main">
   <p:cSld name="Slide 35">
     <p:bg>
@@ -19347,7 +18085,7 @@
               <a:buNone/>
             </a:pPr>
             <a:r>
-              <a:rPr lang="en-US" sz="700" dirty="0">
+              <a:rPr lang="en-US" sz="700">
                 <a:solidFill>
                   <a:srgbClr val="9F968C"/>
                 </a:solidFill>
@@ -19355,7 +18093,7 @@
                 <a:ea typeface="Aptos" pitchFamily="34" charset="-122"/>
                 <a:cs typeface="Aptos" pitchFamily="34" charset="-120"/>
               </a:rPr>
-              <a:t>35</a:t>
+              <a:t>33</a:t>
             </a:r>
             <a:endParaRPr lang="en-US" sz="700" dirty="0"/>
           </a:p>
@@ -19776,7 +18514,7 @@
 </p:sld>
 </file>
 
-<file path=ppt/slides/slide36.xml><?xml version="1.0" encoding="utf-8"?>
+<file path=ppt/slides/slide34.xml><?xml version="1.0" encoding="utf-8"?>
 <p:sld xmlns:a="http://schemas.openxmlformats.org/drawingml/2006/main" xmlns:r="http://schemas.openxmlformats.org/officeDocument/2006/relationships" xmlns:p="http://schemas.openxmlformats.org/presentationml/2006/main">
   <p:cSld name="Slide 36">
     <p:bg>
@@ -19876,7 +18614,7 @@
               <a:buNone/>
             </a:pPr>
             <a:r>
-              <a:rPr lang="en-US" sz="700" dirty="0">
+              <a:rPr lang="en-US" sz="700">
                 <a:solidFill>
                   <a:srgbClr val="9F968C"/>
                 </a:solidFill>
@@ -19884,7 +18622,7 @@
                 <a:ea typeface="Aptos" pitchFamily="34" charset="-122"/>
                 <a:cs typeface="Aptos" pitchFamily="34" charset="-120"/>
               </a:rPr>
-              <a:t>36</a:t>
+              <a:t>34</a:t>
             </a:r>
             <a:endParaRPr lang="en-US" sz="700" dirty="0"/>
           </a:p>
@@ -19997,7 +18735,7 @@
               <a:buNone/>
             </a:pPr>
             <a:r>
-              <a:rPr lang="en-US" sz="3000" b="1" dirty="0">
+              <a:rPr lang="en-US" altLang="ko-KR" sz="3000" b="1">
                 <a:solidFill>
                   <a:srgbClr val="15803D"/>
                 </a:solidFill>
@@ -20005,7 +18743,62 @@
                 <a:ea typeface="Malgun Gothic" pitchFamily="34" charset="-122"/>
                 <a:cs typeface="Malgun Gothic" pitchFamily="34" charset="-120"/>
               </a:rPr>
-              <a:t>Flyweight는 '같은 것을 계속 들고 있지 말고 공유하자'는 패턴이다</a:t>
+              <a:t>Flyweight</a:t>
+            </a:r>
+            <a:r>
+              <a:rPr lang="ko-KR" altLang="en-US" sz="3000" b="1">
+                <a:solidFill>
+                  <a:srgbClr val="15803D"/>
+                </a:solidFill>
+                <a:latin typeface="Malgun Gothic" pitchFamily="34" charset="0"/>
+                <a:ea typeface="Malgun Gothic" pitchFamily="34" charset="-122"/>
+                <a:cs typeface="Malgun Gothic" pitchFamily="34" charset="-120"/>
+              </a:rPr>
+              <a:t>는 </a:t>
+            </a:r>
+            <a:r>
+              <a:rPr lang="en-US" altLang="ko-KR" sz="3000" b="1">
+                <a:solidFill>
+                  <a:srgbClr val="15803D"/>
+                </a:solidFill>
+                <a:latin typeface="Malgun Gothic" pitchFamily="34" charset="0"/>
+                <a:ea typeface="Malgun Gothic" pitchFamily="34" charset="-122"/>
+                <a:cs typeface="Malgun Gothic" pitchFamily="34" charset="-120"/>
+              </a:rPr>
+              <a:t>'</a:t>
+            </a:r>
+            <a:r>
+              <a:rPr lang="ko-KR" altLang="en-US" sz="3000" b="1">
+                <a:solidFill>
+                  <a:srgbClr val="15803D"/>
+                </a:solidFill>
+                <a:latin typeface="Malgun Gothic" pitchFamily="34" charset="0"/>
+                <a:ea typeface="Malgun Gothic" pitchFamily="34" charset="-122"/>
+                <a:cs typeface="Malgun Gothic" pitchFamily="34" charset="-120"/>
+              </a:rPr>
+              <a:t>같은 데이터를 중복해 가지지 말고 공유하자</a:t>
+            </a:r>
+            <a:r>
+              <a:rPr lang="en-US" altLang="ko-KR" sz="3000" b="1">
+                <a:solidFill>
+                  <a:srgbClr val="15803D"/>
+                </a:solidFill>
+                <a:latin typeface="Malgun Gothic" pitchFamily="34" charset="0"/>
+                <a:ea typeface="Malgun Gothic" pitchFamily="34" charset="-122"/>
+                <a:cs typeface="Malgun Gothic" pitchFamily="34" charset="-120"/>
+              </a:rPr>
+              <a:t>'</a:t>
+            </a:r>
+            <a:r>
+              <a:rPr lang="ko-KR" altLang="en-US" sz="3000" b="1">
+                <a:solidFill>
+                  <a:srgbClr val="15803D"/>
+                </a:solidFill>
+                <a:latin typeface="Malgun Gothic" pitchFamily="34" charset="0"/>
+                <a:ea typeface="Malgun Gothic" pitchFamily="34" charset="-122"/>
+                <a:cs typeface="Malgun Gothic" pitchFamily="34" charset="-120"/>
+              </a:rPr>
+              <a:t>는 패턴이다</a:t>
             </a:r>
             <a:endParaRPr lang="en-US" sz="3000" dirty="0"/>
           </a:p>
@@ -20251,935 +19044,6 @@
 </file>
 
 <file path=ppt/slides/slide4.xml><?xml version="1.0" encoding="utf-8"?>
-<p:sld xmlns:a="http://schemas.openxmlformats.org/drawingml/2006/main" xmlns:r="http://schemas.openxmlformats.org/officeDocument/2006/relationships" xmlns:p="http://schemas.openxmlformats.org/presentationml/2006/main">
-  <p:cSld name="Slide 4">
-    <p:bg>
-      <p:bgPr>
-        <a:solidFill>
-          <a:srgbClr val="FAF7EF"/>
-        </a:solidFill>
-        <a:effectLst/>
-      </p:bgPr>
-    </p:bg>
-    <p:spTree>
-      <p:nvGrpSpPr>
-        <p:cNvPr id="1" name=""/>
-        <p:cNvGrpSpPr/>
-        <p:nvPr/>
-      </p:nvGrpSpPr>
-      <p:grpSpPr>
-        <a:xfrm>
-          <a:off x="0" y="0"/>
-          <a:ext cx="0" cy="0"/>
-          <a:chOff x="0" y="0"/>
-          <a:chExt cx="0" cy="0"/>
-        </a:xfrm>
-      </p:grpSpPr>
-      <p:sp>
-        <p:nvSpPr>
-          <p:cNvPr id="2" name="Shape 0"/>
-          <p:cNvSpPr/>
-          <p:nvPr/>
-        </p:nvSpPr>
-        <p:spPr>
-          <a:xfrm>
-            <a:off x="0" y="0"/>
-            <a:ext cx="9144000" cy="5715000"/>
-          </a:xfrm>
-          <a:prstGeom prst="rect">
-            <a:avLst/>
-          </a:prstGeom>
-          <a:solidFill>
-            <a:srgbClr val="FAF7EF"/>
-          </a:solidFill>
-          <a:ln w="12700">
-            <a:solidFill>
-              <a:srgbClr val="FAF7EF"/>
-            </a:solidFill>
-            <a:prstDash val="solid"/>
-          </a:ln>
-        </p:spPr>
-      </p:sp>
-      <p:sp>
-        <p:nvSpPr>
-          <p:cNvPr id="3" name="Shape 1"/>
-          <p:cNvSpPr/>
-          <p:nvPr/>
-        </p:nvSpPr>
-        <p:spPr>
-          <a:xfrm>
-            <a:off x="0" y="0"/>
-            <a:ext cx="118872" cy="5715000"/>
-          </a:xfrm>
-          <a:prstGeom prst="rect">
-            <a:avLst/>
-          </a:prstGeom>
-          <a:solidFill>
-            <a:srgbClr val="15803D"/>
-          </a:solidFill>
-          <a:ln w="12700">
-            <a:solidFill>
-              <a:srgbClr val="15803D"/>
-            </a:solidFill>
-            <a:prstDash val="solid"/>
-          </a:ln>
-        </p:spPr>
-      </p:sp>
-      <p:sp>
-        <p:nvSpPr>
-          <p:cNvPr id="4" name="Text 2"/>
-          <p:cNvSpPr/>
-          <p:nvPr/>
-        </p:nvSpPr>
-        <p:spPr>
-          <a:xfrm>
-            <a:off x="8549640" y="5358384"/>
-            <a:ext cx="310896" cy="146304"/>
-          </a:xfrm>
-          <a:prstGeom prst="rect">
-            <a:avLst/>
-          </a:prstGeom>
-          <a:noFill/>
-          <a:ln/>
-        </p:spPr>
-        <p:txBody>
-          <a:bodyPr wrap="square" lIns="0" tIns="0" rIns="0" bIns="0" rtlCol="0" anchor="ctr"/>
-          <a:lstStyle/>
-          <a:p>
-            <a:pPr marL="0" indent="0" algn="r">
-              <a:buNone/>
-            </a:pPr>
-            <a:r>
-              <a:rPr lang="en-US" sz="700" dirty="0">
-                <a:solidFill>
-                  <a:srgbClr val="9F968C"/>
-                </a:solidFill>
-                <a:latin typeface="Aptos" pitchFamily="34" charset="0"/>
-                <a:ea typeface="Aptos" pitchFamily="34" charset="-122"/>
-                <a:cs typeface="Aptos" pitchFamily="34" charset="-120"/>
-              </a:rPr>
-              <a:t>04</a:t>
-            </a:r>
-            <a:endParaRPr lang="en-US" sz="700" dirty="0"/>
-          </a:p>
-        </p:txBody>
-      </p:sp>
-      <p:sp>
-        <p:nvSpPr>
-          <p:cNvPr id="5" name="Text 3"/>
-          <p:cNvSpPr/>
-          <p:nvPr/>
-        </p:nvSpPr>
-        <p:spPr>
-          <a:xfrm>
-            <a:off x="594360" y="5340096"/>
-            <a:ext cx="4663440" cy="164592"/>
-          </a:xfrm>
-          <a:prstGeom prst="rect">
-            <a:avLst/>
-          </a:prstGeom>
-          <a:noFill/>
-          <a:ln/>
-        </p:spPr>
-        <p:txBody>
-          <a:bodyPr wrap="square" lIns="0" tIns="0" rIns="0" bIns="0" rtlCol="0" anchor="ctr"/>
-          <a:lstStyle/>
-          <a:p>
-            <a:pPr marL="0" indent="0">
-              <a:buNone/>
-            </a:pPr>
-            <a:r>
-              <a:rPr lang="en-US" sz="700" dirty="0">
-                <a:solidFill>
-                  <a:srgbClr val="9F968C"/>
-                </a:solidFill>
-                <a:latin typeface="Malgun Gothic" pitchFamily="34" charset="0"/>
-                <a:ea typeface="Malgun Gothic" pitchFamily="34" charset="-122"/>
-                <a:cs typeface="Malgun Gothic" pitchFamily="34" charset="-120"/>
-              </a:rPr>
-              <a:t>Game Programming Patterns - Flyweight | Unity/C#</a:t>
-            </a:r>
-            <a:endParaRPr lang="en-US" sz="700" dirty="0"/>
-          </a:p>
-        </p:txBody>
-      </p:sp>
-      <p:sp>
-        <p:nvSpPr>
-          <p:cNvPr id="6" name="Text 4"/>
-          <p:cNvSpPr/>
-          <p:nvPr/>
-        </p:nvSpPr>
-        <p:spPr>
-          <a:xfrm>
-            <a:off x="594360" y="347472"/>
-            <a:ext cx="8046720" cy="420624"/>
-          </a:xfrm>
-          <a:prstGeom prst="rect">
-            <a:avLst/>
-          </a:prstGeom>
-          <a:noFill/>
-          <a:ln/>
-        </p:spPr>
-        <p:txBody>
-          <a:bodyPr wrap="square" lIns="0" tIns="0" rIns="0" bIns="0" rtlCol="0" anchor="ctr">
-            <a:normAutofit/>
-          </a:bodyPr>
-          <a:lstStyle/>
-          <a:p>
-            <a:pPr marL="0" indent="0">
-              <a:buNone/>
-            </a:pPr>
-            <a:r>
-              <a:rPr lang="en-US" sz="2500" b="1" dirty="0">
-                <a:solidFill>
-                  <a:srgbClr val="17212B"/>
-                </a:solidFill>
-                <a:latin typeface="Malgun Gothic" pitchFamily="34" charset="0"/>
-                <a:ea typeface="Malgun Gothic" pitchFamily="34" charset="-122"/>
-                <a:cs typeface="Malgun Gothic" pitchFamily="34" charset="-120"/>
-              </a:rPr>
-              <a:t>원문 장의 전체 흐름 2</a:t>
-            </a:r>
-            <a:endParaRPr lang="en-US" sz="2500" dirty="0"/>
-          </a:p>
-        </p:txBody>
-      </p:sp>
-      <p:sp>
-        <p:nvSpPr>
-          <p:cNvPr id="7" name="Shape 5"/>
-          <p:cNvSpPr/>
-          <p:nvPr/>
-        </p:nvSpPr>
-        <p:spPr>
-          <a:xfrm>
-            <a:off x="822960" y="1453896"/>
-            <a:ext cx="82296" cy="82296"/>
-          </a:xfrm>
-          <a:prstGeom prst="ellipse">
-            <a:avLst/>
-          </a:prstGeom>
-          <a:solidFill>
-            <a:srgbClr val="15803D"/>
-          </a:solidFill>
-          <a:ln w="12700">
-            <a:solidFill>
-              <a:srgbClr val="15803D"/>
-            </a:solidFill>
-            <a:prstDash val="solid"/>
-          </a:ln>
-        </p:spPr>
-      </p:sp>
-      <p:sp>
-        <p:nvSpPr>
-          <p:cNvPr id="8" name="Text 6"/>
-          <p:cNvSpPr/>
-          <p:nvPr/>
-        </p:nvSpPr>
-        <p:spPr>
-          <a:xfrm>
-            <a:off x="1024128" y="1353312"/>
-            <a:ext cx="7360920" cy="530352"/>
-          </a:xfrm>
-          <a:prstGeom prst="rect">
-            <a:avLst/>
-          </a:prstGeom>
-          <a:noFill/>
-          <a:ln/>
-        </p:spPr>
-        <p:txBody>
-          <a:bodyPr wrap="square" lIns="254" tIns="254" rIns="254" bIns="254" rtlCol="0" anchor="t">
-            <a:normAutofit/>
-          </a:bodyPr>
-          <a:lstStyle/>
-          <a:p>
-            <a:pPr marL="0" indent="0">
-              <a:buNone/>
-            </a:pPr>
-            <a:r>
-              <a:rPr lang="en-US" sz="1620" dirty="0">
-                <a:solidFill>
-                  <a:srgbClr val="17212B"/>
-                </a:solidFill>
-                <a:latin typeface="Malgun Gothic" pitchFamily="34" charset="0"/>
-                <a:ea typeface="Malgun Gothic" pitchFamily="34" charset="-122"/>
-                <a:cs typeface="Malgun Gothic" pitchFamily="34" charset="-120"/>
-              </a:rPr>
-              <a:t>What About Performance: 포인터 추적 비용은 있을 수 있으니 프로파일링이 필요하다.</a:t>
-            </a:r>
-            <a:endParaRPr lang="en-US" sz="1620" dirty="0"/>
-          </a:p>
-        </p:txBody>
-      </p:sp>
-      <p:sp>
-        <p:nvSpPr>
-          <p:cNvPr id="9" name="Shape 7"/>
-          <p:cNvSpPr/>
-          <p:nvPr/>
-        </p:nvSpPr>
-        <p:spPr>
-          <a:xfrm>
-            <a:off x="822960" y="2185416"/>
-            <a:ext cx="82296" cy="82296"/>
-          </a:xfrm>
-          <a:prstGeom prst="ellipse">
-            <a:avLst/>
-          </a:prstGeom>
-          <a:solidFill>
-            <a:srgbClr val="15803D"/>
-          </a:solidFill>
-          <a:ln w="12700">
-            <a:solidFill>
-              <a:srgbClr val="15803D"/>
-            </a:solidFill>
-            <a:prstDash val="solid"/>
-          </a:ln>
-        </p:spPr>
-      </p:sp>
-      <p:sp>
-        <p:nvSpPr>
-          <p:cNvPr id="10" name="Text 8"/>
-          <p:cNvSpPr/>
-          <p:nvPr/>
-        </p:nvSpPr>
-        <p:spPr>
-          <a:xfrm>
-            <a:off x="1024128" y="2084832"/>
-            <a:ext cx="7360920" cy="530352"/>
-          </a:xfrm>
-          <a:prstGeom prst="rect">
-            <a:avLst/>
-          </a:prstGeom>
-          <a:noFill/>
-          <a:ln/>
-        </p:spPr>
-        <p:txBody>
-          <a:bodyPr wrap="square" lIns="254" tIns="254" rIns="254" bIns="254" rtlCol="0" anchor="t">
-            <a:normAutofit/>
-          </a:bodyPr>
-          <a:lstStyle/>
-          <a:p>
-            <a:pPr marL="0" indent="0">
-              <a:buNone/>
-            </a:pPr>
-            <a:r>
-              <a:rPr lang="en-US" sz="1620" dirty="0">
-                <a:solidFill>
-                  <a:srgbClr val="17212B"/>
-                </a:solidFill>
-                <a:latin typeface="Malgun Gothic" pitchFamily="34" charset="0"/>
-                <a:ea typeface="Malgun Gothic" pitchFamily="34" charset="-122"/>
-                <a:cs typeface="Malgun Gothic" pitchFamily="34" charset="-120"/>
-              </a:rPr>
-              <a:t>See Also: Factory Method는 flyweight 생성을 숨길 수 있다.</a:t>
-            </a:r>
-            <a:endParaRPr lang="en-US" sz="1620" dirty="0"/>
-          </a:p>
-        </p:txBody>
-      </p:sp>
-      <p:sp>
-        <p:nvSpPr>
-          <p:cNvPr id="11" name="Shape 9"/>
-          <p:cNvSpPr/>
-          <p:nvPr/>
-        </p:nvSpPr>
-        <p:spPr>
-          <a:xfrm>
-            <a:off x="822960" y="2916936"/>
-            <a:ext cx="82296" cy="82296"/>
-          </a:xfrm>
-          <a:prstGeom prst="ellipse">
-            <a:avLst/>
-          </a:prstGeom>
-          <a:solidFill>
-            <a:srgbClr val="15803D"/>
-          </a:solidFill>
-          <a:ln w="12700">
-            <a:solidFill>
-              <a:srgbClr val="15803D"/>
-            </a:solidFill>
-            <a:prstDash val="solid"/>
-          </a:ln>
-        </p:spPr>
-      </p:sp>
-      <p:sp>
-        <p:nvSpPr>
-          <p:cNvPr id="12" name="Text 10"/>
-          <p:cNvSpPr/>
-          <p:nvPr/>
-        </p:nvSpPr>
-        <p:spPr>
-          <a:xfrm>
-            <a:off x="1024128" y="2816352"/>
-            <a:ext cx="7360920" cy="530352"/>
-          </a:xfrm>
-          <a:prstGeom prst="rect">
-            <a:avLst/>
-          </a:prstGeom>
-          <a:noFill/>
-          <a:ln/>
-        </p:spPr>
-        <p:txBody>
-          <a:bodyPr wrap="square" lIns="254" tIns="254" rIns="254" bIns="254" rtlCol="0" anchor="t">
-            <a:normAutofit/>
-          </a:bodyPr>
-          <a:lstStyle/>
-          <a:p>
-            <a:pPr marL="0" indent="0">
-              <a:buNone/>
-            </a:pPr>
-            <a:r>
-              <a:rPr lang="en-US" sz="1620" dirty="0">
-                <a:solidFill>
-                  <a:srgbClr val="17212B"/>
-                </a:solidFill>
-                <a:latin typeface="Malgun Gothic" pitchFamily="34" charset="0"/>
-                <a:ea typeface="Malgun Gothic" pitchFamily="34" charset="-122"/>
-                <a:cs typeface="Malgun Gothic" pitchFamily="34" charset="-120"/>
-              </a:rPr>
-              <a:t>Object Pool은 이미 만든 flyweight를 보관하는 장소가 될 수 있다.</a:t>
-            </a:r>
-            <a:endParaRPr lang="en-US" sz="1620" dirty="0"/>
-          </a:p>
-        </p:txBody>
-      </p:sp>
-      <p:sp>
-        <p:nvSpPr>
-          <p:cNvPr id="13" name="Shape 11"/>
-          <p:cNvSpPr/>
-          <p:nvPr/>
-        </p:nvSpPr>
-        <p:spPr>
-          <a:xfrm>
-            <a:off x="822960" y="3648456"/>
-            <a:ext cx="82296" cy="82296"/>
-          </a:xfrm>
-          <a:prstGeom prst="ellipse">
-            <a:avLst/>
-          </a:prstGeom>
-          <a:solidFill>
-            <a:srgbClr val="15803D"/>
-          </a:solidFill>
-          <a:ln w="12700">
-            <a:solidFill>
-              <a:srgbClr val="15803D"/>
-            </a:solidFill>
-            <a:prstDash val="solid"/>
-          </a:ln>
-        </p:spPr>
-      </p:sp>
-      <p:sp>
-        <p:nvSpPr>
-          <p:cNvPr id="14" name="Text 12"/>
-          <p:cNvSpPr/>
-          <p:nvPr/>
-        </p:nvSpPr>
-        <p:spPr>
-          <a:xfrm>
-            <a:off x="1024128" y="3547872"/>
-            <a:ext cx="7360920" cy="530352"/>
-          </a:xfrm>
-          <a:prstGeom prst="rect">
-            <a:avLst/>
-          </a:prstGeom>
-          <a:noFill/>
-          <a:ln/>
-        </p:spPr>
-        <p:txBody>
-          <a:bodyPr wrap="square" lIns="254" tIns="254" rIns="254" bIns="254" rtlCol="0" anchor="t">
-            <a:normAutofit/>
-          </a:bodyPr>
-          <a:lstStyle/>
-          <a:p>
-            <a:pPr marL="0" indent="0">
-              <a:buNone/>
-            </a:pPr>
-            <a:r>
-              <a:rPr lang="en-US" altLang="ko-KR" sz="1620">
-                <a:solidFill>
-                  <a:srgbClr val="17212B"/>
-                </a:solidFill>
-                <a:latin typeface="Malgun Gothic" pitchFamily="34" charset="0"/>
-                <a:ea typeface="Malgun Gothic" pitchFamily="34" charset="-122"/>
-                <a:cs typeface="Malgun Gothic" pitchFamily="34" charset="-120"/>
-              </a:rPr>
-              <a:t>State </a:t>
-            </a:r>
-            <a:r>
-              <a:rPr lang="ko-KR" altLang="en-US" sz="1620">
-                <a:solidFill>
-                  <a:srgbClr val="17212B"/>
-                </a:solidFill>
-                <a:latin typeface="Malgun Gothic" pitchFamily="34" charset="0"/>
-                <a:ea typeface="Malgun Gothic" pitchFamily="34" charset="-122"/>
-                <a:cs typeface="Malgun Gothic" pitchFamily="34" charset="-120"/>
-              </a:rPr>
-              <a:t>패턴의 상태 객체에 데이터가 없다면 공유 인스턴스로 쓸 수 있다</a:t>
-            </a:r>
-            <a:r>
-              <a:rPr lang="en-US" altLang="ko-KR" sz="1620">
-                <a:solidFill>
-                  <a:srgbClr val="17212B"/>
-                </a:solidFill>
-                <a:latin typeface="Malgun Gothic" pitchFamily="34" charset="0"/>
-                <a:ea typeface="Malgun Gothic" pitchFamily="34" charset="-122"/>
-                <a:cs typeface="Malgun Gothic" pitchFamily="34" charset="-120"/>
-              </a:rPr>
-              <a:t>.</a:t>
-            </a:r>
-            <a:endParaRPr lang="en-US" sz="1620" dirty="0"/>
-          </a:p>
-        </p:txBody>
-      </p:sp>
-    </p:spTree>
-  </p:cSld>
-  <p:clrMapOvr>
-    <a:masterClrMapping/>
-  </p:clrMapOvr>
-</p:sld>
-</file>
-
-<file path=ppt/slides/slide5.xml><?xml version="1.0" encoding="utf-8"?>
-<p:sld xmlns:a="http://schemas.openxmlformats.org/drawingml/2006/main" xmlns:r="http://schemas.openxmlformats.org/officeDocument/2006/relationships" xmlns:p="http://schemas.openxmlformats.org/presentationml/2006/main">
-  <p:cSld name="Slide 5">
-    <p:bg>
-      <p:bgPr>
-        <a:solidFill>
-          <a:srgbClr val="FAF7EF"/>
-        </a:solidFill>
-        <a:effectLst/>
-      </p:bgPr>
-    </p:bg>
-    <p:spTree>
-      <p:nvGrpSpPr>
-        <p:cNvPr id="1" name=""/>
-        <p:cNvGrpSpPr/>
-        <p:nvPr/>
-      </p:nvGrpSpPr>
-      <p:grpSpPr>
-        <a:xfrm>
-          <a:off x="0" y="0"/>
-          <a:ext cx="0" cy="0"/>
-          <a:chOff x="0" y="0"/>
-          <a:chExt cx="0" cy="0"/>
-        </a:xfrm>
-      </p:grpSpPr>
-      <p:sp>
-        <p:nvSpPr>
-          <p:cNvPr id="2" name="Shape 0"/>
-          <p:cNvSpPr/>
-          <p:nvPr/>
-        </p:nvSpPr>
-        <p:spPr>
-          <a:xfrm>
-            <a:off x="0" y="0"/>
-            <a:ext cx="9144000" cy="5715000"/>
-          </a:xfrm>
-          <a:prstGeom prst="rect">
-            <a:avLst/>
-          </a:prstGeom>
-          <a:solidFill>
-            <a:srgbClr val="FAF7EF"/>
-          </a:solidFill>
-          <a:ln w="12700">
-            <a:solidFill>
-              <a:srgbClr val="FAF7EF"/>
-            </a:solidFill>
-            <a:prstDash val="solid"/>
-          </a:ln>
-        </p:spPr>
-      </p:sp>
-      <p:sp>
-        <p:nvSpPr>
-          <p:cNvPr id="3" name="Shape 1"/>
-          <p:cNvSpPr/>
-          <p:nvPr/>
-        </p:nvSpPr>
-        <p:spPr>
-          <a:xfrm>
-            <a:off x="0" y="0"/>
-            <a:ext cx="118872" cy="5715000"/>
-          </a:xfrm>
-          <a:prstGeom prst="rect">
-            <a:avLst/>
-          </a:prstGeom>
-          <a:solidFill>
-            <a:srgbClr val="F59E0B"/>
-          </a:solidFill>
-          <a:ln w="12700">
-            <a:solidFill>
-              <a:srgbClr val="F59E0B"/>
-            </a:solidFill>
-            <a:prstDash val="solid"/>
-          </a:ln>
-        </p:spPr>
-      </p:sp>
-      <p:sp>
-        <p:nvSpPr>
-          <p:cNvPr id="4" name="Text 2"/>
-          <p:cNvSpPr/>
-          <p:nvPr/>
-        </p:nvSpPr>
-        <p:spPr>
-          <a:xfrm>
-            <a:off x="8549640" y="5358384"/>
-            <a:ext cx="310896" cy="146304"/>
-          </a:xfrm>
-          <a:prstGeom prst="rect">
-            <a:avLst/>
-          </a:prstGeom>
-          <a:noFill/>
-          <a:ln/>
-        </p:spPr>
-        <p:txBody>
-          <a:bodyPr wrap="square" lIns="0" tIns="0" rIns="0" bIns="0" rtlCol="0" anchor="ctr"/>
-          <a:lstStyle/>
-          <a:p>
-            <a:pPr marL="0" indent="0" algn="r">
-              <a:buNone/>
-            </a:pPr>
-            <a:r>
-              <a:rPr lang="en-US" sz="700" dirty="0">
-                <a:solidFill>
-                  <a:srgbClr val="9F968C"/>
-                </a:solidFill>
-                <a:latin typeface="Aptos" pitchFamily="34" charset="0"/>
-                <a:ea typeface="Aptos" pitchFamily="34" charset="-122"/>
-                <a:cs typeface="Aptos" pitchFamily="34" charset="-120"/>
-              </a:rPr>
-              <a:t>05</a:t>
-            </a:r>
-            <a:endParaRPr lang="en-US" sz="700" dirty="0"/>
-          </a:p>
-        </p:txBody>
-      </p:sp>
-      <p:sp>
-        <p:nvSpPr>
-          <p:cNvPr id="5" name="Text 3"/>
-          <p:cNvSpPr/>
-          <p:nvPr/>
-        </p:nvSpPr>
-        <p:spPr>
-          <a:xfrm>
-            <a:off x="594360" y="5340096"/>
-            <a:ext cx="4663440" cy="164592"/>
-          </a:xfrm>
-          <a:prstGeom prst="rect">
-            <a:avLst/>
-          </a:prstGeom>
-          <a:noFill/>
-          <a:ln/>
-        </p:spPr>
-        <p:txBody>
-          <a:bodyPr wrap="square" lIns="0" tIns="0" rIns="0" bIns="0" rtlCol="0" anchor="ctr"/>
-          <a:lstStyle/>
-          <a:p>
-            <a:pPr marL="0" indent="0">
-              <a:buNone/>
-            </a:pPr>
-            <a:r>
-              <a:rPr lang="en-US" sz="700" dirty="0">
-                <a:solidFill>
-                  <a:srgbClr val="9F968C"/>
-                </a:solidFill>
-                <a:latin typeface="Malgun Gothic" pitchFamily="34" charset="0"/>
-                <a:ea typeface="Malgun Gothic" pitchFamily="34" charset="-122"/>
-                <a:cs typeface="Malgun Gothic" pitchFamily="34" charset="-120"/>
-              </a:rPr>
-              <a:t>Game Programming Patterns - Flyweight | Unity/C#</a:t>
-            </a:r>
-            <a:endParaRPr lang="en-US" sz="700" dirty="0"/>
-          </a:p>
-        </p:txBody>
-      </p:sp>
-      <p:sp>
-        <p:nvSpPr>
-          <p:cNvPr id="6" name="Text 4"/>
-          <p:cNvSpPr/>
-          <p:nvPr/>
-        </p:nvSpPr>
-        <p:spPr>
-          <a:xfrm>
-            <a:off x="594360" y="347472"/>
-            <a:ext cx="8046720" cy="420624"/>
-          </a:xfrm>
-          <a:prstGeom prst="rect">
-            <a:avLst/>
-          </a:prstGeom>
-          <a:noFill/>
-          <a:ln/>
-        </p:spPr>
-        <p:txBody>
-          <a:bodyPr wrap="square" lIns="0" tIns="0" rIns="0" bIns="0" rtlCol="0" anchor="ctr">
-            <a:normAutofit/>
-          </a:bodyPr>
-          <a:lstStyle/>
-          <a:p>
-            <a:pPr marL="0" indent="0">
-              <a:buNone/>
-            </a:pPr>
-            <a:r>
-              <a:rPr lang="en-US" sz="2500" b="1" dirty="0">
-                <a:solidFill>
-                  <a:srgbClr val="17212B"/>
-                </a:solidFill>
-                <a:latin typeface="Malgun Gothic" pitchFamily="34" charset="0"/>
-                <a:ea typeface="Malgun Gothic" pitchFamily="34" charset="-122"/>
-                <a:cs typeface="Malgun Gothic" pitchFamily="34" charset="-120"/>
-              </a:rPr>
-              <a:t>문제 출발점</a:t>
-            </a:r>
-            <a:endParaRPr lang="en-US" sz="2500" dirty="0"/>
-          </a:p>
-        </p:txBody>
-      </p:sp>
-      <p:sp>
-        <p:nvSpPr>
-          <p:cNvPr id="7" name="Text 5"/>
-          <p:cNvSpPr/>
-          <p:nvPr/>
-        </p:nvSpPr>
-        <p:spPr>
-          <a:xfrm>
-            <a:off x="685800" y="1353312"/>
-            <a:ext cx="7635240" cy="914400"/>
-          </a:xfrm>
-          <a:prstGeom prst="rect">
-            <a:avLst/>
-          </a:prstGeom>
-          <a:noFill/>
-          <a:ln/>
-        </p:spPr>
-        <p:txBody>
-          <a:bodyPr wrap="square" lIns="254" tIns="254" rIns="254" bIns="254" rtlCol="0" anchor="ctr">
-            <a:normAutofit/>
-          </a:bodyPr>
-          <a:lstStyle/>
-          <a:p>
-            <a:pPr marL="0" indent="0">
-              <a:buNone/>
-            </a:pPr>
-            <a:r>
-              <a:rPr lang="en-US" sz="3000" b="1" dirty="0">
-                <a:solidFill>
-                  <a:srgbClr val="E45745"/>
-                </a:solidFill>
-                <a:latin typeface="Malgun Gothic" pitchFamily="34" charset="0"/>
-                <a:ea typeface="Malgun Gothic" pitchFamily="34" charset="-122"/>
-                <a:cs typeface="Malgun Gothic" pitchFamily="34" charset="-120"/>
-              </a:rPr>
-              <a:t>숲을 만들고 싶은데, 나무 하나하나가 너무 무겁다</a:t>
-            </a:r>
-            <a:endParaRPr lang="en-US" sz="3000" dirty="0"/>
-          </a:p>
-        </p:txBody>
-      </p:sp>
-      <p:sp>
-        <p:nvSpPr>
-          <p:cNvPr id="8" name="Shape 6"/>
-          <p:cNvSpPr/>
-          <p:nvPr/>
-        </p:nvSpPr>
-        <p:spPr>
-          <a:xfrm>
-            <a:off x="822960" y="2953512"/>
-            <a:ext cx="82296" cy="82296"/>
-          </a:xfrm>
-          <a:prstGeom prst="ellipse">
-            <a:avLst/>
-          </a:prstGeom>
-          <a:solidFill>
-            <a:srgbClr val="E45745"/>
-          </a:solidFill>
-          <a:ln w="12700">
-            <a:solidFill>
-              <a:srgbClr val="E45745"/>
-            </a:solidFill>
-            <a:prstDash val="solid"/>
-          </a:ln>
-        </p:spPr>
-      </p:sp>
-      <p:sp>
-        <p:nvSpPr>
-          <p:cNvPr id="9" name="Text 7"/>
-          <p:cNvSpPr/>
-          <p:nvPr/>
-        </p:nvSpPr>
-        <p:spPr>
-          <a:xfrm>
-            <a:off x="1024128" y="2852928"/>
-            <a:ext cx="7406640" cy="365760"/>
-          </a:xfrm>
-          <a:prstGeom prst="rect">
-            <a:avLst/>
-          </a:prstGeom>
-          <a:noFill/>
-          <a:ln/>
-        </p:spPr>
-        <p:txBody>
-          <a:bodyPr wrap="square" lIns="254" tIns="254" rIns="254" bIns="254" rtlCol="0" anchor="t">
-            <a:normAutofit/>
-          </a:bodyPr>
-          <a:lstStyle/>
-          <a:p>
-            <a:pPr marL="0" indent="0">
-              <a:buNone/>
-            </a:pPr>
-            <a:r>
-              <a:rPr lang="en-US" sz="1700" dirty="0">
-                <a:solidFill>
-                  <a:srgbClr val="17212B"/>
-                </a:solidFill>
-                <a:latin typeface="Malgun Gothic" pitchFamily="34" charset="0"/>
-                <a:ea typeface="Malgun Gothic" pitchFamily="34" charset="-122"/>
-                <a:cs typeface="Malgun Gothic" pitchFamily="34" charset="-120"/>
-              </a:rPr>
-              <a:t>각 나무가 Mesh, Texture, 위치, 크기, 색을 모두 가진다.</a:t>
-            </a:r>
-            <a:endParaRPr lang="en-US" sz="1700" dirty="0"/>
-          </a:p>
-        </p:txBody>
-      </p:sp>
-      <p:sp>
-        <p:nvSpPr>
-          <p:cNvPr id="10" name="Shape 8"/>
-          <p:cNvSpPr/>
-          <p:nvPr/>
-        </p:nvSpPr>
-        <p:spPr>
-          <a:xfrm>
-            <a:off x="822960" y="3502152"/>
-            <a:ext cx="82296" cy="82296"/>
-          </a:xfrm>
-          <a:prstGeom prst="ellipse">
-            <a:avLst/>
-          </a:prstGeom>
-          <a:solidFill>
-            <a:srgbClr val="E45745"/>
-          </a:solidFill>
-          <a:ln w="12700">
-            <a:solidFill>
-              <a:srgbClr val="E45745"/>
-            </a:solidFill>
-            <a:prstDash val="solid"/>
-          </a:ln>
-        </p:spPr>
-      </p:sp>
-      <p:sp>
-        <p:nvSpPr>
-          <p:cNvPr id="11" name="Text 9"/>
-          <p:cNvSpPr/>
-          <p:nvPr/>
-        </p:nvSpPr>
-        <p:spPr>
-          <a:xfrm>
-            <a:off x="1024128" y="3401568"/>
-            <a:ext cx="7406640" cy="365760"/>
-          </a:xfrm>
-          <a:prstGeom prst="rect">
-            <a:avLst/>
-          </a:prstGeom>
-          <a:noFill/>
-          <a:ln/>
-        </p:spPr>
-        <p:txBody>
-          <a:bodyPr wrap="square" lIns="254" tIns="254" rIns="254" bIns="254" rtlCol="0" anchor="t">
-            <a:normAutofit/>
-          </a:bodyPr>
-          <a:lstStyle/>
-          <a:p>
-            <a:pPr marL="0" indent="0">
-              <a:buNone/>
-            </a:pPr>
-            <a:r>
-              <a:rPr lang="en-US" sz="1700" dirty="0">
-                <a:solidFill>
-                  <a:srgbClr val="17212B"/>
-                </a:solidFill>
-                <a:latin typeface="Malgun Gothic" pitchFamily="34" charset="0"/>
-                <a:ea typeface="Malgun Gothic" pitchFamily="34" charset="-122"/>
-                <a:cs typeface="Malgun Gothic" pitchFamily="34" charset="-120"/>
-              </a:rPr>
-              <a:t>수천 개의 나무가 있으면 메모리와 렌더링 비용이 커진다.</a:t>
-            </a:r>
-            <a:endParaRPr lang="en-US" sz="1700" dirty="0"/>
-          </a:p>
-        </p:txBody>
-      </p:sp>
-      <p:sp>
-        <p:nvSpPr>
-          <p:cNvPr id="12" name="Shape 10"/>
-          <p:cNvSpPr/>
-          <p:nvPr/>
-        </p:nvSpPr>
-        <p:spPr>
-          <a:xfrm>
-            <a:off x="822960" y="4050792"/>
-            <a:ext cx="82296" cy="82296"/>
-          </a:xfrm>
-          <a:prstGeom prst="ellipse">
-            <a:avLst/>
-          </a:prstGeom>
-          <a:solidFill>
-            <a:srgbClr val="E45745"/>
-          </a:solidFill>
-          <a:ln w="12700">
-            <a:solidFill>
-              <a:srgbClr val="E45745"/>
-            </a:solidFill>
-            <a:prstDash val="solid"/>
-          </a:ln>
-        </p:spPr>
-      </p:sp>
-      <p:sp>
-        <p:nvSpPr>
-          <p:cNvPr id="13" name="Text 11"/>
-          <p:cNvSpPr/>
-          <p:nvPr/>
-        </p:nvSpPr>
-        <p:spPr>
-          <a:xfrm>
-            <a:off x="1024128" y="3950208"/>
-            <a:ext cx="7406640" cy="365760"/>
-          </a:xfrm>
-          <a:prstGeom prst="rect">
-            <a:avLst/>
-          </a:prstGeom>
-          <a:noFill/>
-          <a:ln/>
-        </p:spPr>
-        <p:txBody>
-          <a:bodyPr wrap="square" lIns="254" tIns="254" rIns="254" bIns="254" rtlCol="0" anchor="t">
-            <a:normAutofit/>
-          </a:bodyPr>
-          <a:lstStyle/>
-          <a:p>
-            <a:pPr marL="0" indent="0">
-              <a:buNone/>
-            </a:pPr>
-            <a:r>
-              <a:rPr lang="en-US" sz="1700" dirty="0">
-                <a:solidFill>
-                  <a:srgbClr val="17212B"/>
-                </a:solidFill>
-                <a:latin typeface="Malgun Gothic" pitchFamily="34" charset="0"/>
-                <a:ea typeface="Malgun Gothic" pitchFamily="34" charset="-122"/>
-                <a:cs typeface="Malgun Gothic" pitchFamily="34" charset="-120"/>
-              </a:rPr>
-              <a:t>사실 대부분의 나무는 같은 모델과 텍스처를 공유한다.</a:t>
-            </a:r>
-            <a:endParaRPr lang="en-US" sz="1700" dirty="0"/>
-          </a:p>
-        </p:txBody>
-      </p:sp>
-    </p:spTree>
-  </p:cSld>
-  <p:clrMapOvr>
-    <a:masterClrMapping/>
-  </p:clrMapOvr>
-</p:sld>
-</file>
-
-<file path=ppt/slides/slide6.xml><?xml version="1.0" encoding="utf-8"?>
 <p:sld xmlns:a="http://schemas.openxmlformats.org/drawingml/2006/main" xmlns:r="http://schemas.openxmlformats.org/officeDocument/2006/relationships" xmlns:p="http://schemas.openxmlformats.org/presentationml/2006/main">
   <p:cSld name="Slide 6">
     <p:bg>
@@ -21279,7 +19143,7 @@
               <a:buNone/>
             </a:pPr>
             <a:r>
-              <a:rPr lang="en-US" sz="700" dirty="0">
+              <a:rPr lang="en-US" sz="700">
                 <a:solidFill>
                   <a:srgbClr val="9F968C"/>
                 </a:solidFill>
@@ -21287,7 +19151,7 @@
                 <a:ea typeface="Aptos" pitchFamily="34" charset="-122"/>
                 <a:cs typeface="Aptos" pitchFamily="34" charset="-120"/>
               </a:rPr>
-              <a:t>06</a:t>
+              <a:t>04</a:t>
             </a:r>
             <a:endParaRPr lang="en-US" sz="700" dirty="0"/>
           </a:p>
@@ -21656,7 +19520,7 @@
 </p:sld>
 </file>
 
-<file path=ppt/slides/slide7.xml><?xml version="1.0" encoding="utf-8"?>
+<file path=ppt/slides/slide5.xml><?xml version="1.0" encoding="utf-8"?>
 <p:sld xmlns:a="http://schemas.openxmlformats.org/drawingml/2006/main" xmlns:r="http://schemas.openxmlformats.org/officeDocument/2006/relationships" xmlns:p="http://schemas.openxmlformats.org/presentationml/2006/main">
   <p:cSld name="Slide 7">
     <p:bg>
@@ -21756,7 +19620,7 @@
               <a:buNone/>
             </a:pPr>
             <a:r>
-              <a:rPr lang="en-US" sz="700" dirty="0">
+              <a:rPr lang="en-US" sz="700">
                 <a:solidFill>
                   <a:srgbClr val="9F968C"/>
                 </a:solidFill>
@@ -21764,7 +19628,7 @@
                 <a:ea typeface="Aptos" pitchFamily="34" charset="-122"/>
                 <a:cs typeface="Aptos" pitchFamily="34" charset="-120"/>
               </a:rPr>
-              <a:t>07</a:t>
+              <a:t>05</a:t>
             </a:r>
             <a:endParaRPr lang="en-US" sz="700" dirty="0"/>
           </a:p>
@@ -22097,7 +19961,7 @@
 </p:sld>
 </file>
 
-<file path=ppt/slides/slide8.xml><?xml version="1.0" encoding="utf-8"?>
+<file path=ppt/slides/slide6.xml><?xml version="1.0" encoding="utf-8"?>
 <p:sld xmlns:a="http://schemas.openxmlformats.org/drawingml/2006/main" xmlns:r="http://schemas.openxmlformats.org/officeDocument/2006/relationships" xmlns:p="http://schemas.openxmlformats.org/presentationml/2006/main">
   <p:cSld name="Slide 8">
     <p:bg>
@@ -22197,7 +20061,7 @@
               <a:buNone/>
             </a:pPr>
             <a:r>
-              <a:rPr lang="en-US" sz="700" dirty="0">
+              <a:rPr lang="en-US" sz="700">
                 <a:solidFill>
                   <a:srgbClr val="9F968C"/>
                 </a:solidFill>
@@ -22205,7 +20069,7 @@
                 <a:ea typeface="Aptos" pitchFamily="34" charset="-122"/>
                 <a:cs typeface="Aptos" pitchFamily="34" charset="-120"/>
               </a:rPr>
-              <a:t>08</a:t>
+              <a:t>06</a:t>
             </a:r>
             <a:endParaRPr lang="en-US" sz="700" dirty="0"/>
           </a:p>
@@ -22318,7 +20182,7 @@
               <a:buNone/>
             </a:pPr>
             <a:r>
-              <a:rPr lang="en-US" sz="1550" b="1" dirty="0">
+              <a:rPr lang="ko-KR" altLang="en-US" sz="1550" b="1">
                 <a:solidFill>
                   <a:srgbClr val="15803D"/>
                 </a:solidFill>
@@ -22326,7 +20190,18 @@
                 <a:ea typeface="Malgun Gothic" pitchFamily="34" charset="-122"/>
                 <a:cs typeface="Malgun Gothic" pitchFamily="34" charset="-120"/>
               </a:rPr>
-              <a:t>모든 나무가 같이 쓰는 데이터를 따로 뺀다.</a:t>
+              <a:t>모든 나무가 함께 쓰는 데이터를 한 곳에 모은다</a:t>
+            </a:r>
+            <a:r>
+              <a:rPr lang="en-US" altLang="ko-KR" sz="1550" b="1">
+                <a:solidFill>
+                  <a:srgbClr val="15803D"/>
+                </a:solidFill>
+                <a:latin typeface="Malgun Gothic" pitchFamily="34" charset="0"/>
+                <a:ea typeface="Malgun Gothic" pitchFamily="34" charset="-122"/>
+                <a:cs typeface="Malgun Gothic" pitchFamily="34" charset="-120"/>
+              </a:rPr>
+              <a:t>.</a:t>
             </a:r>
             <a:endParaRPr lang="en-US" sz="1550" dirty="0"/>
           </a:p>
@@ -22603,7 +20478,7 @@
 </p:sld>
 </file>
 
-<file path=ppt/slides/slide9.xml><?xml version="1.0" encoding="utf-8"?>
+<file path=ppt/slides/slide7.xml><?xml version="1.0" encoding="utf-8"?>
 <p:sld xmlns:a="http://schemas.openxmlformats.org/drawingml/2006/main" xmlns:r="http://schemas.openxmlformats.org/officeDocument/2006/relationships" xmlns:p="http://schemas.openxmlformats.org/presentationml/2006/main">
   <p:cSld name="Slide 9">
     <p:bg>
@@ -22703,7 +20578,7 @@
               <a:buNone/>
             </a:pPr>
             <a:r>
-              <a:rPr lang="en-US" sz="700" dirty="0">
+              <a:rPr lang="en-US" sz="700">
                 <a:solidFill>
                   <a:srgbClr val="9F968C"/>
                 </a:solidFill>
@@ -22711,7 +20586,7 @@
                 <a:ea typeface="Aptos" pitchFamily="34" charset="-122"/>
                 <a:cs typeface="Aptos" pitchFamily="34" charset="-120"/>
               </a:rPr>
-              <a:t>09</a:t>
+              <a:t>07</a:t>
             </a:r>
             <a:endParaRPr lang="en-US" sz="700" dirty="0"/>
           </a:p>
@@ -23149,6 +21024,1474 @@
               <a:t>}</a:t>
             </a:r>
             <a:endParaRPr lang="en-US" sz="1040" dirty="0"/>
+          </a:p>
+        </p:txBody>
+      </p:sp>
+    </p:spTree>
+  </p:cSld>
+  <p:clrMapOvr>
+    <a:masterClrMapping/>
+  </p:clrMapOvr>
+</p:sld>
+</file>
+
+<file path=ppt/slides/slide8.xml><?xml version="1.0" encoding="utf-8"?>
+<p:sld xmlns:a="http://schemas.openxmlformats.org/drawingml/2006/main" xmlns:r="http://schemas.openxmlformats.org/officeDocument/2006/relationships" xmlns:p="http://schemas.openxmlformats.org/presentationml/2006/main">
+  <p:cSld name="Slide 10">
+    <p:bg>
+      <p:bgPr>
+        <a:solidFill>
+          <a:srgbClr val="FAF7EF"/>
+        </a:solidFill>
+        <a:effectLst/>
+      </p:bgPr>
+    </p:bg>
+    <p:spTree>
+      <p:nvGrpSpPr>
+        <p:cNvPr id="1" name=""/>
+        <p:cNvGrpSpPr/>
+        <p:nvPr/>
+      </p:nvGrpSpPr>
+      <p:grpSpPr>
+        <a:xfrm>
+          <a:off x="0" y="0"/>
+          <a:ext cx="0" cy="0"/>
+          <a:chOff x="0" y="0"/>
+          <a:chExt cx="0" cy="0"/>
+        </a:xfrm>
+      </p:grpSpPr>
+      <p:sp>
+        <p:nvSpPr>
+          <p:cNvPr id="2" name="Shape 0"/>
+          <p:cNvSpPr/>
+          <p:nvPr/>
+        </p:nvSpPr>
+        <p:spPr>
+          <a:xfrm>
+            <a:off x="0" y="0"/>
+            <a:ext cx="9144000" cy="5715000"/>
+          </a:xfrm>
+          <a:prstGeom prst="rect">
+            <a:avLst/>
+          </a:prstGeom>
+          <a:solidFill>
+            <a:srgbClr val="FAF7EF"/>
+          </a:solidFill>
+          <a:ln w="12700">
+            <a:solidFill>
+              <a:srgbClr val="FAF7EF"/>
+            </a:solidFill>
+            <a:prstDash val="solid"/>
+          </a:ln>
+        </p:spPr>
+      </p:sp>
+      <p:sp>
+        <p:nvSpPr>
+          <p:cNvPr id="3" name="Shape 1"/>
+          <p:cNvSpPr/>
+          <p:nvPr/>
+        </p:nvSpPr>
+        <p:spPr>
+          <a:xfrm>
+            <a:off x="0" y="0"/>
+            <a:ext cx="118872" cy="5715000"/>
+          </a:xfrm>
+          <a:prstGeom prst="rect">
+            <a:avLst/>
+          </a:prstGeom>
+          <a:solidFill>
+            <a:srgbClr val="2563EB"/>
+          </a:solidFill>
+          <a:ln w="12700">
+            <a:solidFill>
+              <a:srgbClr val="2563EB"/>
+            </a:solidFill>
+            <a:prstDash val="solid"/>
+          </a:ln>
+        </p:spPr>
+      </p:sp>
+      <p:sp>
+        <p:nvSpPr>
+          <p:cNvPr id="4" name="Text 2"/>
+          <p:cNvSpPr/>
+          <p:nvPr/>
+        </p:nvSpPr>
+        <p:spPr>
+          <a:xfrm>
+            <a:off x="8549640" y="5358384"/>
+            <a:ext cx="310896" cy="146304"/>
+          </a:xfrm>
+          <a:prstGeom prst="rect">
+            <a:avLst/>
+          </a:prstGeom>
+          <a:noFill/>
+          <a:ln/>
+        </p:spPr>
+        <p:txBody>
+          <a:bodyPr wrap="square" lIns="0" tIns="0" rIns="0" bIns="0" rtlCol="0" anchor="ctr"/>
+          <a:lstStyle/>
+          <a:p>
+            <a:pPr marL="0" indent="0" algn="r">
+              <a:buNone/>
+            </a:pPr>
+            <a:r>
+              <a:rPr lang="en-US" sz="700">
+                <a:solidFill>
+                  <a:srgbClr val="9F968C"/>
+                </a:solidFill>
+                <a:latin typeface="Aptos" pitchFamily="34" charset="0"/>
+                <a:ea typeface="Aptos" pitchFamily="34" charset="-122"/>
+                <a:cs typeface="Aptos" pitchFamily="34" charset="-120"/>
+              </a:rPr>
+              <a:t>08</a:t>
+            </a:r>
+            <a:endParaRPr lang="en-US" sz="700" dirty="0"/>
+          </a:p>
+        </p:txBody>
+      </p:sp>
+      <p:sp>
+        <p:nvSpPr>
+          <p:cNvPr id="5" name="Text 3"/>
+          <p:cNvSpPr/>
+          <p:nvPr/>
+        </p:nvSpPr>
+        <p:spPr>
+          <a:xfrm>
+            <a:off x="594360" y="5340096"/>
+            <a:ext cx="4663440" cy="164592"/>
+          </a:xfrm>
+          <a:prstGeom prst="rect">
+            <a:avLst/>
+          </a:prstGeom>
+          <a:noFill/>
+          <a:ln/>
+        </p:spPr>
+        <p:txBody>
+          <a:bodyPr wrap="square" lIns="0" tIns="0" rIns="0" bIns="0" rtlCol="0" anchor="ctr"/>
+          <a:lstStyle/>
+          <a:p>
+            <a:pPr marL="0" indent="0">
+              <a:buNone/>
+            </a:pPr>
+            <a:r>
+              <a:rPr lang="en-US" sz="700" dirty="0">
+                <a:solidFill>
+                  <a:srgbClr val="9F968C"/>
+                </a:solidFill>
+                <a:latin typeface="Malgun Gothic" pitchFamily="34" charset="0"/>
+                <a:ea typeface="Malgun Gothic" pitchFamily="34" charset="-122"/>
+                <a:cs typeface="Malgun Gothic" pitchFamily="34" charset="-120"/>
+              </a:rPr>
+              <a:t>Game Programming Patterns - Flyweight | Unity/C#</a:t>
+            </a:r>
+            <a:endParaRPr lang="en-US" sz="700" dirty="0"/>
+          </a:p>
+        </p:txBody>
+      </p:sp>
+      <p:sp>
+        <p:nvSpPr>
+          <p:cNvPr id="6" name="Text 4"/>
+          <p:cNvSpPr/>
+          <p:nvPr/>
+        </p:nvSpPr>
+        <p:spPr>
+          <a:xfrm>
+            <a:off x="594360" y="347472"/>
+            <a:ext cx="8046720" cy="420624"/>
+          </a:xfrm>
+          <a:prstGeom prst="rect">
+            <a:avLst/>
+          </a:prstGeom>
+          <a:noFill/>
+          <a:ln/>
+        </p:spPr>
+        <p:txBody>
+          <a:bodyPr wrap="square" lIns="0" tIns="0" rIns="0" bIns="0" rtlCol="0" anchor="ctr">
+            <a:normAutofit/>
+          </a:bodyPr>
+          <a:lstStyle/>
+          <a:p>
+            <a:pPr marL="0" indent="0">
+              <a:buNone/>
+            </a:pPr>
+            <a:r>
+              <a:rPr lang="en-US" sz="2500" b="1" dirty="0">
+                <a:solidFill>
+                  <a:srgbClr val="17212B"/>
+                </a:solidFill>
+                <a:latin typeface="Malgun Gothic" pitchFamily="34" charset="0"/>
+                <a:ea typeface="Malgun Gothic" pitchFamily="34" charset="-122"/>
+                <a:cs typeface="Malgun Gothic" pitchFamily="34" charset="-120"/>
+              </a:rPr>
+              <a:t>Flyweight 구조</a:t>
+            </a:r>
+            <a:endParaRPr lang="en-US" sz="2500" dirty="0"/>
+          </a:p>
+        </p:txBody>
+      </p:sp>
+      <p:sp>
+        <p:nvSpPr>
+          <p:cNvPr id="7" name="Text 5"/>
+          <p:cNvSpPr/>
+          <p:nvPr/>
+        </p:nvSpPr>
+        <p:spPr>
+          <a:xfrm>
+            <a:off x="749808" y="1335024"/>
+            <a:ext cx="7498080" cy="512064"/>
+          </a:xfrm>
+          <a:prstGeom prst="rect">
+            <a:avLst/>
+          </a:prstGeom>
+          <a:noFill/>
+          <a:ln/>
+        </p:spPr>
+        <p:txBody>
+          <a:bodyPr wrap="square" lIns="254" tIns="254" rIns="254" bIns="254" rtlCol="0" anchor="t">
+            <a:normAutofit/>
+          </a:bodyPr>
+          <a:lstStyle/>
+          <a:p>
+            <a:pPr marL="0" indent="0">
+              <a:buNone/>
+            </a:pPr>
+            <a:r>
+              <a:rPr lang="en-US" sz="1820" b="1" dirty="0">
+                <a:solidFill>
+                  <a:srgbClr val="17212B"/>
+                </a:solidFill>
+                <a:latin typeface="Malgun Gothic" pitchFamily="34" charset="0"/>
+                <a:ea typeface="Malgun Gothic" pitchFamily="34" charset="-122"/>
+                <a:cs typeface="Malgun Gothic" pitchFamily="34" charset="-120"/>
+              </a:rPr>
+              <a:t>하나의 큰 모델을 여러 인스턴스가 가리킨다.</a:t>
+            </a:r>
+            <a:endParaRPr lang="en-US" sz="1820" dirty="0"/>
+          </a:p>
+        </p:txBody>
+      </p:sp>
+      <p:sp>
+        <p:nvSpPr>
+          <p:cNvPr id="8" name="Shape 6"/>
+          <p:cNvSpPr/>
+          <p:nvPr/>
+        </p:nvSpPr>
+        <p:spPr>
+          <a:xfrm>
+            <a:off x="685800" y="2359152"/>
+            <a:ext cx="1819656" cy="658368"/>
+          </a:xfrm>
+          <a:prstGeom prst="roundRect">
+            <a:avLst>
+              <a:gd name="adj" fmla="val 8333"/>
+            </a:avLst>
+          </a:prstGeom>
+          <a:solidFill>
+            <a:srgbClr val="15803D"/>
+          </a:solidFill>
+          <a:ln w="12700">
+            <a:solidFill>
+              <a:srgbClr val="15803D"/>
+            </a:solidFill>
+            <a:prstDash val="solid"/>
+          </a:ln>
+        </p:spPr>
+      </p:sp>
+      <p:sp>
+        <p:nvSpPr>
+          <p:cNvPr id="9" name="Text 7"/>
+          <p:cNvSpPr/>
+          <p:nvPr/>
+        </p:nvSpPr>
+        <p:spPr>
+          <a:xfrm>
+            <a:off x="758952" y="2560320"/>
+            <a:ext cx="1673352" cy="219456"/>
+          </a:xfrm>
+          <a:prstGeom prst="rect">
+            <a:avLst/>
+          </a:prstGeom>
+          <a:noFill/>
+          <a:ln/>
+        </p:spPr>
+        <p:txBody>
+          <a:bodyPr wrap="square" lIns="0" tIns="0" rIns="0" bIns="0" rtlCol="0" anchor="ctr">
+            <a:normAutofit/>
+          </a:bodyPr>
+          <a:lstStyle/>
+          <a:p>
+            <a:pPr marL="0" indent="0" algn="ctr">
+              <a:buNone/>
+            </a:pPr>
+            <a:r>
+              <a:rPr lang="en-US" sz="1280" b="1" dirty="0">
+                <a:solidFill>
+                  <a:srgbClr val="FFFFFF"/>
+                </a:solidFill>
+                <a:latin typeface="Malgun Gothic" pitchFamily="34" charset="0"/>
+                <a:ea typeface="Malgun Gothic" pitchFamily="34" charset="-122"/>
+                <a:cs typeface="Malgun Gothic" pitchFamily="34" charset="-120"/>
+              </a:rPr>
+              <a:t>TreeModel</a:t>
+            </a:r>
+            <a:endParaRPr lang="en-US" sz="1280" dirty="0"/>
+          </a:p>
+        </p:txBody>
+      </p:sp>
+      <p:sp>
+        <p:nvSpPr>
+          <p:cNvPr id="10" name="Text 8"/>
+          <p:cNvSpPr/>
+          <p:nvPr/>
+        </p:nvSpPr>
+        <p:spPr>
+          <a:xfrm>
+            <a:off x="2532888" y="2569464"/>
+            <a:ext cx="109728" cy="182880"/>
+          </a:xfrm>
+          <a:prstGeom prst="rect">
+            <a:avLst/>
+          </a:prstGeom>
+          <a:noFill/>
+          <a:ln/>
+        </p:spPr>
+        <p:txBody>
+          <a:bodyPr wrap="square" lIns="0" tIns="0" rIns="0" bIns="0" rtlCol="0" anchor="ctr"/>
+          <a:lstStyle/>
+          <a:p>
+            <a:pPr marL="0" indent="0">
+              <a:buNone/>
+            </a:pPr>
+            <a:r>
+              <a:rPr lang="en-US" sz="1250" dirty="0">
+                <a:solidFill>
+                  <a:srgbClr val="64707D"/>
+                </a:solidFill>
+              </a:rPr>
+              <a:t>→</a:t>
+            </a:r>
+            <a:endParaRPr lang="en-US" sz="1250" dirty="0"/>
+          </a:p>
+        </p:txBody>
+      </p:sp>
+      <p:sp>
+        <p:nvSpPr>
+          <p:cNvPr id="11" name="Shape 9"/>
+          <p:cNvSpPr/>
+          <p:nvPr/>
+        </p:nvSpPr>
+        <p:spPr>
+          <a:xfrm>
+            <a:off x="2670048" y="2359152"/>
+            <a:ext cx="1819656" cy="658368"/>
+          </a:xfrm>
+          <a:prstGeom prst="roundRect">
+            <a:avLst>
+              <a:gd name="adj" fmla="val 8333"/>
+            </a:avLst>
+          </a:prstGeom>
+          <a:solidFill>
+            <a:srgbClr val="F59E0B"/>
+          </a:solidFill>
+          <a:ln w="12700">
+            <a:solidFill>
+              <a:srgbClr val="F59E0B"/>
+            </a:solidFill>
+            <a:prstDash val="solid"/>
+          </a:ln>
+        </p:spPr>
+      </p:sp>
+      <p:sp>
+        <p:nvSpPr>
+          <p:cNvPr id="12" name="Text 10"/>
+          <p:cNvSpPr/>
+          <p:nvPr/>
+        </p:nvSpPr>
+        <p:spPr>
+          <a:xfrm>
+            <a:off x="2743200" y="2560320"/>
+            <a:ext cx="1673352" cy="219456"/>
+          </a:xfrm>
+          <a:prstGeom prst="rect">
+            <a:avLst/>
+          </a:prstGeom>
+          <a:noFill/>
+          <a:ln/>
+        </p:spPr>
+        <p:txBody>
+          <a:bodyPr wrap="square" lIns="0" tIns="0" rIns="0" bIns="0" rtlCol="0" anchor="ctr">
+            <a:normAutofit/>
+          </a:bodyPr>
+          <a:lstStyle/>
+          <a:p>
+            <a:pPr marL="0" indent="0" algn="ctr">
+              <a:buNone/>
+            </a:pPr>
+            <a:r>
+              <a:rPr lang="en-US" sz="1280" b="1" dirty="0">
+                <a:solidFill>
+                  <a:srgbClr val="FFFFFF"/>
+                </a:solidFill>
+                <a:latin typeface="Malgun Gothic" pitchFamily="34" charset="0"/>
+                <a:ea typeface="Malgun Gothic" pitchFamily="34" charset="-122"/>
+                <a:cs typeface="Malgun Gothic" pitchFamily="34" charset="-120"/>
+              </a:rPr>
+              <a:t>Tree A</a:t>
+            </a:r>
+            <a:endParaRPr lang="en-US" sz="1280" dirty="0"/>
+          </a:p>
+        </p:txBody>
+      </p:sp>
+      <p:sp>
+        <p:nvSpPr>
+          <p:cNvPr id="13" name="Text 11"/>
+          <p:cNvSpPr/>
+          <p:nvPr/>
+        </p:nvSpPr>
+        <p:spPr>
+          <a:xfrm>
+            <a:off x="4517136" y="2569464"/>
+            <a:ext cx="109728" cy="182880"/>
+          </a:xfrm>
+          <a:prstGeom prst="rect">
+            <a:avLst/>
+          </a:prstGeom>
+          <a:noFill/>
+          <a:ln/>
+        </p:spPr>
+        <p:txBody>
+          <a:bodyPr wrap="square" lIns="0" tIns="0" rIns="0" bIns="0" rtlCol="0" anchor="ctr"/>
+          <a:lstStyle/>
+          <a:p>
+            <a:pPr marL="0" indent="0">
+              <a:buNone/>
+            </a:pPr>
+            <a:r>
+              <a:rPr lang="en-US" sz="1250" dirty="0">
+                <a:solidFill>
+                  <a:srgbClr val="64707D"/>
+                </a:solidFill>
+              </a:rPr>
+              <a:t>→</a:t>
+            </a:r>
+            <a:endParaRPr lang="en-US" sz="1250" dirty="0"/>
+          </a:p>
+        </p:txBody>
+      </p:sp>
+      <p:sp>
+        <p:nvSpPr>
+          <p:cNvPr id="14" name="Shape 12"/>
+          <p:cNvSpPr/>
+          <p:nvPr/>
+        </p:nvSpPr>
+        <p:spPr>
+          <a:xfrm>
+            <a:off x="4654296" y="2359152"/>
+            <a:ext cx="1819656" cy="658368"/>
+          </a:xfrm>
+          <a:prstGeom prst="roundRect">
+            <a:avLst>
+              <a:gd name="adj" fmla="val 8333"/>
+            </a:avLst>
+          </a:prstGeom>
+          <a:solidFill>
+            <a:srgbClr val="E45745"/>
+          </a:solidFill>
+          <a:ln w="12700">
+            <a:solidFill>
+              <a:srgbClr val="E45745"/>
+            </a:solidFill>
+            <a:prstDash val="solid"/>
+          </a:ln>
+        </p:spPr>
+      </p:sp>
+      <p:sp>
+        <p:nvSpPr>
+          <p:cNvPr id="15" name="Text 13"/>
+          <p:cNvSpPr/>
+          <p:nvPr/>
+        </p:nvSpPr>
+        <p:spPr>
+          <a:xfrm>
+            <a:off x="4727448" y="2560320"/>
+            <a:ext cx="1673352" cy="219456"/>
+          </a:xfrm>
+          <a:prstGeom prst="rect">
+            <a:avLst/>
+          </a:prstGeom>
+          <a:noFill/>
+          <a:ln/>
+        </p:spPr>
+        <p:txBody>
+          <a:bodyPr wrap="square" lIns="0" tIns="0" rIns="0" bIns="0" rtlCol="0" anchor="ctr">
+            <a:normAutofit/>
+          </a:bodyPr>
+          <a:lstStyle/>
+          <a:p>
+            <a:pPr marL="0" indent="0" algn="ctr">
+              <a:buNone/>
+            </a:pPr>
+            <a:r>
+              <a:rPr lang="en-US" sz="1280" b="1" dirty="0">
+                <a:solidFill>
+                  <a:srgbClr val="FFFFFF"/>
+                </a:solidFill>
+                <a:latin typeface="Malgun Gothic" pitchFamily="34" charset="0"/>
+                <a:ea typeface="Malgun Gothic" pitchFamily="34" charset="-122"/>
+                <a:cs typeface="Malgun Gothic" pitchFamily="34" charset="-120"/>
+              </a:rPr>
+              <a:t>Tree B</a:t>
+            </a:r>
+            <a:endParaRPr lang="en-US" sz="1280" dirty="0"/>
+          </a:p>
+        </p:txBody>
+      </p:sp>
+      <p:sp>
+        <p:nvSpPr>
+          <p:cNvPr id="16" name="Text 14"/>
+          <p:cNvSpPr/>
+          <p:nvPr/>
+        </p:nvSpPr>
+        <p:spPr>
+          <a:xfrm>
+            <a:off x="6501384" y="2569464"/>
+            <a:ext cx="109728" cy="182880"/>
+          </a:xfrm>
+          <a:prstGeom prst="rect">
+            <a:avLst/>
+          </a:prstGeom>
+          <a:noFill/>
+          <a:ln/>
+        </p:spPr>
+        <p:txBody>
+          <a:bodyPr wrap="square" lIns="0" tIns="0" rIns="0" bIns="0" rtlCol="0" anchor="ctr"/>
+          <a:lstStyle/>
+          <a:p>
+            <a:pPr marL="0" indent="0">
+              <a:buNone/>
+            </a:pPr>
+            <a:r>
+              <a:rPr lang="en-US" sz="1250" dirty="0">
+                <a:solidFill>
+                  <a:srgbClr val="64707D"/>
+                </a:solidFill>
+              </a:rPr>
+              <a:t>→</a:t>
+            </a:r>
+            <a:endParaRPr lang="en-US" sz="1250" dirty="0"/>
+          </a:p>
+        </p:txBody>
+      </p:sp>
+      <p:sp>
+        <p:nvSpPr>
+          <p:cNvPr id="17" name="Shape 15"/>
+          <p:cNvSpPr/>
+          <p:nvPr/>
+        </p:nvSpPr>
+        <p:spPr>
+          <a:xfrm>
+            <a:off x="6638544" y="2359152"/>
+            <a:ext cx="1819656" cy="658368"/>
+          </a:xfrm>
+          <a:prstGeom prst="roundRect">
+            <a:avLst>
+              <a:gd name="adj" fmla="val 8333"/>
+            </a:avLst>
+          </a:prstGeom>
+          <a:solidFill>
+            <a:srgbClr val="2563EB"/>
+          </a:solidFill>
+          <a:ln w="12700">
+            <a:solidFill>
+              <a:srgbClr val="2563EB"/>
+            </a:solidFill>
+            <a:prstDash val="solid"/>
+          </a:ln>
+        </p:spPr>
+      </p:sp>
+      <p:sp>
+        <p:nvSpPr>
+          <p:cNvPr id="18" name="Text 16"/>
+          <p:cNvSpPr/>
+          <p:nvPr/>
+        </p:nvSpPr>
+        <p:spPr>
+          <a:xfrm>
+            <a:off x="6711696" y="2560320"/>
+            <a:ext cx="1673352" cy="219456"/>
+          </a:xfrm>
+          <a:prstGeom prst="rect">
+            <a:avLst/>
+          </a:prstGeom>
+          <a:noFill/>
+          <a:ln/>
+        </p:spPr>
+        <p:txBody>
+          <a:bodyPr wrap="square" lIns="0" tIns="0" rIns="0" bIns="0" rtlCol="0" anchor="ctr">
+            <a:normAutofit/>
+          </a:bodyPr>
+          <a:lstStyle/>
+          <a:p>
+            <a:pPr marL="0" indent="0" algn="ctr">
+              <a:buNone/>
+            </a:pPr>
+            <a:r>
+              <a:rPr lang="en-US" sz="1280" b="1" dirty="0">
+                <a:solidFill>
+                  <a:srgbClr val="FFFFFF"/>
+                </a:solidFill>
+                <a:latin typeface="Malgun Gothic" pitchFamily="34" charset="0"/>
+                <a:ea typeface="Malgun Gothic" pitchFamily="34" charset="-122"/>
+                <a:cs typeface="Malgun Gothic" pitchFamily="34" charset="-120"/>
+              </a:rPr>
+              <a:t>Tree C</a:t>
+            </a:r>
+            <a:endParaRPr lang="en-US" sz="1280" dirty="0"/>
+          </a:p>
+        </p:txBody>
+      </p:sp>
+      <p:sp>
+        <p:nvSpPr>
+          <p:cNvPr id="19" name="Shape 17"/>
+          <p:cNvSpPr/>
+          <p:nvPr/>
+        </p:nvSpPr>
+        <p:spPr>
+          <a:xfrm>
+            <a:off x="822960" y="3621024"/>
+            <a:ext cx="82296" cy="82296"/>
+          </a:xfrm>
+          <a:prstGeom prst="ellipse">
+            <a:avLst/>
+          </a:prstGeom>
+          <a:solidFill>
+            <a:srgbClr val="15803D"/>
+          </a:solidFill>
+          <a:ln w="12700">
+            <a:solidFill>
+              <a:srgbClr val="15803D"/>
+            </a:solidFill>
+            <a:prstDash val="solid"/>
+          </a:ln>
+        </p:spPr>
+      </p:sp>
+      <p:sp>
+        <p:nvSpPr>
+          <p:cNvPr id="20" name="Text 18"/>
+          <p:cNvSpPr/>
+          <p:nvPr/>
+        </p:nvSpPr>
+        <p:spPr>
+          <a:xfrm>
+            <a:off x="1024128" y="3520440"/>
+            <a:ext cx="7406640" cy="310896"/>
+          </a:xfrm>
+          <a:prstGeom prst="rect">
+            <a:avLst/>
+          </a:prstGeom>
+          <a:noFill/>
+          <a:ln/>
+        </p:spPr>
+        <p:txBody>
+          <a:bodyPr wrap="square" lIns="254" tIns="254" rIns="254" bIns="254" rtlCol="0" anchor="t">
+            <a:normAutofit/>
+          </a:bodyPr>
+          <a:lstStyle/>
+          <a:p>
+            <a:pPr marL="0" indent="0">
+              <a:buNone/>
+            </a:pPr>
+            <a:r>
+              <a:rPr lang="en-US" altLang="ko-KR" sz="1580">
+                <a:solidFill>
+                  <a:srgbClr val="17212B"/>
+                </a:solidFill>
+                <a:latin typeface="Malgun Gothic" pitchFamily="34" charset="0"/>
+                <a:ea typeface="Malgun Gothic" pitchFamily="34" charset="-122"/>
+                <a:cs typeface="Malgun Gothic" pitchFamily="34" charset="-120"/>
+              </a:rPr>
+              <a:t>TreeModel: Mesh, Material</a:t>
+            </a:r>
+            <a:r>
+              <a:rPr lang="ko-KR" altLang="en-US" sz="1580">
+                <a:solidFill>
+                  <a:srgbClr val="17212B"/>
+                </a:solidFill>
+                <a:latin typeface="Malgun Gothic" pitchFamily="34" charset="0"/>
+                <a:ea typeface="Malgun Gothic" pitchFamily="34" charset="-122"/>
+                <a:cs typeface="Malgun Gothic" pitchFamily="34" charset="-120"/>
+              </a:rPr>
+              <a:t>처럼 무겁고 공통으로 쓰는 데이터</a:t>
+            </a:r>
+            <a:endParaRPr lang="en-US" sz="1580" dirty="0"/>
+          </a:p>
+        </p:txBody>
+      </p:sp>
+      <p:sp>
+        <p:nvSpPr>
+          <p:cNvPr id="21" name="Shape 19"/>
+          <p:cNvSpPr/>
+          <p:nvPr/>
+        </p:nvSpPr>
+        <p:spPr>
+          <a:xfrm>
+            <a:off x="822960" y="4078224"/>
+            <a:ext cx="82296" cy="82296"/>
+          </a:xfrm>
+          <a:prstGeom prst="ellipse">
+            <a:avLst/>
+          </a:prstGeom>
+          <a:solidFill>
+            <a:srgbClr val="15803D"/>
+          </a:solidFill>
+          <a:ln w="12700">
+            <a:solidFill>
+              <a:srgbClr val="15803D"/>
+            </a:solidFill>
+            <a:prstDash val="solid"/>
+          </a:ln>
+        </p:spPr>
+      </p:sp>
+      <p:sp>
+        <p:nvSpPr>
+          <p:cNvPr id="22" name="Text 20"/>
+          <p:cNvSpPr/>
+          <p:nvPr/>
+        </p:nvSpPr>
+        <p:spPr>
+          <a:xfrm>
+            <a:off x="1024128" y="3977640"/>
+            <a:ext cx="7406640" cy="310896"/>
+          </a:xfrm>
+          <a:prstGeom prst="rect">
+            <a:avLst/>
+          </a:prstGeom>
+          <a:noFill/>
+          <a:ln/>
+        </p:spPr>
+        <p:txBody>
+          <a:bodyPr wrap="square" lIns="254" tIns="254" rIns="254" bIns="254" rtlCol="0" anchor="t">
+            <a:normAutofit/>
+          </a:bodyPr>
+          <a:lstStyle/>
+          <a:p>
+            <a:pPr marL="0" indent="0">
+              <a:buNone/>
+            </a:pPr>
+            <a:r>
+              <a:rPr lang="en-US" sz="1580" dirty="0">
+                <a:solidFill>
+                  <a:srgbClr val="17212B"/>
+                </a:solidFill>
+                <a:latin typeface="Malgun Gothic" pitchFamily="34" charset="0"/>
+                <a:ea typeface="Malgun Gothic" pitchFamily="34" charset="-122"/>
+                <a:cs typeface="Malgun Gothic" pitchFamily="34" charset="-120"/>
+              </a:rPr>
+              <a:t>TreeInstance: Position, Scale, Tint처럼 가볍고 개별적인 데이터</a:t>
+            </a:r>
+            <a:endParaRPr lang="en-US" sz="1580" dirty="0"/>
+          </a:p>
+        </p:txBody>
+      </p:sp>
+    </p:spTree>
+  </p:cSld>
+  <p:clrMapOvr>
+    <a:masterClrMapping/>
+  </p:clrMapOvr>
+</p:sld>
+</file>
+
+<file path=ppt/slides/slide9.xml><?xml version="1.0" encoding="utf-8"?>
+<p:sld xmlns:a="http://schemas.openxmlformats.org/drawingml/2006/main" xmlns:r="http://schemas.openxmlformats.org/officeDocument/2006/relationships" xmlns:p="http://schemas.openxmlformats.org/presentationml/2006/main">
+  <p:cSld name="Slide 11">
+    <p:bg>
+      <p:bgPr>
+        <a:solidFill>
+          <a:srgbClr val="FAF7EF"/>
+        </a:solidFill>
+        <a:effectLst/>
+      </p:bgPr>
+    </p:bg>
+    <p:spTree>
+      <p:nvGrpSpPr>
+        <p:cNvPr id="1" name=""/>
+        <p:cNvGrpSpPr/>
+        <p:nvPr/>
+      </p:nvGrpSpPr>
+      <p:grpSpPr>
+        <a:xfrm>
+          <a:off x="0" y="0"/>
+          <a:ext cx="0" cy="0"/>
+          <a:chOff x="0" y="0"/>
+          <a:chExt cx="0" cy="0"/>
+        </a:xfrm>
+      </p:grpSpPr>
+      <p:sp>
+        <p:nvSpPr>
+          <p:cNvPr id="2" name="Shape 0"/>
+          <p:cNvSpPr/>
+          <p:nvPr/>
+        </p:nvSpPr>
+        <p:spPr>
+          <a:xfrm>
+            <a:off x="0" y="0"/>
+            <a:ext cx="9144000" cy="5715000"/>
+          </a:xfrm>
+          <a:prstGeom prst="rect">
+            <a:avLst/>
+          </a:prstGeom>
+          <a:solidFill>
+            <a:srgbClr val="FAF7EF"/>
+          </a:solidFill>
+          <a:ln w="12700">
+            <a:solidFill>
+              <a:srgbClr val="FAF7EF"/>
+            </a:solidFill>
+            <a:prstDash val="solid"/>
+          </a:ln>
+        </p:spPr>
+      </p:sp>
+      <p:sp>
+        <p:nvSpPr>
+          <p:cNvPr id="3" name="Shape 1"/>
+          <p:cNvSpPr/>
+          <p:nvPr/>
+        </p:nvSpPr>
+        <p:spPr>
+          <a:xfrm>
+            <a:off x="0" y="0"/>
+            <a:ext cx="118872" cy="5715000"/>
+          </a:xfrm>
+          <a:prstGeom prst="rect">
+            <a:avLst/>
+          </a:prstGeom>
+          <a:solidFill>
+            <a:srgbClr val="E45745"/>
+          </a:solidFill>
+          <a:ln w="12700">
+            <a:solidFill>
+              <a:srgbClr val="E45745"/>
+            </a:solidFill>
+            <a:prstDash val="solid"/>
+          </a:ln>
+        </p:spPr>
+      </p:sp>
+      <p:sp>
+        <p:nvSpPr>
+          <p:cNvPr id="4" name="Text 2"/>
+          <p:cNvSpPr/>
+          <p:nvPr/>
+        </p:nvSpPr>
+        <p:spPr>
+          <a:xfrm>
+            <a:off x="8549640" y="5358384"/>
+            <a:ext cx="310896" cy="146304"/>
+          </a:xfrm>
+          <a:prstGeom prst="rect">
+            <a:avLst/>
+          </a:prstGeom>
+          <a:noFill/>
+          <a:ln/>
+        </p:spPr>
+        <p:txBody>
+          <a:bodyPr wrap="square" lIns="0" tIns="0" rIns="0" bIns="0" rtlCol="0" anchor="ctr"/>
+          <a:lstStyle/>
+          <a:p>
+            <a:pPr marL="0" indent="0" algn="r">
+              <a:buNone/>
+            </a:pPr>
+            <a:r>
+              <a:rPr lang="en-US" sz="700">
+                <a:solidFill>
+                  <a:srgbClr val="9F968C"/>
+                </a:solidFill>
+                <a:latin typeface="Aptos" pitchFamily="34" charset="0"/>
+                <a:ea typeface="Aptos" pitchFamily="34" charset="-122"/>
+                <a:cs typeface="Aptos" pitchFamily="34" charset="-120"/>
+              </a:rPr>
+              <a:t>09</a:t>
+            </a:r>
+            <a:endParaRPr lang="en-US" sz="700" dirty="0"/>
+          </a:p>
+        </p:txBody>
+      </p:sp>
+      <p:sp>
+        <p:nvSpPr>
+          <p:cNvPr id="5" name="Text 3"/>
+          <p:cNvSpPr/>
+          <p:nvPr/>
+        </p:nvSpPr>
+        <p:spPr>
+          <a:xfrm>
+            <a:off x="594360" y="5340096"/>
+            <a:ext cx="4663440" cy="164592"/>
+          </a:xfrm>
+          <a:prstGeom prst="rect">
+            <a:avLst/>
+          </a:prstGeom>
+          <a:noFill/>
+          <a:ln/>
+        </p:spPr>
+        <p:txBody>
+          <a:bodyPr wrap="square" lIns="0" tIns="0" rIns="0" bIns="0" rtlCol="0" anchor="ctr"/>
+          <a:lstStyle/>
+          <a:p>
+            <a:pPr marL="0" indent="0">
+              <a:buNone/>
+            </a:pPr>
+            <a:r>
+              <a:rPr lang="en-US" sz="700" dirty="0">
+                <a:solidFill>
+                  <a:srgbClr val="9F968C"/>
+                </a:solidFill>
+                <a:latin typeface="Malgun Gothic" pitchFamily="34" charset="0"/>
+                <a:ea typeface="Malgun Gothic" pitchFamily="34" charset="-122"/>
+                <a:cs typeface="Malgun Gothic" pitchFamily="34" charset="-120"/>
+              </a:rPr>
+              <a:t>Game Programming Patterns - Flyweight | Unity/C#</a:t>
+            </a:r>
+            <a:endParaRPr lang="en-US" sz="700" dirty="0"/>
+          </a:p>
+        </p:txBody>
+      </p:sp>
+      <p:sp>
+        <p:nvSpPr>
+          <p:cNvPr id="6" name="Text 4"/>
+          <p:cNvSpPr/>
+          <p:nvPr/>
+        </p:nvSpPr>
+        <p:spPr>
+          <a:xfrm>
+            <a:off x="594360" y="347472"/>
+            <a:ext cx="8046720" cy="420624"/>
+          </a:xfrm>
+          <a:prstGeom prst="rect">
+            <a:avLst/>
+          </a:prstGeom>
+          <a:noFill/>
+          <a:ln/>
+        </p:spPr>
+        <p:txBody>
+          <a:bodyPr wrap="square" lIns="0" tIns="0" rIns="0" bIns="0" rtlCol="0" anchor="ctr">
+            <a:normAutofit/>
+          </a:bodyPr>
+          <a:lstStyle/>
+          <a:p>
+            <a:pPr marL="0" indent="0">
+              <a:buNone/>
+            </a:pPr>
+            <a:r>
+              <a:rPr lang="en-US" sz="2500" b="1" dirty="0">
+                <a:solidFill>
+                  <a:srgbClr val="17212B"/>
+                </a:solidFill>
+                <a:latin typeface="Malgun Gothic" pitchFamily="34" charset="0"/>
+                <a:ea typeface="Malgun Gothic" pitchFamily="34" charset="-122"/>
+                <a:cs typeface="Malgun Gothic" pitchFamily="34" charset="-120"/>
+              </a:rPr>
+              <a:t>Type Object와 비슷하지만 목적이 다르다</a:t>
+            </a:r>
+            <a:endParaRPr lang="en-US" sz="2500" dirty="0"/>
+          </a:p>
+        </p:txBody>
+      </p:sp>
+      <p:sp>
+        <p:nvSpPr>
+          <p:cNvPr id="7" name="Text 5"/>
+          <p:cNvSpPr/>
+          <p:nvPr/>
+        </p:nvSpPr>
+        <p:spPr>
+          <a:xfrm>
+            <a:off x="804672" y="1371600"/>
+            <a:ext cx="3474720" cy="320040"/>
+          </a:xfrm>
+          <a:prstGeom prst="rect">
+            <a:avLst/>
+          </a:prstGeom>
+          <a:noFill/>
+          <a:ln/>
+        </p:spPr>
+        <p:txBody>
+          <a:bodyPr wrap="square" lIns="254" tIns="254" rIns="254" bIns="254" rtlCol="0" anchor="t">
+            <a:normAutofit/>
+          </a:bodyPr>
+          <a:lstStyle/>
+          <a:p>
+            <a:pPr marL="0" indent="0">
+              <a:buNone/>
+            </a:pPr>
+            <a:r>
+              <a:rPr lang="en-US" sz="1950" b="1" dirty="0">
+                <a:solidFill>
+                  <a:srgbClr val="E45745"/>
+                </a:solidFill>
+                <a:latin typeface="Malgun Gothic" pitchFamily="34" charset="0"/>
+                <a:ea typeface="Malgun Gothic" pitchFamily="34" charset="-122"/>
+                <a:cs typeface="Malgun Gothic" pitchFamily="34" charset="-120"/>
+              </a:rPr>
+              <a:t>Type Object</a:t>
+            </a:r>
+            <a:endParaRPr lang="en-US" sz="1950" dirty="0"/>
+          </a:p>
+        </p:txBody>
+      </p:sp>
+      <p:sp>
+        <p:nvSpPr>
+          <p:cNvPr id="8" name="Shape 6"/>
+          <p:cNvSpPr/>
+          <p:nvPr/>
+        </p:nvSpPr>
+        <p:spPr>
+          <a:xfrm>
+            <a:off x="859536" y="1947672"/>
+            <a:ext cx="82296" cy="82296"/>
+          </a:xfrm>
+          <a:prstGeom prst="ellipse">
+            <a:avLst/>
+          </a:prstGeom>
+          <a:solidFill>
+            <a:srgbClr val="E45745"/>
+          </a:solidFill>
+          <a:ln w="12700">
+            <a:solidFill>
+              <a:srgbClr val="E45745"/>
+            </a:solidFill>
+            <a:prstDash val="solid"/>
+          </a:ln>
+        </p:spPr>
+      </p:sp>
+      <p:sp>
+        <p:nvSpPr>
+          <p:cNvPr id="9" name="Text 7"/>
+          <p:cNvSpPr/>
+          <p:nvPr/>
+        </p:nvSpPr>
+        <p:spPr>
+          <a:xfrm>
+            <a:off x="1060704" y="1847088"/>
+            <a:ext cx="3246120" cy="621792"/>
+          </a:xfrm>
+          <a:prstGeom prst="rect">
+            <a:avLst/>
+          </a:prstGeom>
+          <a:noFill/>
+          <a:ln/>
+        </p:spPr>
+        <p:txBody>
+          <a:bodyPr wrap="square" lIns="254" tIns="254" rIns="254" bIns="254" rtlCol="0" anchor="t">
+            <a:normAutofit/>
+          </a:bodyPr>
+          <a:lstStyle/>
+          <a:p>
+            <a:pPr marL="0" indent="0">
+              <a:buNone/>
+            </a:pPr>
+            <a:r>
+              <a:rPr lang="en-US" sz="1420" dirty="0">
+                <a:solidFill>
+                  <a:srgbClr val="17212B"/>
+                </a:solidFill>
+                <a:latin typeface="Malgun Gothic" pitchFamily="34" charset="0"/>
+                <a:ea typeface="Malgun Gothic" pitchFamily="34" charset="-122"/>
+                <a:cs typeface="Malgun Gothic" pitchFamily="34" charset="-120"/>
+              </a:rPr>
+              <a:t>클래스 수를 줄이기 위해 타입을 데이터로 만든다.</a:t>
+            </a:r>
+            <a:endParaRPr lang="en-US" sz="1420" dirty="0"/>
+          </a:p>
+        </p:txBody>
+      </p:sp>
+      <p:sp>
+        <p:nvSpPr>
+          <p:cNvPr id="10" name="Shape 8"/>
+          <p:cNvSpPr/>
+          <p:nvPr/>
+        </p:nvSpPr>
+        <p:spPr>
+          <a:xfrm>
+            <a:off x="859536" y="2734056"/>
+            <a:ext cx="82296" cy="82296"/>
+          </a:xfrm>
+          <a:prstGeom prst="ellipse">
+            <a:avLst/>
+          </a:prstGeom>
+          <a:solidFill>
+            <a:srgbClr val="E45745"/>
+          </a:solidFill>
+          <a:ln w="12700">
+            <a:solidFill>
+              <a:srgbClr val="E45745"/>
+            </a:solidFill>
+            <a:prstDash val="solid"/>
+          </a:ln>
+        </p:spPr>
+      </p:sp>
+      <p:sp>
+        <p:nvSpPr>
+          <p:cNvPr id="11" name="Text 9"/>
+          <p:cNvSpPr/>
+          <p:nvPr/>
+        </p:nvSpPr>
+        <p:spPr>
+          <a:xfrm>
+            <a:off x="1060704" y="2633472"/>
+            <a:ext cx="3246120" cy="621792"/>
+          </a:xfrm>
+          <a:prstGeom prst="rect">
+            <a:avLst/>
+          </a:prstGeom>
+          <a:noFill/>
+          <a:ln/>
+        </p:spPr>
+        <p:txBody>
+          <a:bodyPr wrap="square" lIns="254" tIns="254" rIns="254" bIns="254" rtlCol="0" anchor="t">
+            <a:normAutofit/>
+          </a:bodyPr>
+          <a:lstStyle/>
+          <a:p>
+            <a:pPr marL="0" indent="0">
+              <a:buNone/>
+            </a:pPr>
+            <a:r>
+              <a:rPr lang="en-US" sz="1420" dirty="0">
+                <a:solidFill>
+                  <a:srgbClr val="17212B"/>
+                </a:solidFill>
+                <a:latin typeface="Malgun Gothic" pitchFamily="34" charset="0"/>
+                <a:ea typeface="Malgun Gothic" pitchFamily="34" charset="-122"/>
+                <a:cs typeface="Malgun Gothic" pitchFamily="34" charset="-120"/>
+              </a:rPr>
+              <a:t>설계 유연성이 주목적이다.</a:t>
+            </a:r>
+            <a:endParaRPr lang="en-US" sz="1420" dirty="0"/>
+          </a:p>
+        </p:txBody>
+      </p:sp>
+      <p:sp>
+        <p:nvSpPr>
+          <p:cNvPr id="12" name="Shape 10"/>
+          <p:cNvSpPr/>
+          <p:nvPr/>
+        </p:nvSpPr>
+        <p:spPr>
+          <a:xfrm>
+            <a:off x="859536" y="3520440"/>
+            <a:ext cx="82296" cy="82296"/>
+          </a:xfrm>
+          <a:prstGeom prst="ellipse">
+            <a:avLst/>
+          </a:prstGeom>
+          <a:solidFill>
+            <a:srgbClr val="E45745"/>
+          </a:solidFill>
+          <a:ln w="12700">
+            <a:solidFill>
+              <a:srgbClr val="E45745"/>
+            </a:solidFill>
+            <a:prstDash val="solid"/>
+          </a:ln>
+        </p:spPr>
+      </p:sp>
+      <p:sp>
+        <p:nvSpPr>
+          <p:cNvPr id="13" name="Text 11"/>
+          <p:cNvSpPr/>
+          <p:nvPr/>
+        </p:nvSpPr>
+        <p:spPr>
+          <a:xfrm>
+            <a:off x="1060704" y="3419856"/>
+            <a:ext cx="3246120" cy="621792"/>
+          </a:xfrm>
+          <a:prstGeom prst="rect">
+            <a:avLst/>
+          </a:prstGeom>
+          <a:noFill/>
+          <a:ln/>
+        </p:spPr>
+        <p:txBody>
+          <a:bodyPr wrap="square" lIns="254" tIns="254" rIns="254" bIns="254" rtlCol="0" anchor="t">
+            <a:normAutofit/>
+          </a:bodyPr>
+          <a:lstStyle/>
+          <a:p>
+            <a:pPr marL="0" indent="0">
+              <a:buNone/>
+            </a:pPr>
+            <a:r>
+              <a:rPr lang="ko-KR" altLang="en-US" sz="1420">
+                <a:solidFill>
+                  <a:srgbClr val="17212B"/>
+                </a:solidFill>
+                <a:latin typeface="Malgun Gothic" pitchFamily="34" charset="0"/>
+                <a:ea typeface="Malgun Gothic" pitchFamily="34" charset="-122"/>
+                <a:cs typeface="Malgun Gothic" pitchFamily="34" charset="-120"/>
+              </a:rPr>
+              <a:t>메모리 공유는 부수적인 효과에 가깝다</a:t>
+            </a:r>
+            <a:r>
+              <a:rPr lang="en-US" altLang="ko-KR" sz="1420">
+                <a:solidFill>
+                  <a:srgbClr val="17212B"/>
+                </a:solidFill>
+                <a:latin typeface="Malgun Gothic" pitchFamily="34" charset="0"/>
+                <a:ea typeface="Malgun Gothic" pitchFamily="34" charset="-122"/>
+                <a:cs typeface="Malgun Gothic" pitchFamily="34" charset="-120"/>
+              </a:rPr>
+              <a:t>.</a:t>
+            </a:r>
+            <a:endParaRPr lang="en-US" sz="1420" dirty="0"/>
+          </a:p>
+        </p:txBody>
+      </p:sp>
+      <p:sp>
+        <p:nvSpPr>
+          <p:cNvPr id="14" name="Text 12"/>
+          <p:cNvSpPr/>
+          <p:nvPr/>
+        </p:nvSpPr>
+        <p:spPr>
+          <a:xfrm>
+            <a:off x="4800600" y="1371600"/>
+            <a:ext cx="3474720" cy="320040"/>
+          </a:xfrm>
+          <a:prstGeom prst="rect">
+            <a:avLst/>
+          </a:prstGeom>
+          <a:noFill/>
+          <a:ln/>
+        </p:spPr>
+        <p:txBody>
+          <a:bodyPr wrap="square" lIns="254" tIns="254" rIns="254" bIns="254" rtlCol="0" anchor="t">
+            <a:normAutofit/>
+          </a:bodyPr>
+          <a:lstStyle/>
+          <a:p>
+            <a:pPr marL="0" indent="0">
+              <a:buNone/>
+            </a:pPr>
+            <a:r>
+              <a:rPr lang="en-US" sz="1950" b="1" dirty="0">
+                <a:solidFill>
+                  <a:srgbClr val="15803D"/>
+                </a:solidFill>
+                <a:latin typeface="Malgun Gothic" pitchFamily="34" charset="0"/>
+                <a:ea typeface="Malgun Gothic" pitchFamily="34" charset="-122"/>
+                <a:cs typeface="Malgun Gothic" pitchFamily="34" charset="-120"/>
+              </a:rPr>
+              <a:t>Flyweight</a:t>
+            </a:r>
+            <a:endParaRPr lang="en-US" sz="1950" dirty="0"/>
+          </a:p>
+        </p:txBody>
+      </p:sp>
+      <p:sp>
+        <p:nvSpPr>
+          <p:cNvPr id="15" name="Shape 13"/>
+          <p:cNvSpPr/>
+          <p:nvPr/>
+        </p:nvSpPr>
+        <p:spPr>
+          <a:xfrm>
+            <a:off x="4855464" y="1947672"/>
+            <a:ext cx="82296" cy="82296"/>
+          </a:xfrm>
+          <a:prstGeom prst="ellipse">
+            <a:avLst/>
+          </a:prstGeom>
+          <a:solidFill>
+            <a:srgbClr val="15803D"/>
+          </a:solidFill>
+          <a:ln w="12700">
+            <a:solidFill>
+              <a:srgbClr val="15803D"/>
+            </a:solidFill>
+            <a:prstDash val="solid"/>
+          </a:ln>
+        </p:spPr>
+      </p:sp>
+      <p:sp>
+        <p:nvSpPr>
+          <p:cNvPr id="16" name="Text 14"/>
+          <p:cNvSpPr/>
+          <p:nvPr/>
+        </p:nvSpPr>
+        <p:spPr>
+          <a:xfrm>
+            <a:off x="5056632" y="1847088"/>
+            <a:ext cx="3246120" cy="621792"/>
+          </a:xfrm>
+          <a:prstGeom prst="rect">
+            <a:avLst/>
+          </a:prstGeom>
+          <a:noFill/>
+          <a:ln/>
+        </p:spPr>
+        <p:txBody>
+          <a:bodyPr wrap="square" lIns="254" tIns="254" rIns="254" bIns="254" rtlCol="0" anchor="t">
+            <a:normAutofit/>
+          </a:bodyPr>
+          <a:lstStyle/>
+          <a:p>
+            <a:pPr marL="0" indent="0">
+              <a:buNone/>
+            </a:pPr>
+            <a:r>
+              <a:rPr lang="en-US" sz="1420" dirty="0">
+                <a:solidFill>
+                  <a:srgbClr val="17212B"/>
+                </a:solidFill>
+                <a:latin typeface="Malgun Gothic" pitchFamily="34" charset="0"/>
+                <a:ea typeface="Malgun Gothic" pitchFamily="34" charset="-122"/>
+                <a:cs typeface="Malgun Gothic" pitchFamily="34" charset="-120"/>
+              </a:rPr>
+              <a:t>많은 객체의 중복 데이터를 줄인다.</a:t>
+            </a:r>
+            <a:endParaRPr lang="en-US" sz="1420" dirty="0"/>
+          </a:p>
+        </p:txBody>
+      </p:sp>
+      <p:sp>
+        <p:nvSpPr>
+          <p:cNvPr id="17" name="Shape 15"/>
+          <p:cNvSpPr/>
+          <p:nvPr/>
+        </p:nvSpPr>
+        <p:spPr>
+          <a:xfrm>
+            <a:off x="4855464" y="2734056"/>
+            <a:ext cx="82296" cy="82296"/>
+          </a:xfrm>
+          <a:prstGeom prst="ellipse">
+            <a:avLst/>
+          </a:prstGeom>
+          <a:solidFill>
+            <a:srgbClr val="15803D"/>
+          </a:solidFill>
+          <a:ln w="12700">
+            <a:solidFill>
+              <a:srgbClr val="15803D"/>
+            </a:solidFill>
+            <a:prstDash val="solid"/>
+          </a:ln>
+        </p:spPr>
+      </p:sp>
+      <p:sp>
+        <p:nvSpPr>
+          <p:cNvPr id="18" name="Text 16"/>
+          <p:cNvSpPr/>
+          <p:nvPr/>
+        </p:nvSpPr>
+        <p:spPr>
+          <a:xfrm>
+            <a:off x="5056632" y="2633472"/>
+            <a:ext cx="3246120" cy="621792"/>
+          </a:xfrm>
+          <a:prstGeom prst="rect">
+            <a:avLst/>
+          </a:prstGeom>
+          <a:noFill/>
+          <a:ln/>
+        </p:spPr>
+        <p:txBody>
+          <a:bodyPr wrap="square" lIns="254" tIns="254" rIns="254" bIns="254" rtlCol="0" anchor="t">
+            <a:normAutofit/>
+          </a:bodyPr>
+          <a:lstStyle/>
+          <a:p>
+            <a:pPr marL="0" indent="0">
+              <a:buNone/>
+            </a:pPr>
+            <a:r>
+              <a:rPr lang="ko-KR" altLang="en-US" sz="1420">
+                <a:solidFill>
+                  <a:srgbClr val="17212B"/>
+                </a:solidFill>
+                <a:latin typeface="Malgun Gothic" pitchFamily="34" charset="0"/>
+                <a:ea typeface="Malgun Gothic" pitchFamily="34" charset="-122"/>
+                <a:cs typeface="Malgun Gothic" pitchFamily="34" charset="-120"/>
+              </a:rPr>
+              <a:t>메모리 효율이 주목적이다</a:t>
+            </a:r>
+            <a:r>
+              <a:rPr lang="en-US" altLang="ko-KR" sz="1420">
+                <a:solidFill>
+                  <a:srgbClr val="17212B"/>
+                </a:solidFill>
+                <a:latin typeface="Malgun Gothic" pitchFamily="34" charset="0"/>
+                <a:ea typeface="Malgun Gothic" pitchFamily="34" charset="-122"/>
+                <a:cs typeface="Malgun Gothic" pitchFamily="34" charset="-120"/>
+              </a:rPr>
+              <a:t>.</a:t>
+            </a:r>
+            <a:endParaRPr lang="en-US" sz="1420" dirty="0"/>
+          </a:p>
+        </p:txBody>
+      </p:sp>
+      <p:sp>
+        <p:nvSpPr>
+          <p:cNvPr id="19" name="Shape 17"/>
+          <p:cNvSpPr/>
+          <p:nvPr/>
+        </p:nvSpPr>
+        <p:spPr>
+          <a:xfrm>
+            <a:off x="4855464" y="3520440"/>
+            <a:ext cx="82296" cy="82296"/>
+          </a:xfrm>
+          <a:prstGeom prst="ellipse">
+            <a:avLst/>
+          </a:prstGeom>
+          <a:solidFill>
+            <a:srgbClr val="15803D"/>
+          </a:solidFill>
+          <a:ln w="12700">
+            <a:solidFill>
+              <a:srgbClr val="15803D"/>
+            </a:solidFill>
+            <a:prstDash val="solid"/>
+          </a:ln>
+        </p:spPr>
+      </p:sp>
+      <p:sp>
+        <p:nvSpPr>
+          <p:cNvPr id="20" name="Text 18"/>
+          <p:cNvSpPr/>
+          <p:nvPr/>
+        </p:nvSpPr>
+        <p:spPr>
+          <a:xfrm>
+            <a:off x="5056632" y="3419856"/>
+            <a:ext cx="3246120" cy="621792"/>
+          </a:xfrm>
+          <a:prstGeom prst="rect">
+            <a:avLst/>
+          </a:prstGeom>
+          <a:noFill/>
+          <a:ln/>
+        </p:spPr>
+        <p:txBody>
+          <a:bodyPr wrap="square" lIns="254" tIns="254" rIns="254" bIns="254" rtlCol="0" anchor="t">
+            <a:normAutofit/>
+          </a:bodyPr>
+          <a:lstStyle/>
+          <a:p>
+            <a:pPr marL="0" indent="0">
+              <a:buNone/>
+            </a:pPr>
+            <a:r>
+              <a:rPr lang="en-US" sz="1420" dirty="0">
+                <a:solidFill>
+                  <a:srgbClr val="17212B"/>
+                </a:solidFill>
+                <a:latin typeface="Malgun Gothic" pitchFamily="34" charset="0"/>
+                <a:ea typeface="Malgun Gothic" pitchFamily="34" charset="-122"/>
+                <a:cs typeface="Malgun Gothic" pitchFamily="34" charset="-120"/>
+              </a:rPr>
+              <a:t>공유 상태는 거의 불변이어야 한다.</a:t>
+            </a:r>
+            <a:endParaRPr lang="en-US" sz="1420" dirty="0"/>
           </a:p>
         </p:txBody>
       </p:sp>

--- a/03차시_Flyweight/강의자료/유니티 프로그래밍 패턴 3차시 - Flyweight.pptx
+++ b/03차시_Flyweight/강의자료/유니티 프로그래밍 패턴 3차시 - Flyweight.pptx
@@ -316,15 +316,15 @@
           <a:p>
             <a:r>
               <a:rPr lang="ko-KR" altLang="en-US"/>
-              <a:t>오늘은 </a:t>
+              <a:t>오늘은</a:t>
             </a:r>
             <a:r>
               <a:rPr lang="en-US" altLang="ko-KR"/>
-              <a:t>Flyweight </a:t>
+              <a:t>Flyweight</a:t>
             </a:r>
             <a:r>
               <a:rPr lang="ko-KR" altLang="en-US"/>
-              <a:t>패턴을 </a:t>
+              <a:t>패턴을</a:t>
             </a:r>
             <a:r>
               <a:rPr lang="en-US" altLang="ko-KR"/>
@@ -332,11 +332,11 @@
             </a:r>
             <a:r>
               <a:rPr lang="ko-KR" altLang="en-US"/>
-              <a:t>와 </a:t>
+              <a:t>와</a:t>
             </a:r>
             <a:r>
               <a:rPr lang="en-US" altLang="ko-KR"/>
-              <a:t>C# </a:t>
+              <a:t>C#</a:t>
             </a:r>
             <a:r>
               <a:rPr lang="ko-KR" altLang="en-US"/>
@@ -344,7 +344,7 @@
             </a:r>
             <a:r>
               <a:rPr lang="en-US" altLang="ko-KR"/>
-              <a:t>. </a:t>
+              <a:t>.</a:t>
             </a:r>
             <a:r>
               <a:rPr lang="ko-KR" altLang="en-US"/>
@@ -352,7 +352,7 @@
             </a:r>
             <a:r>
               <a:rPr lang="en-US" altLang="ko-KR"/>
-              <a:t>, </a:t>
+              <a:t>,</a:t>
             </a:r>
             <a:r>
               <a:rPr lang="ko-KR" altLang="en-US"/>
@@ -448,7 +448,7 @@
           <a:p>
             <a:r>
               <a:rPr lang="ko-KR" altLang="en-US"/>
-              <a:t>원문은 </a:t>
+              <a:t>예제에서는</a:t>
             </a:r>
             <a:r>
               <a:rPr lang="en-US"/>
@@ -456,7 +456,7 @@
             </a:r>
             <a:r>
               <a:rPr lang="ko-KR" altLang="en-US"/>
-              <a:t>와 </a:t>
+              <a:t>와</a:t>
             </a:r>
             <a:r>
               <a:rPr lang="en-US"/>
@@ -464,7 +464,7 @@
             </a:r>
             <a:r>
               <a:rPr lang="ko-KR" altLang="en-US"/>
-              <a:t>의 </a:t>
+              <a:t>의</a:t>
             </a:r>
             <a:r>
               <a:rPr lang="en-US"/>
@@ -476,7 +476,7 @@
             </a:r>
             <a:r>
               <a:rPr lang="en-US" altLang="ko-KR"/>
-              <a:t>. </a:t>
+              <a:t>.</a:t>
             </a:r>
             <a:r>
               <a:rPr lang="en-US"/>
@@ -484,7 +484,7 @@
             </a:r>
             <a:r>
               <a:rPr lang="ko-KR" altLang="en-US"/>
-              <a:t>에서도 </a:t>
+              <a:t>에서도</a:t>
             </a:r>
             <a:r>
               <a:rPr lang="en-US"/>
@@ -492,7 +492,7 @@
             </a:r>
             <a:r>
               <a:rPr lang="ko-KR" altLang="en-US"/>
-              <a:t>과 </a:t>
+              <a:t>과</a:t>
             </a:r>
             <a:r>
               <a:rPr lang="en-US"/>
@@ -592,11 +592,11 @@
           <a:p>
             <a:r>
               <a:rPr lang="ko-KR" altLang="en-US"/>
-              <a:t>실제 </a:t>
+              <a:t>실제</a:t>
             </a:r>
             <a:r>
               <a:rPr lang="en-US" altLang="ko-KR"/>
-              <a:t>Unity </a:t>
+              <a:t>Unity</a:t>
             </a:r>
             <a:r>
               <a:rPr lang="ko-KR" altLang="en-US"/>
@@ -604,7 +604,7 @@
             </a:r>
             <a:r>
               <a:rPr lang="en-US" altLang="ko-KR"/>
-              <a:t>, </a:t>
+              <a:t>,</a:t>
             </a:r>
             <a:r>
               <a:rPr lang="ko-KR" altLang="en-US"/>
@@ -612,7 +612,7 @@
             </a:r>
             <a:r>
               <a:rPr lang="en-US" altLang="ko-KR"/>
-              <a:t>, SRP Batcher </a:t>
+              <a:t>, SRP Batcher</a:t>
             </a:r>
             <a:r>
               <a:rPr lang="ko-KR" altLang="en-US"/>
@@ -620,7 +620,7 @@
             </a:r>
             <a:r>
               <a:rPr lang="en-US" altLang="ko-KR"/>
-              <a:t>, </a:t>
+              <a:t>,</a:t>
             </a:r>
             <a:r>
               <a:rPr lang="ko-KR" altLang="en-US"/>
@@ -716,7 +716,7 @@
           <a:p>
             <a:r>
               <a:rPr lang="en-US" dirty="0"/>
-              <a:t>원문은 context-free 상태를 intrinsic state로 설명하고, 인스턴스마다 다른 값을 extrinsic state로 설명한다.</a:t>
+              <a:t>예제에서는 context-free 상태를 intrinsic state로 설명하고, 인스턴스마다 다른 값을 extrinsic state로 설명한다.</a:t>
             </a:r>
           </a:p>
         </p:txBody>
@@ -890,7 +890,7 @@
           <a:p>
             <a:r>
               <a:rPr lang="ko-KR" altLang="en-US"/>
-              <a:t>원문은 </a:t>
+              <a:t>예제에서는</a:t>
             </a:r>
             <a:r>
               <a:rPr lang="en-US" altLang="ko-KR"/>
@@ -898,7 +898,7 @@
             </a:r>
             <a:r>
               <a:rPr lang="ko-KR" altLang="en-US"/>
-              <a:t>의 메서드가 </a:t>
+              <a:t>의 메서드가</a:t>
             </a:r>
             <a:r>
               <a:rPr lang="en-US" altLang="ko-KR"/>
@@ -998,7 +998,7 @@
           <a:p>
             <a:r>
               <a:rPr lang="en-US" dirty="0"/>
-              <a:t>원문은 나무 다음으로 지형 타일 예시를 든다.</a:t>
+              <a:t>예제에서는 나무 다음으로 지형 타일 예시를 든다.</a:t>
             </a:r>
           </a:p>
         </p:txBody>
@@ -1085,7 +1085,7 @@
           <a:p>
             <a:r>
               <a:rPr lang="en-US" dirty="0"/>
-              <a:t>원문은 enum으로 지형 타입을 저장하고 switch로 movement cost와 water 여부를 반환하는 방식을 먼저 보여준다.</a:t>
+              <a:t>예제에서는 enum으로 지형 타입을 저장하고 switch로 movement cost와 water 여부를 반환하는 방식을 먼저 보여준다.</a:t>
             </a:r>
           </a:p>
         </p:txBody>
@@ -1172,11 +1172,11 @@
           <a:p>
             <a:r>
               <a:rPr lang="ko-KR" altLang="en-US"/>
-              <a:t>원문은 이 방식이 동작은 하지만 보기 좋지 않다고 설명한다</a:t>
+              <a:t>예제에서는 이 방식이 동작은 하지만 보기 좋지 않다고 설명한다</a:t>
             </a:r>
             <a:r>
               <a:rPr lang="en-US" altLang="ko-KR"/>
-              <a:t>. </a:t>
+              <a:t>.</a:t>
             </a:r>
             <a:r>
               <a:rPr lang="ko-KR" altLang="en-US"/>
@@ -1272,15 +1272,15 @@
           <a:p>
             <a:r>
               <a:rPr lang="ko-KR" altLang="en-US"/>
-              <a:t>원문의 </a:t>
+              <a:t>예제의</a:t>
             </a:r>
             <a:r>
               <a:rPr lang="en-US" altLang="ko-KR"/>
-              <a:t>Terrain </a:t>
+              <a:t>Terrain</a:t>
             </a:r>
             <a:r>
               <a:rPr lang="ko-KR" altLang="en-US"/>
-              <a:t>클래스를 </a:t>
+              <a:t>클래스를</a:t>
             </a:r>
             <a:r>
               <a:rPr lang="en-US" altLang="ko-KR"/>
@@ -1292,7 +1292,7 @@
             </a:r>
             <a:r>
               <a:rPr lang="en-US" altLang="ko-KR"/>
-              <a:t>. </a:t>
+              <a:t>.</a:t>
             </a:r>
             <a:r>
               <a:rPr lang="ko-KR" altLang="en-US"/>
@@ -1388,7 +1388,7 @@
           <a:p>
             <a:r>
               <a:rPr lang="en-US" dirty="0"/>
-              <a:t>원문은 Terrain* tiles_[WIDTH][HEIGHT] 구조를 사용한다. C#에서는 2차원 배열에 TerrainType 참조를 저장한다.</a:t>
+              <a:t>예제에서는 Terrain* tiles_[WIDTH][HEIGHT] 구조를 사용한다. C#에서는 2차원 배열에 TerrainType 참조를 저장한다.</a:t>
             </a:r>
           </a:p>
         </p:txBody>
@@ -1475,35 +1475,35 @@
           <a:p>
             <a:r>
               <a:rPr lang="ko-KR" altLang="en-US"/>
-              <a:t>원문 출처는 </a:t>
+              <a:t>수업 흐름은 공유 데이터와 개별 상태 분리, Unity 지형 예제, 장단점, 실습 순서입니다.</a:t>
             </a:r>
             <a:r>
               <a:rPr lang="en-US" altLang="ko-KR"/>
-              <a:t>Robert Nystrom</a:t>
+              <a:t/>
             </a:r>
             <a:r>
               <a:rPr lang="ko-KR" altLang="en-US"/>
-              <a:t>의 </a:t>
+              <a:t/>
             </a:r>
             <a:r>
               <a:rPr lang="en-US" altLang="ko-KR"/>
-              <a:t>Game Programming Patterns, Flyweight </a:t>
+              <a:t/>
             </a:r>
             <a:r>
               <a:rPr lang="ko-KR" altLang="en-US"/>
-              <a:t>장이다</a:t>
+              <a:t/>
             </a:r>
             <a:r>
               <a:rPr lang="en-US" altLang="ko-KR"/>
-              <a:t>. </a:t>
+              <a:t/>
             </a:r>
             <a:r>
               <a:rPr lang="ko-KR" altLang="en-US"/>
-              <a:t>슬라이드는 원문을 그대로 옮기지 않고 수업용 설명으로 재구성했다</a:t>
+              <a:t/>
             </a:r>
             <a:r>
               <a:rPr lang="en-US" altLang="ko-KR"/>
-              <a:t>.</a:t>
+              <a:t/>
             </a:r>
             <a:endParaRPr lang="en-US" dirty="0"/>
           </a:p>
@@ -1526,7 +1526,7 @@
           <a:p>
             <a:fld id="{F7021451-1387-4CA6-816F-3879F97B5CBC}" type="slidenum">
               <a:rPr lang="en-US"/>
-              <a:t>2</a:t>
+              <a:t/>
             </a:fld>
             <a:endParaRPr lang="en-US"/>
           </a:p>
@@ -1591,7 +1591,7 @@
           <a:p>
             <a:r>
               <a:rPr lang="ko-KR" altLang="en-US"/>
-              <a:t>원문은 초원으로 채우고 군데군데 언덕을 배치한 뒤 강을 그리는 간단한 생성 예시를 보여준다</a:t>
+              <a:t>예제에서는 초원으로 채우고 군데군데 언덕을 배치한 뒤 강을 그리는 간단한 생성 예시를 보여준다</a:t>
             </a:r>
             <a:r>
               <a:rPr lang="en-US" altLang="ko-KR"/>
@@ -1683,7 +1683,7 @@
           <a:p>
             <a:r>
               <a:rPr lang="ko-KR" altLang="en-US"/>
-              <a:t>원문은 포인터가 </a:t>
+              <a:t>예제에서는 포인터가</a:t>
             </a:r>
             <a:r>
               <a:rPr lang="en-US" altLang="ko-KR"/>
@@ -1691,7 +1691,7 @@
             </a:r>
             <a:r>
               <a:rPr lang="ko-KR" altLang="en-US"/>
-              <a:t>보다 크게 무겁지 않으면서 객체지향 </a:t>
+              <a:t>보다 크게 무겁지 않으면서 객체지향</a:t>
             </a:r>
             <a:r>
               <a:rPr lang="en-US" altLang="ko-KR"/>
@@ -1965,7 +1965,7 @@
           <a:p>
             <a:r>
               <a:rPr lang="en-US" dirty="0"/>
-              <a:t>원문 What About Performance 절이다. Flyweight가 항상 빠르다고 단정하지 않고 프로파일링을 강조한다.</a:t>
+              <a:t>예제 What About Performance 절이다. Flyweight가 항상 빠르다고 단정하지 않고 프로파일링을 강조한다.</a:t>
             </a:r>
           </a:p>
         </p:txBody>
@@ -2226,7 +2226,7 @@
           <a:p>
             <a:r>
               <a:rPr lang="en-US" dirty="0"/>
-              <a:t>원문 See Also를 수업용으로 정리한다.</a:t>
+              <a:t>예제 See Also를 수업용으로 정리한다.</a:t>
             </a:r>
           </a:p>
         </p:txBody>
@@ -2313,19 +2313,19 @@
           <a:p>
             <a:r>
               <a:rPr lang="ko-KR" altLang="en-US"/>
-              <a:t>실습은 </a:t>
+              <a:t>실습은</a:t>
             </a:r>
             <a:r>
               <a:rPr lang="en-US" altLang="ko-KR"/>
-              <a:t>ScriptableObject </a:t>
+              <a:t>ScriptableObject</a:t>
             </a:r>
             <a:r>
               <a:rPr lang="ko-KR" altLang="en-US"/>
-              <a:t>없이 </a:t>
+              <a:t>없이</a:t>
             </a:r>
             <a:r>
               <a:rPr lang="en-US" altLang="ko-KR"/>
-              <a:t>C# </a:t>
+              <a:t>C#</a:t>
             </a:r>
             <a:r>
               <a:rPr lang="ko-KR" altLang="en-US"/>
@@ -2333,15 +2333,15 @@
             </a:r>
             <a:r>
               <a:rPr lang="en-US" altLang="ko-KR"/>
-              <a:t>, </a:t>
+              <a:t>,</a:t>
             </a:r>
             <a:r>
               <a:rPr lang="ko-KR" altLang="en-US"/>
-              <a:t>확장 과제에서 </a:t>
+              <a:t>확장 과제에서</a:t>
             </a:r>
             <a:r>
               <a:rPr lang="en-US" altLang="ko-KR"/>
-              <a:t>ScriptableObject </a:t>
+              <a:t>ScriptableObject</a:t>
             </a:r>
             <a:r>
               <a:rPr lang="ko-KR" altLang="en-US"/>
@@ -2524,7 +2524,7 @@
           <a:p>
             <a:r>
               <a:rPr lang="en-US" dirty="0"/>
-              <a:t>원문은 장대한 숲을 예시로 시작한다. 실제 게임에서는 수천 개의 나무를 렌더링해야 하므로 데이터 중복이 문제가 된다.</a:t>
+              <a:t>예제에서는 장대한 숲을 예시로 시작한다. 실제 게임에서는 수천 개의 나무를 렌더링해야 하므로 데이터 중복이 문제가 된다.</a:t>
             </a:r>
           </a:p>
         </p:txBody>
@@ -3046,7 +3046,7 @@
           <a:p>
             <a:r>
               <a:rPr lang="en-US" dirty="0"/>
-              <a:t>원문의 Tree 클래스 예시를 C#으로 바꾸었다. 큰 데이터인 Mesh와 Texture가 각 객체 안에 들어가면 중복이 커진다.</a:t>
+              <a:t>예제의 Tree 클래스 예시를 C#으로 바꾸었다. 큰 데이터인 Mesh와 Texture가 각 객체 안에 들어가면 중복이 커진다.</a:t>
             </a:r>
           </a:p>
         </p:txBody>
@@ -3220,7 +3220,7 @@
           <a:p>
             <a:r>
               <a:rPr lang="ko-KR" altLang="en-US"/>
-              <a:t>원문은 </a:t>
+              <a:t>예제에서는</a:t>
             </a:r>
             <a:r>
               <a:rPr lang="en-US" altLang="ko-KR"/>
@@ -3228,7 +3228,7 @@
             </a:r>
             <a:r>
               <a:rPr lang="ko-KR" altLang="en-US"/>
-              <a:t>에 </a:t>
+              <a:t>에</a:t>
             </a:r>
             <a:r>
               <a:rPr lang="en-US" altLang="ko-KR"/>
@@ -3244,7 +3244,7 @@
             </a:r>
             <a:r>
               <a:rPr lang="ko-KR" altLang="en-US"/>
-              <a:t>에서는 </a:t>
+              <a:t>에서는</a:t>
             </a:r>
             <a:r>
               <a:rPr lang="en-US" altLang="ko-KR"/>
@@ -3252,7 +3252,7 @@
             </a:r>
             <a:r>
               <a:rPr lang="ko-KR" altLang="en-US"/>
-              <a:t>와 </a:t>
+              <a:t>와</a:t>
             </a:r>
             <a:r>
               <a:rPr lang="en-US" altLang="ko-KR"/>
@@ -3439,7 +3439,7 @@
           <a:p>
             <a:r>
               <a:rPr lang="en-US" dirty="0"/>
-              <a:t>원문의 그림은 여러 나무가 하나의 Model을 공유하는 구조를 보여준다.</a:t>
+              <a:t>예제의 그림은 여러 나무가 하나의 Model을 공유하는 구조를 보여준다.</a:t>
             </a:r>
           </a:p>
         </p:txBody>
@@ -3526,7 +3526,7 @@
           <a:p>
             <a:r>
               <a:rPr lang="en-US" dirty="0"/>
-              <a:t>원문은 Flyweight와 Type Object가 비슷해 보이지만 의도가 다르다고 설명한다.</a:t>
+              <a:t>예제에서는 Flyweight와 Type Object가 비슷해 보이지만 의도가 다르다고 설명한다.</a:t>
             </a:r>
           </a:p>
         </p:txBody>
@@ -4451,7 +4451,7 @@
                 <a:ea typeface="Malgun Gothic" pitchFamily="34" charset="-122"/>
                 <a:cs typeface="Malgun Gothic" pitchFamily="34" charset="-120"/>
               </a:rPr>
-              <a:t>Game Programming Patterns · Unity/C#</a:t>
+              <a:t>Unity/C# 설계 패턴</a:t>
             </a:r>
             <a:endParaRPr lang="en-US" sz="1050" dirty="0"/>
           </a:p>
@@ -4612,7 +4612,7 @@
                 <a:ea typeface="Malgun Gothic" pitchFamily="34" charset="-122"/>
                 <a:cs typeface="Malgun Gothic" pitchFamily="34" charset="-120"/>
               </a:rPr>
-              <a:t>Game Programming Patterns - Flyweight | Unity/C#</a:t>
+              <a:t>Flyweight | Unity/C#</a:t>
             </a:r>
             <a:endParaRPr lang="en-US" sz="700" dirty="0"/>
           </a:p>
@@ -5053,7 +5053,7 @@
                 <a:ea typeface="Malgun Gothic" pitchFamily="34" charset="-122"/>
                 <a:cs typeface="Malgun Gothic" pitchFamily="34" charset="-120"/>
               </a:rPr>
-              <a:t>Game Programming Patterns - Flyweight | Unity/C#</a:t>
+              <a:t>Flyweight | Unity/C#</a:t>
             </a:r>
             <a:endParaRPr lang="en-US" sz="700" dirty="0"/>
           </a:p>
@@ -5233,7 +5233,7 @@
                 <a:ea typeface="Consolas" pitchFamily="34" charset="-122"/>
                 <a:cs typeface="Consolas" pitchFamily="34" charset="-120"/>
               </a:rPr>
-              <a:t>                      Matrix4x4[] transforms)</a:t>
+              <a:t>Matrix4x4[] transforms)</a:t>
             </a:r>
             <a:endParaRPr lang="en-US" sz="1320" dirty="0"/>
           </a:p>
@@ -5267,7 +5267,7 @@
                 <a:ea typeface="Consolas" pitchFamily="34" charset="-122"/>
                 <a:cs typeface="Consolas" pitchFamily="34" charset="-120"/>
               </a:rPr>
-              <a:t>    Graphics.DrawMeshInstanced(</a:t>
+              <a:t>Graphics.DrawMeshInstanced(</a:t>
             </a:r>
             <a:endParaRPr lang="en-US" sz="1320" dirty="0"/>
           </a:p>
@@ -5284,7 +5284,7 @@
                 <a:ea typeface="Consolas" pitchFamily="34" charset="-122"/>
                 <a:cs typeface="Consolas" pitchFamily="34" charset="-120"/>
               </a:rPr>
-              <a:t>        mesh,</a:t>
+              <a:t>mesh,</a:t>
             </a:r>
             <a:endParaRPr lang="en-US" sz="1320" dirty="0"/>
           </a:p>
@@ -5301,7 +5301,7 @@
                 <a:ea typeface="Consolas" pitchFamily="34" charset="-122"/>
                 <a:cs typeface="Consolas" pitchFamily="34" charset="-120"/>
               </a:rPr>
-              <a:t>        0,</a:t>
+              <a:t>0,</a:t>
             </a:r>
             <a:endParaRPr lang="en-US" sz="1320" dirty="0"/>
           </a:p>
@@ -5318,7 +5318,7 @@
                 <a:ea typeface="Consolas" pitchFamily="34" charset="-122"/>
                 <a:cs typeface="Consolas" pitchFamily="34" charset="-120"/>
               </a:rPr>
-              <a:t>        material,</a:t>
+              <a:t>material,</a:t>
             </a:r>
             <a:endParaRPr lang="en-US" sz="1320" dirty="0"/>
           </a:p>
@@ -5335,7 +5335,7 @@
                 <a:ea typeface="Consolas" pitchFamily="34" charset="-122"/>
                 <a:cs typeface="Consolas" pitchFamily="34" charset="-120"/>
               </a:rPr>
-              <a:t>        transforms</a:t>
+              <a:t>transforms</a:t>
             </a:r>
             <a:endParaRPr lang="en-US" sz="1320" dirty="0"/>
           </a:p>
@@ -5352,7 +5352,7 @@
                 <a:ea typeface="Consolas" pitchFamily="34" charset="-122"/>
                 <a:cs typeface="Consolas" pitchFamily="34" charset="-120"/>
               </a:rPr>
-              <a:t>    );</a:t>
+              <a:t>);</a:t>
             </a:r>
             <a:endParaRPr lang="en-US" sz="1320" dirty="0"/>
           </a:p>
@@ -5530,7 +5530,7 @@
                 <a:ea typeface="Malgun Gothic" pitchFamily="34" charset="-122"/>
                 <a:cs typeface="Malgun Gothic" pitchFamily="34" charset="-120"/>
               </a:rPr>
-              <a:t>Game Programming Patterns - Flyweight | Unity/C#</a:t>
+              <a:t>Flyweight | Unity/C#</a:t>
             </a:r>
             <a:endParaRPr lang="en-US" sz="700" dirty="0"/>
           </a:p>
@@ -5982,7 +5982,7 @@
                 <a:ea typeface="Malgun Gothic" pitchFamily="34" charset="-122"/>
                 <a:cs typeface="Malgun Gothic" pitchFamily="34" charset="-120"/>
               </a:rPr>
-              <a:t>Game Programming Patterns - Flyweight | Unity/C#</a:t>
+              <a:t>Flyweight | Unity/C#</a:t>
             </a:r>
             <a:endParaRPr lang="en-US" sz="700" dirty="0"/>
           </a:p>
@@ -6576,7 +6576,7 @@
                 <a:ea typeface="Malgun Gothic" pitchFamily="34" charset="-122"/>
                 <a:cs typeface="Malgun Gothic" pitchFamily="34" charset="-120"/>
               </a:rPr>
-              <a:t>Position, Tint: </a:t>
+              <a:t>Position, Tint:</a:t>
             </a:r>
             <a:r>
               <a:rPr lang="ko-KR" altLang="en-US" sz="1580">
@@ -6759,7 +6759,7 @@
                 <a:ea typeface="Malgun Gothic" pitchFamily="34" charset="-122"/>
                 <a:cs typeface="Malgun Gothic" pitchFamily="34" charset="-120"/>
               </a:rPr>
-              <a:t>Game Programming Patterns - Flyweight | Unity/C#</a:t>
+              <a:t>Flyweight | Unity/C#</a:t>
             </a:r>
             <a:endParaRPr lang="en-US" sz="700" dirty="0"/>
           </a:p>
@@ -7064,7 +7064,7 @@
                 <a:ea typeface="Malgun Gothic" pitchFamily="34" charset="-122"/>
                 <a:cs typeface="Malgun Gothic" pitchFamily="34" charset="-120"/>
               </a:rPr>
-              <a:t>개별 색이 필요하면 </a:t>
+              <a:t>개별 색이 필요하면</a:t>
             </a:r>
             <a:r>
               <a:rPr lang="en-US" altLang="ko-KR" sz="1680">
@@ -7075,7 +7075,7 @@
                 <a:ea typeface="Malgun Gothic" pitchFamily="34" charset="-122"/>
                 <a:cs typeface="Malgun Gothic" pitchFamily="34" charset="-120"/>
               </a:rPr>
-              <a:t>MaterialPropertyBlock </a:t>
+              <a:t>MaterialPropertyBlock</a:t>
             </a:r>
             <a:r>
               <a:rPr lang="ko-KR" altLang="en-US" sz="1680">
@@ -7258,7 +7258,7 @@
                 <a:ea typeface="Malgun Gothic" pitchFamily="34" charset="-122"/>
                 <a:cs typeface="Malgun Gothic" pitchFamily="34" charset="-120"/>
               </a:rPr>
-              <a:t>Game Programming Patterns - Flyweight | Unity/C#</a:t>
+              <a:t>Flyweight | Unity/C#</a:t>
             </a:r>
             <a:endParaRPr lang="en-US" sz="700" dirty="0"/>
           </a:p>
@@ -7351,7 +7351,7 @@
                 <a:ea typeface="Malgun Gothic" pitchFamily="34" charset="-122"/>
                 <a:cs typeface="Malgun Gothic" pitchFamily="34" charset="-120"/>
               </a:rPr>
-              <a:t>, </a:t>
+              <a:t>,</a:t>
             </a:r>
             <a:r>
               <a:rPr lang="ko-KR" altLang="en-US" sz="3000" b="1">
@@ -7721,7 +7721,7 @@
                 <a:ea typeface="Malgun Gothic" pitchFamily="34" charset="-122"/>
                 <a:cs typeface="Malgun Gothic" pitchFamily="34" charset="-120"/>
               </a:rPr>
-              <a:t>Game Programming Patterns - Flyweight | Unity/C#</a:t>
+              <a:t>Flyweight | Unity/C#</a:t>
             </a:r>
             <a:endParaRPr lang="en-US" sz="700" dirty="0"/>
           </a:p>
@@ -7907,7 +7907,7 @@
                 <a:ea typeface="Consolas" pitchFamily="34" charset="-122"/>
                 <a:cs typeface="Consolas" pitchFamily="34" charset="-120"/>
               </a:rPr>
-              <a:t>    Grass,</a:t>
+              <a:t>Grass,</a:t>
             </a:r>
             <a:endParaRPr lang="en-US" sz="1180" dirty="0"/>
           </a:p>
@@ -7924,7 +7924,7 @@
                 <a:ea typeface="Consolas" pitchFamily="34" charset="-122"/>
                 <a:cs typeface="Consolas" pitchFamily="34" charset="-120"/>
               </a:rPr>
-              <a:t>    Hill,</a:t>
+              <a:t>Hill,</a:t>
             </a:r>
             <a:endParaRPr lang="en-US" sz="1180" dirty="0"/>
           </a:p>
@@ -7941,7 +7941,7 @@
                 <a:ea typeface="Consolas" pitchFamily="34" charset="-122"/>
                 <a:cs typeface="Consolas" pitchFamily="34" charset="-120"/>
               </a:rPr>
-              <a:t>    River</a:t>
+              <a:t>River</a:t>
             </a:r>
             <a:endParaRPr lang="en-US" sz="1180" dirty="0"/>
           </a:p>
@@ -8015,7 +8015,7 @@
                 <a:ea typeface="Consolas" pitchFamily="34" charset="-122"/>
                 <a:cs typeface="Consolas" pitchFamily="34" charset="-120"/>
               </a:rPr>
-              <a:t>    return kind switch</a:t>
+              <a:t>return kind switch</a:t>
             </a:r>
             <a:endParaRPr lang="en-US" sz="1180" dirty="0"/>
           </a:p>
@@ -8032,7 +8032,7 @@
                 <a:ea typeface="Consolas" pitchFamily="34" charset="-122"/>
                 <a:cs typeface="Consolas" pitchFamily="34" charset="-120"/>
               </a:rPr>
-              <a:t>    {</a:t>
+              <a:t>{</a:t>
             </a:r>
             <a:endParaRPr lang="en-US" sz="1180" dirty="0"/>
           </a:p>
@@ -8049,7 +8049,7 @@
                 <a:ea typeface="Consolas" pitchFamily="34" charset="-122"/>
                 <a:cs typeface="Consolas" pitchFamily="34" charset="-120"/>
               </a:rPr>
-              <a:t>        TerrainKind.Grass =&gt; 1,</a:t>
+              <a:t>TerrainKind.Grass =&gt; 1,</a:t>
             </a:r>
             <a:endParaRPr lang="en-US" sz="1180" dirty="0"/>
           </a:p>
@@ -8066,7 +8066,7 @@
                 <a:ea typeface="Consolas" pitchFamily="34" charset="-122"/>
                 <a:cs typeface="Consolas" pitchFamily="34" charset="-120"/>
               </a:rPr>
-              <a:t>        TerrainKind.Hill =&gt; 3,</a:t>
+              <a:t>TerrainKind.Hill =&gt; 3,</a:t>
             </a:r>
             <a:endParaRPr lang="en-US" sz="1180" dirty="0"/>
           </a:p>
@@ -8083,7 +8083,7 @@
                 <a:ea typeface="Consolas" pitchFamily="34" charset="-122"/>
                 <a:cs typeface="Consolas" pitchFamily="34" charset="-120"/>
               </a:rPr>
-              <a:t>        TerrainKind.River =&gt; 2,</a:t>
+              <a:t>TerrainKind.River =&gt; 2,</a:t>
             </a:r>
             <a:endParaRPr lang="en-US" sz="1180" dirty="0"/>
           </a:p>
@@ -8100,7 +8100,7 @@
                 <a:ea typeface="Consolas" pitchFamily="34" charset="-122"/>
                 <a:cs typeface="Consolas" pitchFamily="34" charset="-120"/>
               </a:rPr>
-              <a:t>        _ =&gt; 1</a:t>
+              <a:t>_ =&gt; 1</a:t>
             </a:r>
             <a:endParaRPr lang="en-US" sz="1180" dirty="0"/>
           </a:p>
@@ -8117,7 +8117,7 @@
                 <a:ea typeface="Consolas" pitchFamily="34" charset="-122"/>
                 <a:cs typeface="Consolas" pitchFamily="34" charset="-120"/>
               </a:rPr>
-              <a:t>    };</a:t>
+              <a:t>};</a:t>
             </a:r>
             <a:endParaRPr lang="en-US" sz="1180" dirty="0"/>
           </a:p>
@@ -8295,7 +8295,7 @@
                 <a:ea typeface="Malgun Gothic" pitchFamily="34" charset="-122"/>
                 <a:cs typeface="Malgun Gothic" pitchFamily="34" charset="-120"/>
               </a:rPr>
-              <a:t>Game Programming Patterns - Flyweight | Unity/C#</a:t>
+              <a:t>Flyweight | Unity/C#</a:t>
             </a:r>
             <a:endParaRPr lang="en-US" sz="700" dirty="0"/>
           </a:p>
@@ -8824,7 +8824,7 @@
                 <a:ea typeface="Malgun Gothic" pitchFamily="34" charset="-122"/>
                 <a:cs typeface="Malgun Gothic" pitchFamily="34" charset="-120"/>
               </a:rPr>
-              <a:t>Game Programming Patterns - Flyweight | Unity/C#</a:t>
+              <a:t>Flyweight | Unity/C#</a:t>
             </a:r>
             <a:endParaRPr lang="en-US" sz="700" dirty="0"/>
           </a:p>
@@ -9010,7 +9010,7 @@
                 <a:ea typeface="Consolas" pitchFamily="34" charset="-122"/>
                 <a:cs typeface="Consolas" pitchFamily="34" charset="-120"/>
               </a:rPr>
-              <a:t>    public int MovementCost { get; }</a:t>
+              <a:t>public int MovementCost { get; }</a:t>
             </a:r>
             <a:endParaRPr lang="en-US" sz="1100" dirty="0"/>
           </a:p>
@@ -9027,7 +9027,7 @@
                 <a:ea typeface="Consolas" pitchFamily="34" charset="-122"/>
                 <a:cs typeface="Consolas" pitchFamily="34" charset="-120"/>
               </a:rPr>
-              <a:t>    public bool IsWater { get; }</a:t>
+              <a:t>public bool IsWater { get; }</a:t>
             </a:r>
             <a:endParaRPr lang="en-US" sz="1100" dirty="0"/>
           </a:p>
@@ -9044,7 +9044,7 @@
                 <a:ea typeface="Consolas" pitchFamily="34" charset="-122"/>
                 <a:cs typeface="Consolas" pitchFamily="34" charset="-120"/>
               </a:rPr>
-              <a:t>    public Sprite Sprite { get; }</a:t>
+              <a:t>public Sprite Sprite { get; }</a:t>
             </a:r>
             <a:endParaRPr lang="en-US" sz="1100" dirty="0"/>
           </a:p>
@@ -9067,7 +9067,7 @@
                 <a:ea typeface="Consolas" pitchFamily="34" charset="-122"/>
                 <a:cs typeface="Consolas" pitchFamily="34" charset="-120"/>
               </a:rPr>
-              <a:t>    public TerrainType(int movementCost,</a:t>
+              <a:t>public TerrainType(int movementCost,</a:t>
             </a:r>
             <a:endParaRPr lang="en-US" sz="1100" dirty="0"/>
           </a:p>
@@ -9084,7 +9084,7 @@
                 <a:ea typeface="Consolas" pitchFamily="34" charset="-122"/>
                 <a:cs typeface="Consolas" pitchFamily="34" charset="-120"/>
               </a:rPr>
-              <a:t>                       bool isWater,</a:t>
+              <a:t>bool isWater,</a:t>
             </a:r>
             <a:endParaRPr lang="en-US" sz="1100" dirty="0"/>
           </a:p>
@@ -9101,7 +9101,7 @@
                 <a:ea typeface="Consolas" pitchFamily="34" charset="-122"/>
                 <a:cs typeface="Consolas" pitchFamily="34" charset="-120"/>
               </a:rPr>
-              <a:t>                       Sprite sprite)</a:t>
+              <a:t>Sprite sprite)</a:t>
             </a:r>
             <a:endParaRPr lang="en-US" sz="1100" dirty="0"/>
           </a:p>
@@ -9118,7 +9118,7 @@
                 <a:ea typeface="Consolas" pitchFamily="34" charset="-122"/>
                 <a:cs typeface="Consolas" pitchFamily="34" charset="-120"/>
               </a:rPr>
-              <a:t>    {</a:t>
+              <a:t>{</a:t>
             </a:r>
             <a:endParaRPr lang="en-US" sz="1100" dirty="0"/>
           </a:p>
@@ -9135,7 +9135,7 @@
                 <a:ea typeface="Consolas" pitchFamily="34" charset="-122"/>
                 <a:cs typeface="Consolas" pitchFamily="34" charset="-120"/>
               </a:rPr>
-              <a:t>        MovementCost = movementCost;</a:t>
+              <a:t>MovementCost = movementCost;</a:t>
             </a:r>
             <a:endParaRPr lang="en-US" sz="1100" dirty="0"/>
           </a:p>
@@ -9152,7 +9152,7 @@
                 <a:ea typeface="Consolas" pitchFamily="34" charset="-122"/>
                 <a:cs typeface="Consolas" pitchFamily="34" charset="-120"/>
               </a:rPr>
-              <a:t>        IsWater = isWater;</a:t>
+              <a:t>IsWater = isWater;</a:t>
             </a:r>
             <a:endParaRPr lang="en-US" sz="1100" dirty="0"/>
           </a:p>
@@ -9169,7 +9169,7 @@
                 <a:ea typeface="Consolas" pitchFamily="34" charset="-122"/>
                 <a:cs typeface="Consolas" pitchFamily="34" charset="-120"/>
               </a:rPr>
-              <a:t>        Sprite = sprite;</a:t>
+              <a:t>Sprite = sprite;</a:t>
             </a:r>
             <a:endParaRPr lang="en-US" sz="1100" dirty="0"/>
           </a:p>
@@ -9186,7 +9186,7 @@
                 <a:ea typeface="Consolas" pitchFamily="34" charset="-122"/>
                 <a:cs typeface="Consolas" pitchFamily="34" charset="-120"/>
               </a:rPr>
-              <a:t>    }</a:t>
+              <a:t>}</a:t>
             </a:r>
             <a:endParaRPr lang="en-US" sz="1100" dirty="0"/>
           </a:p>
@@ -9364,7 +9364,7 @@
                 <a:ea typeface="Malgun Gothic" pitchFamily="34" charset="-122"/>
                 <a:cs typeface="Malgun Gothic" pitchFamily="34" charset="-120"/>
               </a:rPr>
-              <a:t>Game Programming Patterns - Flyweight | Unity/C#</a:t>
+              <a:t>Flyweight | Unity/C#</a:t>
             </a:r>
             <a:endParaRPr lang="en-US" sz="700" dirty="0"/>
           </a:p>
@@ -9550,7 +9550,7 @@
                 <a:ea typeface="Consolas" pitchFamily="34" charset="-122"/>
                 <a:cs typeface="Consolas" pitchFamily="34" charset="-120"/>
               </a:rPr>
-              <a:t>    private readonly TerrainType[,] tiles;</a:t>
+              <a:t>private readonly TerrainType[,] tiles;</a:t>
             </a:r>
             <a:endParaRPr lang="en-US" sz="1220" dirty="0"/>
           </a:p>
@@ -9573,7 +9573,7 @@
                 <a:ea typeface="Consolas" pitchFamily="34" charset="-122"/>
                 <a:cs typeface="Consolas" pitchFamily="34" charset="-120"/>
               </a:rPr>
-              <a:t>    private readonly TerrainType grass;</a:t>
+              <a:t>private readonly TerrainType grass;</a:t>
             </a:r>
             <a:endParaRPr lang="en-US" sz="1220" dirty="0"/>
           </a:p>
@@ -9590,7 +9590,7 @@
                 <a:ea typeface="Consolas" pitchFamily="34" charset="-122"/>
                 <a:cs typeface="Consolas" pitchFamily="34" charset="-120"/>
               </a:rPr>
-              <a:t>    private readonly TerrainType hill;</a:t>
+              <a:t>private readonly TerrainType hill;</a:t>
             </a:r>
             <a:endParaRPr lang="en-US" sz="1220" dirty="0"/>
           </a:p>
@@ -9607,7 +9607,7 @@
                 <a:ea typeface="Consolas" pitchFamily="34" charset="-122"/>
                 <a:cs typeface="Consolas" pitchFamily="34" charset="-120"/>
               </a:rPr>
-              <a:t>    private readonly TerrainType river;</a:t>
+              <a:t>private readonly TerrainType river;</a:t>
             </a:r>
             <a:endParaRPr lang="en-US" sz="1220" dirty="0"/>
           </a:p>
@@ -9630,7 +9630,7 @@
                 <a:ea typeface="Consolas" pitchFamily="34" charset="-122"/>
                 <a:cs typeface="Consolas" pitchFamily="34" charset="-120"/>
               </a:rPr>
-              <a:t>    public TerrainType GetTile(int x, int y)</a:t>
+              <a:t>public TerrainType GetTile(int x, int y)</a:t>
             </a:r>
             <a:endParaRPr lang="en-US" sz="1220" dirty="0"/>
           </a:p>
@@ -9647,7 +9647,7 @@
                 <a:ea typeface="Consolas" pitchFamily="34" charset="-122"/>
                 <a:cs typeface="Consolas" pitchFamily="34" charset="-120"/>
               </a:rPr>
-              <a:t>    {</a:t>
+              <a:t>{</a:t>
             </a:r>
             <a:endParaRPr lang="en-US" sz="1220" dirty="0"/>
           </a:p>
@@ -9664,7 +9664,7 @@
                 <a:ea typeface="Consolas" pitchFamily="34" charset="-122"/>
                 <a:cs typeface="Consolas" pitchFamily="34" charset="-120"/>
               </a:rPr>
-              <a:t>        return tiles[x, y];</a:t>
+              <a:t>return tiles[x, y];</a:t>
             </a:r>
             <a:endParaRPr lang="en-US" sz="1220" dirty="0"/>
           </a:p>
@@ -9681,7 +9681,7 @@
                 <a:ea typeface="Consolas" pitchFamily="34" charset="-122"/>
                 <a:cs typeface="Consolas" pitchFamily="34" charset="-120"/>
               </a:rPr>
-              <a:t>    }</a:t>
+              <a:t>}</a:t>
             </a:r>
             <a:endParaRPr lang="en-US" sz="1220" dirty="0"/>
           </a:p>
@@ -9859,7 +9859,7 @@
                 <a:ea typeface="Malgun Gothic" pitchFamily="34" charset="-122"/>
                 <a:cs typeface="Malgun Gothic" pitchFamily="34" charset="-120"/>
               </a:rPr>
-              <a:t>Game Programming Patterns - Flyweight | Unity/C#</a:t>
+              <a:t>Flyweight | Unity/C#</a:t>
             </a:r>
             <a:endParaRPr lang="en-US" sz="700" dirty="0"/>
           </a:p>
@@ -9977,7 +9977,7 @@
                 <a:ea typeface="Malgun Gothic" pitchFamily="34" charset="-122"/>
                 <a:cs typeface="Malgun Gothic" pitchFamily="34" charset="-120"/>
               </a:rPr>
-              <a:t>를 </a:t>
+              <a:t>를</a:t>
             </a:r>
             <a:r>
               <a:rPr lang="en-US" altLang="ko-KR" sz="1720">
@@ -10391,7 +10391,7 @@
                 <a:ea typeface="Malgun Gothic" pitchFamily="34" charset="-122"/>
                 <a:cs typeface="Malgun Gothic" pitchFamily="34" charset="-120"/>
               </a:rPr>
-              <a:t>Game Programming Patterns - Flyweight | Unity/C#</a:t>
+              <a:t>Flyweight | Unity/C#</a:t>
             </a:r>
             <a:endParaRPr lang="en-US" sz="700" dirty="0"/>
           </a:p>
@@ -10577,7 +10577,7 @@
                 <a:ea typeface="Consolas" pitchFamily="34" charset="-122"/>
                 <a:cs typeface="Consolas" pitchFamily="34" charset="-120"/>
               </a:rPr>
-              <a:t>    for (int y = 0; y &lt; height; y++)</a:t>
+              <a:t>for (int y = 0; y &lt; height; y++)</a:t>
             </a:r>
             <a:endParaRPr lang="en-US" sz="1150" dirty="0"/>
           </a:p>
@@ -10594,7 +10594,7 @@
                 <a:ea typeface="Consolas" pitchFamily="34" charset="-122"/>
                 <a:cs typeface="Consolas" pitchFamily="34" charset="-120"/>
               </a:rPr>
-              <a:t>    {</a:t>
+              <a:t>{</a:t>
             </a:r>
             <a:endParaRPr lang="en-US" sz="1150" dirty="0"/>
           </a:p>
@@ -10611,7 +10611,7 @@
                 <a:ea typeface="Consolas" pitchFamily="34" charset="-122"/>
                 <a:cs typeface="Consolas" pitchFamily="34" charset="-120"/>
               </a:rPr>
-              <a:t>        tiles[x, y] = Random.value &lt; 0.1f</a:t>
+              <a:t>tiles[x, y] = Random.value &lt; 0.1f</a:t>
             </a:r>
             <a:endParaRPr lang="en-US" sz="1150" dirty="0"/>
           </a:p>
@@ -10628,7 +10628,7 @@
                 <a:ea typeface="Consolas" pitchFamily="34" charset="-122"/>
                 <a:cs typeface="Consolas" pitchFamily="34" charset="-120"/>
               </a:rPr>
-              <a:t>            ? hill</a:t>
+              <a:t>? hill</a:t>
             </a:r>
             <a:endParaRPr lang="en-US" sz="1150" dirty="0"/>
           </a:p>
@@ -10645,7 +10645,7 @@
                 <a:ea typeface="Consolas" pitchFamily="34" charset="-122"/>
                 <a:cs typeface="Consolas" pitchFamily="34" charset="-120"/>
               </a:rPr>
-              <a:t>            : grass;</a:t>
+              <a:t>: grass;</a:t>
             </a:r>
             <a:endParaRPr lang="en-US" sz="1150" dirty="0"/>
           </a:p>
@@ -10662,7 +10662,7 @@
                 <a:ea typeface="Consolas" pitchFamily="34" charset="-122"/>
                 <a:cs typeface="Consolas" pitchFamily="34" charset="-120"/>
               </a:rPr>
-              <a:t>    }</a:t>
+              <a:t>}</a:t>
             </a:r>
             <a:endParaRPr lang="en-US" sz="1150" dirty="0"/>
           </a:p>
@@ -10736,7 +10736,7 @@
                 <a:ea typeface="Consolas" pitchFamily="34" charset="-122"/>
                 <a:cs typeface="Consolas" pitchFamily="34" charset="-120"/>
               </a:rPr>
-              <a:t>    tiles[riverX, y] = river;</a:t>
+              <a:t>tiles[riverX, y] = river;</a:t>
             </a:r>
             <a:endParaRPr lang="en-US" sz="1150" dirty="0"/>
           </a:p>
@@ -10897,7 +10897,7 @@
                 <a:ea typeface="Malgun Gothic" pitchFamily="34" charset="-122"/>
                 <a:cs typeface="Malgun Gothic" pitchFamily="34" charset="-120"/>
               </a:rPr>
-              <a:t>Game Programming Patterns - Flyweight | Unity/C#</a:t>
+              <a:t>Flyweight | Unity/C#</a:t>
             </a:r>
             <a:endParaRPr lang="en-US" sz="700" dirty="0"/>
           </a:p>
@@ -10938,7 +10938,7 @@
                 <a:ea typeface="Malgun Gothic" pitchFamily="34" charset="-122"/>
                 <a:cs typeface="Malgun Gothic" pitchFamily="34" charset="-120"/>
               </a:rPr>
-              <a:t>객체지향 </a:t>
+              <a:t>객체지향</a:t>
             </a:r>
             <a:r>
               <a:rPr lang="en-US" altLang="ko-KR" sz="2500" b="1">
@@ -11199,7 +11199,7 @@
                 <a:ea typeface="Malgun Gothic" pitchFamily="34" charset="-122"/>
                 <a:cs typeface="Malgun Gothic" pitchFamily="34" charset="-120"/>
               </a:rPr>
-              <a:t>enum </a:t>
+              <a:t>enum</a:t>
             </a:r>
             <a:r>
               <a:rPr lang="ko-KR" altLang="en-US" sz="1700">
@@ -11210,7 +11210,7 @@
                 <a:ea typeface="Malgun Gothic" pitchFamily="34" charset="-122"/>
                 <a:cs typeface="Malgun Gothic" pitchFamily="34" charset="-120"/>
               </a:rPr>
-              <a:t>한 개 정도의 가벼운 비용으로 객체지향 </a:t>
+              <a:t>한 개 정도의 가벼운 비용으로 객체지향</a:t>
             </a:r>
             <a:r>
               <a:rPr lang="en-US" altLang="ko-KR" sz="1700">
@@ -11404,7 +11404,7 @@
                 <a:ea typeface="Malgun Gothic" pitchFamily="34" charset="-122"/>
                 <a:cs typeface="Malgun Gothic" pitchFamily="34" charset="-120"/>
               </a:rPr>
-              <a:t>Game Programming Patterns - Flyweight | Unity/C#</a:t>
+              <a:t>Flyweight | Unity/C#</a:t>
             </a:r>
             <a:endParaRPr lang="en-US" sz="700" dirty="0"/>
           </a:p>
@@ -11456,7 +11456,7 @@
                 <a:ea typeface="Malgun Gothic" pitchFamily="34" charset="-122"/>
                 <a:cs typeface="Malgun Gothic" pitchFamily="34" charset="-120"/>
               </a:rPr>
-              <a:t>에서는 </a:t>
+              <a:t>에서는</a:t>
             </a:r>
             <a:r>
               <a:rPr lang="en-US" altLang="ko-KR" sz="2500" b="1">
@@ -11467,7 +11467,7 @@
                 <a:ea typeface="Malgun Gothic" pitchFamily="34" charset="-122"/>
                 <a:cs typeface="Malgun Gothic" pitchFamily="34" charset="-120"/>
               </a:rPr>
-              <a:t>ScriptableObject </a:t>
+              <a:t>ScriptableObject</a:t>
             </a:r>
             <a:r>
               <a:rPr lang="ko-KR" altLang="en-US" sz="2500" b="1">
@@ -11640,7 +11640,7 @@
                 <a:ea typeface="Consolas" pitchFamily="34" charset="-122"/>
                 <a:cs typeface="Consolas" pitchFamily="34" charset="-120"/>
               </a:rPr>
-              <a:t>    public int movementCost = 1;</a:t>
+              <a:t>public int movementCost = 1;</a:t>
             </a:r>
             <a:endParaRPr lang="en-US" sz="1300" dirty="0"/>
           </a:p>
@@ -11657,7 +11657,7 @@
                 <a:ea typeface="Consolas" pitchFamily="34" charset="-122"/>
                 <a:cs typeface="Consolas" pitchFamily="34" charset="-120"/>
               </a:rPr>
-              <a:t>    public bool isWater;</a:t>
+              <a:t>public bool isWater;</a:t>
             </a:r>
             <a:endParaRPr lang="en-US" sz="1300" dirty="0"/>
           </a:p>
@@ -11674,7 +11674,7 @@
                 <a:ea typeface="Consolas" pitchFamily="34" charset="-122"/>
                 <a:cs typeface="Consolas" pitchFamily="34" charset="-120"/>
               </a:rPr>
-              <a:t>    public Sprite sprite;</a:t>
+              <a:t>public Sprite sprite;</a:t>
             </a:r>
             <a:endParaRPr lang="en-US" sz="1300" dirty="0"/>
           </a:p>
@@ -11691,7 +11691,7 @@
                 <a:ea typeface="Consolas" pitchFamily="34" charset="-122"/>
                 <a:cs typeface="Consolas" pitchFamily="34" charset="-120"/>
               </a:rPr>
-              <a:t>    public Color tint = Color.white;</a:t>
+              <a:t>public Color tint = Color.white;</a:t>
             </a:r>
             <a:endParaRPr lang="en-US" sz="1300" dirty="0"/>
           </a:p>
@@ -11869,7 +11869,7 @@
                 <a:ea typeface="Malgun Gothic" pitchFamily="34" charset="-122"/>
                 <a:cs typeface="Malgun Gothic" pitchFamily="34" charset="-120"/>
               </a:rPr>
-              <a:t>Game Programming Patterns - Flyweight | Unity/C#</a:t>
+              <a:t>Flyweight | Unity/C#</a:t>
             </a:r>
             <a:endParaRPr lang="en-US" sz="700" dirty="0"/>
           </a:p>
@@ -11921,7 +11921,7 @@
                 <a:ea typeface="Malgun Gothic" pitchFamily="34" charset="-122"/>
                 <a:cs typeface="Malgun Gothic" pitchFamily="34" charset="-120"/>
               </a:rPr>
-              <a:t>에서 자주 볼 수 있는 </a:t>
+              <a:t>에서 자주 볼 수 있는</a:t>
             </a:r>
             <a:r>
               <a:rPr lang="en-US" altLang="ko-KR" sz="2500" b="1">
@@ -12542,7 +12542,7 @@
                 <a:ea typeface="Malgun Gothic" pitchFamily="34" charset="-122"/>
                 <a:cs typeface="Malgun Gothic" pitchFamily="34" charset="-120"/>
               </a:rPr>
-              <a:t>랜덤 </a:t>
+              <a:t>랜덤</a:t>
             </a:r>
             <a:r>
               <a:rPr lang="en-US" altLang="ko-KR" sz="1420">
@@ -12725,7 +12725,7 @@
                 <a:ea typeface="Malgun Gothic" pitchFamily="34" charset="-122"/>
                 <a:cs typeface="Malgun Gothic" pitchFamily="34" charset="-120"/>
               </a:rPr>
-              <a:t>Game Programming Patterns - Flyweight | Unity/C#</a:t>
+              <a:t>Flyweight | Unity/C#</a:t>
             </a:r>
             <a:endParaRPr lang="en-US" sz="700" dirty="0"/>
           </a:p>
@@ -12975,7 +12975,7 @@
                 <a:ea typeface="Malgun Gothic" pitchFamily="34" charset="-122"/>
                 <a:cs typeface="Malgun Gothic" pitchFamily="34" charset="-120"/>
               </a:rPr>
-              <a:t>원문의 결론처럼 최적화는 추측보다 프로파일링이 먼저다.</a:t>
+              <a:t>예제의 결론처럼 최적화는 추측보다 프로파일링이 먼저다.</a:t>
             </a:r>
             <a:endParaRPr lang="en-US" sz="1680" dirty="0"/>
           </a:p>
@@ -13202,7 +13202,7 @@
                 <a:ea typeface="Malgun Gothic" pitchFamily="34" charset="-122"/>
                 <a:cs typeface="Malgun Gothic" pitchFamily="34" charset="-120"/>
               </a:rPr>
-              <a:t>Game Programming Patterns - Flyweight | Unity/C#</a:t>
+              <a:t>Flyweight | Unity/C#</a:t>
             </a:r>
             <a:endParaRPr lang="en-US" sz="700" dirty="0"/>
           </a:p>
@@ -13386,7 +13386,7 @@
                 <a:ea typeface="Malgun Gothic" pitchFamily="34" charset="-122"/>
                 <a:cs typeface="Malgun Gothic" pitchFamily="34" charset="-120"/>
               </a:rPr>
-              <a:t>각 객체가 같은 </a:t>
+              <a:t>각 객체가 같은</a:t>
             </a:r>
             <a:r>
               <a:rPr lang="en-US" altLang="ko-KR" sz="1680">
@@ -13397,7 +13397,7 @@
                 <a:ea typeface="Malgun Gothic" pitchFamily="34" charset="-122"/>
                 <a:cs typeface="Malgun Gothic" pitchFamily="34" charset="-120"/>
               </a:rPr>
-              <a:t>Mesh, Texture, </a:t>
+              <a:t>Mesh, Texture,</a:t>
             </a:r>
             <a:r>
               <a:rPr lang="ko-KR" altLang="en-US" sz="1680">
@@ -13485,7 +13485,7 @@
                 <a:ea typeface="Malgun Gothic" pitchFamily="34" charset="-122"/>
                 <a:cs typeface="Malgun Gothic" pitchFamily="34" charset="-120"/>
               </a:rPr>
-              <a:t>메모리 사용량이나 </a:t>
+              <a:t>메모리 사용량이나</a:t>
             </a:r>
             <a:r>
               <a:rPr lang="en-US" altLang="ko-KR" sz="1680">
@@ -13745,7 +13745,7 @@
                 <a:ea typeface="Malgun Gothic" pitchFamily="34" charset="-122"/>
                 <a:cs typeface="Malgun Gothic" pitchFamily="34" charset="-120"/>
               </a:rPr>
-              <a:t>Game Programming Patterns - Flyweight | Unity/C#</a:t>
+              <a:t>Flyweight | Unity/C#</a:t>
             </a:r>
             <a:endParaRPr lang="en-US" sz="700" dirty="0"/>
           </a:p>
@@ -14233,7 +14233,7 @@
                 <a:ea typeface="Malgun Gothic" pitchFamily="34" charset="-122"/>
                 <a:cs typeface="Malgun Gothic" pitchFamily="34" charset="-120"/>
               </a:rPr>
-              <a:t>Game Programming Patterns - Flyweight | Unity/C#</a:t>
+              <a:t>Flyweight | Unity/C#</a:t>
             </a:r>
             <a:endParaRPr lang="en-US" sz="700" dirty="0"/>
           </a:p>
@@ -14538,7 +14538,7 @@
                 <a:ea typeface="Malgun Gothic" pitchFamily="34" charset="-122"/>
                 <a:cs typeface="Malgun Gothic" pitchFamily="34" charset="-120"/>
               </a:rPr>
-              <a:t>Data Locality: </a:t>
+              <a:t>Data Locality:</a:t>
             </a:r>
             <a:r>
               <a:rPr lang="ko-KR" altLang="en-US" sz="1570">
@@ -14721,7 +14721,7 @@
                 <a:ea typeface="Malgun Gothic" pitchFamily="34" charset="-122"/>
                 <a:cs typeface="Malgun Gothic" pitchFamily="34" charset="-120"/>
               </a:rPr>
-              <a:t>Game Programming Patterns - Flyweight | Unity/C#</a:t>
+              <a:t>Flyweight | Unity/C#</a:t>
             </a:r>
             <a:endParaRPr lang="en-US" sz="700" dirty="0"/>
           </a:p>
@@ -15542,7 +15542,7 @@
                 <a:ea typeface="Malgun Gothic" pitchFamily="34" charset="-122"/>
                 <a:cs typeface="Malgun Gothic" pitchFamily="34" charset="-120"/>
               </a:rPr>
-              <a:t>Game Programming Patterns - Flyweight | Unity/C#</a:t>
+              <a:t>Flyweight | Unity/C#</a:t>
             </a:r>
             <a:endParaRPr lang="en-US" sz="700" dirty="0"/>
           </a:p>
@@ -16071,7 +16071,7 @@
                 <a:ea typeface="Malgun Gothic" pitchFamily="34" charset="-122"/>
                 <a:cs typeface="Malgun Gothic" pitchFamily="34" charset="-120"/>
               </a:rPr>
-              <a:t>Game Programming Patterns - Flyweight | Unity/C#</a:t>
+              <a:t>Flyweight | Unity/C#</a:t>
             </a:r>
             <a:endParaRPr lang="en-US" sz="700" dirty="0"/>
           </a:p>
@@ -16523,7 +16523,7 @@
                 <a:ea typeface="Malgun Gothic" pitchFamily="34" charset="-122"/>
                 <a:cs typeface="Malgun Gothic" pitchFamily="34" charset="-120"/>
               </a:rPr>
-              <a:t>Game Programming Patterns - Flyweight | Unity/C#</a:t>
+              <a:t>Flyweight | Unity/C#</a:t>
             </a:r>
             <a:endParaRPr lang="en-US" sz="700" dirty="0"/>
           </a:p>
@@ -17052,7 +17052,7 @@
                 <a:ea typeface="Malgun Gothic" pitchFamily="34" charset="-122"/>
                 <a:cs typeface="Malgun Gothic" pitchFamily="34" charset="-120"/>
               </a:rPr>
-              <a:t>Game Programming Patterns - Flyweight | Unity/C#</a:t>
+              <a:t>Flyweight | Unity/C#</a:t>
             </a:r>
             <a:endParaRPr lang="en-US" sz="700" dirty="0"/>
           </a:p>
@@ -17581,7 +17581,7 @@
                 <a:ea typeface="Malgun Gothic" pitchFamily="34" charset="-122"/>
                 <a:cs typeface="Malgun Gothic" pitchFamily="34" charset="-120"/>
               </a:rPr>
-              <a:t>Game Programming Patterns - Flyweight | Unity/C#</a:t>
+              <a:t>Flyweight | Unity/C#</a:t>
             </a:r>
             <a:endParaRPr lang="en-US" sz="700" dirty="0"/>
           </a:p>
@@ -18132,7 +18132,7 @@
                 <a:ea typeface="Malgun Gothic" pitchFamily="34" charset="-122"/>
                 <a:cs typeface="Malgun Gothic" pitchFamily="34" charset="-120"/>
               </a:rPr>
-              <a:t>Game Programming Patterns - Flyweight | Unity/C#</a:t>
+              <a:t>Flyweight | Unity/C#</a:t>
             </a:r>
             <a:endParaRPr lang="en-US" sz="700" dirty="0"/>
           </a:p>
@@ -18661,7 +18661,7 @@
                 <a:ea typeface="Malgun Gothic" pitchFamily="34" charset="-122"/>
                 <a:cs typeface="Malgun Gothic" pitchFamily="34" charset="-120"/>
               </a:rPr>
-              <a:t>Game Programming Patterns - Flyweight | Unity/C#</a:t>
+              <a:t>Flyweight | Unity/C#</a:t>
             </a:r>
             <a:endParaRPr lang="en-US" sz="700" dirty="0"/>
           </a:p>
@@ -18754,7 +18754,7 @@
                 <a:ea typeface="Malgun Gothic" pitchFamily="34" charset="-122"/>
                 <a:cs typeface="Malgun Gothic" pitchFamily="34" charset="-120"/>
               </a:rPr>
-              <a:t>는 </a:t>
+              <a:t>는</a:t>
             </a:r>
             <a:r>
               <a:rPr lang="en-US" altLang="ko-KR" sz="3000" b="1">
@@ -19007,7 +19007,7 @@
                 <a:ea typeface="Malgun Gothic" pitchFamily="34" charset="-122"/>
                 <a:cs typeface="Malgun Gothic" pitchFamily="34" charset="-120"/>
               </a:rPr>
-              <a:t>, </a:t>
+              <a:t>,</a:t>
             </a:r>
             <a:r>
               <a:rPr lang="ko-KR" altLang="en-US" sz="1700">
@@ -19190,7 +19190,7 @@
                 <a:ea typeface="Malgun Gothic" pitchFamily="34" charset="-122"/>
                 <a:cs typeface="Malgun Gothic" pitchFamily="34" charset="-120"/>
               </a:rPr>
-              <a:t>Game Programming Patterns - Flyweight | Unity/C#</a:t>
+              <a:t>Flyweight | Unity/C#</a:t>
             </a:r>
             <a:endParaRPr lang="en-US" sz="700" dirty="0"/>
           </a:p>
@@ -19242,7 +19242,7 @@
                 <a:ea typeface="Malgun Gothic" pitchFamily="34" charset="-122"/>
                 <a:cs typeface="Malgun Gothic" pitchFamily="34" charset="-120"/>
               </a:rPr>
-              <a:t>: </a:t>
+              <a:t>:</a:t>
             </a:r>
             <a:r>
               <a:rPr lang="ko-KR" altLang="en-US" sz="2500" b="1">
@@ -19398,7 +19398,7 @@
                 <a:ea typeface="Consolas" pitchFamily="34" charset="-122"/>
                 <a:cs typeface="Consolas" pitchFamily="34" charset="-120"/>
               </a:rPr>
-              <a:t>    public Mesh Mesh;</a:t>
+              <a:t>public Mesh Mesh;</a:t>
             </a:r>
             <a:endParaRPr lang="en-US" sz="1300" dirty="0"/>
           </a:p>
@@ -19415,7 +19415,7 @@
                 <a:ea typeface="Consolas" pitchFamily="34" charset="-122"/>
                 <a:cs typeface="Consolas" pitchFamily="34" charset="-120"/>
               </a:rPr>
-              <a:t>    public Texture2D Bark;</a:t>
+              <a:t>public Texture2D Bark;</a:t>
             </a:r>
             <a:endParaRPr lang="en-US" sz="1300" dirty="0"/>
           </a:p>
@@ -19432,7 +19432,7 @@
                 <a:ea typeface="Consolas" pitchFamily="34" charset="-122"/>
                 <a:cs typeface="Consolas" pitchFamily="34" charset="-120"/>
               </a:rPr>
-              <a:t>    public Texture2D Leaves;</a:t>
+              <a:t>public Texture2D Leaves;</a:t>
             </a:r>
             <a:endParaRPr lang="en-US" sz="1300" dirty="0"/>
           </a:p>
@@ -19455,7 +19455,7 @@
                 <a:ea typeface="Consolas" pitchFamily="34" charset="-122"/>
                 <a:cs typeface="Consolas" pitchFamily="34" charset="-120"/>
               </a:rPr>
-              <a:t>    public Vector3 Position;</a:t>
+              <a:t>public Vector3 Position;</a:t>
             </a:r>
             <a:endParaRPr lang="en-US" sz="1300" dirty="0"/>
           </a:p>
@@ -19472,7 +19472,7 @@
                 <a:ea typeface="Consolas" pitchFamily="34" charset="-122"/>
                 <a:cs typeface="Consolas" pitchFamily="34" charset="-120"/>
               </a:rPr>
-              <a:t>    public float Height;</a:t>
+              <a:t>public float Height;</a:t>
             </a:r>
             <a:endParaRPr lang="en-US" sz="1300" dirty="0"/>
           </a:p>
@@ -19489,7 +19489,7 @@
                 <a:ea typeface="Consolas" pitchFamily="34" charset="-122"/>
                 <a:cs typeface="Consolas" pitchFamily="34" charset="-120"/>
               </a:rPr>
-              <a:t>    public Color LeafTint;</a:t>
+              <a:t>public Color LeafTint;</a:t>
             </a:r>
             <a:endParaRPr lang="en-US" sz="1300" dirty="0"/>
           </a:p>
@@ -19667,7 +19667,7 @@
                 <a:ea typeface="Malgun Gothic" pitchFamily="34" charset="-122"/>
                 <a:cs typeface="Malgun Gothic" pitchFamily="34" charset="-120"/>
               </a:rPr>
-              <a:t>Game Programming Patterns - Flyweight | Unity/C#</a:t>
+              <a:t>Flyweight | Unity/C#</a:t>
             </a:r>
             <a:endParaRPr lang="en-US" sz="700" dirty="0"/>
           </a:p>
@@ -20108,7 +20108,7 @@
                 <a:ea typeface="Malgun Gothic" pitchFamily="34" charset="-122"/>
                 <a:cs typeface="Malgun Gothic" pitchFamily="34" charset="-120"/>
               </a:rPr>
-              <a:t>Game Programming Patterns - Flyweight | Unity/C#</a:t>
+              <a:t>Flyweight | Unity/C#</a:t>
             </a:r>
             <a:endParaRPr lang="en-US" sz="700" dirty="0"/>
           </a:p>
@@ -20305,7 +20305,7 @@
                 <a:ea typeface="Consolas" pitchFamily="34" charset="-122"/>
                 <a:cs typeface="Consolas" pitchFamily="34" charset="-120"/>
               </a:rPr>
-              <a:t>    public Mesh Mesh { get; }</a:t>
+              <a:t>public Mesh Mesh { get; }</a:t>
             </a:r>
             <a:endParaRPr lang="en-US" sz="1170" dirty="0"/>
           </a:p>
@@ -20322,7 +20322,7 @@
                 <a:ea typeface="Consolas" pitchFamily="34" charset="-122"/>
                 <a:cs typeface="Consolas" pitchFamily="34" charset="-120"/>
               </a:rPr>
-              <a:t>    public Material BarkMaterial { get; }</a:t>
+              <a:t>public Material BarkMaterial { get; }</a:t>
             </a:r>
             <a:endParaRPr lang="en-US" sz="1170" dirty="0"/>
           </a:p>
@@ -20339,7 +20339,7 @@
                 <a:ea typeface="Consolas" pitchFamily="34" charset="-122"/>
                 <a:cs typeface="Consolas" pitchFamily="34" charset="-120"/>
               </a:rPr>
-              <a:t>    public Material LeafMaterial { get; }</a:t>
+              <a:t>public Material LeafMaterial { get; }</a:t>
             </a:r>
             <a:endParaRPr lang="en-US" sz="1170" dirty="0"/>
           </a:p>
@@ -20362,7 +20362,7 @@
                 <a:ea typeface="Consolas" pitchFamily="34" charset="-122"/>
                 <a:cs typeface="Consolas" pitchFamily="34" charset="-120"/>
               </a:rPr>
-              <a:t>    public TreeModel(Mesh mesh, Material bark, Material leaf)</a:t>
+              <a:t>public TreeModel(Mesh mesh, Material bark, Material leaf)</a:t>
             </a:r>
             <a:endParaRPr lang="en-US" sz="1170" dirty="0"/>
           </a:p>
@@ -20379,7 +20379,7 @@
                 <a:ea typeface="Consolas" pitchFamily="34" charset="-122"/>
                 <a:cs typeface="Consolas" pitchFamily="34" charset="-120"/>
               </a:rPr>
-              <a:t>    {</a:t>
+              <a:t>{</a:t>
             </a:r>
             <a:endParaRPr lang="en-US" sz="1170" dirty="0"/>
           </a:p>
@@ -20396,7 +20396,7 @@
                 <a:ea typeface="Consolas" pitchFamily="34" charset="-122"/>
                 <a:cs typeface="Consolas" pitchFamily="34" charset="-120"/>
               </a:rPr>
-              <a:t>        Mesh = mesh;</a:t>
+              <a:t>Mesh = mesh;</a:t>
             </a:r>
             <a:endParaRPr lang="en-US" sz="1170" dirty="0"/>
           </a:p>
@@ -20413,7 +20413,7 @@
                 <a:ea typeface="Consolas" pitchFamily="34" charset="-122"/>
                 <a:cs typeface="Consolas" pitchFamily="34" charset="-120"/>
               </a:rPr>
-              <a:t>        BarkMaterial = bark;</a:t>
+              <a:t>BarkMaterial = bark;</a:t>
             </a:r>
             <a:endParaRPr lang="en-US" sz="1170" dirty="0"/>
           </a:p>
@@ -20430,7 +20430,7 @@
                 <a:ea typeface="Consolas" pitchFamily="34" charset="-122"/>
                 <a:cs typeface="Consolas" pitchFamily="34" charset="-120"/>
               </a:rPr>
-              <a:t>        LeafMaterial = leaf;</a:t>
+              <a:t>LeafMaterial = leaf;</a:t>
             </a:r>
             <a:endParaRPr lang="en-US" sz="1170" dirty="0"/>
           </a:p>
@@ -20447,7 +20447,7 @@
                 <a:ea typeface="Consolas" pitchFamily="34" charset="-122"/>
                 <a:cs typeface="Consolas" pitchFamily="34" charset="-120"/>
               </a:rPr>
-              <a:t>    }</a:t>
+              <a:t>}</a:t>
             </a:r>
             <a:endParaRPr lang="en-US" sz="1170" dirty="0"/>
           </a:p>
@@ -20625,7 +20625,7 @@
                 <a:ea typeface="Malgun Gothic" pitchFamily="34" charset="-122"/>
                 <a:cs typeface="Malgun Gothic" pitchFamily="34" charset="-120"/>
               </a:rPr>
-              <a:t>Game Programming Patterns - Flyweight | Unity/C#</a:t>
+              <a:t>Flyweight | Unity/C#</a:t>
             </a:r>
             <a:endParaRPr lang="en-US" sz="700" dirty="0"/>
           </a:p>
@@ -20811,7 +20811,7 @@
                 <a:ea typeface="Consolas" pitchFamily="34" charset="-122"/>
                 <a:cs typeface="Consolas" pitchFamily="34" charset="-120"/>
               </a:rPr>
-              <a:t>    public TreeModel Model { get; }</a:t>
+              <a:t>public TreeModel Model { get; }</a:t>
             </a:r>
             <a:endParaRPr lang="en-US" sz="1040" dirty="0"/>
           </a:p>
@@ -20828,7 +20828,7 @@
                 <a:ea typeface="Consolas" pitchFamily="34" charset="-122"/>
                 <a:cs typeface="Consolas" pitchFamily="34" charset="-120"/>
               </a:rPr>
-              <a:t>    public Vector3 Position { get; }</a:t>
+              <a:t>public Vector3 Position { get; }</a:t>
             </a:r>
             <a:endParaRPr lang="en-US" sz="1040" dirty="0"/>
           </a:p>
@@ -20845,7 +20845,7 @@
                 <a:ea typeface="Consolas" pitchFamily="34" charset="-122"/>
                 <a:cs typeface="Consolas" pitchFamily="34" charset="-120"/>
               </a:rPr>
-              <a:t>    public float Height { get; }</a:t>
+              <a:t>public float Height { get; }</a:t>
             </a:r>
             <a:endParaRPr lang="en-US" sz="1040" dirty="0"/>
           </a:p>
@@ -20862,7 +20862,7 @@
                 <a:ea typeface="Consolas" pitchFamily="34" charset="-122"/>
                 <a:cs typeface="Consolas" pitchFamily="34" charset="-120"/>
               </a:rPr>
-              <a:t>    public Color LeafTint { get; }</a:t>
+              <a:t>public Color LeafTint { get; }</a:t>
             </a:r>
             <a:endParaRPr lang="en-US" sz="1040" dirty="0"/>
           </a:p>
@@ -20885,7 +20885,7 @@
                 <a:ea typeface="Consolas" pitchFamily="34" charset="-122"/>
                 <a:cs typeface="Consolas" pitchFamily="34" charset="-120"/>
               </a:rPr>
-              <a:t>    public TreeInstance(TreeModel model, Vector3 position,</a:t>
+              <a:t>public TreeInstance(TreeModel model, Vector3 position,</a:t>
             </a:r>
             <a:endParaRPr lang="en-US" sz="1040" dirty="0"/>
           </a:p>
@@ -20902,7 +20902,7 @@
                 <a:ea typeface="Consolas" pitchFamily="34" charset="-122"/>
                 <a:cs typeface="Consolas" pitchFamily="34" charset="-120"/>
               </a:rPr>
-              <a:t>                        float height, Color leafTint)</a:t>
+              <a:t>float height, Color leafTint)</a:t>
             </a:r>
             <a:endParaRPr lang="en-US" sz="1040" dirty="0"/>
           </a:p>
@@ -20919,7 +20919,7 @@
                 <a:ea typeface="Consolas" pitchFamily="34" charset="-122"/>
                 <a:cs typeface="Consolas" pitchFamily="34" charset="-120"/>
               </a:rPr>
-              <a:t>    {</a:t>
+              <a:t>{</a:t>
             </a:r>
             <a:endParaRPr lang="en-US" sz="1040" dirty="0"/>
           </a:p>
@@ -20936,7 +20936,7 @@
                 <a:ea typeface="Consolas" pitchFamily="34" charset="-122"/>
                 <a:cs typeface="Consolas" pitchFamily="34" charset="-120"/>
               </a:rPr>
-              <a:t>        Model = model;</a:t>
+              <a:t>Model = model;</a:t>
             </a:r>
             <a:endParaRPr lang="en-US" sz="1040" dirty="0"/>
           </a:p>
@@ -20953,7 +20953,7 @@
                 <a:ea typeface="Consolas" pitchFamily="34" charset="-122"/>
                 <a:cs typeface="Consolas" pitchFamily="34" charset="-120"/>
               </a:rPr>
-              <a:t>        Position = position;</a:t>
+              <a:t>Position = position;</a:t>
             </a:r>
             <a:endParaRPr lang="en-US" sz="1040" dirty="0"/>
           </a:p>
@@ -20970,7 +20970,7 @@
                 <a:ea typeface="Consolas" pitchFamily="34" charset="-122"/>
                 <a:cs typeface="Consolas" pitchFamily="34" charset="-120"/>
               </a:rPr>
-              <a:t>        Height = height;</a:t>
+              <a:t>Height = height;</a:t>
             </a:r>
             <a:endParaRPr lang="en-US" sz="1040" dirty="0"/>
           </a:p>
@@ -20987,7 +20987,7 @@
                 <a:ea typeface="Consolas" pitchFamily="34" charset="-122"/>
                 <a:cs typeface="Consolas" pitchFamily="34" charset="-120"/>
               </a:rPr>
-              <a:t>        LeafTint = leafTint;</a:t>
+              <a:t>LeafTint = leafTint;</a:t>
             </a:r>
             <a:endParaRPr lang="en-US" sz="1040" dirty="0"/>
           </a:p>
@@ -21004,7 +21004,7 @@
                 <a:ea typeface="Consolas" pitchFamily="34" charset="-122"/>
                 <a:cs typeface="Consolas" pitchFamily="34" charset="-120"/>
               </a:rPr>
-              <a:t>    }</a:t>
+              <a:t>}</a:t>
             </a:r>
             <a:endParaRPr lang="en-US" sz="1040" dirty="0"/>
           </a:p>
@@ -21182,7 +21182,7 @@
                 <a:ea typeface="Malgun Gothic" pitchFamily="34" charset="-122"/>
                 <a:cs typeface="Malgun Gothic" pitchFamily="34" charset="-120"/>
               </a:rPr>
-              <a:t>Game Programming Patterns - Flyweight | Unity/C#</a:t>
+              <a:t>Flyweight | Unity/C#</a:t>
             </a:r>
             <a:endParaRPr lang="en-US" sz="700" dirty="0"/>
           </a:p>
@@ -21948,7 +21948,7 @@
                 <a:ea typeface="Malgun Gothic" pitchFamily="34" charset="-122"/>
                 <a:cs typeface="Malgun Gothic" pitchFamily="34" charset="-120"/>
               </a:rPr>
-              <a:t>Game Programming Patterns - Flyweight | Unity/C#</a:t>
+              <a:t>Flyweight | Unity/C#</a:t>
             </a:r>
             <a:endParaRPr lang="en-US" sz="700" dirty="0"/>
           </a:p>
